--- a/LabBook_3.pptx
+++ b/LabBook_3.pptx
@@ -5,19 +5,20 @@
     <p:sldMasterId id="2147483648" r:id="rId1"/>
   </p:sldMasterIdLst>
   <p:notesMasterIdLst>
-    <p:notesMasterId r:id="rId9"/>
+    <p:notesMasterId r:id="rId10"/>
   </p:notesMasterIdLst>
   <p:handoutMasterIdLst>
-    <p:handoutMasterId r:id="rId10"/>
+    <p:handoutMasterId r:id="rId11"/>
   </p:handoutMasterIdLst>
   <p:sldIdLst>
     <p:sldId id="256" r:id="rId2"/>
     <p:sldId id="289" r:id="rId3"/>
     <p:sldId id="290" r:id="rId4"/>
-    <p:sldId id="295" r:id="rId5"/>
-    <p:sldId id="296" r:id="rId6"/>
-    <p:sldId id="293" r:id="rId7"/>
-    <p:sldId id="288" r:id="rId8"/>
+    <p:sldId id="297" r:id="rId5"/>
+    <p:sldId id="295" r:id="rId6"/>
+    <p:sldId id="296" r:id="rId7"/>
+    <p:sldId id="293" r:id="rId8"/>
+    <p:sldId id="288" r:id="rId9"/>
   </p:sldIdLst>
   <p:sldSz cx="12192000" cy="6858000"/>
   <p:notesSz cx="12192000" cy="6858000"/>
@@ -768,6 +769,114 @@
         <p:cNvPr id="1" name="">
           <a:extLst>
             <a:ext uri="{FF2B5EF4-FFF2-40B4-BE49-F238E27FC236}">
+              <a16:creationId xmlns:a16="http://schemas.microsoft.com/office/drawing/2014/main" id="{845763E5-B315-6B89-9E6A-296CC0C32BEB}"/>
+            </a:ext>
+          </a:extLst>
+        </p:cNvPr>
+        <p:cNvGrpSpPr/>
+        <p:nvPr/>
+      </p:nvGrpSpPr>
+      <p:grpSpPr>
+        <a:xfrm>
+          <a:off x="0" y="0"/>
+          <a:ext cx="0" cy="0"/>
+          <a:chOff x="0" y="0"/>
+          <a:chExt cx="0" cy="0"/>
+        </a:xfrm>
+      </p:grpSpPr>
+      <p:sp>
+        <p:nvSpPr>
+          <p:cNvPr id="2" name="Marcador de imagen de diapositiva 1">
+            <a:extLst>
+              <a:ext uri="{FF2B5EF4-FFF2-40B4-BE49-F238E27FC236}">
+                <a16:creationId xmlns:a16="http://schemas.microsoft.com/office/drawing/2014/main" id="{E2D0EE57-D3E5-5882-3113-7E39695FDB29}"/>
+              </a:ext>
+            </a:extLst>
+          </p:cNvPr>
+          <p:cNvSpPr>
+            <a:spLocks noGrp="1" noRot="1" noChangeAspect="1"/>
+          </p:cNvSpPr>
+          <p:nvPr>
+            <p:ph type="sldImg"/>
+          </p:nvPr>
+        </p:nvSpPr>
+        <p:spPr/>
+      </p:sp>
+      <p:sp>
+        <p:nvSpPr>
+          <p:cNvPr id="3" name="Marcador de notas 2">
+            <a:extLst>
+              <a:ext uri="{FF2B5EF4-FFF2-40B4-BE49-F238E27FC236}">
+                <a16:creationId xmlns:a16="http://schemas.microsoft.com/office/drawing/2014/main" id="{33CE78E4-FE49-4B0C-A57E-5C5FDE25D97F}"/>
+              </a:ext>
+            </a:extLst>
+          </p:cNvPr>
+          <p:cNvSpPr>
+            <a:spLocks noGrp="1"/>
+          </p:cNvSpPr>
+          <p:nvPr>
+            <p:ph type="body" idx="1"/>
+          </p:nvPr>
+        </p:nvSpPr>
+        <p:spPr/>
+        <p:txBody>
+          <a:bodyPr/>
+          <a:lstStyle/>
+          <a:p>
+            <a:endParaRPr lang="es-ES" dirty="0"/>
+          </a:p>
+        </p:txBody>
+      </p:sp>
+      <p:sp>
+        <p:nvSpPr>
+          <p:cNvPr id="4" name="Marcador de número de diapositiva 3">
+            <a:extLst>
+              <a:ext uri="{FF2B5EF4-FFF2-40B4-BE49-F238E27FC236}">
+                <a16:creationId xmlns:a16="http://schemas.microsoft.com/office/drawing/2014/main" id="{D7C3657D-061F-C8AE-FFC6-D9A0C1657AD9}"/>
+              </a:ext>
+            </a:extLst>
+          </p:cNvPr>
+          <p:cNvSpPr>
+            <a:spLocks noGrp="1"/>
+          </p:cNvSpPr>
+          <p:nvPr>
+            <p:ph type="sldNum" sz="quarter" idx="5"/>
+          </p:nvPr>
+        </p:nvSpPr>
+        <p:spPr/>
+        <p:txBody>
+          <a:bodyPr/>
+          <a:lstStyle/>
+          <a:p>
+            <a:fld id="{676223B9-C868-4436-87D9-1A3152E1157A}" type="slidenum">
+              <a:rPr lang="es-ES" smtClean="0"/>
+              <a:t>4</a:t>
+            </a:fld>
+            <a:endParaRPr lang="es-ES"/>
+          </a:p>
+        </p:txBody>
+      </p:sp>
+    </p:spTree>
+    <p:extLst>
+      <p:ext uri="{BB962C8B-B14F-4D97-AF65-F5344CB8AC3E}">
+        <p14:creationId xmlns:p14="http://schemas.microsoft.com/office/powerpoint/2010/main" val="580024602"/>
+      </p:ext>
+    </p:extLst>
+  </p:cSld>
+  <p:clrMapOvr>
+    <a:masterClrMapping/>
+  </p:clrMapOvr>
+</p:notes>
+</file>
+
+<file path=ppt/notesSlides/notesSlide3.xml><?xml version="1.0" encoding="utf-8"?>
+<p:notes xmlns:a="http://schemas.openxmlformats.org/drawingml/2006/main" xmlns:r="http://schemas.openxmlformats.org/officeDocument/2006/relationships" xmlns:p="http://schemas.openxmlformats.org/presentationml/2006/main">
+  <p:cSld>
+    <p:spTree>
+      <p:nvGrpSpPr>
+        <p:cNvPr id="1" name="">
+          <a:extLst>
+            <a:ext uri="{FF2B5EF4-FFF2-40B4-BE49-F238E27FC236}">
               <a16:creationId xmlns:a16="http://schemas.microsoft.com/office/drawing/2014/main" id="{812B2A21-C6A2-C5B9-2DCA-3754617037C3}"/>
             </a:ext>
           </a:extLst>
@@ -849,7 +958,7 @@
           <a:p>
             <a:fld id="{676223B9-C868-4436-87D9-1A3152E1157A}" type="slidenum">
               <a:rPr lang="es-ES" smtClean="0"/>
-              <a:t>4</a:t>
+              <a:t>5</a:t>
             </a:fld>
             <a:endParaRPr lang="es-ES"/>
           </a:p>
@@ -868,7 +977,7 @@
 </p:notes>
 </file>
 
-<file path=ppt/notesSlides/notesSlide3.xml><?xml version="1.0" encoding="utf-8"?>
+<file path=ppt/notesSlides/notesSlide4.xml><?xml version="1.0" encoding="utf-8"?>
 <p:notes xmlns:a="http://schemas.openxmlformats.org/drawingml/2006/main" xmlns:r="http://schemas.openxmlformats.org/officeDocument/2006/relationships" xmlns:p="http://schemas.openxmlformats.org/presentationml/2006/main">
   <p:cSld>
     <p:spTree>
@@ -957,7 +1066,7 @@
           <a:p>
             <a:fld id="{676223B9-C868-4436-87D9-1A3152E1157A}" type="slidenum">
               <a:rPr lang="es-ES" smtClean="0"/>
-              <a:t>5</a:t>
+              <a:t>6</a:t>
             </a:fld>
             <a:endParaRPr lang="es-ES"/>
           </a:p>
@@ -976,7 +1085,7 @@
 </p:notes>
 </file>
 
-<file path=ppt/notesSlides/notesSlide4.xml><?xml version="1.0" encoding="utf-8"?>
+<file path=ppt/notesSlides/notesSlide5.xml><?xml version="1.0" encoding="utf-8"?>
 <p:notes xmlns:a="http://schemas.openxmlformats.org/drawingml/2006/main" xmlns:r="http://schemas.openxmlformats.org/officeDocument/2006/relationships" xmlns:p="http://schemas.openxmlformats.org/presentationml/2006/main">
   <p:cSld>
     <p:spTree>
@@ -1065,7 +1174,7 @@
           <a:p>
             <a:fld id="{676223B9-C868-4436-87D9-1A3152E1157A}" type="slidenum">
               <a:rPr lang="es-ES" smtClean="0"/>
-              <a:t>6</a:t>
+              <a:t>7</a:t>
             </a:fld>
             <a:endParaRPr lang="es-ES"/>
           </a:p>
@@ -4889,6 +4998,676 @@
         <p:cNvPr id="1" name="">
           <a:extLst>
             <a:ext uri="{FF2B5EF4-FFF2-40B4-BE49-F238E27FC236}">
+              <a16:creationId xmlns:a16="http://schemas.microsoft.com/office/drawing/2014/main" id="{977991F9-0A8D-EA56-149F-ABF4C9FBD7C6}"/>
+            </a:ext>
+          </a:extLst>
+        </p:cNvPr>
+        <p:cNvGrpSpPr/>
+        <p:nvPr/>
+      </p:nvGrpSpPr>
+      <p:grpSpPr>
+        <a:xfrm>
+          <a:off x="0" y="0"/>
+          <a:ext cx="0" cy="0"/>
+          <a:chOff x="0" y="0"/>
+          <a:chExt cx="0" cy="0"/>
+        </a:xfrm>
+      </p:grpSpPr>
+      <p:pic>
+        <p:nvPicPr>
+          <p:cNvPr id="83" name="Gráfico 82">
+            <a:extLst>
+              <a:ext uri="{FF2B5EF4-FFF2-40B4-BE49-F238E27FC236}">
+                <a16:creationId xmlns:a16="http://schemas.microsoft.com/office/drawing/2014/main" id="{1B844145-16A0-AB26-42D0-ED845AA0F7A0}"/>
+              </a:ext>
+            </a:extLst>
+          </p:cNvPr>
+          <p:cNvPicPr>
+            <a:picLocks noChangeAspect="1"/>
+          </p:cNvPicPr>
+          <p:nvPr/>
+        </p:nvPicPr>
+        <p:blipFill>
+          <a:blip r:embed="rId3">
+            <a:extLst>
+              <a:ext uri="{96DAC541-7B7A-43D3-8B79-37D633B846F1}">
+                <asvg:svgBlip xmlns:asvg="http://schemas.microsoft.com/office/drawing/2016/SVG/main" r:embed="rId4"/>
+              </a:ext>
+            </a:extLst>
+          </a:blip>
+          <a:stretch>
+            <a:fillRect/>
+          </a:stretch>
+        </p:blipFill>
+        <p:spPr>
+          <a:xfrm>
+            <a:off x="5045006" y="6356057"/>
+            <a:ext cx="6409575" cy="363174"/>
+          </a:xfrm>
+          <a:prstGeom prst="rect">
+            <a:avLst/>
+          </a:prstGeom>
+        </p:spPr>
+      </p:pic>
+      <p:sp>
+        <p:nvSpPr>
+          <p:cNvPr id="84" name="Marcador de número de diapositiva 83">
+            <a:extLst>
+              <a:ext uri="{FF2B5EF4-FFF2-40B4-BE49-F238E27FC236}">
+                <a16:creationId xmlns:a16="http://schemas.microsoft.com/office/drawing/2014/main" id="{26A449DB-5ED0-510B-C0EA-6986DCBC89BE}"/>
+              </a:ext>
+            </a:extLst>
+          </p:cNvPr>
+          <p:cNvSpPr>
+            <a:spLocks noGrp="1"/>
+          </p:cNvSpPr>
+          <p:nvPr>
+            <p:ph type="sldNum" sz="quarter" idx="7"/>
+          </p:nvPr>
+        </p:nvSpPr>
+        <p:spPr>
+          <a:xfrm>
+            <a:off x="9311640" y="6377940"/>
+            <a:ext cx="2804160" cy="276999"/>
+          </a:xfrm>
+        </p:spPr>
+        <p:txBody>
+          <a:bodyPr/>
+          <a:lstStyle/>
+          <a:p>
+            <a:fld id="{B6F15528-21DE-4FAA-801E-634DDDAF4B2B}" type="slidenum">
+              <a:rPr lang="es-ES" u="sng" smtClean="0"/>
+              <a:t>4</a:t>
+            </a:fld>
+            <a:endParaRPr lang="es-ES" u="sng" dirty="0"/>
+          </a:p>
+        </p:txBody>
+      </p:sp>
+      <p:sp>
+        <p:nvSpPr>
+          <p:cNvPr id="4" name="Marcador de texto 2">
+            <a:extLst>
+              <a:ext uri="{FF2B5EF4-FFF2-40B4-BE49-F238E27FC236}">
+                <a16:creationId xmlns:a16="http://schemas.microsoft.com/office/drawing/2014/main" id="{4D519C49-6C56-2617-D5D9-34E3A440F2A8}"/>
+              </a:ext>
+            </a:extLst>
+          </p:cNvPr>
+          <p:cNvSpPr txBox="1">
+            <a:spLocks/>
+          </p:cNvSpPr>
+          <p:nvPr/>
+        </p:nvSpPr>
+        <p:spPr>
+          <a:xfrm>
+            <a:off x="608012" y="1295400"/>
+            <a:ext cx="11048999" cy="4958137"/>
+          </a:xfrm>
+          <a:prstGeom prst="rect">
+            <a:avLst/>
+          </a:prstGeom>
+        </p:spPr>
+        <p:txBody>
+          <a:bodyPr>
+            <a:normAutofit/>
+          </a:bodyPr>
+          <a:lstStyle>
+            <a:lvl1pPr marL="0">
+              <a:defRPr>
+                <a:latin typeface="+mn-lt"/>
+                <a:ea typeface="+mn-ea"/>
+                <a:cs typeface="+mn-cs"/>
+              </a:defRPr>
+            </a:lvl1pPr>
+            <a:lvl2pPr marL="457200">
+              <a:defRPr>
+                <a:latin typeface="+mn-lt"/>
+                <a:ea typeface="+mn-ea"/>
+                <a:cs typeface="+mn-cs"/>
+              </a:defRPr>
+            </a:lvl2pPr>
+            <a:lvl3pPr marL="914400">
+              <a:defRPr>
+                <a:latin typeface="+mn-lt"/>
+                <a:ea typeface="+mn-ea"/>
+                <a:cs typeface="+mn-cs"/>
+              </a:defRPr>
+            </a:lvl3pPr>
+            <a:lvl4pPr marL="1371600">
+              <a:defRPr>
+                <a:latin typeface="+mn-lt"/>
+                <a:ea typeface="+mn-ea"/>
+                <a:cs typeface="+mn-cs"/>
+              </a:defRPr>
+            </a:lvl4pPr>
+            <a:lvl5pPr marL="1828800">
+              <a:defRPr>
+                <a:latin typeface="+mn-lt"/>
+                <a:ea typeface="+mn-ea"/>
+                <a:cs typeface="+mn-cs"/>
+              </a:defRPr>
+            </a:lvl5pPr>
+            <a:lvl6pPr marL="2286000">
+              <a:defRPr>
+                <a:latin typeface="+mn-lt"/>
+                <a:ea typeface="+mn-ea"/>
+                <a:cs typeface="+mn-cs"/>
+              </a:defRPr>
+            </a:lvl6pPr>
+            <a:lvl7pPr marL="2743200">
+              <a:defRPr>
+                <a:latin typeface="+mn-lt"/>
+                <a:ea typeface="+mn-ea"/>
+                <a:cs typeface="+mn-cs"/>
+              </a:defRPr>
+            </a:lvl7pPr>
+            <a:lvl8pPr marL="3200400">
+              <a:defRPr>
+                <a:latin typeface="+mn-lt"/>
+                <a:ea typeface="+mn-ea"/>
+                <a:cs typeface="+mn-cs"/>
+              </a:defRPr>
+            </a:lvl8pPr>
+            <a:lvl9pPr marL="3657600">
+              <a:defRPr>
+                <a:latin typeface="+mn-lt"/>
+                <a:ea typeface="+mn-ea"/>
+                <a:cs typeface="+mn-cs"/>
+              </a:defRPr>
+            </a:lvl9pPr>
+          </a:lstStyle>
+          <a:p>
+            <a:r>
+              <a:rPr lang="en-US" sz="2000" dirty="0"/>
+              <a:t> </a:t>
+            </a:r>
+          </a:p>
+          <a:p>
+            <a:pPr algn="just"/>
+            <a:endParaRPr lang="en-US" sz="2000" dirty="0"/>
+          </a:p>
+          <a:p>
+            <a:pPr algn="just"/>
+            <a:endParaRPr lang="en-US" sz="2000" b="1" i="1" dirty="0"/>
+          </a:p>
+          <a:p>
+            <a:pPr algn="just"/>
+            <a:endParaRPr lang="en-US" sz="2000" kern="0" dirty="0">
+              <a:solidFill>
+                <a:sysClr val="windowText" lastClr="000000"/>
+              </a:solidFill>
+            </a:endParaRPr>
+          </a:p>
+          <a:p>
+            <a:endParaRPr lang="en-US" sz="2000" kern="0" dirty="0">
+              <a:solidFill>
+                <a:sysClr val="windowText" lastClr="000000"/>
+              </a:solidFill>
+            </a:endParaRPr>
+          </a:p>
+        </p:txBody>
+      </p:sp>
+      <p:sp>
+        <p:nvSpPr>
+          <p:cNvPr id="5" name="Marcador de pie de página 2">
+            <a:extLst>
+              <a:ext uri="{FF2B5EF4-FFF2-40B4-BE49-F238E27FC236}">
+                <a16:creationId xmlns:a16="http://schemas.microsoft.com/office/drawing/2014/main" id="{9D42CE27-BDDD-AAE2-C559-4ED67D8C843B}"/>
+              </a:ext>
+            </a:extLst>
+          </p:cNvPr>
+          <p:cNvSpPr>
+            <a:spLocks noGrp="1"/>
+          </p:cNvSpPr>
+          <p:nvPr>
+            <p:ph type="ftr" sz="quarter" idx="5"/>
+          </p:nvPr>
+        </p:nvSpPr>
+        <p:spPr>
+          <a:xfrm>
+            <a:off x="609600" y="6457057"/>
+            <a:ext cx="2743200" cy="184666"/>
+          </a:xfrm>
+        </p:spPr>
+        <p:txBody>
+          <a:bodyPr/>
+          <a:lstStyle/>
+          <a:p>
+            <a:pPr marL="12700">
+              <a:spcBef>
+                <a:spcPts val="15"/>
+              </a:spcBef>
+            </a:pPr>
+            <a:r>
+              <a:rPr lang="es-ES" spc="-5"/>
+              <a:t>LAB 3. INTERFEROMETERS I</a:t>
+            </a:r>
+            <a:endParaRPr lang="es-ES" spc="-5" dirty="0"/>
+          </a:p>
+        </p:txBody>
+      </p:sp>
+      <p:pic>
+        <p:nvPicPr>
+          <p:cNvPr id="6" name="Imagen 5" descr="Gráfico, Gráfico de líneas&#10;&#10;El contenido generado por IA puede ser incorrecto.">
+            <a:extLst>
+              <a:ext uri="{FF2B5EF4-FFF2-40B4-BE49-F238E27FC236}">
+                <a16:creationId xmlns:a16="http://schemas.microsoft.com/office/drawing/2014/main" id="{F2F96476-DC78-718E-FA71-1F358D7444D7}"/>
+              </a:ext>
+            </a:extLst>
+          </p:cNvPr>
+          <p:cNvPicPr>
+            <a:picLocks noChangeAspect="1"/>
+          </p:cNvPicPr>
+          <p:nvPr/>
+        </p:nvPicPr>
+        <p:blipFill>
+          <a:blip r:embed="rId5"/>
+          <a:stretch>
+            <a:fillRect/>
+          </a:stretch>
+        </p:blipFill>
+        <p:spPr>
+          <a:xfrm>
+            <a:off x="228600" y="381000"/>
+            <a:ext cx="3649907" cy="2928938"/>
+          </a:xfrm>
+          <a:prstGeom prst="rect">
+            <a:avLst/>
+          </a:prstGeom>
+        </p:spPr>
+      </p:pic>
+      <p:sp>
+        <p:nvSpPr>
+          <p:cNvPr id="9" name="CuadroTexto 8">
+            <a:extLst>
+              <a:ext uri="{FF2B5EF4-FFF2-40B4-BE49-F238E27FC236}">
+                <a16:creationId xmlns:a16="http://schemas.microsoft.com/office/drawing/2014/main" id="{35CCEBD4-6A73-92F4-CD2C-BA744D2AA23B}"/>
+              </a:ext>
+            </a:extLst>
+          </p:cNvPr>
+          <p:cNvSpPr txBox="1"/>
+          <p:nvPr/>
+        </p:nvSpPr>
+        <p:spPr>
+          <a:xfrm>
+            <a:off x="6325378" y="3429000"/>
+            <a:ext cx="1219200" cy="1384995"/>
+          </a:xfrm>
+          <a:prstGeom prst="rect">
+            <a:avLst/>
+          </a:prstGeom>
+          <a:noFill/>
+        </p:spPr>
+        <p:txBody>
+          <a:bodyPr wrap="square" rtlCol="0">
+            <a:spAutoFit/>
+          </a:bodyPr>
+          <a:lstStyle/>
+          <a:p>
+            <a:r>
+              <a:rPr lang="es-ES" sz="1400" dirty="0">
+                <a:solidFill>
+                  <a:srgbClr val="FF0000"/>
+                </a:solidFill>
+              </a:rPr>
+              <a:t>Con </a:t>
+            </a:r>
+            <a:r>
+              <a:rPr lang="es-ES" sz="1400" dirty="0" err="1">
+                <a:solidFill>
+                  <a:srgbClr val="FF0000"/>
+                </a:solidFill>
+              </a:rPr>
+              <a:t>SiN</a:t>
+            </a:r>
+            <a:r>
+              <a:rPr lang="es-ES" sz="1400" dirty="0">
+                <a:solidFill>
+                  <a:srgbClr val="FF0000"/>
+                </a:solidFill>
+              </a:rPr>
+              <a:t>. Cambio de fase mediante poner una guía en aire y una en </a:t>
+            </a:r>
+            <a:r>
+              <a:rPr lang="es-ES" sz="1400" dirty="0" err="1">
+                <a:solidFill>
+                  <a:srgbClr val="FF0000"/>
+                </a:solidFill>
+              </a:rPr>
+              <a:t>clad</a:t>
+            </a:r>
+            <a:r>
+              <a:rPr lang="es-ES" sz="1400" dirty="0">
+                <a:solidFill>
+                  <a:srgbClr val="FF0000"/>
+                </a:solidFill>
+              </a:rPr>
+              <a:t>. </a:t>
+            </a:r>
+          </a:p>
+        </p:txBody>
+      </p:sp>
+      <p:pic>
+        <p:nvPicPr>
+          <p:cNvPr id="11" name="Imagen 10" descr="Gráfico, Gráfico de líneas&#10;&#10;El contenido generado por IA puede ser incorrecto.">
+            <a:extLst>
+              <a:ext uri="{FF2B5EF4-FFF2-40B4-BE49-F238E27FC236}">
+                <a16:creationId xmlns:a16="http://schemas.microsoft.com/office/drawing/2014/main" id="{824090E0-5133-2592-7A46-FF062E4B2DD1}"/>
+              </a:ext>
+            </a:extLst>
+          </p:cNvPr>
+          <p:cNvPicPr>
+            <a:picLocks noChangeAspect="1"/>
+          </p:cNvPicPr>
+          <p:nvPr/>
+        </p:nvPicPr>
+        <p:blipFill>
+          <a:blip r:embed="rId6"/>
+          <a:stretch>
+            <a:fillRect/>
+          </a:stretch>
+        </p:blipFill>
+        <p:spPr>
+          <a:xfrm>
+            <a:off x="7528414" y="332509"/>
+            <a:ext cx="3914796" cy="3141503"/>
+          </a:xfrm>
+          <a:prstGeom prst="rect">
+            <a:avLst/>
+          </a:prstGeom>
+        </p:spPr>
+      </p:pic>
+      <p:pic>
+        <p:nvPicPr>
+          <p:cNvPr id="13" name="Imagen 12" descr="Gráfico&#10;&#10;El contenido generado por IA puede ser incorrecto.">
+            <a:extLst>
+              <a:ext uri="{FF2B5EF4-FFF2-40B4-BE49-F238E27FC236}">
+                <a16:creationId xmlns:a16="http://schemas.microsoft.com/office/drawing/2014/main" id="{F9BEA475-2622-9D82-08DC-02B387AD3A43}"/>
+              </a:ext>
+            </a:extLst>
+          </p:cNvPr>
+          <p:cNvPicPr>
+            <a:picLocks noChangeAspect="1"/>
+          </p:cNvPicPr>
+          <p:nvPr/>
+        </p:nvPicPr>
+        <p:blipFill>
+          <a:blip r:embed="rId7"/>
+          <a:stretch>
+            <a:fillRect/>
+          </a:stretch>
+        </p:blipFill>
+        <p:spPr>
+          <a:xfrm>
+            <a:off x="228600" y="3471957"/>
+            <a:ext cx="3843338" cy="3084160"/>
+          </a:xfrm>
+          <a:prstGeom prst="rect">
+            <a:avLst/>
+          </a:prstGeom>
+        </p:spPr>
+      </p:pic>
+      <p:pic>
+        <p:nvPicPr>
+          <p:cNvPr id="15" name="Imagen 14" descr="Gráfico, Gráfico de líneas&#10;&#10;El contenido generado por IA puede ser incorrecto.">
+            <a:extLst>
+              <a:ext uri="{FF2B5EF4-FFF2-40B4-BE49-F238E27FC236}">
+                <a16:creationId xmlns:a16="http://schemas.microsoft.com/office/drawing/2014/main" id="{DD96DAE0-4FB8-2E44-72B2-D2675BB7620C}"/>
+              </a:ext>
+            </a:extLst>
+          </p:cNvPr>
+          <p:cNvPicPr>
+            <a:picLocks noChangeAspect="1"/>
+          </p:cNvPicPr>
+          <p:nvPr/>
+        </p:nvPicPr>
+        <p:blipFill>
+          <a:blip r:embed="rId8"/>
+          <a:stretch>
+            <a:fillRect/>
+          </a:stretch>
+        </p:blipFill>
+        <p:spPr>
+          <a:xfrm>
+            <a:off x="7342433" y="3319147"/>
+            <a:ext cx="4540495" cy="3375695"/>
+          </a:xfrm>
+          <a:prstGeom prst="rect">
+            <a:avLst/>
+          </a:prstGeom>
+        </p:spPr>
+      </p:pic>
+      <p:sp>
+        <p:nvSpPr>
+          <p:cNvPr id="17" name="CuadroTexto 16">
+            <a:extLst>
+              <a:ext uri="{FF2B5EF4-FFF2-40B4-BE49-F238E27FC236}">
+                <a16:creationId xmlns:a16="http://schemas.microsoft.com/office/drawing/2014/main" id="{CA26DD12-C5BA-B952-33AD-A90369715974}"/>
+              </a:ext>
+            </a:extLst>
+          </p:cNvPr>
+          <p:cNvSpPr txBox="1"/>
+          <p:nvPr/>
+        </p:nvSpPr>
+        <p:spPr>
+          <a:xfrm>
+            <a:off x="6705600" y="823548"/>
+            <a:ext cx="1066800" cy="738664"/>
+          </a:xfrm>
+          <a:prstGeom prst="rect">
+            <a:avLst/>
+          </a:prstGeom>
+          <a:noFill/>
+        </p:spPr>
+        <p:txBody>
+          <a:bodyPr wrap="square" rtlCol="0">
+            <a:spAutoFit/>
+          </a:bodyPr>
+          <a:lstStyle/>
+          <a:p>
+            <a:r>
+              <a:rPr lang="es-ES" sz="1400" dirty="0">
+                <a:solidFill>
+                  <a:srgbClr val="FF0000"/>
+                </a:solidFill>
+              </a:rPr>
+              <a:t>Cambio de longitud en los brazos</a:t>
+            </a:r>
+          </a:p>
+        </p:txBody>
+      </p:sp>
+      <p:sp>
+        <p:nvSpPr>
+          <p:cNvPr id="18" name="CuadroTexto 17">
+            <a:extLst>
+              <a:ext uri="{FF2B5EF4-FFF2-40B4-BE49-F238E27FC236}">
+                <a16:creationId xmlns:a16="http://schemas.microsoft.com/office/drawing/2014/main" id="{D6514099-5CD2-C9F2-EFD9-90C7F6EC7A3F}"/>
+              </a:ext>
+            </a:extLst>
+          </p:cNvPr>
+          <p:cNvSpPr txBox="1"/>
+          <p:nvPr/>
+        </p:nvSpPr>
+        <p:spPr>
+          <a:xfrm>
+            <a:off x="3706568" y="3916233"/>
+            <a:ext cx="1143000" cy="738664"/>
+          </a:xfrm>
+          <a:prstGeom prst="rect">
+            <a:avLst/>
+          </a:prstGeom>
+          <a:noFill/>
+        </p:spPr>
+        <p:txBody>
+          <a:bodyPr wrap="square" rtlCol="0">
+            <a:spAutoFit/>
+          </a:bodyPr>
+          <a:lstStyle/>
+          <a:p>
+            <a:r>
+              <a:rPr lang="es-ES" sz="1400" dirty="0">
+                <a:solidFill>
+                  <a:srgbClr val="FF0000"/>
+                </a:solidFill>
+              </a:rPr>
+              <a:t>Cambio en </a:t>
+            </a:r>
+            <a:r>
+              <a:rPr lang="es-ES" sz="1400" dirty="0" err="1">
+                <a:solidFill>
+                  <a:srgbClr val="FF0000"/>
+                </a:solidFill>
+              </a:rPr>
+              <a:t>cte</a:t>
+            </a:r>
+            <a:r>
+              <a:rPr lang="es-ES" sz="1400" dirty="0">
+                <a:solidFill>
+                  <a:srgbClr val="FF0000"/>
+                </a:solidFill>
+              </a:rPr>
+              <a:t> de acoplo</a:t>
+            </a:r>
+          </a:p>
+        </p:txBody>
+      </p:sp>
+      <p:pic>
+        <p:nvPicPr>
+          <p:cNvPr id="20" name="Imagen 19" descr="Gráfico&#10;&#10;El contenido generado por IA puede ser incorrecto.">
+            <a:extLst>
+              <a:ext uri="{FF2B5EF4-FFF2-40B4-BE49-F238E27FC236}">
+                <a16:creationId xmlns:a16="http://schemas.microsoft.com/office/drawing/2014/main" id="{1653191D-5E5F-EFFE-B541-D2451EB81DF6}"/>
+              </a:ext>
+            </a:extLst>
+          </p:cNvPr>
+          <p:cNvPicPr>
+            <a:picLocks noChangeAspect="1"/>
+          </p:cNvPicPr>
+          <p:nvPr/>
+        </p:nvPicPr>
+        <p:blipFill>
+          <a:blip r:embed="rId9"/>
+          <a:stretch>
+            <a:fillRect/>
+          </a:stretch>
+        </p:blipFill>
+        <p:spPr>
+          <a:xfrm>
+            <a:off x="3706134" y="1327498"/>
+            <a:ext cx="2547938" cy="2044642"/>
+          </a:xfrm>
+          <a:prstGeom prst="rect">
+            <a:avLst/>
+          </a:prstGeom>
+        </p:spPr>
+      </p:pic>
+      <p:sp>
+        <p:nvSpPr>
+          <p:cNvPr id="21" name="CuadroTexto 20">
+            <a:extLst>
+              <a:ext uri="{FF2B5EF4-FFF2-40B4-BE49-F238E27FC236}">
+                <a16:creationId xmlns:a16="http://schemas.microsoft.com/office/drawing/2014/main" id="{A0F9B25B-89E1-CEC4-C0A9-B3DAB73301DF}"/>
+              </a:ext>
+            </a:extLst>
+          </p:cNvPr>
+          <p:cNvSpPr txBox="1"/>
+          <p:nvPr/>
+        </p:nvSpPr>
+        <p:spPr>
+          <a:xfrm>
+            <a:off x="5394035" y="2042636"/>
+            <a:ext cx="990600" cy="738664"/>
+          </a:xfrm>
+          <a:prstGeom prst="rect">
+            <a:avLst/>
+          </a:prstGeom>
+          <a:noFill/>
+        </p:spPr>
+        <p:txBody>
+          <a:bodyPr wrap="square" rtlCol="0">
+            <a:spAutoFit/>
+          </a:bodyPr>
+          <a:lstStyle/>
+          <a:p>
+            <a:r>
+              <a:rPr lang="es-ES" sz="1400" dirty="0">
+                <a:solidFill>
+                  <a:srgbClr val="FF0000"/>
+                </a:solidFill>
+              </a:rPr>
+              <a:t>Con </a:t>
+            </a:r>
+            <a:r>
+              <a:rPr lang="es-ES" sz="1400" dirty="0" err="1">
+                <a:solidFill>
+                  <a:srgbClr val="FF0000"/>
+                </a:solidFill>
+              </a:rPr>
+              <a:t>SiN</a:t>
+            </a:r>
+            <a:r>
+              <a:rPr lang="es-ES" sz="1400" dirty="0">
+                <a:solidFill>
+                  <a:srgbClr val="FF0000"/>
+                </a:solidFill>
+              </a:rPr>
+              <a:t>. </a:t>
+            </a:r>
+            <a:r>
+              <a:rPr lang="es-ES" sz="1400" dirty="0" err="1">
+                <a:solidFill>
+                  <a:srgbClr val="FF0000"/>
+                </a:solidFill>
+              </a:rPr>
+              <a:t>Water</a:t>
+            </a:r>
+            <a:r>
+              <a:rPr lang="es-ES" sz="1400" dirty="0">
+                <a:solidFill>
+                  <a:srgbClr val="FF0000"/>
+                </a:solidFill>
+              </a:rPr>
+              <a:t> y </a:t>
+            </a:r>
+            <a:r>
+              <a:rPr lang="es-ES" sz="1400" dirty="0" err="1">
+                <a:solidFill>
+                  <a:srgbClr val="FF0000"/>
+                </a:solidFill>
+              </a:rPr>
+              <a:t>clad</a:t>
+            </a:r>
+            <a:r>
+              <a:rPr lang="es-ES" sz="1400" dirty="0">
+                <a:solidFill>
+                  <a:srgbClr val="FF0000"/>
+                </a:solidFill>
+              </a:rPr>
+              <a:t>. </a:t>
+            </a:r>
+          </a:p>
+        </p:txBody>
+      </p:sp>
+    </p:spTree>
+    <p:extLst>
+      <p:ext uri="{BB962C8B-B14F-4D97-AF65-F5344CB8AC3E}">
+        <p14:creationId xmlns:p14="http://schemas.microsoft.com/office/powerpoint/2010/main" val="3412787152"/>
+      </p:ext>
+    </p:extLst>
+  </p:cSld>
+  <p:clrMapOvr>
+    <a:masterClrMapping/>
+  </p:clrMapOvr>
+</p:sld>
+</file>
+
+<file path=ppt/slides/slide5.xml><?xml version="1.0" encoding="utf-8"?>
+<p:sld xmlns:a="http://schemas.openxmlformats.org/drawingml/2006/main" xmlns:r="http://schemas.openxmlformats.org/officeDocument/2006/relationships" xmlns:p="http://schemas.openxmlformats.org/presentationml/2006/main">
+  <p:cSld>
+    <p:spTree>
+      <p:nvGrpSpPr>
+        <p:cNvPr id="1" name="">
+          <a:extLst>
+            <a:ext uri="{FF2B5EF4-FFF2-40B4-BE49-F238E27FC236}">
               <a16:creationId xmlns:a16="http://schemas.microsoft.com/office/drawing/2014/main" id="{1525AB88-A787-2C84-3A44-2B634D87FB5B}"/>
             </a:ext>
           </a:extLst>
@@ -5096,7 +5875,7 @@
           <a:p>
             <a:fld id="{B6F15528-21DE-4FAA-801E-634DDDAF4B2B}" type="slidenum">
               <a:rPr lang="es-ES" smtClean="0"/>
-              <a:t>4</a:t>
+              <a:t>5</a:t>
             </a:fld>
             <a:endParaRPr lang="es-ES"/>
           </a:p>
@@ -5545,7 +6324,7 @@
 </p:sld>
 </file>
 
-<file path=ppt/slides/slide5.xml><?xml version="1.0" encoding="utf-8"?>
+<file path=ppt/slides/slide6.xml><?xml version="1.0" encoding="utf-8"?>
 <p:sld xmlns:a="http://schemas.openxmlformats.org/drawingml/2006/main" xmlns:r="http://schemas.openxmlformats.org/officeDocument/2006/relationships" xmlns:p="http://schemas.openxmlformats.org/presentationml/2006/main">
   <p:cSld>
     <p:spTree>
@@ -5687,7 +6466,7 @@
           <a:p>
             <a:fld id="{B6F15528-21DE-4FAA-801E-634DDDAF4B2B}" type="slidenum">
               <a:rPr lang="es-ES" smtClean="0"/>
-              <a:t>5</a:t>
+              <a:t>6</a:t>
             </a:fld>
             <a:endParaRPr lang="es-ES"/>
           </a:p>
@@ -6273,7 +7052,7 @@
 </p:sld>
 </file>
 
-<file path=ppt/slides/slide6.xml><?xml version="1.0" encoding="utf-8"?>
+<file path=ppt/slides/slide7.xml><?xml version="1.0" encoding="utf-8"?>
 <p:sld xmlns:a="http://schemas.openxmlformats.org/drawingml/2006/main" xmlns:r="http://schemas.openxmlformats.org/officeDocument/2006/relationships" xmlns:p="http://schemas.openxmlformats.org/presentationml/2006/main">
   <p:cSld>
     <p:spTree>
@@ -6405,7 +7184,7 @@
           <a:p>
             <a:fld id="{B6F15528-21DE-4FAA-801E-634DDDAF4B2B}" type="slidenum">
               <a:rPr lang="es-ES" smtClean="0"/>
-              <a:t>6</a:t>
+              <a:t>7</a:t>
             </a:fld>
             <a:endParaRPr lang="es-ES"/>
           </a:p>
@@ -6702,7 +7481,7 @@
 </p:sld>
 </file>
 
-<file path=ppt/slides/slide7.xml><?xml version="1.0" encoding="utf-8"?>
+<file path=ppt/slides/slide8.xml><?xml version="1.0" encoding="utf-8"?>
 <p:sld xmlns:a="http://schemas.openxmlformats.org/drawingml/2006/main" xmlns:r="http://schemas.openxmlformats.org/officeDocument/2006/relationships" xmlns:p="http://schemas.openxmlformats.org/presentationml/2006/main">
   <p:cSld>
     <p:spTree>
@@ -6841,7 +7620,7 @@
           <a:p>
             <a:fld id="{B6F15528-21DE-4FAA-801E-634DDDAF4B2B}" type="slidenum">
               <a:rPr lang="es-ES" smtClean="0"/>
-              <a:t>7</a:t>
+              <a:t>8</a:t>
             </a:fld>
             <a:endParaRPr lang="es-ES"/>
           </a:p>

--- a/LabBook_3.pptx
+++ b/LabBook_3.pptx
@@ -5,10 +5,10 @@
     <p:sldMasterId id="2147483648" r:id="rId1"/>
   </p:sldMasterIdLst>
   <p:notesMasterIdLst>
-    <p:notesMasterId r:id="rId10"/>
+    <p:notesMasterId r:id="rId13"/>
   </p:notesMasterIdLst>
   <p:handoutMasterIdLst>
-    <p:handoutMasterId r:id="rId11"/>
+    <p:handoutMasterId r:id="rId14"/>
   </p:handoutMasterIdLst>
   <p:sldIdLst>
     <p:sldId id="256" r:id="rId2"/>
@@ -17,8 +17,11 @@
     <p:sldId id="297" r:id="rId5"/>
     <p:sldId id="295" r:id="rId6"/>
     <p:sldId id="296" r:id="rId7"/>
-    <p:sldId id="293" r:id="rId8"/>
-    <p:sldId id="288" r:id="rId9"/>
+    <p:sldId id="298" r:id="rId8"/>
+    <p:sldId id="293" r:id="rId9"/>
+    <p:sldId id="299" r:id="rId10"/>
+    <p:sldId id="300" r:id="rId11"/>
+    <p:sldId id="288" r:id="rId12"/>
   </p:sldIdLst>
   <p:sldSz cx="12192000" cy="6858000"/>
   <p:notesSz cx="12192000" cy="6858000"/>
@@ -233,7 +236,7 @@
           <a:p>
             <a:fld id="{8438F8DC-35B0-48E6-A86E-42F1F08DD00F}" type="datetimeFigureOut">
               <a:rPr lang="es-ES" smtClean="0"/>
-              <a:t>02/03/2026</a:t>
+              <a:t>09/03/2026</a:t>
             </a:fld>
             <a:endParaRPr lang="es-ES"/>
           </a:p>
@@ -410,7 +413,7 @@
           <a:p>
             <a:fld id="{FACBDC12-F39B-4B97-8F4D-6734F9D366FF}" type="datetimeFigureOut">
               <a:rPr lang="es-ES" smtClean="0"/>
-              <a:t>02/03/2026</a:t>
+              <a:t>09/03/2026</a:t>
             </a:fld>
             <a:endParaRPr lang="es-ES"/>
           </a:p>
@@ -1174,7 +1177,7 @@
           <a:p>
             <a:fld id="{676223B9-C868-4436-87D9-1A3152E1157A}" type="slidenum">
               <a:rPr lang="es-ES" smtClean="0"/>
-              <a:t>7</a:t>
+              <a:t>8</a:t>
             </a:fld>
             <a:endParaRPr lang="es-ES"/>
           </a:p>
@@ -2821,6 +2824,218 @@
             <a:fld id="{B6F15528-21DE-4FAA-801E-634DDDAF4B2B}" type="slidenum">
               <a:rPr lang="es-ES" smtClean="0"/>
               <a:t>1</a:t>
+            </a:fld>
+            <a:endParaRPr lang="es-ES"/>
+          </a:p>
+        </p:txBody>
+      </p:sp>
+    </p:spTree>
+  </p:cSld>
+  <p:clrMapOvr>
+    <a:masterClrMapping/>
+  </p:clrMapOvr>
+</p:sld>
+</file>
+
+<file path=ppt/slides/slide10.xml><?xml version="1.0" encoding="utf-8"?>
+<p:sld xmlns:a="http://schemas.openxmlformats.org/drawingml/2006/main" xmlns:r="http://schemas.openxmlformats.org/officeDocument/2006/relationships" xmlns:p="http://schemas.openxmlformats.org/presentationml/2006/main">
+  <p:cSld>
+    <p:spTree>
+      <p:nvGrpSpPr>
+        <p:cNvPr id="1" name=""/>
+        <p:cNvGrpSpPr/>
+        <p:nvPr/>
+      </p:nvGrpSpPr>
+      <p:grpSpPr>
+        <a:xfrm>
+          <a:off x="0" y="0"/>
+          <a:ext cx="0" cy="0"/>
+          <a:chOff x="0" y="0"/>
+          <a:chExt cx="0" cy="0"/>
+        </a:xfrm>
+      </p:grpSpPr>
+      <p:sp>
+        <p:nvSpPr>
+          <p:cNvPr id="2" name="Marcador de número de diapositiva 1">
+            <a:extLst>
+              <a:ext uri="{FF2B5EF4-FFF2-40B4-BE49-F238E27FC236}">
+                <a16:creationId xmlns:a16="http://schemas.microsoft.com/office/drawing/2014/main" id="{85987E63-66F6-C19F-7345-65F13653EC0C}"/>
+              </a:ext>
+            </a:extLst>
+          </p:cNvPr>
+          <p:cNvSpPr>
+            <a:spLocks noGrp="1"/>
+          </p:cNvSpPr>
+          <p:nvPr>
+            <p:ph type="sldNum" sz="quarter" idx="7"/>
+          </p:nvPr>
+        </p:nvSpPr>
+        <p:spPr/>
+        <p:txBody>
+          <a:bodyPr/>
+          <a:lstStyle/>
+          <a:p>
+            <a:fld id="{B6F15528-21DE-4FAA-801E-634DDDAF4B2B}" type="slidenum">
+              <a:rPr lang="es-ES" smtClean="0"/>
+              <a:t>10</a:t>
+            </a:fld>
+            <a:endParaRPr lang="es-ES"/>
+          </a:p>
+        </p:txBody>
+      </p:sp>
+    </p:spTree>
+    <p:extLst>
+      <p:ext uri="{BB962C8B-B14F-4D97-AF65-F5344CB8AC3E}">
+        <p14:creationId xmlns:p14="http://schemas.microsoft.com/office/powerpoint/2010/main" val="939832317"/>
+      </p:ext>
+    </p:extLst>
+  </p:cSld>
+  <p:clrMapOvr>
+    <a:masterClrMapping/>
+  </p:clrMapOvr>
+</p:sld>
+</file>
+
+<file path=ppt/slides/slide11.xml><?xml version="1.0" encoding="utf-8"?>
+<p:sld xmlns:a="http://schemas.openxmlformats.org/drawingml/2006/main" xmlns:r="http://schemas.openxmlformats.org/officeDocument/2006/relationships" xmlns:p="http://schemas.openxmlformats.org/presentationml/2006/main">
+  <p:cSld>
+    <p:spTree>
+      <p:nvGrpSpPr>
+        <p:cNvPr id="1" name=""/>
+        <p:cNvGrpSpPr/>
+        <p:nvPr/>
+      </p:nvGrpSpPr>
+      <p:grpSpPr>
+        <a:xfrm>
+          <a:off x="0" y="0"/>
+          <a:ext cx="0" cy="0"/>
+          <a:chOff x="0" y="0"/>
+          <a:chExt cx="0" cy="0"/>
+        </a:xfrm>
+      </p:grpSpPr>
+      <p:sp>
+        <p:nvSpPr>
+          <p:cNvPr id="3" name="object 3"/>
+          <p:cNvSpPr/>
+          <p:nvPr/>
+        </p:nvSpPr>
+        <p:spPr>
+          <a:xfrm>
+            <a:off x="3945635" y="2636520"/>
+            <a:ext cx="8246363" cy="1584959"/>
+          </a:xfrm>
+          <a:prstGeom prst="rect">
+            <a:avLst/>
+          </a:prstGeom>
+          <a:blipFill>
+            <a:blip r:embed="rId2" cstate="print"/>
+            <a:stretch>
+              <a:fillRect/>
+            </a:stretch>
+          </a:blipFill>
+        </p:spPr>
+        <p:txBody>
+          <a:bodyPr wrap="square" lIns="0" tIns="0" rIns="0" bIns="0" rtlCol="0"/>
+          <a:lstStyle/>
+          <a:p>
+            <a:endParaRPr/>
+          </a:p>
+        </p:txBody>
+      </p:sp>
+      <p:sp>
+        <p:nvSpPr>
+          <p:cNvPr id="4" name="object 4"/>
+          <p:cNvSpPr txBox="1">
+            <a:spLocks noGrp="1"/>
+          </p:cNvSpPr>
+          <p:nvPr>
+            <p:ph type="title"/>
+          </p:nvPr>
+        </p:nvSpPr>
+        <p:spPr>
+          <a:xfrm>
+            <a:off x="4513326" y="3165729"/>
+            <a:ext cx="2233295" cy="513715"/>
+          </a:xfrm>
+          <a:prstGeom prst="rect">
+            <a:avLst/>
+          </a:prstGeom>
+        </p:spPr>
+        <p:txBody>
+          <a:bodyPr vert="horz" wrap="square" lIns="0" tIns="13335" rIns="0" bIns="0" rtlCol="0">
+            <a:spAutoFit/>
+          </a:bodyPr>
+          <a:lstStyle/>
+          <a:p>
+            <a:pPr marL="12700">
+              <a:lnSpc>
+                <a:spcPct val="100000"/>
+              </a:lnSpc>
+              <a:spcBef>
+                <a:spcPts val="105"/>
+              </a:spcBef>
+            </a:pPr>
+            <a:r>
+              <a:rPr sz="3200" b="1" spc="-5" dirty="0">
+                <a:solidFill>
+                  <a:srgbClr val="FFFFFF"/>
+                </a:solidFill>
+                <a:latin typeface="Lucida Sans"/>
+                <a:cs typeface="Lucida Sans"/>
+              </a:rPr>
+              <a:t>Thank</a:t>
+            </a:r>
+            <a:r>
+              <a:rPr sz="3200" b="1" spc="-55" dirty="0">
+                <a:solidFill>
+                  <a:srgbClr val="FFFFFF"/>
+                </a:solidFill>
+                <a:latin typeface="Lucida Sans"/>
+                <a:cs typeface="Lucida Sans"/>
+              </a:rPr>
+              <a:t> </a:t>
+            </a:r>
+            <a:r>
+              <a:rPr sz="3200" b="1" dirty="0">
+                <a:solidFill>
+                  <a:srgbClr val="FFFFFF"/>
+                </a:solidFill>
+                <a:latin typeface="Lucida Sans"/>
+                <a:cs typeface="Lucida Sans"/>
+              </a:rPr>
+              <a:t>you</a:t>
+            </a:r>
+            <a:endParaRPr sz="3200">
+              <a:latin typeface="Lucida Sans"/>
+              <a:cs typeface="Lucida Sans"/>
+            </a:endParaRPr>
+          </a:p>
+        </p:txBody>
+      </p:sp>
+      <p:sp>
+        <p:nvSpPr>
+          <p:cNvPr id="5" name="Marcador de número de diapositiva 4">
+            <a:extLst>
+              <a:ext uri="{FF2B5EF4-FFF2-40B4-BE49-F238E27FC236}">
+                <a16:creationId xmlns:a16="http://schemas.microsoft.com/office/drawing/2014/main" id="{B052DA19-AD24-7D24-2AE9-51F8F5A7F5E0}"/>
+              </a:ext>
+            </a:extLst>
+          </p:cNvPr>
+          <p:cNvSpPr>
+            <a:spLocks noGrp="1"/>
+          </p:cNvSpPr>
+          <p:nvPr>
+            <p:ph type="sldNum" sz="quarter" idx="7"/>
+          </p:nvPr>
+        </p:nvSpPr>
+        <p:spPr/>
+        <p:txBody>
+          <a:bodyPr/>
+          <a:lstStyle/>
+          <a:p>
+            <a:fld id="{B6F15528-21DE-4FAA-801E-634DDDAF4B2B}" type="slidenum">
+              <a:rPr lang="es-ES" smtClean="0"/>
+              <a:t>11</a:t>
             </a:fld>
             <a:endParaRPr lang="es-ES"/>
           </a:p>
@@ -7057,6 +7272,188 @@
   <p:cSld>
     <p:spTree>
       <p:nvGrpSpPr>
+        <p:cNvPr id="1" name=""/>
+        <p:cNvGrpSpPr/>
+        <p:nvPr/>
+      </p:nvGrpSpPr>
+      <p:grpSpPr>
+        <a:xfrm>
+          <a:off x="0" y="0"/>
+          <a:ext cx="0" cy="0"/>
+          <a:chOff x="0" y="0"/>
+          <a:chExt cx="0" cy="0"/>
+        </a:xfrm>
+      </p:grpSpPr>
+      <p:sp>
+        <p:nvSpPr>
+          <p:cNvPr id="2" name="Marcador de número de diapositiva 1">
+            <a:extLst>
+              <a:ext uri="{FF2B5EF4-FFF2-40B4-BE49-F238E27FC236}">
+                <a16:creationId xmlns:a16="http://schemas.microsoft.com/office/drawing/2014/main" id="{5A262B9B-63C7-D050-29CE-69C0673EA18E}"/>
+              </a:ext>
+            </a:extLst>
+          </p:cNvPr>
+          <p:cNvSpPr>
+            <a:spLocks noGrp="1"/>
+          </p:cNvSpPr>
+          <p:nvPr>
+            <p:ph type="sldNum" sz="quarter" idx="7"/>
+          </p:nvPr>
+        </p:nvSpPr>
+        <p:spPr/>
+        <p:txBody>
+          <a:bodyPr/>
+          <a:lstStyle/>
+          <a:p>
+            <a:fld id="{B6F15528-21DE-4FAA-801E-634DDDAF4B2B}" type="slidenum">
+              <a:rPr lang="es-ES" smtClean="0"/>
+              <a:t>7</a:t>
+            </a:fld>
+            <a:endParaRPr lang="es-ES"/>
+          </a:p>
+        </p:txBody>
+      </p:sp>
+      <p:pic>
+        <p:nvPicPr>
+          <p:cNvPr id="8" name="Imagen 7">
+            <a:extLst>
+              <a:ext uri="{FF2B5EF4-FFF2-40B4-BE49-F238E27FC236}">
+                <a16:creationId xmlns:a16="http://schemas.microsoft.com/office/drawing/2014/main" id="{6E6A95D7-6F7D-A4CD-0DB7-37860A54D1D6}"/>
+              </a:ext>
+            </a:extLst>
+          </p:cNvPr>
+          <p:cNvPicPr>
+            <a:picLocks noChangeAspect="1"/>
+          </p:cNvPicPr>
+          <p:nvPr/>
+        </p:nvPicPr>
+        <p:blipFill>
+          <a:blip r:embed="rId2"/>
+          <a:stretch>
+            <a:fillRect/>
+          </a:stretch>
+        </p:blipFill>
+        <p:spPr>
+          <a:xfrm>
+            <a:off x="4191000" y="303789"/>
+            <a:ext cx="3989450" cy="3201411"/>
+          </a:xfrm>
+          <a:prstGeom prst="rect">
+            <a:avLst/>
+          </a:prstGeom>
+        </p:spPr>
+      </p:pic>
+      <p:pic>
+        <p:nvPicPr>
+          <p:cNvPr id="10" name="Imagen 9">
+            <a:extLst>
+              <a:ext uri="{FF2B5EF4-FFF2-40B4-BE49-F238E27FC236}">
+                <a16:creationId xmlns:a16="http://schemas.microsoft.com/office/drawing/2014/main" id="{A8B83A4A-197F-1857-FB32-1782C497CC3B}"/>
+              </a:ext>
+            </a:extLst>
+          </p:cNvPr>
+          <p:cNvPicPr>
+            <a:picLocks noChangeAspect="1"/>
+          </p:cNvPicPr>
+          <p:nvPr/>
+        </p:nvPicPr>
+        <p:blipFill>
+          <a:blip r:embed="rId3"/>
+          <a:stretch>
+            <a:fillRect/>
+          </a:stretch>
+        </p:blipFill>
+        <p:spPr>
+          <a:xfrm>
+            <a:off x="152400" y="195262"/>
+            <a:ext cx="4124692" cy="3309938"/>
+          </a:xfrm>
+          <a:prstGeom prst="rect">
+            <a:avLst/>
+          </a:prstGeom>
+        </p:spPr>
+      </p:pic>
+      <p:sp>
+        <p:nvSpPr>
+          <p:cNvPr id="11" name="CuadroTexto 10">
+            <a:extLst>
+              <a:ext uri="{FF2B5EF4-FFF2-40B4-BE49-F238E27FC236}">
+                <a16:creationId xmlns:a16="http://schemas.microsoft.com/office/drawing/2014/main" id="{D4799E6C-0660-BA35-BAA0-7AB4AAC8C92C}"/>
+              </a:ext>
+            </a:extLst>
+          </p:cNvPr>
+          <p:cNvSpPr txBox="1"/>
+          <p:nvPr/>
+        </p:nvSpPr>
+        <p:spPr>
+          <a:xfrm>
+            <a:off x="8686800" y="914400"/>
+            <a:ext cx="2667000" cy="1477328"/>
+          </a:xfrm>
+          <a:prstGeom prst="rect">
+            <a:avLst/>
+          </a:prstGeom>
+          <a:noFill/>
+        </p:spPr>
+        <p:txBody>
+          <a:bodyPr wrap="square" rtlCol="0">
+            <a:spAutoFit/>
+          </a:bodyPr>
+          <a:lstStyle/>
+          <a:p>
+            <a:r>
+              <a:rPr lang="es-ES" dirty="0"/>
+              <a:t>HACER MÁS EJEMPLOS</a:t>
+            </a:r>
+          </a:p>
+          <a:p>
+            <a:r>
+              <a:rPr lang="es-ES" dirty="0"/>
+              <a:t>En </a:t>
+            </a:r>
+            <a:r>
+              <a:rPr lang="es-ES" dirty="0" err="1"/>
+              <a:t>sax</a:t>
+            </a:r>
+            <a:r>
+              <a:rPr lang="es-ES" dirty="0"/>
+              <a:t> los puertos son 0, 1</a:t>
+            </a:r>
+          </a:p>
+          <a:p>
+            <a:r>
+              <a:rPr lang="es-ES" dirty="0"/>
+              <a:t>Por lo que 1 en </a:t>
+            </a:r>
+            <a:r>
+              <a:rPr lang="es-ES" dirty="0" err="1"/>
+              <a:t>sax</a:t>
+            </a:r>
+            <a:r>
+              <a:rPr lang="es-ES" dirty="0"/>
+              <a:t> corresponde a 2 en el otro. </a:t>
+            </a:r>
+          </a:p>
+        </p:txBody>
+      </p:sp>
+    </p:spTree>
+    <p:extLst>
+      <p:ext uri="{BB962C8B-B14F-4D97-AF65-F5344CB8AC3E}">
+        <p14:creationId xmlns:p14="http://schemas.microsoft.com/office/powerpoint/2010/main" val="701476647"/>
+      </p:ext>
+    </p:extLst>
+  </p:cSld>
+  <p:clrMapOvr>
+    <a:masterClrMapping/>
+  </p:clrMapOvr>
+</p:sld>
+</file>
+
+<file path=ppt/slides/slide8.xml><?xml version="1.0" encoding="utf-8"?>
+<p:sld xmlns:a="http://schemas.openxmlformats.org/drawingml/2006/main" xmlns:r="http://schemas.openxmlformats.org/officeDocument/2006/relationships" xmlns:p="http://schemas.openxmlformats.org/presentationml/2006/main">
+  <p:cSld>
+    <p:spTree>
+      <p:nvGrpSpPr>
         <p:cNvPr id="1" name="">
           <a:extLst>
             <a:ext uri="{FF2B5EF4-FFF2-40B4-BE49-F238E27FC236}">
@@ -7184,7 +7581,7 @@
           <a:p>
             <a:fld id="{B6F15528-21DE-4FAA-801E-634DDDAF4B2B}" type="slidenum">
               <a:rPr lang="es-ES" smtClean="0"/>
-              <a:t>7</a:t>
+              <a:t>8</a:t>
             </a:fld>
             <a:endParaRPr lang="es-ES"/>
           </a:p>
@@ -7481,7 +7878,7 @@
 </p:sld>
 </file>
 
-<file path=ppt/slides/slide8.xml><?xml version="1.0" encoding="utf-8"?>
+<file path=ppt/slides/slide9.xml><?xml version="1.0" encoding="utf-8"?>
 <p:sld xmlns:a="http://schemas.openxmlformats.org/drawingml/2006/main" xmlns:r="http://schemas.openxmlformats.org/officeDocument/2006/relationships" xmlns:p="http://schemas.openxmlformats.org/presentationml/2006/main">
   <p:cSld>
     <p:spTree>
@@ -7500,109 +7897,10 @@
       </p:grpSpPr>
       <p:sp>
         <p:nvSpPr>
-          <p:cNvPr id="3" name="object 3"/>
-          <p:cNvSpPr/>
-          <p:nvPr/>
-        </p:nvSpPr>
-        <p:spPr>
-          <a:xfrm>
-            <a:off x="3945635" y="2636520"/>
-            <a:ext cx="8246363" cy="1584959"/>
-          </a:xfrm>
-          <a:prstGeom prst="rect">
-            <a:avLst/>
-          </a:prstGeom>
-          <a:blipFill>
-            <a:blip r:embed="rId2" cstate="print"/>
-            <a:stretch>
-              <a:fillRect/>
-            </a:stretch>
-          </a:blipFill>
-        </p:spPr>
-        <p:txBody>
-          <a:bodyPr wrap="square" lIns="0" tIns="0" rIns="0" bIns="0" rtlCol="0"/>
-          <a:lstStyle/>
-          <a:p>
-            <a:endParaRPr/>
-          </a:p>
-        </p:txBody>
-      </p:sp>
-      <p:sp>
-        <p:nvSpPr>
-          <p:cNvPr id="4" name="object 4"/>
-          <p:cNvSpPr txBox="1">
-            <a:spLocks noGrp="1"/>
-          </p:cNvSpPr>
-          <p:nvPr>
-            <p:ph type="title"/>
-          </p:nvPr>
-        </p:nvSpPr>
-        <p:spPr>
-          <a:xfrm>
-            <a:off x="4513326" y="3165729"/>
-            <a:ext cx="2233295" cy="513715"/>
-          </a:xfrm>
-          <a:prstGeom prst="rect">
-            <a:avLst/>
-          </a:prstGeom>
-        </p:spPr>
-        <p:txBody>
-          <a:bodyPr vert="horz" wrap="square" lIns="0" tIns="13335" rIns="0" bIns="0" rtlCol="0">
-            <a:spAutoFit/>
-          </a:bodyPr>
-          <a:lstStyle/>
-          <a:p>
-            <a:pPr marL="12700">
-              <a:lnSpc>
-                <a:spcPct val="100000"/>
-              </a:lnSpc>
-              <a:spcBef>
-                <a:spcPts val="105"/>
-              </a:spcBef>
-            </a:pPr>
-            <a:r>
-              <a:rPr sz="3200" b="1" spc="-5" dirty="0">
-                <a:solidFill>
-                  <a:srgbClr val="FFFFFF"/>
-                </a:solidFill>
-                <a:latin typeface="Lucida Sans"/>
-                <a:cs typeface="Lucida Sans"/>
-              </a:rPr>
-              <a:t>Thank</a:t>
-            </a:r>
-            <a:r>
-              <a:rPr sz="3200" b="1" spc="-55" dirty="0">
-                <a:solidFill>
-                  <a:srgbClr val="FFFFFF"/>
-                </a:solidFill>
-                <a:latin typeface="Lucida Sans"/>
-                <a:cs typeface="Lucida Sans"/>
-              </a:rPr>
-              <a:t> </a:t>
-            </a:r>
-            <a:r>
-              <a:rPr sz="3200" b="1" dirty="0">
-                <a:solidFill>
-                  <a:srgbClr val="FFFFFF"/>
-                </a:solidFill>
-                <a:latin typeface="Lucida Sans"/>
-                <a:cs typeface="Lucida Sans"/>
-              </a:rPr>
-              <a:t>you</a:t>
-            </a:r>
-            <a:endParaRPr sz="3200">
-              <a:latin typeface="Lucida Sans"/>
-              <a:cs typeface="Lucida Sans"/>
-            </a:endParaRPr>
-          </a:p>
-        </p:txBody>
-      </p:sp>
-      <p:sp>
-        <p:nvSpPr>
-          <p:cNvPr id="5" name="Marcador de número de diapositiva 4">
+          <p:cNvPr id="2" name="Marcador de número de diapositiva 1">
             <a:extLst>
               <a:ext uri="{FF2B5EF4-FFF2-40B4-BE49-F238E27FC236}">
-                <a16:creationId xmlns:a16="http://schemas.microsoft.com/office/drawing/2014/main" id="{B052DA19-AD24-7D24-2AE9-51F8F5A7F5E0}"/>
+                <a16:creationId xmlns:a16="http://schemas.microsoft.com/office/drawing/2014/main" id="{06DE8A1B-D36B-640A-052A-EB519F6309B9}"/>
               </a:ext>
             </a:extLst>
           </p:cNvPr>
@@ -7620,13 +7918,237 @@
           <a:p>
             <a:fld id="{B6F15528-21DE-4FAA-801E-634DDDAF4B2B}" type="slidenum">
               <a:rPr lang="es-ES" smtClean="0"/>
-              <a:t>8</a:t>
+              <a:t>9</a:t>
             </a:fld>
             <a:endParaRPr lang="es-ES"/>
           </a:p>
         </p:txBody>
       </p:sp>
+      <p:pic>
+        <p:nvPicPr>
+          <p:cNvPr id="4" name="Imagen 3">
+            <a:extLst>
+              <a:ext uri="{FF2B5EF4-FFF2-40B4-BE49-F238E27FC236}">
+                <a16:creationId xmlns:a16="http://schemas.microsoft.com/office/drawing/2014/main" id="{E3564D6F-B7D2-160A-55F0-B8721146B29A}"/>
+              </a:ext>
+            </a:extLst>
+          </p:cNvPr>
+          <p:cNvPicPr>
+            <a:picLocks noChangeAspect="1"/>
+          </p:cNvPicPr>
+          <p:nvPr/>
+        </p:nvPicPr>
+        <p:blipFill>
+          <a:blip r:embed="rId2"/>
+          <a:stretch>
+            <a:fillRect/>
+          </a:stretch>
+        </p:blipFill>
+        <p:spPr>
+          <a:xfrm>
+            <a:off x="1447800" y="1752600"/>
+            <a:ext cx="3181350" cy="838200"/>
+          </a:xfrm>
+          <a:prstGeom prst="rect">
+            <a:avLst/>
+          </a:prstGeom>
+        </p:spPr>
+      </p:pic>
+      <p:sp>
+        <p:nvSpPr>
+          <p:cNvPr id="5" name="CuadroTexto 4">
+            <a:extLst>
+              <a:ext uri="{FF2B5EF4-FFF2-40B4-BE49-F238E27FC236}">
+                <a16:creationId xmlns:a16="http://schemas.microsoft.com/office/drawing/2014/main" id="{3383DB73-B498-36BE-3CA7-16C3FDD7E8EE}"/>
+              </a:ext>
+            </a:extLst>
+          </p:cNvPr>
+          <p:cNvSpPr txBox="1"/>
+          <p:nvPr/>
+        </p:nvSpPr>
+        <p:spPr>
+          <a:xfrm>
+            <a:off x="304800" y="609600"/>
+            <a:ext cx="6918960" cy="923330"/>
+          </a:xfrm>
+          <a:prstGeom prst="rect">
+            <a:avLst/>
+          </a:prstGeom>
+          <a:noFill/>
+        </p:spPr>
+        <p:txBody>
+          <a:bodyPr wrap="square" rtlCol="0">
+            <a:spAutoFit/>
+          </a:bodyPr>
+          <a:lstStyle/>
+          <a:p>
+            <a:r>
+              <a:rPr lang="es-ES" dirty="0"/>
+              <a:t>Para tener interferencia constructiva en lambda 0 se debe cumplir esa condición: (tenemos en cuenta que estamos en el caso en el que solo hay </a:t>
+            </a:r>
+            <a:r>
+              <a:rPr lang="es-ES" dirty="0" err="1"/>
+              <a:t>dif</a:t>
+            </a:r>
+            <a:r>
+              <a:rPr lang="es-ES" dirty="0"/>
+              <a:t> de longitud en los brazos): </a:t>
+            </a:r>
+          </a:p>
+        </p:txBody>
+      </p:sp>
+      <p:pic>
+        <p:nvPicPr>
+          <p:cNvPr id="7" name="Imagen 6">
+            <a:extLst>
+              <a:ext uri="{FF2B5EF4-FFF2-40B4-BE49-F238E27FC236}">
+                <a16:creationId xmlns:a16="http://schemas.microsoft.com/office/drawing/2014/main" id="{0D31D717-D0AE-75D4-2688-DBA6014492FC}"/>
+              </a:ext>
+            </a:extLst>
+          </p:cNvPr>
+          <p:cNvPicPr>
+            <a:picLocks noChangeAspect="1"/>
+          </p:cNvPicPr>
+          <p:nvPr/>
+        </p:nvPicPr>
+        <p:blipFill>
+          <a:blip r:embed="rId3"/>
+          <a:stretch>
+            <a:fillRect/>
+          </a:stretch>
+        </p:blipFill>
+        <p:spPr>
+          <a:xfrm>
+            <a:off x="5715000" y="1532930"/>
+            <a:ext cx="1752600" cy="923925"/>
+          </a:xfrm>
+          <a:prstGeom prst="rect">
+            <a:avLst/>
+          </a:prstGeom>
+        </p:spPr>
+      </p:pic>
+      <p:sp>
+        <p:nvSpPr>
+          <p:cNvPr id="8" name="CuadroTexto 7">
+            <a:extLst>
+              <a:ext uri="{FF2B5EF4-FFF2-40B4-BE49-F238E27FC236}">
+                <a16:creationId xmlns:a16="http://schemas.microsoft.com/office/drawing/2014/main" id="{4205ABBB-6150-0834-CDF4-24A98BA4EA1D}"/>
+              </a:ext>
+            </a:extLst>
+          </p:cNvPr>
+          <p:cNvSpPr txBox="1"/>
+          <p:nvPr/>
+        </p:nvSpPr>
+        <p:spPr>
+          <a:xfrm>
+            <a:off x="8458200" y="762000"/>
+            <a:ext cx="2438400" cy="2862322"/>
+          </a:xfrm>
+          <a:prstGeom prst="rect">
+            <a:avLst/>
+          </a:prstGeom>
+          <a:noFill/>
+        </p:spPr>
+        <p:txBody>
+          <a:bodyPr wrap="square" rtlCol="0">
+            <a:spAutoFit/>
+          </a:bodyPr>
+          <a:lstStyle/>
+          <a:p>
+            <a:r>
+              <a:rPr lang="es-ES" dirty="0"/>
+              <a:t>Observamos que para m=1 nos queda un </a:t>
+            </a:r>
+            <a:r>
+              <a:rPr lang="es-ES" dirty="0" err="1"/>
+              <a:t>fsr</a:t>
+            </a:r>
+            <a:r>
+              <a:rPr lang="es-ES" dirty="0"/>
+              <a:t> demasiado ancho para una aplicación de filtrado. Por eso hacemos un barrido de m para escoger la m necesaria para la </a:t>
+            </a:r>
+            <a:r>
+              <a:rPr lang="es-ES" dirty="0" err="1"/>
+              <a:t>plicación</a:t>
+            </a:r>
+            <a:r>
+              <a:rPr lang="es-ES" dirty="0"/>
+              <a:t> concreta de nuestro filtro. </a:t>
+            </a:r>
+          </a:p>
+        </p:txBody>
+      </p:sp>
+      <p:pic>
+        <p:nvPicPr>
+          <p:cNvPr id="10" name="Imagen 9">
+            <a:extLst>
+              <a:ext uri="{FF2B5EF4-FFF2-40B4-BE49-F238E27FC236}">
+                <a16:creationId xmlns:a16="http://schemas.microsoft.com/office/drawing/2014/main" id="{26CFADEB-D2F5-E274-9860-ACE0FEF5EBE3}"/>
+              </a:ext>
+            </a:extLst>
+          </p:cNvPr>
+          <p:cNvPicPr>
+            <a:picLocks noChangeAspect="1"/>
+          </p:cNvPicPr>
+          <p:nvPr/>
+        </p:nvPicPr>
+        <p:blipFill>
+          <a:blip r:embed="rId4"/>
+          <a:stretch>
+            <a:fillRect/>
+          </a:stretch>
+        </p:blipFill>
+        <p:spPr>
+          <a:xfrm>
+            <a:off x="381000" y="2915602"/>
+            <a:ext cx="4314606" cy="3462338"/>
+          </a:xfrm>
+          <a:prstGeom prst="rect">
+            <a:avLst/>
+          </a:prstGeom>
+        </p:spPr>
+      </p:pic>
+      <p:sp>
+        <p:nvSpPr>
+          <p:cNvPr id="11" name="CuadroTexto 10">
+            <a:extLst>
+              <a:ext uri="{FF2B5EF4-FFF2-40B4-BE49-F238E27FC236}">
+                <a16:creationId xmlns:a16="http://schemas.microsoft.com/office/drawing/2014/main" id="{BFAF3784-0FF0-9D2F-AF31-5D982A9CA718}"/>
+              </a:ext>
+            </a:extLst>
+          </p:cNvPr>
+          <p:cNvSpPr txBox="1"/>
+          <p:nvPr/>
+        </p:nvSpPr>
+        <p:spPr>
+          <a:xfrm>
+            <a:off x="5257800" y="3686383"/>
+            <a:ext cx="4724400" cy="1200329"/>
+          </a:xfrm>
+          <a:prstGeom prst="rect">
+            <a:avLst/>
+          </a:prstGeom>
+          <a:noFill/>
+        </p:spPr>
+        <p:txBody>
+          <a:bodyPr wrap="square" rtlCol="0">
+            <a:spAutoFit/>
+          </a:bodyPr>
+          <a:lstStyle/>
+          <a:p>
+            <a:r>
+              <a:rPr lang="es-ES" dirty="0"/>
+              <a:t>Podemos elegir la m según lo fino que nos interese que sea nuestro filtro y obtenemos las longitudes de los brazos. He dejado Lu fija solo cambiamos el incremento. </a:t>
+            </a:r>
+          </a:p>
+        </p:txBody>
+      </p:sp>
     </p:spTree>
+    <p:extLst>
+      <p:ext uri="{BB962C8B-B14F-4D97-AF65-F5344CB8AC3E}">
+        <p14:creationId xmlns:p14="http://schemas.microsoft.com/office/powerpoint/2010/main" val="2832491540"/>
+      </p:ext>
+    </p:extLst>
   </p:cSld>
   <p:clrMapOvr>
     <a:masterClrMapping/>

--- a/LabBook_3.pptx
+++ b/LabBook_3.pptx
@@ -8143,6 +8143,36 @@
           </a:p>
         </p:txBody>
       </p:sp>
+      <p:pic>
+        <p:nvPicPr>
+          <p:cNvPr id="13" name="Imagen 12">
+            <a:extLst>
+              <a:ext uri="{FF2B5EF4-FFF2-40B4-BE49-F238E27FC236}">
+                <a16:creationId xmlns:a16="http://schemas.microsoft.com/office/drawing/2014/main" id="{362AAAEC-8C47-B016-8E59-7C040F37A647}"/>
+              </a:ext>
+            </a:extLst>
+          </p:cNvPr>
+          <p:cNvPicPr>
+            <a:picLocks noChangeAspect="1"/>
+          </p:cNvPicPr>
+          <p:nvPr/>
+        </p:nvPicPr>
+        <p:blipFill>
+          <a:blip r:embed="rId5"/>
+          <a:stretch>
+            <a:fillRect/>
+          </a:stretch>
+        </p:blipFill>
+        <p:spPr>
+          <a:xfrm>
+            <a:off x="8133263" y="4646771"/>
+            <a:ext cx="2411131" cy="1934858"/>
+          </a:xfrm>
+          <a:prstGeom prst="rect">
+            <a:avLst/>
+          </a:prstGeom>
+        </p:spPr>
+      </p:pic>
     </p:spTree>
     <p:extLst>
       <p:ext uri="{BB962C8B-B14F-4D97-AF65-F5344CB8AC3E}">

--- a/LabBook_3.pptx
+++ b/LabBook_3.pptx
@@ -5,23 +5,25 @@
     <p:sldMasterId id="2147483648" r:id="rId1"/>
   </p:sldMasterIdLst>
   <p:notesMasterIdLst>
-    <p:notesMasterId r:id="rId13"/>
+    <p:notesMasterId r:id="rId15"/>
   </p:notesMasterIdLst>
   <p:handoutMasterIdLst>
-    <p:handoutMasterId r:id="rId14"/>
+    <p:handoutMasterId r:id="rId16"/>
   </p:handoutMasterIdLst>
   <p:sldIdLst>
     <p:sldId id="256" r:id="rId2"/>
     <p:sldId id="289" r:id="rId3"/>
     <p:sldId id="290" r:id="rId4"/>
-    <p:sldId id="297" r:id="rId5"/>
-    <p:sldId id="295" r:id="rId6"/>
-    <p:sldId id="296" r:id="rId7"/>
-    <p:sldId id="298" r:id="rId8"/>
-    <p:sldId id="293" r:id="rId9"/>
-    <p:sldId id="299" r:id="rId10"/>
-    <p:sldId id="300" r:id="rId11"/>
-    <p:sldId id="288" r:id="rId12"/>
+    <p:sldId id="301" r:id="rId5"/>
+    <p:sldId id="302" r:id="rId6"/>
+    <p:sldId id="297" r:id="rId7"/>
+    <p:sldId id="295" r:id="rId8"/>
+    <p:sldId id="296" r:id="rId9"/>
+    <p:sldId id="298" r:id="rId10"/>
+    <p:sldId id="293" r:id="rId11"/>
+    <p:sldId id="299" r:id="rId12"/>
+    <p:sldId id="300" r:id="rId13"/>
+    <p:sldId id="288" r:id="rId14"/>
   </p:sldIdLst>
   <p:sldSz cx="12192000" cy="6858000"/>
   <p:notesSz cx="12192000" cy="6858000"/>
@@ -772,6 +774,222 @@
         <p:cNvPr id="1" name="">
           <a:extLst>
             <a:ext uri="{FF2B5EF4-FFF2-40B4-BE49-F238E27FC236}">
+              <a16:creationId xmlns:a16="http://schemas.microsoft.com/office/drawing/2014/main" id="{8B2DC39A-A10F-0726-11F9-99F18CC1E3E0}"/>
+            </a:ext>
+          </a:extLst>
+        </p:cNvPr>
+        <p:cNvGrpSpPr/>
+        <p:nvPr/>
+      </p:nvGrpSpPr>
+      <p:grpSpPr>
+        <a:xfrm>
+          <a:off x="0" y="0"/>
+          <a:ext cx="0" cy="0"/>
+          <a:chOff x="0" y="0"/>
+          <a:chExt cx="0" cy="0"/>
+        </a:xfrm>
+      </p:grpSpPr>
+      <p:sp>
+        <p:nvSpPr>
+          <p:cNvPr id="2" name="Marcador de imagen de diapositiva 1">
+            <a:extLst>
+              <a:ext uri="{FF2B5EF4-FFF2-40B4-BE49-F238E27FC236}">
+                <a16:creationId xmlns:a16="http://schemas.microsoft.com/office/drawing/2014/main" id="{0B1F673C-EEC7-30E4-85B0-975F4F8D2B14}"/>
+              </a:ext>
+            </a:extLst>
+          </p:cNvPr>
+          <p:cNvSpPr>
+            <a:spLocks noGrp="1" noRot="1" noChangeAspect="1"/>
+          </p:cNvSpPr>
+          <p:nvPr>
+            <p:ph type="sldImg"/>
+          </p:nvPr>
+        </p:nvSpPr>
+        <p:spPr/>
+      </p:sp>
+      <p:sp>
+        <p:nvSpPr>
+          <p:cNvPr id="3" name="Marcador de notas 2">
+            <a:extLst>
+              <a:ext uri="{FF2B5EF4-FFF2-40B4-BE49-F238E27FC236}">
+                <a16:creationId xmlns:a16="http://schemas.microsoft.com/office/drawing/2014/main" id="{07005D4D-EE17-133A-2E49-DAD519D77A19}"/>
+              </a:ext>
+            </a:extLst>
+          </p:cNvPr>
+          <p:cNvSpPr>
+            <a:spLocks noGrp="1"/>
+          </p:cNvSpPr>
+          <p:nvPr>
+            <p:ph type="body" idx="1"/>
+          </p:nvPr>
+        </p:nvSpPr>
+        <p:spPr/>
+        <p:txBody>
+          <a:bodyPr/>
+          <a:lstStyle/>
+          <a:p>
+            <a:endParaRPr lang="es-ES" dirty="0"/>
+          </a:p>
+        </p:txBody>
+      </p:sp>
+      <p:sp>
+        <p:nvSpPr>
+          <p:cNvPr id="4" name="Marcador de número de diapositiva 3">
+            <a:extLst>
+              <a:ext uri="{FF2B5EF4-FFF2-40B4-BE49-F238E27FC236}">
+                <a16:creationId xmlns:a16="http://schemas.microsoft.com/office/drawing/2014/main" id="{73362712-2836-FBF8-857B-617D2E76AB1A}"/>
+              </a:ext>
+            </a:extLst>
+          </p:cNvPr>
+          <p:cNvSpPr>
+            <a:spLocks noGrp="1"/>
+          </p:cNvSpPr>
+          <p:nvPr>
+            <p:ph type="sldNum" sz="quarter" idx="5"/>
+          </p:nvPr>
+        </p:nvSpPr>
+        <p:spPr/>
+        <p:txBody>
+          <a:bodyPr/>
+          <a:lstStyle/>
+          <a:p>
+            <a:fld id="{676223B9-C868-4436-87D9-1A3152E1157A}" type="slidenum">
+              <a:rPr lang="es-ES" smtClean="0"/>
+              <a:t>4</a:t>
+            </a:fld>
+            <a:endParaRPr lang="es-ES"/>
+          </a:p>
+        </p:txBody>
+      </p:sp>
+    </p:spTree>
+    <p:extLst>
+      <p:ext uri="{BB962C8B-B14F-4D97-AF65-F5344CB8AC3E}">
+        <p14:creationId xmlns:p14="http://schemas.microsoft.com/office/powerpoint/2010/main" val="2688201750"/>
+      </p:ext>
+    </p:extLst>
+  </p:cSld>
+  <p:clrMapOvr>
+    <a:masterClrMapping/>
+  </p:clrMapOvr>
+</p:notes>
+</file>
+
+<file path=ppt/notesSlides/notesSlide3.xml><?xml version="1.0" encoding="utf-8"?>
+<p:notes xmlns:a="http://schemas.openxmlformats.org/drawingml/2006/main" xmlns:r="http://schemas.openxmlformats.org/officeDocument/2006/relationships" xmlns:p="http://schemas.openxmlformats.org/presentationml/2006/main">
+  <p:cSld>
+    <p:spTree>
+      <p:nvGrpSpPr>
+        <p:cNvPr id="1" name="">
+          <a:extLst>
+            <a:ext uri="{FF2B5EF4-FFF2-40B4-BE49-F238E27FC236}">
+              <a16:creationId xmlns:a16="http://schemas.microsoft.com/office/drawing/2014/main" id="{5C26CA98-932D-FC7D-E086-49272ED7A935}"/>
+            </a:ext>
+          </a:extLst>
+        </p:cNvPr>
+        <p:cNvGrpSpPr/>
+        <p:nvPr/>
+      </p:nvGrpSpPr>
+      <p:grpSpPr>
+        <a:xfrm>
+          <a:off x="0" y="0"/>
+          <a:ext cx="0" cy="0"/>
+          <a:chOff x="0" y="0"/>
+          <a:chExt cx="0" cy="0"/>
+        </a:xfrm>
+      </p:grpSpPr>
+      <p:sp>
+        <p:nvSpPr>
+          <p:cNvPr id="2" name="Marcador de imagen de diapositiva 1">
+            <a:extLst>
+              <a:ext uri="{FF2B5EF4-FFF2-40B4-BE49-F238E27FC236}">
+                <a16:creationId xmlns:a16="http://schemas.microsoft.com/office/drawing/2014/main" id="{6323D39F-DACD-389A-6F47-6FC1AFB1F031}"/>
+              </a:ext>
+            </a:extLst>
+          </p:cNvPr>
+          <p:cNvSpPr>
+            <a:spLocks noGrp="1" noRot="1" noChangeAspect="1"/>
+          </p:cNvSpPr>
+          <p:nvPr>
+            <p:ph type="sldImg"/>
+          </p:nvPr>
+        </p:nvSpPr>
+        <p:spPr/>
+      </p:sp>
+      <p:sp>
+        <p:nvSpPr>
+          <p:cNvPr id="3" name="Marcador de notas 2">
+            <a:extLst>
+              <a:ext uri="{FF2B5EF4-FFF2-40B4-BE49-F238E27FC236}">
+                <a16:creationId xmlns:a16="http://schemas.microsoft.com/office/drawing/2014/main" id="{B8976636-10CE-346A-E5D9-0308161DB18F}"/>
+              </a:ext>
+            </a:extLst>
+          </p:cNvPr>
+          <p:cNvSpPr>
+            <a:spLocks noGrp="1"/>
+          </p:cNvSpPr>
+          <p:nvPr>
+            <p:ph type="body" idx="1"/>
+          </p:nvPr>
+        </p:nvSpPr>
+        <p:spPr/>
+        <p:txBody>
+          <a:bodyPr/>
+          <a:lstStyle/>
+          <a:p>
+            <a:endParaRPr lang="es-ES" dirty="0"/>
+          </a:p>
+        </p:txBody>
+      </p:sp>
+      <p:sp>
+        <p:nvSpPr>
+          <p:cNvPr id="4" name="Marcador de número de diapositiva 3">
+            <a:extLst>
+              <a:ext uri="{FF2B5EF4-FFF2-40B4-BE49-F238E27FC236}">
+                <a16:creationId xmlns:a16="http://schemas.microsoft.com/office/drawing/2014/main" id="{F6AC00D6-8149-8B58-330C-7DEC74AA55FF}"/>
+              </a:ext>
+            </a:extLst>
+          </p:cNvPr>
+          <p:cNvSpPr>
+            <a:spLocks noGrp="1"/>
+          </p:cNvSpPr>
+          <p:nvPr>
+            <p:ph type="sldNum" sz="quarter" idx="5"/>
+          </p:nvPr>
+        </p:nvSpPr>
+        <p:spPr/>
+        <p:txBody>
+          <a:bodyPr/>
+          <a:lstStyle/>
+          <a:p>
+            <a:fld id="{676223B9-C868-4436-87D9-1A3152E1157A}" type="slidenum">
+              <a:rPr lang="es-ES" smtClean="0"/>
+              <a:t>5</a:t>
+            </a:fld>
+            <a:endParaRPr lang="es-ES"/>
+          </a:p>
+        </p:txBody>
+      </p:sp>
+    </p:spTree>
+    <p:extLst>
+      <p:ext uri="{BB962C8B-B14F-4D97-AF65-F5344CB8AC3E}">
+        <p14:creationId xmlns:p14="http://schemas.microsoft.com/office/powerpoint/2010/main" val="525747330"/>
+      </p:ext>
+    </p:extLst>
+  </p:cSld>
+  <p:clrMapOvr>
+    <a:masterClrMapping/>
+  </p:clrMapOvr>
+</p:notes>
+</file>
+
+<file path=ppt/notesSlides/notesSlide4.xml><?xml version="1.0" encoding="utf-8"?>
+<p:notes xmlns:a="http://schemas.openxmlformats.org/drawingml/2006/main" xmlns:r="http://schemas.openxmlformats.org/officeDocument/2006/relationships" xmlns:p="http://schemas.openxmlformats.org/presentationml/2006/main">
+  <p:cSld>
+    <p:spTree>
+      <p:nvGrpSpPr>
+        <p:cNvPr id="1" name="">
+          <a:extLst>
+            <a:ext uri="{FF2B5EF4-FFF2-40B4-BE49-F238E27FC236}">
               <a16:creationId xmlns:a16="http://schemas.microsoft.com/office/drawing/2014/main" id="{845763E5-B315-6B89-9E6A-296CC0C32BEB}"/>
             </a:ext>
           </a:extLst>
@@ -853,7 +1071,7 @@
           <a:p>
             <a:fld id="{676223B9-C868-4436-87D9-1A3152E1157A}" type="slidenum">
               <a:rPr lang="es-ES" smtClean="0"/>
-              <a:t>4</a:t>
+              <a:t>6</a:t>
             </a:fld>
             <a:endParaRPr lang="es-ES"/>
           </a:p>
@@ -872,7 +1090,7 @@
 </p:notes>
 </file>
 
-<file path=ppt/notesSlides/notesSlide3.xml><?xml version="1.0" encoding="utf-8"?>
+<file path=ppt/notesSlides/notesSlide5.xml><?xml version="1.0" encoding="utf-8"?>
 <p:notes xmlns:a="http://schemas.openxmlformats.org/drawingml/2006/main" xmlns:r="http://schemas.openxmlformats.org/officeDocument/2006/relationships" xmlns:p="http://schemas.openxmlformats.org/presentationml/2006/main">
   <p:cSld>
     <p:spTree>
@@ -961,7 +1179,7 @@
           <a:p>
             <a:fld id="{676223B9-C868-4436-87D9-1A3152E1157A}" type="slidenum">
               <a:rPr lang="es-ES" smtClean="0"/>
-              <a:t>5</a:t>
+              <a:t>7</a:t>
             </a:fld>
             <a:endParaRPr lang="es-ES"/>
           </a:p>
@@ -980,7 +1198,7 @@
 </p:notes>
 </file>
 
-<file path=ppt/notesSlides/notesSlide4.xml><?xml version="1.0" encoding="utf-8"?>
+<file path=ppt/notesSlides/notesSlide6.xml><?xml version="1.0" encoding="utf-8"?>
 <p:notes xmlns:a="http://schemas.openxmlformats.org/drawingml/2006/main" xmlns:r="http://schemas.openxmlformats.org/officeDocument/2006/relationships" xmlns:p="http://schemas.openxmlformats.org/presentationml/2006/main">
   <p:cSld>
     <p:spTree>
@@ -1069,7 +1287,7 @@
           <a:p>
             <a:fld id="{676223B9-C868-4436-87D9-1A3152E1157A}" type="slidenum">
               <a:rPr lang="es-ES" smtClean="0"/>
-              <a:t>6</a:t>
+              <a:t>8</a:t>
             </a:fld>
             <a:endParaRPr lang="es-ES"/>
           </a:p>
@@ -1088,7 +1306,7 @@
 </p:notes>
 </file>
 
-<file path=ppt/notesSlides/notesSlide5.xml><?xml version="1.0" encoding="utf-8"?>
+<file path=ppt/notesSlides/notesSlide7.xml><?xml version="1.0" encoding="utf-8"?>
 <p:notes xmlns:a="http://schemas.openxmlformats.org/drawingml/2006/main" xmlns:r="http://schemas.openxmlformats.org/officeDocument/2006/relationships" xmlns:p="http://schemas.openxmlformats.org/presentationml/2006/main">
   <p:cSld>
     <p:spTree>
@@ -1177,7 +1395,7 @@
           <a:p>
             <a:fld id="{676223B9-C868-4436-87D9-1A3152E1157A}" type="slidenum">
               <a:rPr lang="es-ES" smtClean="0"/>
-              <a:t>8</a:t>
+              <a:t>10</a:t>
             </a:fld>
             <a:endParaRPr lang="es-ES"/>
           </a:p>
@@ -2842,7 +3060,13 @@
   <p:cSld>
     <p:spTree>
       <p:nvGrpSpPr>
-        <p:cNvPr id="1" name=""/>
+        <p:cNvPr id="1" name="">
+          <a:extLst>
+            <a:ext uri="{FF2B5EF4-FFF2-40B4-BE49-F238E27FC236}">
+              <a16:creationId xmlns:a16="http://schemas.microsoft.com/office/drawing/2014/main" id="{25434E70-43B1-3881-1771-20FB4358471D}"/>
+            </a:ext>
+          </a:extLst>
+        </p:cNvPr>
         <p:cNvGrpSpPr/>
         <p:nvPr/>
       </p:nvGrpSpPr>
@@ -2856,10 +3080,96 @@
       </p:grpSpPr>
       <p:sp>
         <p:nvSpPr>
-          <p:cNvPr id="2" name="Marcador de número de diapositiva 1">
+          <p:cNvPr id="16" name="object 16">
             <a:extLst>
               <a:ext uri="{FF2B5EF4-FFF2-40B4-BE49-F238E27FC236}">
-                <a16:creationId xmlns:a16="http://schemas.microsoft.com/office/drawing/2014/main" id="{85987E63-66F6-C19F-7345-65F13653EC0C}"/>
+                <a16:creationId xmlns:a16="http://schemas.microsoft.com/office/drawing/2014/main" id="{742C31CE-19F0-B995-0997-9A2D6A879BF7}"/>
+              </a:ext>
+            </a:extLst>
+          </p:cNvPr>
+          <p:cNvSpPr txBox="1">
+            <a:spLocks noGrp="1"/>
+          </p:cNvSpPr>
+          <p:nvPr>
+            <p:ph type="title"/>
+          </p:nvPr>
+        </p:nvSpPr>
+        <p:spPr>
+          <a:xfrm>
+            <a:off x="685800" y="408883"/>
+            <a:ext cx="10994410" cy="397545"/>
+          </a:xfrm>
+          <a:prstGeom prst="rect">
+            <a:avLst/>
+          </a:prstGeom>
+        </p:spPr>
+        <p:txBody>
+          <a:bodyPr vert="horz" wrap="square" lIns="0" tIns="12700" rIns="0" bIns="0" rtlCol="0">
+            <a:spAutoFit/>
+          </a:bodyPr>
+          <a:lstStyle/>
+          <a:p>
+            <a:pPr marL="12700">
+              <a:lnSpc>
+                <a:spcPct val="100000"/>
+              </a:lnSpc>
+              <a:spcBef>
+                <a:spcPts val="100"/>
+              </a:spcBef>
+            </a:pPr>
+            <a:r>
+              <a:rPr lang="en-US" sz="2500" dirty="0"/>
+              <a:t>Extra assessments </a:t>
+            </a:r>
+            <a:endParaRPr lang="en-US" sz="2500" b="0" dirty="0">
+              <a:latin typeface="+mj-lt"/>
+              <a:cs typeface="Lucida Sans"/>
+            </a:endParaRPr>
+          </a:p>
+        </p:txBody>
+      </p:sp>
+      <p:pic>
+        <p:nvPicPr>
+          <p:cNvPr id="83" name="Gráfico 82">
+            <a:extLst>
+              <a:ext uri="{FF2B5EF4-FFF2-40B4-BE49-F238E27FC236}">
+                <a16:creationId xmlns:a16="http://schemas.microsoft.com/office/drawing/2014/main" id="{D688A609-F3DC-EE34-C536-683E70F32EAE}"/>
+              </a:ext>
+            </a:extLst>
+          </p:cNvPr>
+          <p:cNvPicPr>
+            <a:picLocks noChangeAspect="1"/>
+          </p:cNvPicPr>
+          <p:nvPr/>
+        </p:nvPicPr>
+        <p:blipFill>
+          <a:blip r:embed="rId3">
+            <a:extLst>
+              <a:ext uri="{96DAC541-7B7A-43D3-8B79-37D633B846F1}">
+                <asvg:svgBlip xmlns:asvg="http://schemas.microsoft.com/office/drawing/2016/SVG/main" r:embed="rId4"/>
+              </a:ext>
+            </a:extLst>
+          </a:blip>
+          <a:stretch>
+            <a:fillRect/>
+          </a:stretch>
+        </p:blipFill>
+        <p:spPr>
+          <a:xfrm>
+            <a:off x="5045006" y="6356057"/>
+            <a:ext cx="6409575" cy="363174"/>
+          </a:xfrm>
+          <a:prstGeom prst="rect">
+            <a:avLst/>
+          </a:prstGeom>
+        </p:spPr>
+      </p:pic>
+      <p:sp>
+        <p:nvSpPr>
+          <p:cNvPr id="84" name="Marcador de número de diapositiva 83">
+            <a:extLst>
+              <a:ext uri="{FF2B5EF4-FFF2-40B4-BE49-F238E27FC236}">
+                <a16:creationId xmlns:a16="http://schemas.microsoft.com/office/drawing/2014/main" id="{B6C672C6-89D4-7E67-2B94-811D081786A7}"/>
               </a:ext>
             </a:extLst>
           </p:cNvPr>
@@ -2883,10 +3193,288 @@
           </a:p>
         </p:txBody>
       </p:sp>
+      <p:sp>
+        <p:nvSpPr>
+          <p:cNvPr id="4" name="Marcador de texto 2">
+            <a:extLst>
+              <a:ext uri="{FF2B5EF4-FFF2-40B4-BE49-F238E27FC236}">
+                <a16:creationId xmlns:a16="http://schemas.microsoft.com/office/drawing/2014/main" id="{D838A93A-BFC8-0124-93CE-FDC193435A0C}"/>
+              </a:ext>
+            </a:extLst>
+          </p:cNvPr>
+          <p:cNvSpPr txBox="1">
+            <a:spLocks/>
+          </p:cNvSpPr>
+          <p:nvPr/>
+        </p:nvSpPr>
+        <p:spPr>
+          <a:xfrm>
+            <a:off x="608012" y="1295400"/>
+            <a:ext cx="11048999" cy="4958137"/>
+          </a:xfrm>
+          <a:prstGeom prst="rect">
+            <a:avLst/>
+          </a:prstGeom>
+        </p:spPr>
+        <p:txBody>
+          <a:bodyPr>
+            <a:normAutofit/>
+          </a:bodyPr>
+          <a:lstStyle>
+            <a:lvl1pPr marL="0">
+              <a:defRPr>
+                <a:latin typeface="+mn-lt"/>
+                <a:ea typeface="+mn-ea"/>
+                <a:cs typeface="+mn-cs"/>
+              </a:defRPr>
+            </a:lvl1pPr>
+            <a:lvl2pPr marL="457200">
+              <a:defRPr>
+                <a:latin typeface="+mn-lt"/>
+                <a:ea typeface="+mn-ea"/>
+                <a:cs typeface="+mn-cs"/>
+              </a:defRPr>
+            </a:lvl2pPr>
+            <a:lvl3pPr marL="914400">
+              <a:defRPr>
+                <a:latin typeface="+mn-lt"/>
+                <a:ea typeface="+mn-ea"/>
+                <a:cs typeface="+mn-cs"/>
+              </a:defRPr>
+            </a:lvl3pPr>
+            <a:lvl4pPr marL="1371600">
+              <a:defRPr>
+                <a:latin typeface="+mn-lt"/>
+                <a:ea typeface="+mn-ea"/>
+                <a:cs typeface="+mn-cs"/>
+              </a:defRPr>
+            </a:lvl4pPr>
+            <a:lvl5pPr marL="1828800">
+              <a:defRPr>
+                <a:latin typeface="+mn-lt"/>
+                <a:ea typeface="+mn-ea"/>
+                <a:cs typeface="+mn-cs"/>
+              </a:defRPr>
+            </a:lvl5pPr>
+            <a:lvl6pPr marL="2286000">
+              <a:defRPr>
+                <a:latin typeface="+mn-lt"/>
+                <a:ea typeface="+mn-ea"/>
+                <a:cs typeface="+mn-cs"/>
+              </a:defRPr>
+            </a:lvl6pPr>
+            <a:lvl7pPr marL="2743200">
+              <a:defRPr>
+                <a:latin typeface="+mn-lt"/>
+                <a:ea typeface="+mn-ea"/>
+                <a:cs typeface="+mn-cs"/>
+              </a:defRPr>
+            </a:lvl7pPr>
+            <a:lvl8pPr marL="3200400">
+              <a:defRPr>
+                <a:latin typeface="+mn-lt"/>
+                <a:ea typeface="+mn-ea"/>
+                <a:cs typeface="+mn-cs"/>
+              </a:defRPr>
+            </a:lvl8pPr>
+            <a:lvl9pPr marL="3657600">
+              <a:defRPr>
+                <a:latin typeface="+mn-lt"/>
+                <a:ea typeface="+mn-ea"/>
+                <a:cs typeface="+mn-cs"/>
+              </a:defRPr>
+            </a:lvl9pPr>
+          </a:lstStyle>
+          <a:p>
+            <a:pPr marL="0" indent="0">
+              <a:buNone/>
+            </a:pPr>
+            <a:r>
+              <a:rPr lang="en-US" b="1" dirty="0"/>
+              <a:t>Assessment 4</a:t>
+            </a:r>
+            <a:r>
+              <a:rPr lang="en-US" dirty="0"/>
+              <a:t>. Design an MZI for filtering at a specific wavelength. Calculate and adjust the arm lengths to configure the MZI to have a maximum transmission at 1550 nm.</a:t>
+            </a:r>
+          </a:p>
+          <a:p>
+            <a:endParaRPr lang="en-US" b="1" dirty="0"/>
+          </a:p>
+          <a:p>
+            <a:r>
+              <a:rPr lang="en-US" b="1" dirty="0"/>
+              <a:t>Assessment 5. </a:t>
+            </a:r>
+            <a:r>
+              <a:rPr lang="en-US" dirty="0"/>
+              <a:t>Let's see how the response of the MZI varies with the effective index. Vary the effective index of one of the arms and analyze how the spectrum shifts. To do this, you can use the data provided in the .txt files entitled ‘</a:t>
+            </a:r>
+            <a:r>
+              <a:rPr lang="en-US" dirty="0" err="1"/>
+              <a:t>SiN</a:t>
+            </a:r>
+            <a:r>
+              <a:rPr lang="en-US" dirty="0"/>
+              <a:t>’. Can you give an example of an application where this configuration is used?</a:t>
+            </a:r>
+          </a:p>
+          <a:p>
+            <a:pPr marL="0" indent="0">
+              <a:buNone/>
+            </a:pPr>
+            <a:endParaRPr lang="en-US" dirty="0"/>
+          </a:p>
+          <a:p>
+            <a:r>
+              <a:rPr lang="en-US" b="1" dirty="0"/>
+              <a:t>Advanced level assessment.</a:t>
+            </a:r>
+            <a:r>
+              <a:rPr lang="en-US" dirty="0"/>
+              <a:t> Explore how cascading two MZIs affects the transmission spectrum. To do so, design a system in which two MZIs are cascaded. Simulate and observe the spectrum, explaining how the transmission peaks behave</a:t>
+            </a:r>
+            <a:r>
+              <a:rPr lang="en-US" b="1" dirty="0"/>
+              <a:t>.</a:t>
+            </a:r>
+          </a:p>
+          <a:p>
+            <a:pPr algn="just"/>
+            <a:endParaRPr lang="en-US" sz="2000" kern="0" dirty="0">
+              <a:solidFill>
+                <a:sysClr val="windowText" lastClr="000000"/>
+              </a:solidFill>
+            </a:endParaRPr>
+          </a:p>
+        </p:txBody>
+      </p:sp>
+      <p:sp>
+        <p:nvSpPr>
+          <p:cNvPr id="2" name="CuadroTexto 1">
+            <a:extLst>
+              <a:ext uri="{FF2B5EF4-FFF2-40B4-BE49-F238E27FC236}">
+                <a16:creationId xmlns:a16="http://schemas.microsoft.com/office/drawing/2014/main" id="{FDE3A197-9508-F9F1-1FEB-FF883D78C151}"/>
+              </a:ext>
+            </a:extLst>
+          </p:cNvPr>
+          <p:cNvSpPr txBox="1"/>
+          <p:nvPr/>
+        </p:nvSpPr>
+        <p:spPr>
+          <a:xfrm>
+            <a:off x="609441" y="4860334"/>
+            <a:ext cx="11199971" cy="1200329"/>
+          </a:xfrm>
+          <a:prstGeom prst="rect">
+            <a:avLst/>
+          </a:prstGeom>
+          <a:solidFill>
+            <a:schemeClr val="bg1">
+              <a:lumMod val="95000"/>
+            </a:schemeClr>
+          </a:solidFill>
+          <a:ln w="28575">
+            <a:solidFill>
+              <a:srgbClr val="E0700D"/>
+            </a:solidFill>
+          </a:ln>
+        </p:spPr>
+        <p:txBody>
+          <a:bodyPr wrap="square" rtlCol="0">
+            <a:spAutoFit/>
+          </a:bodyPr>
+          <a:lstStyle/>
+          <a:p>
+            <a:pPr algn="just"/>
+            <a:r>
+              <a:rPr lang="en-US" sz="1200" dirty="0">
+                <a:latin typeface="Arial" panose="020B0604020202020204" pitchFamily="34" charset="0"/>
+                <a:cs typeface="Arial" panose="020B0604020202020204" pitchFamily="34" charset="0"/>
+              </a:rPr>
+              <a:t>Document all your results</a:t>
+            </a:r>
+          </a:p>
+          <a:p>
+            <a:pPr algn="just"/>
+            <a:endParaRPr lang="en-US" sz="1200" dirty="0">
+              <a:latin typeface="Arial" panose="020B0604020202020204" pitchFamily="34" charset="0"/>
+              <a:cs typeface="Arial" panose="020B0604020202020204" pitchFamily="34" charset="0"/>
+            </a:endParaRPr>
+          </a:p>
+          <a:p>
+            <a:pPr algn="just"/>
+            <a:endParaRPr lang="en-US" sz="1200" dirty="0">
+              <a:latin typeface="Arial" panose="020B0604020202020204" pitchFamily="34" charset="0"/>
+              <a:cs typeface="Arial" panose="020B0604020202020204" pitchFamily="34" charset="0"/>
+            </a:endParaRPr>
+          </a:p>
+          <a:p>
+            <a:pPr algn="just"/>
+            <a:endParaRPr lang="en-US" sz="1200" dirty="0">
+              <a:latin typeface="Arial" panose="020B0604020202020204" pitchFamily="34" charset="0"/>
+              <a:cs typeface="Arial" panose="020B0604020202020204" pitchFamily="34" charset="0"/>
+            </a:endParaRPr>
+          </a:p>
+          <a:p>
+            <a:pPr algn="just"/>
+            <a:endParaRPr lang="en-US" sz="1200" dirty="0">
+              <a:latin typeface="Arial" panose="020B0604020202020204" pitchFamily="34" charset="0"/>
+              <a:cs typeface="Arial" panose="020B0604020202020204" pitchFamily="34" charset="0"/>
+            </a:endParaRPr>
+          </a:p>
+          <a:p>
+            <a:pPr algn="just"/>
+            <a:endParaRPr lang="en-US" sz="1200" dirty="0">
+              <a:latin typeface="Arial" panose="020B0604020202020204" pitchFamily="34" charset="0"/>
+              <a:cs typeface="Arial" panose="020B0604020202020204" pitchFamily="34" charset="0"/>
+            </a:endParaRPr>
+          </a:p>
+        </p:txBody>
+      </p:sp>
+      <p:sp>
+        <p:nvSpPr>
+          <p:cNvPr id="6" name="Marcador de pie de página 2">
+            <a:extLst>
+              <a:ext uri="{FF2B5EF4-FFF2-40B4-BE49-F238E27FC236}">
+                <a16:creationId xmlns:a16="http://schemas.microsoft.com/office/drawing/2014/main" id="{04C1A7E9-6C33-172D-E7B9-CCF643221E6A}"/>
+              </a:ext>
+            </a:extLst>
+          </p:cNvPr>
+          <p:cNvSpPr>
+            <a:spLocks noGrp="1"/>
+          </p:cNvSpPr>
+          <p:nvPr>
+            <p:ph type="ftr" sz="quarter" idx="5"/>
+          </p:nvPr>
+        </p:nvSpPr>
+        <p:spPr>
+          <a:xfrm>
+            <a:off x="609600" y="6457057"/>
+            <a:ext cx="2743200" cy="184666"/>
+          </a:xfrm>
+        </p:spPr>
+        <p:txBody>
+          <a:bodyPr/>
+          <a:lstStyle/>
+          <a:p>
+            <a:pPr marL="12700">
+              <a:spcBef>
+                <a:spcPts val="15"/>
+              </a:spcBef>
+            </a:pPr>
+            <a:r>
+              <a:rPr lang="es-ES" spc="-5"/>
+              <a:t>LAB 3. INTERFEROMETERS I</a:t>
+            </a:r>
+            <a:endParaRPr lang="es-ES" spc="-5" dirty="0"/>
+          </a:p>
+        </p:txBody>
+      </p:sp>
     </p:spTree>
     <p:extLst>
       <p:ext uri="{BB962C8B-B14F-4D97-AF65-F5344CB8AC3E}">
-        <p14:creationId xmlns:p14="http://schemas.microsoft.com/office/powerpoint/2010/main" val="939832317"/>
+        <p14:creationId xmlns:p14="http://schemas.microsoft.com/office/powerpoint/2010/main" val="3660438245"/>
       </p:ext>
     </p:extLst>
   </p:cSld>
@@ -2915,6 +3503,373 @@
       </p:grpSpPr>
       <p:sp>
         <p:nvSpPr>
+          <p:cNvPr id="2" name="Marcador de número de diapositiva 1">
+            <a:extLst>
+              <a:ext uri="{FF2B5EF4-FFF2-40B4-BE49-F238E27FC236}">
+                <a16:creationId xmlns:a16="http://schemas.microsoft.com/office/drawing/2014/main" id="{06DE8A1B-D36B-640A-052A-EB519F6309B9}"/>
+              </a:ext>
+            </a:extLst>
+          </p:cNvPr>
+          <p:cNvSpPr>
+            <a:spLocks noGrp="1"/>
+          </p:cNvSpPr>
+          <p:nvPr>
+            <p:ph type="sldNum" sz="quarter" idx="7"/>
+          </p:nvPr>
+        </p:nvSpPr>
+        <p:spPr/>
+        <p:txBody>
+          <a:bodyPr/>
+          <a:lstStyle/>
+          <a:p>
+            <a:fld id="{B6F15528-21DE-4FAA-801E-634DDDAF4B2B}" type="slidenum">
+              <a:rPr lang="es-ES" smtClean="0"/>
+              <a:t>11</a:t>
+            </a:fld>
+            <a:endParaRPr lang="es-ES"/>
+          </a:p>
+        </p:txBody>
+      </p:sp>
+      <p:pic>
+        <p:nvPicPr>
+          <p:cNvPr id="4" name="Imagen 3">
+            <a:extLst>
+              <a:ext uri="{FF2B5EF4-FFF2-40B4-BE49-F238E27FC236}">
+                <a16:creationId xmlns:a16="http://schemas.microsoft.com/office/drawing/2014/main" id="{E3564D6F-B7D2-160A-55F0-B8721146B29A}"/>
+              </a:ext>
+            </a:extLst>
+          </p:cNvPr>
+          <p:cNvPicPr>
+            <a:picLocks noChangeAspect="1"/>
+          </p:cNvPicPr>
+          <p:nvPr/>
+        </p:nvPicPr>
+        <p:blipFill>
+          <a:blip r:embed="rId2"/>
+          <a:stretch>
+            <a:fillRect/>
+          </a:stretch>
+        </p:blipFill>
+        <p:spPr>
+          <a:xfrm>
+            <a:off x="1447800" y="1752600"/>
+            <a:ext cx="3181350" cy="838200"/>
+          </a:xfrm>
+          <a:prstGeom prst="rect">
+            <a:avLst/>
+          </a:prstGeom>
+        </p:spPr>
+      </p:pic>
+      <p:sp>
+        <p:nvSpPr>
+          <p:cNvPr id="5" name="CuadroTexto 4">
+            <a:extLst>
+              <a:ext uri="{FF2B5EF4-FFF2-40B4-BE49-F238E27FC236}">
+                <a16:creationId xmlns:a16="http://schemas.microsoft.com/office/drawing/2014/main" id="{3383DB73-B498-36BE-3CA7-16C3FDD7E8EE}"/>
+              </a:ext>
+            </a:extLst>
+          </p:cNvPr>
+          <p:cNvSpPr txBox="1"/>
+          <p:nvPr/>
+        </p:nvSpPr>
+        <p:spPr>
+          <a:xfrm>
+            <a:off x="304800" y="609600"/>
+            <a:ext cx="6918960" cy="923330"/>
+          </a:xfrm>
+          <a:prstGeom prst="rect">
+            <a:avLst/>
+          </a:prstGeom>
+          <a:noFill/>
+        </p:spPr>
+        <p:txBody>
+          <a:bodyPr wrap="square" rtlCol="0">
+            <a:spAutoFit/>
+          </a:bodyPr>
+          <a:lstStyle/>
+          <a:p>
+            <a:r>
+              <a:rPr lang="es-ES" dirty="0"/>
+              <a:t>Para tener interferencia constructiva en lambda 0 se debe cumplir esa condición: (tenemos en cuenta que estamos en el caso en el que solo hay </a:t>
+            </a:r>
+            <a:r>
+              <a:rPr lang="es-ES" dirty="0" err="1"/>
+              <a:t>dif</a:t>
+            </a:r>
+            <a:r>
+              <a:rPr lang="es-ES" dirty="0"/>
+              <a:t> de longitud en los brazos): </a:t>
+            </a:r>
+          </a:p>
+        </p:txBody>
+      </p:sp>
+      <p:pic>
+        <p:nvPicPr>
+          <p:cNvPr id="7" name="Imagen 6">
+            <a:extLst>
+              <a:ext uri="{FF2B5EF4-FFF2-40B4-BE49-F238E27FC236}">
+                <a16:creationId xmlns:a16="http://schemas.microsoft.com/office/drawing/2014/main" id="{0D31D717-D0AE-75D4-2688-DBA6014492FC}"/>
+              </a:ext>
+            </a:extLst>
+          </p:cNvPr>
+          <p:cNvPicPr>
+            <a:picLocks noChangeAspect="1"/>
+          </p:cNvPicPr>
+          <p:nvPr/>
+        </p:nvPicPr>
+        <p:blipFill>
+          <a:blip r:embed="rId3"/>
+          <a:stretch>
+            <a:fillRect/>
+          </a:stretch>
+        </p:blipFill>
+        <p:spPr>
+          <a:xfrm>
+            <a:off x="5715000" y="1532930"/>
+            <a:ext cx="1752600" cy="923925"/>
+          </a:xfrm>
+          <a:prstGeom prst="rect">
+            <a:avLst/>
+          </a:prstGeom>
+        </p:spPr>
+      </p:pic>
+      <p:sp>
+        <p:nvSpPr>
+          <p:cNvPr id="8" name="CuadroTexto 7">
+            <a:extLst>
+              <a:ext uri="{FF2B5EF4-FFF2-40B4-BE49-F238E27FC236}">
+                <a16:creationId xmlns:a16="http://schemas.microsoft.com/office/drawing/2014/main" id="{4205ABBB-6150-0834-CDF4-24A98BA4EA1D}"/>
+              </a:ext>
+            </a:extLst>
+          </p:cNvPr>
+          <p:cNvSpPr txBox="1"/>
+          <p:nvPr/>
+        </p:nvSpPr>
+        <p:spPr>
+          <a:xfrm>
+            <a:off x="8458200" y="762000"/>
+            <a:ext cx="2438400" cy="2862322"/>
+          </a:xfrm>
+          <a:prstGeom prst="rect">
+            <a:avLst/>
+          </a:prstGeom>
+          <a:noFill/>
+        </p:spPr>
+        <p:txBody>
+          <a:bodyPr wrap="square" rtlCol="0">
+            <a:spAutoFit/>
+          </a:bodyPr>
+          <a:lstStyle/>
+          <a:p>
+            <a:r>
+              <a:rPr lang="es-ES" dirty="0"/>
+              <a:t>Observamos que para m=1 nos queda un </a:t>
+            </a:r>
+            <a:r>
+              <a:rPr lang="es-ES" dirty="0" err="1"/>
+              <a:t>fsr</a:t>
+            </a:r>
+            <a:r>
+              <a:rPr lang="es-ES" dirty="0"/>
+              <a:t> demasiado ancho para una aplicación de filtrado. Por eso hacemos un barrido de m para escoger la m necesaria para la </a:t>
+            </a:r>
+            <a:r>
+              <a:rPr lang="es-ES" dirty="0" err="1"/>
+              <a:t>plicación</a:t>
+            </a:r>
+            <a:r>
+              <a:rPr lang="es-ES" dirty="0"/>
+              <a:t> concreta de nuestro filtro. </a:t>
+            </a:r>
+          </a:p>
+        </p:txBody>
+      </p:sp>
+      <p:pic>
+        <p:nvPicPr>
+          <p:cNvPr id="10" name="Imagen 9">
+            <a:extLst>
+              <a:ext uri="{FF2B5EF4-FFF2-40B4-BE49-F238E27FC236}">
+                <a16:creationId xmlns:a16="http://schemas.microsoft.com/office/drawing/2014/main" id="{26CFADEB-D2F5-E274-9860-ACE0FEF5EBE3}"/>
+              </a:ext>
+            </a:extLst>
+          </p:cNvPr>
+          <p:cNvPicPr>
+            <a:picLocks noChangeAspect="1"/>
+          </p:cNvPicPr>
+          <p:nvPr/>
+        </p:nvPicPr>
+        <p:blipFill>
+          <a:blip r:embed="rId4"/>
+          <a:stretch>
+            <a:fillRect/>
+          </a:stretch>
+        </p:blipFill>
+        <p:spPr>
+          <a:xfrm>
+            <a:off x="381000" y="2915602"/>
+            <a:ext cx="4314606" cy="3462338"/>
+          </a:xfrm>
+          <a:prstGeom prst="rect">
+            <a:avLst/>
+          </a:prstGeom>
+        </p:spPr>
+      </p:pic>
+      <p:sp>
+        <p:nvSpPr>
+          <p:cNvPr id="11" name="CuadroTexto 10">
+            <a:extLst>
+              <a:ext uri="{FF2B5EF4-FFF2-40B4-BE49-F238E27FC236}">
+                <a16:creationId xmlns:a16="http://schemas.microsoft.com/office/drawing/2014/main" id="{BFAF3784-0FF0-9D2F-AF31-5D982A9CA718}"/>
+              </a:ext>
+            </a:extLst>
+          </p:cNvPr>
+          <p:cNvSpPr txBox="1"/>
+          <p:nvPr/>
+        </p:nvSpPr>
+        <p:spPr>
+          <a:xfrm>
+            <a:off x="5257800" y="3686383"/>
+            <a:ext cx="4724400" cy="1200329"/>
+          </a:xfrm>
+          <a:prstGeom prst="rect">
+            <a:avLst/>
+          </a:prstGeom>
+          <a:noFill/>
+        </p:spPr>
+        <p:txBody>
+          <a:bodyPr wrap="square" rtlCol="0">
+            <a:spAutoFit/>
+          </a:bodyPr>
+          <a:lstStyle/>
+          <a:p>
+            <a:r>
+              <a:rPr lang="es-ES" dirty="0"/>
+              <a:t>Podemos elegir la m según lo fino que nos interese que sea nuestro filtro y obtenemos las longitudes de los brazos. He dejado Lu fija solo cambiamos el incremento. </a:t>
+            </a:r>
+          </a:p>
+        </p:txBody>
+      </p:sp>
+      <p:pic>
+        <p:nvPicPr>
+          <p:cNvPr id="13" name="Imagen 12">
+            <a:extLst>
+              <a:ext uri="{FF2B5EF4-FFF2-40B4-BE49-F238E27FC236}">
+                <a16:creationId xmlns:a16="http://schemas.microsoft.com/office/drawing/2014/main" id="{362AAAEC-8C47-B016-8E59-7C040F37A647}"/>
+              </a:ext>
+            </a:extLst>
+          </p:cNvPr>
+          <p:cNvPicPr>
+            <a:picLocks noChangeAspect="1"/>
+          </p:cNvPicPr>
+          <p:nvPr/>
+        </p:nvPicPr>
+        <p:blipFill>
+          <a:blip r:embed="rId5"/>
+          <a:stretch>
+            <a:fillRect/>
+          </a:stretch>
+        </p:blipFill>
+        <p:spPr>
+          <a:xfrm>
+            <a:off x="8133263" y="4646771"/>
+            <a:ext cx="2411131" cy="1934858"/>
+          </a:xfrm>
+          <a:prstGeom prst="rect">
+            <a:avLst/>
+          </a:prstGeom>
+        </p:spPr>
+      </p:pic>
+    </p:spTree>
+    <p:extLst>
+      <p:ext uri="{BB962C8B-B14F-4D97-AF65-F5344CB8AC3E}">
+        <p14:creationId xmlns:p14="http://schemas.microsoft.com/office/powerpoint/2010/main" val="2832491540"/>
+      </p:ext>
+    </p:extLst>
+  </p:cSld>
+  <p:clrMapOvr>
+    <a:masterClrMapping/>
+  </p:clrMapOvr>
+</p:sld>
+</file>
+
+<file path=ppt/slides/slide12.xml><?xml version="1.0" encoding="utf-8"?>
+<p:sld xmlns:a="http://schemas.openxmlformats.org/drawingml/2006/main" xmlns:r="http://schemas.openxmlformats.org/officeDocument/2006/relationships" xmlns:p="http://schemas.openxmlformats.org/presentationml/2006/main">
+  <p:cSld>
+    <p:spTree>
+      <p:nvGrpSpPr>
+        <p:cNvPr id="1" name=""/>
+        <p:cNvGrpSpPr/>
+        <p:nvPr/>
+      </p:nvGrpSpPr>
+      <p:grpSpPr>
+        <a:xfrm>
+          <a:off x="0" y="0"/>
+          <a:ext cx="0" cy="0"/>
+          <a:chOff x="0" y="0"/>
+          <a:chExt cx="0" cy="0"/>
+        </a:xfrm>
+      </p:grpSpPr>
+      <p:sp>
+        <p:nvSpPr>
+          <p:cNvPr id="2" name="Marcador de número de diapositiva 1">
+            <a:extLst>
+              <a:ext uri="{FF2B5EF4-FFF2-40B4-BE49-F238E27FC236}">
+                <a16:creationId xmlns:a16="http://schemas.microsoft.com/office/drawing/2014/main" id="{85987E63-66F6-C19F-7345-65F13653EC0C}"/>
+              </a:ext>
+            </a:extLst>
+          </p:cNvPr>
+          <p:cNvSpPr>
+            <a:spLocks noGrp="1"/>
+          </p:cNvSpPr>
+          <p:nvPr>
+            <p:ph type="sldNum" sz="quarter" idx="7"/>
+          </p:nvPr>
+        </p:nvSpPr>
+        <p:spPr/>
+        <p:txBody>
+          <a:bodyPr/>
+          <a:lstStyle/>
+          <a:p>
+            <a:fld id="{B6F15528-21DE-4FAA-801E-634DDDAF4B2B}" type="slidenum">
+              <a:rPr lang="es-ES" smtClean="0"/>
+              <a:t>12</a:t>
+            </a:fld>
+            <a:endParaRPr lang="es-ES"/>
+          </a:p>
+        </p:txBody>
+      </p:sp>
+    </p:spTree>
+    <p:extLst>
+      <p:ext uri="{BB962C8B-B14F-4D97-AF65-F5344CB8AC3E}">
+        <p14:creationId xmlns:p14="http://schemas.microsoft.com/office/powerpoint/2010/main" val="939832317"/>
+      </p:ext>
+    </p:extLst>
+  </p:cSld>
+  <p:clrMapOvr>
+    <a:masterClrMapping/>
+  </p:clrMapOvr>
+</p:sld>
+</file>
+
+<file path=ppt/slides/slide13.xml><?xml version="1.0" encoding="utf-8"?>
+<p:sld xmlns:a="http://schemas.openxmlformats.org/drawingml/2006/main" xmlns:r="http://schemas.openxmlformats.org/officeDocument/2006/relationships" xmlns:p="http://schemas.openxmlformats.org/presentationml/2006/main">
+  <p:cSld>
+    <p:spTree>
+      <p:nvGrpSpPr>
+        <p:cNvPr id="1" name=""/>
+        <p:cNvGrpSpPr/>
+        <p:nvPr/>
+      </p:nvGrpSpPr>
+      <p:grpSpPr>
+        <a:xfrm>
+          <a:off x="0" y="0"/>
+          <a:ext cx="0" cy="0"/>
+          <a:chOff x="0" y="0"/>
+          <a:chExt cx="0" cy="0"/>
+        </a:xfrm>
+      </p:grpSpPr>
+      <p:sp>
+        <p:nvSpPr>
           <p:cNvPr id="3" name="object 3"/>
           <p:cNvSpPr/>
           <p:nvPr/>
@@ -3035,7 +3990,7 @@
           <a:p>
             <a:fld id="{B6F15528-21DE-4FAA-801E-634DDDAF4B2B}" type="slidenum">
               <a:rPr lang="es-ES" smtClean="0"/>
-              <a:t>11</a:t>
+              <a:t>13</a:t>
             </a:fld>
             <a:endParaRPr lang="es-ES"/>
           </a:p>
@@ -5213,7 +6168,7 @@
         <p:cNvPr id="1" name="">
           <a:extLst>
             <a:ext uri="{FF2B5EF4-FFF2-40B4-BE49-F238E27FC236}">
-              <a16:creationId xmlns:a16="http://schemas.microsoft.com/office/drawing/2014/main" id="{977991F9-0A8D-EA56-149F-ABF4C9FBD7C6}"/>
+              <a16:creationId xmlns:a16="http://schemas.microsoft.com/office/drawing/2014/main" id="{68C01A93-C2F8-DF66-F7C9-5356493DDEC0}"/>
             </a:ext>
           </a:extLst>
         </p:cNvPr>
@@ -5228,12 +6183,64 @@
           <a:chExt cx="0" cy="0"/>
         </a:xfrm>
       </p:grpSpPr>
+      <p:sp>
+        <p:nvSpPr>
+          <p:cNvPr id="16" name="object 16">
+            <a:extLst>
+              <a:ext uri="{FF2B5EF4-FFF2-40B4-BE49-F238E27FC236}">
+                <a16:creationId xmlns:a16="http://schemas.microsoft.com/office/drawing/2014/main" id="{0F219A45-9A6C-A1D8-ADE5-5CFF66C4E390}"/>
+              </a:ext>
+            </a:extLst>
+          </p:cNvPr>
+          <p:cNvSpPr txBox="1">
+            <a:spLocks noGrp="1"/>
+          </p:cNvSpPr>
+          <p:nvPr>
+            <p:ph type="title"/>
+          </p:nvPr>
+        </p:nvSpPr>
+        <p:spPr>
+          <a:xfrm>
+            <a:off x="304800" y="157942"/>
+            <a:ext cx="10994410" cy="782265"/>
+          </a:xfrm>
+          <a:prstGeom prst="rect">
+            <a:avLst/>
+          </a:prstGeom>
+        </p:spPr>
+        <p:txBody>
+          <a:bodyPr vert="horz" wrap="square" lIns="0" tIns="12700" rIns="0" bIns="0" rtlCol="0">
+            <a:spAutoFit/>
+          </a:bodyPr>
+          <a:lstStyle/>
+          <a:p>
+            <a:pPr marL="12700">
+              <a:lnSpc>
+                <a:spcPct val="100000"/>
+              </a:lnSpc>
+              <a:spcBef>
+                <a:spcPts val="100"/>
+              </a:spcBef>
+            </a:pPr>
+            <a:br>
+              <a:rPr lang="es-ES" sz="2500" spc="-5" dirty="0">
+                <a:latin typeface="+mj-lt"/>
+                <a:cs typeface="Lucida Sans"/>
+              </a:rPr>
+            </a:br>
+            <a:endParaRPr sz="2500" b="0" dirty="0">
+              <a:latin typeface="+mj-lt"/>
+              <a:cs typeface="Lucida Sans"/>
+            </a:endParaRPr>
+          </a:p>
+        </p:txBody>
+      </p:sp>
       <p:pic>
         <p:nvPicPr>
           <p:cNvPr id="83" name="Gráfico 82">
             <a:extLst>
               <a:ext uri="{FF2B5EF4-FFF2-40B4-BE49-F238E27FC236}">
-                <a16:creationId xmlns:a16="http://schemas.microsoft.com/office/drawing/2014/main" id="{1B844145-16A0-AB26-42D0-ED845AA0F7A0}"/>
+                <a16:creationId xmlns:a16="http://schemas.microsoft.com/office/drawing/2014/main" id="{2442F252-C6F5-61FA-7F8C-DE7D68E315D5}"/>
               </a:ext>
             </a:extLst>
           </p:cNvPr>
@@ -5269,7 +6276,7 @@
           <p:cNvPr id="84" name="Marcador de número de diapositiva 83">
             <a:extLst>
               <a:ext uri="{FF2B5EF4-FFF2-40B4-BE49-F238E27FC236}">
-                <a16:creationId xmlns:a16="http://schemas.microsoft.com/office/drawing/2014/main" id="{26A449DB-5ED0-510B-C0EA-6986DCBC89BE}"/>
+                <a16:creationId xmlns:a16="http://schemas.microsoft.com/office/drawing/2014/main" id="{30031CBF-ED2A-ECE2-C5DB-2848D0F06083}"/>
               </a:ext>
             </a:extLst>
           </p:cNvPr>
@@ -5280,21 +6287,16 @@
             <p:ph type="sldNum" sz="quarter" idx="7"/>
           </p:nvPr>
         </p:nvSpPr>
-        <p:spPr>
-          <a:xfrm>
-            <a:off x="9311640" y="6377940"/>
-            <a:ext cx="2804160" cy="276999"/>
-          </a:xfrm>
-        </p:spPr>
+        <p:spPr/>
         <p:txBody>
           <a:bodyPr/>
           <a:lstStyle/>
           <a:p>
             <a:fld id="{B6F15528-21DE-4FAA-801E-634DDDAF4B2B}" type="slidenum">
-              <a:rPr lang="es-ES" u="sng" smtClean="0"/>
+              <a:rPr lang="es-ES" smtClean="0"/>
               <a:t>4</a:t>
             </a:fld>
-            <a:endParaRPr lang="es-ES" u="sng" dirty="0"/>
+            <a:endParaRPr lang="es-ES"/>
           </a:p>
         </p:txBody>
       </p:sp>
@@ -5303,7 +6305,7 @@
           <p:cNvPr id="4" name="Marcador de texto 2">
             <a:extLst>
               <a:ext uri="{FF2B5EF4-FFF2-40B4-BE49-F238E27FC236}">
-                <a16:creationId xmlns:a16="http://schemas.microsoft.com/office/drawing/2014/main" id="{4D519C49-6C56-2617-D5D9-34E3A440F2A8}"/>
+                <a16:creationId xmlns:a16="http://schemas.microsoft.com/office/drawing/2014/main" id="{BF0E50B8-A1DE-00D5-86B4-1DAAA9C53491}"/>
               </a:ext>
             </a:extLst>
           </p:cNvPr>
@@ -5314,7 +6316,7 @@
         </p:nvSpPr>
         <p:spPr>
           <a:xfrm>
-            <a:off x="608012" y="1295400"/>
+            <a:off x="-228600" y="91194"/>
             <a:ext cx="11048999" cy="4958137"/>
           </a:xfrm>
           <a:prstGeom prst="rect">
@@ -5391,10 +6393,15 @@
             </a:lvl9pPr>
           </a:lstStyle>
           <a:p>
-            <a:r>
-              <a:rPr lang="en-US" sz="2000" dirty="0"/>
-              <a:t> </a:t>
-            </a:r>
+            <a:pPr lvl="1"/>
+            <a:r>
+              <a:rPr lang="en-US" sz="2000" b="1" dirty="0"/>
+              <a:t>1. Balanced configuration</a:t>
+            </a:r>
+          </a:p>
+          <a:p>
+            <a:pPr lvl="1"/>
+            <a:endParaRPr lang="en-US" sz="2000" dirty="0"/>
           </a:p>
           <a:p>
             <a:pPr algn="just"/>
@@ -5426,7 +6433,7 @@
           <p:cNvPr id="5" name="Marcador de pie de página 2">
             <a:extLst>
               <a:ext uri="{FF2B5EF4-FFF2-40B4-BE49-F238E27FC236}">
-                <a16:creationId xmlns:a16="http://schemas.microsoft.com/office/drawing/2014/main" id="{9D42CE27-BDDD-AAE2-C559-4ED67D8C843B}"/>
+                <a16:creationId xmlns:a16="http://schemas.microsoft.com/office/drawing/2014/main" id="{5DC359C2-A995-EC96-0A50-96BF033493E4}"/>
               </a:ext>
             </a:extLst>
           </p:cNvPr>
@@ -5462,10 +6469,10 @@
       </p:sp>
       <p:pic>
         <p:nvPicPr>
-          <p:cNvPr id="6" name="Imagen 5" descr="Gráfico, Gráfico de líneas&#10;&#10;El contenido generado por IA puede ser incorrecto.">
+          <p:cNvPr id="3" name="Imagen 2" descr="Gráfico, Gráfico de líneas&#10;&#10;El contenido generado por IA puede ser incorrecto.">
             <a:extLst>
               <a:ext uri="{FF2B5EF4-FFF2-40B4-BE49-F238E27FC236}">
-                <a16:creationId xmlns:a16="http://schemas.microsoft.com/office/drawing/2014/main" id="{F2F96476-DC78-718E-FA71-1F358D7444D7}"/>
+                <a16:creationId xmlns:a16="http://schemas.microsoft.com/office/drawing/2014/main" id="{6038F429-580A-FE69-29AC-F7BDB08F4906}"/>
               </a:ext>
             </a:extLst>
           </p:cNvPr>
@@ -5482,14 +6489,2034 @@
         </p:blipFill>
         <p:spPr>
           <a:xfrm>
-            <a:off x="228600" y="381000"/>
-            <a:ext cx="3649907" cy="2928938"/>
+            <a:off x="251166" y="549074"/>
+            <a:ext cx="3767138" cy="3023012"/>
           </a:xfrm>
           <a:prstGeom prst="rect">
             <a:avLst/>
           </a:prstGeom>
         </p:spPr>
       </p:pic>
+      <p:sp>
+        <p:nvSpPr>
+          <p:cNvPr id="6" name="CuadroTexto 5">
+            <a:extLst>
+              <a:ext uri="{FF2B5EF4-FFF2-40B4-BE49-F238E27FC236}">
+                <a16:creationId xmlns:a16="http://schemas.microsoft.com/office/drawing/2014/main" id="{016BC889-883D-8F13-77E7-709EC6159639}"/>
+              </a:ext>
+            </a:extLst>
+          </p:cNvPr>
+          <p:cNvSpPr txBox="1"/>
+          <p:nvPr/>
+        </p:nvSpPr>
+        <p:spPr>
+          <a:xfrm>
+            <a:off x="491990" y="3739189"/>
+            <a:ext cx="11208020" cy="2308324"/>
+          </a:xfrm>
+          <a:prstGeom prst="rect">
+            <a:avLst/>
+          </a:prstGeom>
+          <a:noFill/>
+        </p:spPr>
+        <p:txBody>
+          <a:bodyPr wrap="square" rtlCol="0">
+            <a:spAutoFit/>
+          </a:bodyPr>
+          <a:lstStyle/>
+          <a:p>
+            <a:pPr algn="just"/>
+            <a:r>
+              <a:rPr lang="es-ES" sz="1600" dirty="0"/>
+              <a:t>As </a:t>
+            </a:r>
+            <a:r>
+              <a:rPr lang="es-ES" sz="1600" dirty="0" err="1"/>
+              <a:t>we</a:t>
+            </a:r>
+            <a:r>
+              <a:rPr lang="es-ES" sz="1600" dirty="0"/>
+              <a:t> can observe in </a:t>
+            </a:r>
+            <a:r>
+              <a:rPr lang="es-ES" sz="1600" dirty="0" err="1"/>
+              <a:t>the</a:t>
+            </a:r>
+            <a:r>
+              <a:rPr lang="es-ES" sz="1600" dirty="0"/>
+              <a:t> </a:t>
+            </a:r>
+            <a:r>
+              <a:rPr lang="es-ES" sz="1600" dirty="0" err="1"/>
+              <a:t>first</a:t>
+            </a:r>
+            <a:r>
+              <a:rPr lang="es-ES" sz="1600" dirty="0"/>
+              <a:t> </a:t>
+            </a:r>
+            <a:r>
+              <a:rPr lang="es-ES" sz="1600" dirty="0" err="1"/>
+              <a:t>plot</a:t>
+            </a:r>
+            <a:r>
+              <a:rPr lang="es-ES" sz="1600" dirty="0"/>
+              <a:t>, </a:t>
+            </a:r>
+            <a:r>
+              <a:rPr lang="es-ES" sz="1600" dirty="0" err="1"/>
+              <a:t>the</a:t>
+            </a:r>
+            <a:r>
+              <a:rPr lang="es-ES" sz="1600" dirty="0"/>
+              <a:t> transfer </a:t>
+            </a:r>
+            <a:r>
+              <a:rPr lang="es-ES" sz="1600" dirty="0" err="1"/>
+              <a:t>function</a:t>
+            </a:r>
+            <a:r>
+              <a:rPr lang="es-ES" sz="1600" dirty="0"/>
+              <a:t> </a:t>
+            </a:r>
+            <a:r>
+              <a:rPr lang="es-ES" sz="1600" dirty="0" err="1"/>
+              <a:t>of</a:t>
+            </a:r>
+            <a:r>
+              <a:rPr lang="es-ES" sz="1600" dirty="0"/>
+              <a:t> a </a:t>
+            </a:r>
+            <a:r>
+              <a:rPr lang="es-ES" sz="1600" dirty="0" err="1"/>
+              <a:t>balanced</a:t>
+            </a:r>
+            <a:r>
+              <a:rPr lang="es-ES" sz="1600" dirty="0"/>
+              <a:t> MZI is flat and </a:t>
+            </a:r>
+            <a:r>
+              <a:rPr lang="es-ES" sz="1600" dirty="0" err="1"/>
+              <a:t>does</a:t>
+            </a:r>
+            <a:r>
+              <a:rPr lang="es-ES" sz="1600" dirty="0"/>
+              <a:t> </a:t>
+            </a:r>
+            <a:r>
+              <a:rPr lang="es-ES" sz="1600" dirty="0" err="1"/>
+              <a:t>not</a:t>
+            </a:r>
+            <a:r>
+              <a:rPr lang="es-ES" sz="1600" dirty="0"/>
+              <a:t> show </a:t>
+            </a:r>
+            <a:r>
+              <a:rPr lang="es-ES" sz="1600" dirty="0" err="1"/>
+              <a:t>any</a:t>
+            </a:r>
+            <a:r>
+              <a:rPr lang="es-ES" sz="1600" dirty="0"/>
+              <a:t> </a:t>
+            </a:r>
+            <a:r>
+              <a:rPr lang="es-ES" sz="1600" dirty="0" err="1"/>
+              <a:t>spectral</a:t>
+            </a:r>
+            <a:r>
+              <a:rPr lang="es-ES" sz="1600" dirty="0"/>
+              <a:t> </a:t>
+            </a:r>
+            <a:r>
+              <a:rPr lang="es-ES" sz="1600" dirty="0" err="1"/>
+              <a:t>periodicity</a:t>
+            </a:r>
+            <a:r>
+              <a:rPr lang="es-ES" sz="1600" dirty="0"/>
+              <a:t> </a:t>
+            </a:r>
+            <a:r>
+              <a:rPr lang="es-ES" sz="1600" dirty="0" err="1"/>
+              <a:t>because</a:t>
+            </a:r>
+            <a:r>
+              <a:rPr lang="es-ES" sz="1600" dirty="0"/>
+              <a:t> </a:t>
+            </a:r>
+            <a:r>
+              <a:rPr lang="es-ES" sz="1600" dirty="0" err="1"/>
+              <a:t>there</a:t>
+            </a:r>
+            <a:r>
+              <a:rPr lang="es-ES" sz="1600" dirty="0"/>
+              <a:t> is no </a:t>
+            </a:r>
+            <a:r>
+              <a:rPr lang="es-ES" sz="1600" dirty="0" err="1"/>
+              <a:t>wavelength-dependent</a:t>
+            </a:r>
+            <a:r>
+              <a:rPr lang="es-ES" sz="1600" dirty="0"/>
+              <a:t> </a:t>
+            </a:r>
+            <a:r>
+              <a:rPr lang="es-ES" sz="1600" dirty="0" err="1"/>
+              <a:t>phase</a:t>
+            </a:r>
+            <a:r>
+              <a:rPr lang="es-ES" sz="1600" dirty="0"/>
+              <a:t> </a:t>
+            </a:r>
+            <a:r>
+              <a:rPr lang="es-ES" sz="1600" dirty="0" err="1"/>
+              <a:t>difference</a:t>
+            </a:r>
+            <a:r>
+              <a:rPr lang="es-ES" sz="1600" dirty="0"/>
+              <a:t> </a:t>
+            </a:r>
+            <a:r>
+              <a:rPr lang="es-ES" sz="1600" dirty="0" err="1"/>
+              <a:t>between</a:t>
+            </a:r>
+            <a:r>
+              <a:rPr lang="es-ES" sz="1600" dirty="0"/>
+              <a:t> </a:t>
+            </a:r>
+            <a:r>
+              <a:rPr lang="es-ES" sz="1600" dirty="0" err="1"/>
+              <a:t>arms</a:t>
+            </a:r>
+            <a:r>
+              <a:rPr lang="es-ES" sz="1600" dirty="0"/>
+              <a:t>. </a:t>
+            </a:r>
+            <a:r>
+              <a:rPr lang="es-ES" sz="1600" dirty="0" err="1"/>
+              <a:t>The</a:t>
+            </a:r>
+            <a:r>
+              <a:rPr lang="es-ES" sz="1600" dirty="0"/>
+              <a:t> </a:t>
+            </a:r>
+            <a:r>
+              <a:rPr lang="es-ES" sz="1600" dirty="0" err="1"/>
+              <a:t>unity</a:t>
+            </a:r>
+            <a:r>
+              <a:rPr lang="es-ES" sz="1600" dirty="0"/>
+              <a:t> </a:t>
+            </a:r>
+            <a:r>
+              <a:rPr lang="es-ES" sz="1600" dirty="0" err="1"/>
+              <a:t>level</a:t>
+            </a:r>
+            <a:r>
+              <a:rPr lang="es-ES" sz="1600" dirty="0"/>
+              <a:t> in H21 and </a:t>
+            </a:r>
+            <a:r>
+              <a:rPr lang="es-ES" sz="1600" dirty="0" err="1"/>
+              <a:t>the</a:t>
+            </a:r>
+            <a:r>
+              <a:rPr lang="es-ES" sz="1600" dirty="0"/>
+              <a:t> </a:t>
+            </a:r>
+            <a:r>
+              <a:rPr lang="es-ES" sz="1600" dirty="0" err="1"/>
+              <a:t>near-zero</a:t>
+            </a:r>
+            <a:r>
+              <a:rPr lang="es-ES" sz="1600" dirty="0"/>
+              <a:t> </a:t>
+            </a:r>
+            <a:r>
+              <a:rPr lang="es-ES" sz="1600" dirty="0" err="1"/>
+              <a:t>level</a:t>
+            </a:r>
+            <a:r>
+              <a:rPr lang="es-ES" sz="1600" dirty="0"/>
+              <a:t> in H22 </a:t>
+            </a:r>
+            <a:r>
+              <a:rPr lang="es-ES" sz="1600" dirty="0" err="1"/>
+              <a:t>reflect</a:t>
+            </a:r>
+            <a:r>
+              <a:rPr lang="es-ES" sz="1600" dirty="0"/>
+              <a:t> ideal constructive and destructive </a:t>
+            </a:r>
+            <a:r>
+              <a:rPr lang="es-ES" sz="1600" dirty="0" err="1"/>
+              <a:t>interference</a:t>
+            </a:r>
+            <a:r>
+              <a:rPr lang="es-ES" sz="1600" dirty="0"/>
+              <a:t>. </a:t>
+            </a:r>
+          </a:p>
+          <a:p>
+            <a:pPr algn="just"/>
+            <a:endParaRPr lang="es-ES" sz="1600" dirty="0"/>
+          </a:p>
+          <a:p>
+            <a:pPr algn="just"/>
+            <a:r>
+              <a:rPr lang="es-ES" sz="1600" dirty="0" err="1"/>
+              <a:t>If</a:t>
+            </a:r>
+            <a:r>
+              <a:rPr lang="es-ES" sz="1600" dirty="0"/>
+              <a:t> </a:t>
+            </a:r>
+            <a:r>
+              <a:rPr lang="es-ES" sz="1600" dirty="0" err="1"/>
+              <a:t>the</a:t>
+            </a:r>
+            <a:r>
+              <a:rPr lang="es-ES" sz="1600" dirty="0"/>
+              <a:t> </a:t>
+            </a:r>
+            <a:r>
+              <a:rPr lang="es-ES" sz="1600" dirty="0" err="1"/>
+              <a:t>coupling</a:t>
+            </a:r>
+            <a:r>
+              <a:rPr lang="es-ES" sz="1600" dirty="0"/>
+              <a:t> ratio </a:t>
+            </a:r>
+            <a:r>
+              <a:rPr lang="es-ES" sz="1600" dirty="0" err="1"/>
+              <a:t>deviates</a:t>
+            </a:r>
+            <a:r>
+              <a:rPr lang="es-ES" sz="1600" dirty="0"/>
+              <a:t> </a:t>
+            </a:r>
+            <a:r>
+              <a:rPr lang="es-ES" sz="1600" dirty="0" err="1"/>
+              <a:t>from</a:t>
+            </a:r>
+            <a:r>
+              <a:rPr lang="es-ES" sz="1600" dirty="0"/>
+              <a:t> a 50:50 </a:t>
+            </a:r>
+            <a:r>
+              <a:rPr lang="es-ES" sz="1600" dirty="0" err="1"/>
+              <a:t>split</a:t>
+            </a:r>
+            <a:r>
+              <a:rPr lang="es-ES" sz="1600" dirty="0"/>
+              <a:t>, </a:t>
+            </a:r>
+            <a:r>
+              <a:rPr lang="es-ES" sz="1600" dirty="0" err="1"/>
+              <a:t>the</a:t>
+            </a:r>
+            <a:r>
+              <a:rPr lang="es-ES" sz="1600" dirty="0"/>
+              <a:t> amplitudes in </a:t>
+            </a:r>
+            <a:r>
+              <a:rPr lang="es-ES" sz="1600" dirty="0" err="1"/>
+              <a:t>the</a:t>
+            </a:r>
+            <a:r>
+              <a:rPr lang="es-ES" sz="1600" dirty="0"/>
+              <a:t> </a:t>
+            </a:r>
+            <a:r>
+              <a:rPr lang="es-ES" sz="1600" dirty="0" err="1"/>
+              <a:t>two</a:t>
+            </a:r>
+            <a:r>
+              <a:rPr lang="es-ES" sz="1600" dirty="0"/>
+              <a:t> </a:t>
+            </a:r>
+            <a:r>
+              <a:rPr lang="es-ES" sz="1600" dirty="0" err="1"/>
+              <a:t>paths</a:t>
+            </a:r>
+            <a:r>
+              <a:rPr lang="es-ES" sz="1600" dirty="0"/>
+              <a:t> </a:t>
+            </a:r>
+            <a:r>
+              <a:rPr lang="es-ES" sz="1600" dirty="0" err="1"/>
+              <a:t>become</a:t>
+            </a:r>
+            <a:r>
+              <a:rPr lang="es-ES" sz="1600" dirty="0"/>
+              <a:t> </a:t>
+            </a:r>
+            <a:r>
+              <a:rPr lang="es-ES" sz="1600" dirty="0" err="1"/>
+              <a:t>unbalanced</a:t>
+            </a:r>
+            <a:r>
+              <a:rPr lang="es-ES" sz="1600" dirty="0"/>
+              <a:t>. As a </a:t>
+            </a:r>
+            <a:r>
+              <a:rPr lang="es-ES" sz="1600" dirty="0" err="1"/>
+              <a:t>result</a:t>
+            </a:r>
+            <a:r>
+              <a:rPr lang="es-ES" sz="1600" dirty="0"/>
+              <a:t>, </a:t>
+            </a:r>
+            <a:r>
+              <a:rPr lang="es-ES" sz="1600" dirty="0" err="1"/>
+              <a:t>the</a:t>
+            </a:r>
+            <a:r>
+              <a:rPr lang="es-ES" sz="1600" dirty="0"/>
+              <a:t> </a:t>
+            </a:r>
+            <a:r>
+              <a:rPr lang="es-ES" sz="1600" dirty="0" err="1"/>
+              <a:t>extinction</a:t>
+            </a:r>
+            <a:r>
+              <a:rPr lang="es-ES" sz="1600" dirty="0"/>
+              <a:t> ratio degrades as </a:t>
+            </a:r>
+            <a:r>
+              <a:rPr lang="es-ES" sz="1600" dirty="0" err="1"/>
+              <a:t>shown</a:t>
+            </a:r>
+            <a:r>
+              <a:rPr lang="es-ES" sz="1600" dirty="0"/>
+              <a:t> in </a:t>
+            </a:r>
+            <a:r>
+              <a:rPr lang="es-ES" sz="1600" dirty="0" err="1"/>
+              <a:t>the</a:t>
+            </a:r>
+            <a:r>
+              <a:rPr lang="es-ES" sz="1600" dirty="0"/>
+              <a:t> </a:t>
+            </a:r>
+            <a:r>
+              <a:rPr lang="es-ES" sz="1600" dirty="0" err="1"/>
+              <a:t>second</a:t>
+            </a:r>
+            <a:r>
+              <a:rPr lang="es-ES" sz="1600" dirty="0"/>
+              <a:t> </a:t>
+            </a:r>
+            <a:r>
+              <a:rPr lang="es-ES" sz="1600" dirty="0" err="1"/>
+              <a:t>plot</a:t>
+            </a:r>
+            <a:r>
+              <a:rPr lang="es-ES" sz="1600" dirty="0"/>
+              <a:t>: </a:t>
+            </a:r>
+            <a:r>
+              <a:rPr lang="es-ES" sz="1600" dirty="0" err="1"/>
+              <a:t>the</a:t>
+            </a:r>
+            <a:r>
+              <a:rPr lang="es-ES" sz="1600" dirty="0"/>
+              <a:t> constructive </a:t>
+            </a:r>
+            <a:r>
+              <a:rPr lang="es-ES" sz="1600" dirty="0" err="1"/>
+              <a:t>port</a:t>
+            </a:r>
+            <a:r>
+              <a:rPr lang="es-ES" sz="1600" dirty="0"/>
+              <a:t> </a:t>
+            </a:r>
+            <a:r>
+              <a:rPr lang="es-ES" sz="1600" dirty="0" err="1"/>
+              <a:t>drops</a:t>
+            </a:r>
+            <a:r>
+              <a:rPr lang="es-ES" sz="1600" dirty="0"/>
+              <a:t> </a:t>
+            </a:r>
+            <a:r>
+              <a:rPr lang="es-ES" sz="1600" dirty="0" err="1"/>
+              <a:t>below</a:t>
+            </a:r>
+            <a:r>
+              <a:rPr lang="es-ES" sz="1600" dirty="0"/>
+              <a:t> 1 and </a:t>
+            </a:r>
+            <a:r>
+              <a:rPr lang="es-ES" sz="1600" dirty="0" err="1"/>
+              <a:t>the</a:t>
+            </a:r>
+            <a:r>
+              <a:rPr lang="es-ES" sz="1600" dirty="0"/>
+              <a:t> destructive </a:t>
+            </a:r>
+            <a:r>
+              <a:rPr lang="es-ES" sz="1600" dirty="0" err="1"/>
+              <a:t>plot</a:t>
+            </a:r>
+            <a:r>
+              <a:rPr lang="es-ES" sz="1600" dirty="0"/>
+              <a:t> </a:t>
+            </a:r>
+            <a:r>
+              <a:rPr lang="es-ES" sz="1600" dirty="0" err="1"/>
+              <a:t>rises</a:t>
+            </a:r>
+            <a:r>
+              <a:rPr lang="es-ES" sz="1600" dirty="0"/>
+              <a:t> </a:t>
+            </a:r>
+            <a:r>
+              <a:rPr lang="es-ES" sz="1600" dirty="0" err="1"/>
+              <a:t>below</a:t>
+            </a:r>
+            <a:r>
+              <a:rPr lang="es-ES" sz="1600" dirty="0"/>
+              <a:t> </a:t>
+            </a:r>
+            <a:r>
+              <a:rPr lang="es-ES" sz="1600" dirty="0" err="1"/>
+              <a:t>zero</a:t>
+            </a:r>
+            <a:r>
+              <a:rPr lang="es-ES" sz="1600" dirty="0"/>
+              <a:t>.  </a:t>
+            </a:r>
+          </a:p>
+          <a:p>
+            <a:pPr algn="just"/>
+            <a:endParaRPr lang="es-ES" sz="1600" dirty="0"/>
+          </a:p>
+          <a:p>
+            <a:pPr algn="just"/>
+            <a:r>
+              <a:rPr lang="es-ES" sz="1600" dirty="0"/>
+              <a:t>As </a:t>
+            </a:r>
+            <a:r>
+              <a:rPr lang="es-ES" sz="1600" dirty="0" err="1"/>
+              <a:t>shown</a:t>
+            </a:r>
+            <a:r>
+              <a:rPr lang="es-ES" sz="1600" dirty="0"/>
+              <a:t> in </a:t>
+            </a:r>
+            <a:r>
+              <a:rPr lang="es-ES" sz="1600" dirty="0" err="1"/>
+              <a:t>the</a:t>
+            </a:r>
+            <a:r>
+              <a:rPr lang="es-ES" sz="1600" dirty="0"/>
+              <a:t> </a:t>
+            </a:r>
+            <a:r>
+              <a:rPr lang="es-ES" sz="1600" dirty="0" err="1"/>
+              <a:t>third</a:t>
+            </a:r>
+            <a:r>
+              <a:rPr lang="es-ES" sz="1600" dirty="0"/>
+              <a:t> </a:t>
+            </a:r>
+            <a:r>
+              <a:rPr lang="es-ES" sz="1600" dirty="0" err="1"/>
+              <a:t>plot</a:t>
+            </a:r>
+            <a:r>
+              <a:rPr lang="es-ES" sz="1600" dirty="0"/>
+              <a:t>, </a:t>
+            </a:r>
+            <a:r>
+              <a:rPr lang="es-ES" sz="1600" dirty="0" err="1"/>
+              <a:t>introducing</a:t>
+            </a:r>
+            <a:r>
+              <a:rPr lang="es-ES" sz="1600" dirty="0"/>
+              <a:t> </a:t>
+            </a:r>
+            <a:r>
+              <a:rPr lang="es-ES" sz="1600" dirty="0" err="1"/>
+              <a:t>excess</a:t>
+            </a:r>
+            <a:r>
+              <a:rPr lang="es-ES" sz="1600" dirty="0"/>
+              <a:t> </a:t>
+            </a:r>
+            <a:r>
+              <a:rPr lang="es-ES" sz="1600" dirty="0" err="1"/>
+              <a:t>loss</a:t>
+            </a:r>
+            <a:r>
+              <a:rPr lang="es-ES" sz="1600" dirty="0"/>
+              <a:t> reduces </a:t>
+            </a:r>
+            <a:r>
+              <a:rPr lang="es-ES" sz="1600" dirty="0" err="1"/>
+              <a:t>the</a:t>
+            </a:r>
+            <a:r>
+              <a:rPr lang="es-ES" sz="1600" dirty="0"/>
+              <a:t> absolute </a:t>
+            </a:r>
+            <a:r>
+              <a:rPr lang="es-ES" sz="1600" dirty="0" err="1"/>
+              <a:t>amplitude</a:t>
+            </a:r>
+            <a:r>
+              <a:rPr lang="es-ES" sz="1600" dirty="0"/>
+              <a:t>. </a:t>
+            </a:r>
+            <a:r>
+              <a:rPr lang="es-ES" sz="1600" dirty="0" err="1"/>
+              <a:t>We</a:t>
+            </a:r>
+            <a:r>
+              <a:rPr lang="es-ES" sz="1600" dirty="0"/>
+              <a:t> observe a </a:t>
+            </a:r>
+            <a:r>
+              <a:rPr lang="es-ES" sz="1600" dirty="0" err="1"/>
+              <a:t>drop</a:t>
+            </a:r>
+            <a:r>
+              <a:rPr lang="es-ES" sz="1600" dirty="0"/>
+              <a:t> </a:t>
+            </a:r>
+            <a:r>
+              <a:rPr lang="es-ES" sz="1600" dirty="0" err="1"/>
+              <a:t>to</a:t>
+            </a:r>
+            <a:r>
+              <a:rPr lang="es-ES" sz="1600" dirty="0"/>
+              <a:t> 0.7 in </a:t>
+            </a:r>
+            <a:r>
+              <a:rPr lang="es-ES" sz="1600" dirty="0" err="1"/>
+              <a:t>the</a:t>
+            </a:r>
+            <a:r>
+              <a:rPr lang="es-ES" sz="1600" dirty="0"/>
+              <a:t> constructive </a:t>
+            </a:r>
+            <a:r>
+              <a:rPr lang="es-ES" sz="1600" dirty="0" err="1"/>
+              <a:t>port</a:t>
+            </a:r>
+            <a:r>
+              <a:rPr lang="es-ES" sz="1600" dirty="0"/>
+              <a:t> </a:t>
+            </a:r>
+            <a:r>
+              <a:rPr lang="es-ES" sz="1600" dirty="0" err="1"/>
+              <a:t>while</a:t>
+            </a:r>
+            <a:r>
+              <a:rPr lang="es-ES" sz="1600" dirty="0"/>
+              <a:t> </a:t>
+            </a:r>
+            <a:r>
+              <a:rPr lang="es-ES" sz="1600" dirty="0" err="1"/>
+              <a:t>the</a:t>
+            </a:r>
+            <a:r>
+              <a:rPr lang="es-ES" sz="1600" dirty="0"/>
+              <a:t> destructive </a:t>
+            </a:r>
+            <a:r>
+              <a:rPr lang="es-ES" sz="1600" dirty="0" err="1"/>
+              <a:t>port</a:t>
+            </a:r>
+            <a:r>
+              <a:rPr lang="es-ES" sz="1600" dirty="0"/>
+              <a:t> </a:t>
+            </a:r>
+            <a:r>
+              <a:rPr lang="es-ES" sz="1600" dirty="0" err="1"/>
+              <a:t>remains</a:t>
+            </a:r>
+            <a:r>
+              <a:rPr lang="es-ES" sz="1600" dirty="0"/>
+              <a:t> at 0. </a:t>
+            </a:r>
+          </a:p>
+        </p:txBody>
+      </p:sp>
+      <p:pic>
+        <p:nvPicPr>
+          <p:cNvPr id="8" name="Imagen 7">
+            <a:extLst>
+              <a:ext uri="{FF2B5EF4-FFF2-40B4-BE49-F238E27FC236}">
+                <a16:creationId xmlns:a16="http://schemas.microsoft.com/office/drawing/2014/main" id="{C74D49BB-A4AE-CE17-1D25-4686670D8CD1}"/>
+              </a:ext>
+            </a:extLst>
+          </p:cNvPr>
+          <p:cNvPicPr>
+            <a:picLocks noChangeAspect="1"/>
+          </p:cNvPicPr>
+          <p:nvPr/>
+        </p:nvPicPr>
+        <p:blipFill>
+          <a:blip r:embed="rId6"/>
+          <a:stretch>
+            <a:fillRect/>
+          </a:stretch>
+        </p:blipFill>
+        <p:spPr>
+          <a:xfrm>
+            <a:off x="4191860" y="561905"/>
+            <a:ext cx="3767138" cy="3023012"/>
+          </a:xfrm>
+          <a:prstGeom prst="rect">
+            <a:avLst/>
+          </a:prstGeom>
+        </p:spPr>
+      </p:pic>
+      <p:pic>
+        <p:nvPicPr>
+          <p:cNvPr id="10" name="Imagen 9">
+            <a:extLst>
+              <a:ext uri="{FF2B5EF4-FFF2-40B4-BE49-F238E27FC236}">
+                <a16:creationId xmlns:a16="http://schemas.microsoft.com/office/drawing/2014/main" id="{47962490-EFEF-F038-9F99-970F1C13DA86}"/>
+              </a:ext>
+            </a:extLst>
+          </p:cNvPr>
+          <p:cNvPicPr>
+            <a:picLocks noChangeAspect="1"/>
+          </p:cNvPicPr>
+          <p:nvPr/>
+        </p:nvPicPr>
+        <p:blipFill>
+          <a:blip r:embed="rId7"/>
+          <a:stretch>
+            <a:fillRect/>
+          </a:stretch>
+        </p:blipFill>
+        <p:spPr>
+          <a:xfrm>
+            <a:off x="8120062" y="602729"/>
+            <a:ext cx="3767138" cy="2950168"/>
+          </a:xfrm>
+          <a:prstGeom prst="rect">
+            <a:avLst/>
+          </a:prstGeom>
+        </p:spPr>
+      </p:pic>
+    </p:spTree>
+    <p:extLst>
+      <p:ext uri="{BB962C8B-B14F-4D97-AF65-F5344CB8AC3E}">
+        <p14:creationId xmlns:p14="http://schemas.microsoft.com/office/powerpoint/2010/main" val="1881651114"/>
+      </p:ext>
+    </p:extLst>
+  </p:cSld>
+  <p:clrMapOvr>
+    <a:masterClrMapping/>
+  </p:clrMapOvr>
+</p:sld>
+</file>
+
+<file path=ppt/slides/slide5.xml><?xml version="1.0" encoding="utf-8"?>
+<p:sld xmlns:a="http://schemas.openxmlformats.org/drawingml/2006/main" xmlns:r="http://schemas.openxmlformats.org/officeDocument/2006/relationships" xmlns:p="http://schemas.openxmlformats.org/presentationml/2006/main">
+  <p:cSld>
+    <p:spTree>
+      <p:nvGrpSpPr>
+        <p:cNvPr id="1" name="">
+          <a:extLst>
+            <a:ext uri="{FF2B5EF4-FFF2-40B4-BE49-F238E27FC236}">
+              <a16:creationId xmlns:a16="http://schemas.microsoft.com/office/drawing/2014/main" id="{86670351-967E-459A-1025-1FD143DA2418}"/>
+            </a:ext>
+          </a:extLst>
+        </p:cNvPr>
+        <p:cNvGrpSpPr/>
+        <p:nvPr/>
+      </p:nvGrpSpPr>
+      <p:grpSpPr>
+        <a:xfrm>
+          <a:off x="0" y="0"/>
+          <a:ext cx="0" cy="0"/>
+          <a:chOff x="0" y="0"/>
+          <a:chExt cx="0" cy="0"/>
+        </a:xfrm>
+      </p:grpSpPr>
+      <p:sp>
+        <p:nvSpPr>
+          <p:cNvPr id="16" name="object 16">
+            <a:extLst>
+              <a:ext uri="{FF2B5EF4-FFF2-40B4-BE49-F238E27FC236}">
+                <a16:creationId xmlns:a16="http://schemas.microsoft.com/office/drawing/2014/main" id="{32A98BF5-11A0-68AC-1C2D-558A0E4FC5B7}"/>
+              </a:ext>
+            </a:extLst>
+          </p:cNvPr>
+          <p:cNvSpPr txBox="1">
+            <a:spLocks noGrp="1"/>
+          </p:cNvSpPr>
+          <p:nvPr>
+            <p:ph type="title"/>
+          </p:nvPr>
+        </p:nvSpPr>
+        <p:spPr>
+          <a:xfrm>
+            <a:off x="304800" y="157942"/>
+            <a:ext cx="10994410" cy="782265"/>
+          </a:xfrm>
+          <a:prstGeom prst="rect">
+            <a:avLst/>
+          </a:prstGeom>
+        </p:spPr>
+        <p:txBody>
+          <a:bodyPr vert="horz" wrap="square" lIns="0" tIns="12700" rIns="0" bIns="0" rtlCol="0">
+            <a:spAutoFit/>
+          </a:bodyPr>
+          <a:lstStyle/>
+          <a:p>
+            <a:pPr marL="12700">
+              <a:lnSpc>
+                <a:spcPct val="100000"/>
+              </a:lnSpc>
+              <a:spcBef>
+                <a:spcPts val="100"/>
+              </a:spcBef>
+            </a:pPr>
+            <a:br>
+              <a:rPr lang="es-ES" sz="2500" spc="-5" dirty="0">
+                <a:latin typeface="+mj-lt"/>
+                <a:cs typeface="Lucida Sans"/>
+              </a:rPr>
+            </a:br>
+            <a:endParaRPr sz="2500" b="0" dirty="0">
+              <a:latin typeface="+mj-lt"/>
+              <a:cs typeface="Lucida Sans"/>
+            </a:endParaRPr>
+          </a:p>
+        </p:txBody>
+      </p:sp>
+      <p:pic>
+        <p:nvPicPr>
+          <p:cNvPr id="83" name="Gráfico 82">
+            <a:extLst>
+              <a:ext uri="{FF2B5EF4-FFF2-40B4-BE49-F238E27FC236}">
+                <a16:creationId xmlns:a16="http://schemas.microsoft.com/office/drawing/2014/main" id="{EB90B929-2E2F-4284-4E7F-B0EADDED4695}"/>
+              </a:ext>
+            </a:extLst>
+          </p:cNvPr>
+          <p:cNvPicPr>
+            <a:picLocks noChangeAspect="1"/>
+          </p:cNvPicPr>
+          <p:nvPr/>
+        </p:nvPicPr>
+        <p:blipFill>
+          <a:blip r:embed="rId3">
+            <a:extLst>
+              <a:ext uri="{96DAC541-7B7A-43D3-8B79-37D633B846F1}">
+                <asvg:svgBlip xmlns:asvg="http://schemas.microsoft.com/office/drawing/2016/SVG/main" r:embed="rId4"/>
+              </a:ext>
+            </a:extLst>
+          </a:blip>
+          <a:stretch>
+            <a:fillRect/>
+          </a:stretch>
+        </p:blipFill>
+        <p:spPr>
+          <a:xfrm>
+            <a:off x="5045006" y="6356057"/>
+            <a:ext cx="6409575" cy="363174"/>
+          </a:xfrm>
+          <a:prstGeom prst="rect">
+            <a:avLst/>
+          </a:prstGeom>
+        </p:spPr>
+      </p:pic>
+      <p:sp>
+        <p:nvSpPr>
+          <p:cNvPr id="84" name="Marcador de número de diapositiva 83">
+            <a:extLst>
+              <a:ext uri="{FF2B5EF4-FFF2-40B4-BE49-F238E27FC236}">
+                <a16:creationId xmlns:a16="http://schemas.microsoft.com/office/drawing/2014/main" id="{B8C73342-CA7F-93AC-A089-7DAC033BAD8B}"/>
+              </a:ext>
+            </a:extLst>
+          </p:cNvPr>
+          <p:cNvSpPr>
+            <a:spLocks noGrp="1"/>
+          </p:cNvSpPr>
+          <p:nvPr>
+            <p:ph type="sldNum" sz="quarter" idx="7"/>
+          </p:nvPr>
+        </p:nvSpPr>
+        <p:spPr/>
+        <p:txBody>
+          <a:bodyPr/>
+          <a:lstStyle/>
+          <a:p>
+            <a:fld id="{B6F15528-21DE-4FAA-801E-634DDDAF4B2B}" type="slidenum">
+              <a:rPr lang="es-ES" smtClean="0"/>
+              <a:t>5</a:t>
+            </a:fld>
+            <a:endParaRPr lang="es-ES"/>
+          </a:p>
+        </p:txBody>
+      </p:sp>
+      <p:sp>
+        <p:nvSpPr>
+          <p:cNvPr id="4" name="Marcador de texto 2">
+            <a:extLst>
+              <a:ext uri="{FF2B5EF4-FFF2-40B4-BE49-F238E27FC236}">
+                <a16:creationId xmlns:a16="http://schemas.microsoft.com/office/drawing/2014/main" id="{3CE03C73-2F55-1E5F-B9B4-6E5B2E3CBCF4}"/>
+              </a:ext>
+            </a:extLst>
+          </p:cNvPr>
+          <p:cNvSpPr txBox="1">
+            <a:spLocks/>
+          </p:cNvSpPr>
+          <p:nvPr/>
+        </p:nvSpPr>
+        <p:spPr>
+          <a:xfrm>
+            <a:off x="-228600" y="91194"/>
+            <a:ext cx="11048999" cy="4958137"/>
+          </a:xfrm>
+          <a:prstGeom prst="rect">
+            <a:avLst/>
+          </a:prstGeom>
+        </p:spPr>
+        <p:txBody>
+          <a:bodyPr>
+            <a:normAutofit/>
+          </a:bodyPr>
+          <a:lstStyle>
+            <a:lvl1pPr marL="0">
+              <a:defRPr>
+                <a:latin typeface="+mn-lt"/>
+                <a:ea typeface="+mn-ea"/>
+                <a:cs typeface="+mn-cs"/>
+              </a:defRPr>
+            </a:lvl1pPr>
+            <a:lvl2pPr marL="457200">
+              <a:defRPr>
+                <a:latin typeface="+mn-lt"/>
+                <a:ea typeface="+mn-ea"/>
+                <a:cs typeface="+mn-cs"/>
+              </a:defRPr>
+            </a:lvl2pPr>
+            <a:lvl3pPr marL="914400">
+              <a:defRPr>
+                <a:latin typeface="+mn-lt"/>
+                <a:ea typeface="+mn-ea"/>
+                <a:cs typeface="+mn-cs"/>
+              </a:defRPr>
+            </a:lvl3pPr>
+            <a:lvl4pPr marL="1371600">
+              <a:defRPr>
+                <a:latin typeface="+mn-lt"/>
+                <a:ea typeface="+mn-ea"/>
+                <a:cs typeface="+mn-cs"/>
+              </a:defRPr>
+            </a:lvl4pPr>
+            <a:lvl5pPr marL="1828800">
+              <a:defRPr>
+                <a:latin typeface="+mn-lt"/>
+                <a:ea typeface="+mn-ea"/>
+                <a:cs typeface="+mn-cs"/>
+              </a:defRPr>
+            </a:lvl5pPr>
+            <a:lvl6pPr marL="2286000">
+              <a:defRPr>
+                <a:latin typeface="+mn-lt"/>
+                <a:ea typeface="+mn-ea"/>
+                <a:cs typeface="+mn-cs"/>
+              </a:defRPr>
+            </a:lvl6pPr>
+            <a:lvl7pPr marL="2743200">
+              <a:defRPr>
+                <a:latin typeface="+mn-lt"/>
+                <a:ea typeface="+mn-ea"/>
+                <a:cs typeface="+mn-cs"/>
+              </a:defRPr>
+            </a:lvl7pPr>
+            <a:lvl8pPr marL="3200400">
+              <a:defRPr>
+                <a:latin typeface="+mn-lt"/>
+                <a:ea typeface="+mn-ea"/>
+                <a:cs typeface="+mn-cs"/>
+              </a:defRPr>
+            </a:lvl8pPr>
+            <a:lvl9pPr marL="3657600">
+              <a:defRPr>
+                <a:latin typeface="+mn-lt"/>
+                <a:ea typeface="+mn-ea"/>
+                <a:cs typeface="+mn-cs"/>
+              </a:defRPr>
+            </a:lvl9pPr>
+          </a:lstStyle>
+          <a:p>
+            <a:pPr lvl="1"/>
+            <a:r>
+              <a:rPr lang="en-US" sz="2000" b="1" dirty="0"/>
+              <a:t>1. Unbalanced configuration: phase difference</a:t>
+            </a:r>
+          </a:p>
+          <a:p>
+            <a:pPr lvl="1"/>
+            <a:endParaRPr lang="en-US" sz="2000" dirty="0"/>
+          </a:p>
+          <a:p>
+            <a:pPr algn="just"/>
+            <a:endParaRPr lang="en-US" sz="2000" dirty="0"/>
+          </a:p>
+          <a:p>
+            <a:pPr algn="just"/>
+            <a:endParaRPr lang="en-US" sz="2000" b="1" i="1" dirty="0"/>
+          </a:p>
+          <a:p>
+            <a:pPr algn="just"/>
+            <a:endParaRPr lang="en-US" sz="2000" kern="0" dirty="0">
+              <a:solidFill>
+                <a:sysClr val="windowText" lastClr="000000"/>
+              </a:solidFill>
+            </a:endParaRPr>
+          </a:p>
+          <a:p>
+            <a:endParaRPr lang="en-US" sz="2000" kern="0" dirty="0">
+              <a:solidFill>
+                <a:sysClr val="windowText" lastClr="000000"/>
+              </a:solidFill>
+            </a:endParaRPr>
+          </a:p>
+        </p:txBody>
+      </p:sp>
+      <p:sp>
+        <p:nvSpPr>
+          <p:cNvPr id="5" name="Marcador de pie de página 2">
+            <a:extLst>
+              <a:ext uri="{FF2B5EF4-FFF2-40B4-BE49-F238E27FC236}">
+                <a16:creationId xmlns:a16="http://schemas.microsoft.com/office/drawing/2014/main" id="{BBD76B01-75FD-25FA-98C5-690AF127EEA8}"/>
+              </a:ext>
+            </a:extLst>
+          </p:cNvPr>
+          <p:cNvSpPr>
+            <a:spLocks noGrp="1"/>
+          </p:cNvSpPr>
+          <p:nvPr>
+            <p:ph type="ftr" sz="quarter" idx="5"/>
+          </p:nvPr>
+        </p:nvSpPr>
+        <p:spPr>
+          <a:xfrm>
+            <a:off x="609600" y="6457057"/>
+            <a:ext cx="2743200" cy="184666"/>
+          </a:xfrm>
+        </p:spPr>
+        <p:txBody>
+          <a:bodyPr/>
+          <a:lstStyle/>
+          <a:p>
+            <a:pPr marL="12700">
+              <a:spcBef>
+                <a:spcPts val="15"/>
+              </a:spcBef>
+            </a:pPr>
+            <a:r>
+              <a:rPr lang="es-ES" spc="-5"/>
+              <a:t>LAB 3. INTERFEROMETERS I</a:t>
+            </a:r>
+            <a:endParaRPr lang="es-ES" spc="-5" dirty="0"/>
+          </a:p>
+        </p:txBody>
+      </p:sp>
+      <p:sp>
+        <p:nvSpPr>
+          <p:cNvPr id="6" name="CuadroTexto 5">
+            <a:extLst>
+              <a:ext uri="{FF2B5EF4-FFF2-40B4-BE49-F238E27FC236}">
+                <a16:creationId xmlns:a16="http://schemas.microsoft.com/office/drawing/2014/main" id="{81E84CCF-4370-162E-AEB0-A1BACCF20000}"/>
+              </a:ext>
+            </a:extLst>
+          </p:cNvPr>
+          <p:cNvSpPr txBox="1"/>
+          <p:nvPr/>
+        </p:nvSpPr>
+        <p:spPr>
+          <a:xfrm>
+            <a:off x="491990" y="3658811"/>
+            <a:ext cx="11208020" cy="3046988"/>
+          </a:xfrm>
+          <a:prstGeom prst="rect">
+            <a:avLst/>
+          </a:prstGeom>
+          <a:noFill/>
+        </p:spPr>
+        <p:txBody>
+          <a:bodyPr wrap="square" rtlCol="0">
+            <a:spAutoFit/>
+          </a:bodyPr>
+          <a:lstStyle/>
+          <a:p>
+            <a:pPr algn="just"/>
+            <a:r>
+              <a:rPr lang="es-ES" sz="1600" dirty="0" err="1"/>
+              <a:t>The</a:t>
+            </a:r>
+            <a:r>
+              <a:rPr lang="es-ES" sz="1600" dirty="0"/>
+              <a:t> </a:t>
+            </a:r>
+            <a:r>
+              <a:rPr lang="es-ES" sz="1600" dirty="0" err="1"/>
+              <a:t>phase</a:t>
+            </a:r>
+            <a:r>
+              <a:rPr lang="es-ES" sz="1600" dirty="0"/>
+              <a:t> </a:t>
+            </a:r>
+            <a:r>
+              <a:rPr lang="es-ES" sz="1600" dirty="0" err="1"/>
+              <a:t>difference</a:t>
+            </a:r>
+            <a:r>
+              <a:rPr lang="es-ES" sz="1600" dirty="0"/>
+              <a:t> in </a:t>
+            </a:r>
+            <a:r>
+              <a:rPr lang="es-ES" sz="1600" dirty="0" err="1"/>
+              <a:t>both</a:t>
+            </a:r>
+            <a:r>
+              <a:rPr lang="es-ES" sz="1600" dirty="0"/>
+              <a:t> </a:t>
+            </a:r>
+            <a:r>
+              <a:rPr lang="es-ES" sz="1600" dirty="0" err="1"/>
+              <a:t>simulations</a:t>
+            </a:r>
+            <a:r>
+              <a:rPr lang="es-ES" sz="1600" dirty="0"/>
+              <a:t> is </a:t>
+            </a:r>
+            <a:r>
+              <a:rPr lang="es-ES" sz="1600" dirty="0" err="1"/>
+              <a:t>introduced</a:t>
+            </a:r>
+            <a:r>
+              <a:rPr lang="es-ES" sz="1600" dirty="0"/>
+              <a:t> by </a:t>
+            </a:r>
+            <a:r>
+              <a:rPr lang="es-ES" sz="1600" dirty="0" err="1"/>
+              <a:t>changing</a:t>
+            </a:r>
+            <a:r>
+              <a:rPr lang="es-ES" sz="1600" dirty="0"/>
+              <a:t> </a:t>
+            </a:r>
+            <a:r>
+              <a:rPr lang="es-ES" sz="1600" dirty="0" err="1"/>
+              <a:t>the</a:t>
+            </a:r>
+            <a:r>
+              <a:rPr lang="es-ES" sz="1600" dirty="0"/>
+              <a:t> refractive index in </a:t>
+            </a:r>
+            <a:r>
+              <a:rPr lang="es-ES" sz="1600" dirty="0" err="1"/>
+              <a:t>one</a:t>
+            </a:r>
+            <a:r>
+              <a:rPr lang="es-ES" sz="1600" dirty="0"/>
+              <a:t> </a:t>
+            </a:r>
+            <a:r>
+              <a:rPr lang="es-ES" sz="1600" dirty="0" err="1"/>
+              <a:t>of</a:t>
+            </a:r>
+            <a:r>
+              <a:rPr lang="es-ES" sz="1600" dirty="0"/>
+              <a:t> </a:t>
+            </a:r>
+            <a:r>
+              <a:rPr lang="es-ES" sz="1600" dirty="0" err="1"/>
+              <a:t>the</a:t>
+            </a:r>
+            <a:r>
+              <a:rPr lang="es-ES" sz="1600" dirty="0"/>
+              <a:t> MZI </a:t>
+            </a:r>
+            <a:r>
+              <a:rPr lang="es-ES" sz="1600" dirty="0" err="1"/>
+              <a:t>arms</a:t>
+            </a:r>
+            <a:r>
+              <a:rPr lang="es-ES" sz="1600" dirty="0"/>
+              <a:t>, which </a:t>
+            </a:r>
+            <a:r>
+              <a:rPr lang="es-ES" sz="1600" dirty="0" err="1"/>
+              <a:t>modifies</a:t>
+            </a:r>
+            <a:r>
+              <a:rPr lang="es-ES" sz="1600" dirty="0"/>
+              <a:t> </a:t>
+            </a:r>
+            <a:r>
+              <a:rPr lang="es-ES" sz="1600" dirty="0" err="1"/>
+              <a:t>the</a:t>
+            </a:r>
+            <a:r>
+              <a:rPr lang="es-ES" sz="1600" dirty="0"/>
+              <a:t> </a:t>
+            </a:r>
+            <a:r>
+              <a:rPr lang="es-ES" sz="1600" dirty="0" err="1"/>
+              <a:t>propagation</a:t>
+            </a:r>
+            <a:r>
+              <a:rPr lang="es-ES" sz="1600" dirty="0"/>
+              <a:t> </a:t>
+            </a:r>
+            <a:r>
+              <a:rPr lang="es-ES" sz="1600" dirty="0" err="1"/>
+              <a:t>constant</a:t>
+            </a:r>
+            <a:r>
+              <a:rPr lang="es-ES" sz="1600" dirty="0"/>
+              <a:t>. </a:t>
+            </a:r>
+          </a:p>
+          <a:p>
+            <a:pPr algn="just"/>
+            <a:endParaRPr lang="es-ES" sz="1600" dirty="0"/>
+          </a:p>
+          <a:p>
+            <a:pPr algn="just"/>
+            <a:r>
+              <a:rPr lang="es-ES" sz="1600" dirty="0" err="1"/>
+              <a:t>When</a:t>
+            </a:r>
+            <a:r>
+              <a:rPr lang="es-ES" sz="1600" dirty="0"/>
+              <a:t> </a:t>
+            </a:r>
+            <a:r>
+              <a:rPr lang="es-ES" sz="1600" dirty="0" err="1"/>
+              <a:t>the</a:t>
+            </a:r>
+            <a:r>
+              <a:rPr lang="es-ES" sz="1600" dirty="0"/>
+              <a:t> refractive index </a:t>
+            </a:r>
+            <a:r>
+              <a:rPr lang="es-ES" sz="1600" dirty="0" err="1"/>
+              <a:t>contrast</a:t>
+            </a:r>
+            <a:r>
+              <a:rPr lang="es-ES" sz="1600" dirty="0"/>
+              <a:t> is </a:t>
+            </a:r>
+            <a:r>
+              <a:rPr lang="es-ES" sz="1600" dirty="0" err="1"/>
+              <a:t>very</a:t>
+            </a:r>
+            <a:r>
+              <a:rPr lang="es-ES" sz="1600" dirty="0"/>
+              <a:t> </a:t>
+            </a:r>
+            <a:r>
+              <a:rPr lang="es-ES" sz="1600" dirty="0" err="1"/>
+              <a:t>small</a:t>
+            </a:r>
+            <a:r>
+              <a:rPr lang="es-ES" sz="1600" dirty="0"/>
+              <a:t>, as in </a:t>
+            </a:r>
+            <a:r>
+              <a:rPr lang="es-ES" sz="1600" dirty="0" err="1"/>
+              <a:t>the</a:t>
+            </a:r>
+            <a:r>
+              <a:rPr lang="es-ES" sz="1600" dirty="0"/>
+              <a:t> case </a:t>
+            </a:r>
+            <a:r>
+              <a:rPr lang="es-ES" sz="1600" dirty="0" err="1"/>
+              <a:t>of</a:t>
+            </a:r>
+            <a:r>
+              <a:rPr lang="es-ES" sz="1600" dirty="0"/>
+              <a:t> </a:t>
+            </a:r>
+            <a:r>
+              <a:rPr lang="es-ES" sz="1600" dirty="0" err="1"/>
+              <a:t>the</a:t>
+            </a:r>
+            <a:r>
+              <a:rPr lang="es-ES" sz="1600" dirty="0"/>
+              <a:t> </a:t>
+            </a:r>
+            <a:r>
+              <a:rPr lang="es-ES" sz="1600" dirty="0" err="1"/>
+              <a:t>first</a:t>
+            </a:r>
+            <a:r>
+              <a:rPr lang="es-ES" sz="1600" dirty="0"/>
+              <a:t> </a:t>
+            </a:r>
+            <a:r>
+              <a:rPr lang="es-ES" sz="1600" dirty="0" err="1"/>
+              <a:t>plot</a:t>
+            </a:r>
+            <a:r>
+              <a:rPr lang="es-ES" sz="1600" dirty="0"/>
+              <a:t>, </a:t>
+            </a:r>
+            <a:r>
+              <a:rPr lang="es-ES" sz="1600" dirty="0" err="1"/>
+              <a:t>the</a:t>
+            </a:r>
+            <a:r>
+              <a:rPr lang="es-ES" sz="1600" dirty="0"/>
+              <a:t> </a:t>
+            </a:r>
+            <a:r>
+              <a:rPr lang="es-ES" sz="1600" dirty="0" err="1"/>
+              <a:t>phase</a:t>
+            </a:r>
+            <a:r>
+              <a:rPr lang="es-ES" sz="1600" dirty="0"/>
+              <a:t> </a:t>
+            </a:r>
+            <a:r>
+              <a:rPr lang="es-ES" sz="1600" dirty="0" err="1"/>
+              <a:t>difference</a:t>
+            </a:r>
+            <a:r>
+              <a:rPr lang="es-ES" sz="1600" dirty="0"/>
+              <a:t> </a:t>
+            </a:r>
+            <a:r>
+              <a:rPr lang="es-ES" sz="1600" dirty="0" err="1"/>
+              <a:t>roughly</a:t>
+            </a:r>
+            <a:r>
+              <a:rPr lang="es-ES" sz="1600" dirty="0"/>
+              <a:t> </a:t>
+            </a:r>
+            <a:r>
+              <a:rPr lang="es-ES" sz="1600" dirty="0" err="1"/>
+              <a:t>changes</a:t>
+            </a:r>
+            <a:r>
+              <a:rPr lang="es-ES" sz="1600" dirty="0"/>
+              <a:t> </a:t>
+            </a:r>
+            <a:r>
+              <a:rPr lang="es-ES" sz="1600" dirty="0" err="1"/>
+              <a:t>with</a:t>
+            </a:r>
+            <a:r>
+              <a:rPr lang="es-ES" sz="1600" dirty="0"/>
+              <a:t> </a:t>
+            </a:r>
+            <a:r>
+              <a:rPr lang="es-ES" sz="1600" dirty="0" err="1"/>
+              <a:t>wavelength</a:t>
+            </a:r>
+            <a:r>
+              <a:rPr lang="es-ES" sz="1600" dirty="0"/>
+              <a:t>, and </a:t>
+            </a:r>
+            <a:r>
+              <a:rPr lang="es-ES" sz="1600" dirty="0" err="1"/>
+              <a:t>the</a:t>
+            </a:r>
+            <a:r>
+              <a:rPr lang="es-ES" sz="1600" dirty="0"/>
+              <a:t> </a:t>
+            </a:r>
+            <a:r>
+              <a:rPr lang="es-ES" sz="1600" dirty="0" err="1"/>
+              <a:t>expected</a:t>
+            </a:r>
+            <a:r>
+              <a:rPr lang="es-ES" sz="1600" dirty="0"/>
+              <a:t> sinusoidal transfer </a:t>
+            </a:r>
+            <a:r>
+              <a:rPr lang="es-ES" sz="1600" dirty="0" err="1"/>
+              <a:t>function</a:t>
+            </a:r>
+            <a:r>
+              <a:rPr lang="es-ES" sz="1600" dirty="0"/>
+              <a:t> </a:t>
+            </a:r>
+            <a:r>
+              <a:rPr lang="es-ES" sz="1600" dirty="0" err="1"/>
+              <a:t>of</a:t>
+            </a:r>
+            <a:r>
+              <a:rPr lang="es-ES" sz="1600" dirty="0"/>
+              <a:t> </a:t>
+            </a:r>
+            <a:r>
+              <a:rPr lang="es-ES" sz="1600" dirty="0" err="1"/>
+              <a:t>the</a:t>
+            </a:r>
+            <a:r>
+              <a:rPr lang="es-ES" sz="1600" dirty="0"/>
+              <a:t> MZI is </a:t>
+            </a:r>
+            <a:r>
+              <a:rPr lang="es-ES" sz="1600" dirty="0" err="1"/>
+              <a:t>not</a:t>
+            </a:r>
+            <a:r>
+              <a:rPr lang="es-ES" sz="1600" dirty="0"/>
+              <a:t> visible. </a:t>
+            </a:r>
+            <a:r>
+              <a:rPr lang="es-ES" sz="1600" dirty="0" err="1"/>
+              <a:t>We</a:t>
+            </a:r>
+            <a:r>
+              <a:rPr lang="es-ES" sz="1600" dirty="0"/>
+              <a:t> can observe a </a:t>
+            </a:r>
+            <a:r>
+              <a:rPr lang="es-ES" sz="1600" dirty="0" err="1"/>
+              <a:t>minimal</a:t>
+            </a:r>
+            <a:r>
+              <a:rPr lang="es-ES" sz="1600" dirty="0"/>
+              <a:t> </a:t>
+            </a:r>
+            <a:r>
+              <a:rPr lang="es-ES" sz="1600" dirty="0" err="1"/>
+              <a:t>curvature</a:t>
+            </a:r>
+            <a:r>
+              <a:rPr lang="es-ES" sz="1600" dirty="0"/>
+              <a:t> for </a:t>
+            </a:r>
+            <a:r>
+              <a:rPr lang="es-ES" sz="1600" dirty="0" err="1"/>
+              <a:t>higher</a:t>
+            </a:r>
+            <a:r>
+              <a:rPr lang="es-ES" sz="1600" dirty="0"/>
+              <a:t> </a:t>
+            </a:r>
+            <a:r>
+              <a:rPr lang="es-ES" sz="1600" dirty="0" err="1"/>
+              <a:t>wavelengths</a:t>
+            </a:r>
+            <a:r>
+              <a:rPr lang="es-ES" sz="1600" dirty="0"/>
+              <a:t>, </a:t>
+            </a:r>
+            <a:r>
+              <a:rPr lang="es-ES" sz="1600" dirty="0" err="1"/>
+              <a:t>but</a:t>
+            </a:r>
+            <a:r>
+              <a:rPr lang="es-ES" sz="1600" dirty="0"/>
+              <a:t> </a:t>
+            </a:r>
+            <a:r>
+              <a:rPr lang="es-ES" sz="1600" dirty="0" err="1"/>
+              <a:t>the</a:t>
+            </a:r>
+            <a:r>
+              <a:rPr lang="es-ES" sz="1600" dirty="0"/>
+              <a:t> transfer </a:t>
+            </a:r>
+            <a:r>
+              <a:rPr lang="es-ES" sz="1600" dirty="0" err="1"/>
+              <a:t>function</a:t>
+            </a:r>
+            <a:r>
+              <a:rPr lang="es-ES" sz="1600" dirty="0"/>
+              <a:t> </a:t>
+            </a:r>
+            <a:r>
+              <a:rPr lang="es-ES" sz="1600" dirty="0" err="1"/>
+              <a:t>appears</a:t>
+            </a:r>
+            <a:r>
+              <a:rPr lang="es-ES" sz="1600" dirty="0"/>
+              <a:t> </a:t>
+            </a:r>
+            <a:r>
+              <a:rPr lang="es-ES" sz="1600" dirty="0" err="1"/>
+              <a:t>practically</a:t>
+            </a:r>
+            <a:r>
+              <a:rPr lang="es-ES" sz="1600" dirty="0"/>
+              <a:t> flat. </a:t>
+            </a:r>
+          </a:p>
+          <a:p>
+            <a:pPr algn="just"/>
+            <a:endParaRPr lang="es-ES" sz="1600" dirty="0"/>
+          </a:p>
+          <a:p>
+            <a:pPr algn="just"/>
+            <a:r>
+              <a:rPr lang="es-ES" sz="1600" dirty="0"/>
+              <a:t>For </a:t>
+            </a:r>
+            <a:r>
+              <a:rPr lang="es-ES" sz="1600" dirty="0" err="1"/>
+              <a:t>the</a:t>
+            </a:r>
+            <a:r>
+              <a:rPr lang="es-ES" sz="1600" dirty="0"/>
+              <a:t> case </a:t>
+            </a:r>
+            <a:r>
+              <a:rPr lang="es-ES" sz="1600" dirty="0" err="1"/>
+              <a:t>of</a:t>
+            </a:r>
+            <a:r>
+              <a:rPr lang="es-ES" sz="1600" dirty="0"/>
+              <a:t> </a:t>
+            </a:r>
+            <a:r>
+              <a:rPr lang="es-ES" sz="1600" dirty="0" err="1"/>
+              <a:t>the</a:t>
+            </a:r>
+            <a:r>
+              <a:rPr lang="es-ES" sz="1600" dirty="0"/>
+              <a:t> </a:t>
+            </a:r>
+            <a:r>
+              <a:rPr lang="es-ES" sz="1600" dirty="0" err="1"/>
+              <a:t>second</a:t>
+            </a:r>
+            <a:r>
+              <a:rPr lang="es-ES" sz="1600" dirty="0"/>
+              <a:t> </a:t>
+            </a:r>
+            <a:r>
+              <a:rPr lang="es-ES" sz="1600" dirty="0" err="1"/>
+              <a:t>plot</a:t>
+            </a:r>
+            <a:r>
+              <a:rPr lang="es-ES" sz="1600" dirty="0"/>
+              <a:t>, </a:t>
+            </a:r>
+            <a:r>
+              <a:rPr lang="es-ES" sz="1600" dirty="0" err="1"/>
+              <a:t>the</a:t>
+            </a:r>
+            <a:r>
+              <a:rPr lang="es-ES" sz="1600" dirty="0"/>
+              <a:t> index </a:t>
+            </a:r>
+            <a:r>
+              <a:rPr lang="es-ES" sz="1600" dirty="0" err="1"/>
+              <a:t>difference</a:t>
+            </a:r>
+            <a:r>
+              <a:rPr lang="es-ES" sz="1600" dirty="0"/>
+              <a:t> is </a:t>
+            </a:r>
+            <a:r>
+              <a:rPr lang="es-ES" sz="1600" dirty="0" err="1"/>
+              <a:t>significantly</a:t>
+            </a:r>
+            <a:r>
+              <a:rPr lang="es-ES" sz="1600" dirty="0"/>
+              <a:t> </a:t>
+            </a:r>
+            <a:r>
+              <a:rPr lang="es-ES" sz="1600" dirty="0" err="1"/>
+              <a:t>larger</a:t>
+            </a:r>
+            <a:r>
+              <a:rPr lang="es-ES" sz="1600" dirty="0"/>
+              <a:t> </a:t>
+            </a:r>
+            <a:r>
+              <a:rPr lang="es-ES" sz="1600" dirty="0" err="1"/>
+              <a:t>than</a:t>
+            </a:r>
+            <a:r>
+              <a:rPr lang="es-ES" sz="1600" dirty="0"/>
+              <a:t> in </a:t>
+            </a:r>
+            <a:r>
+              <a:rPr lang="es-ES" sz="1600" dirty="0" err="1"/>
+              <a:t>the</a:t>
+            </a:r>
+            <a:r>
+              <a:rPr lang="es-ES" sz="1600" dirty="0"/>
+              <a:t> </a:t>
+            </a:r>
+            <a:r>
+              <a:rPr lang="es-ES" sz="1600" dirty="0" err="1"/>
+              <a:t>previous</a:t>
+            </a:r>
+            <a:r>
+              <a:rPr lang="es-ES" sz="1600" dirty="0"/>
+              <a:t> </a:t>
+            </a:r>
+            <a:r>
+              <a:rPr lang="es-ES" sz="1600" dirty="0" err="1"/>
+              <a:t>example</a:t>
+            </a:r>
+            <a:r>
+              <a:rPr lang="es-ES" sz="1600" dirty="0"/>
+              <a:t>. </a:t>
+            </a:r>
+            <a:r>
+              <a:rPr lang="es-ES" sz="1600" dirty="0" err="1"/>
+              <a:t>This</a:t>
+            </a:r>
+            <a:r>
+              <a:rPr lang="es-ES" sz="1600" dirty="0"/>
+              <a:t> </a:t>
+            </a:r>
+            <a:r>
+              <a:rPr lang="es-ES" sz="1600" dirty="0" err="1"/>
+              <a:t>increases</a:t>
+            </a:r>
+            <a:r>
+              <a:rPr lang="es-ES" sz="1600" dirty="0"/>
+              <a:t> </a:t>
+            </a:r>
+            <a:r>
+              <a:rPr lang="es-ES" sz="1600" dirty="0" err="1"/>
+              <a:t>the</a:t>
+            </a:r>
+            <a:r>
+              <a:rPr lang="es-ES" sz="1600" dirty="0"/>
+              <a:t> </a:t>
+            </a:r>
+            <a:r>
+              <a:rPr lang="es-ES" sz="1600" dirty="0" err="1"/>
+              <a:t>mismatch</a:t>
+            </a:r>
+            <a:r>
+              <a:rPr lang="es-ES" sz="1600" dirty="0"/>
+              <a:t> in </a:t>
+            </a:r>
+            <a:r>
+              <a:rPr lang="es-ES" sz="1600" dirty="0" err="1"/>
+              <a:t>propagation</a:t>
+            </a:r>
+            <a:r>
+              <a:rPr lang="es-ES" sz="1600" dirty="0"/>
+              <a:t> </a:t>
+            </a:r>
+            <a:r>
+              <a:rPr lang="es-ES" sz="1600" dirty="0" err="1"/>
+              <a:t>constants</a:t>
+            </a:r>
+            <a:r>
+              <a:rPr lang="es-ES" sz="1600" dirty="0"/>
+              <a:t> and causes </a:t>
+            </a:r>
+            <a:r>
+              <a:rPr lang="es-ES" sz="1600" dirty="0" err="1"/>
+              <a:t>the</a:t>
+            </a:r>
+            <a:r>
+              <a:rPr lang="es-ES" sz="1600" dirty="0"/>
+              <a:t> </a:t>
+            </a:r>
+            <a:r>
+              <a:rPr lang="es-ES" sz="1600" dirty="0" err="1"/>
+              <a:t>phase</a:t>
+            </a:r>
+            <a:r>
+              <a:rPr lang="es-ES" sz="1600" dirty="0"/>
+              <a:t> </a:t>
+            </a:r>
+            <a:r>
+              <a:rPr lang="es-ES" sz="1600" dirty="0" err="1"/>
+              <a:t>to</a:t>
+            </a:r>
+            <a:r>
+              <a:rPr lang="es-ES" sz="1600" dirty="0"/>
+              <a:t> </a:t>
+            </a:r>
+            <a:r>
+              <a:rPr lang="es-ES" sz="1600" dirty="0" err="1"/>
+              <a:t>vary</a:t>
+            </a:r>
+            <a:r>
+              <a:rPr lang="es-ES" sz="1600" dirty="0"/>
+              <a:t> more </a:t>
+            </a:r>
+            <a:r>
+              <a:rPr lang="es-ES" sz="1600" dirty="0" err="1"/>
+              <a:t>noticeably</a:t>
+            </a:r>
+            <a:r>
+              <a:rPr lang="es-ES" sz="1600" dirty="0"/>
+              <a:t> </a:t>
+            </a:r>
+            <a:r>
+              <a:rPr lang="es-ES" sz="1600" dirty="0" err="1"/>
+              <a:t>with</a:t>
+            </a:r>
+            <a:r>
+              <a:rPr lang="es-ES" sz="1600" dirty="0"/>
+              <a:t> </a:t>
+            </a:r>
+            <a:r>
+              <a:rPr lang="es-ES" sz="1600" dirty="0" err="1"/>
+              <a:t>wavelength</a:t>
+            </a:r>
+            <a:r>
+              <a:rPr lang="es-ES" sz="1600" dirty="0"/>
+              <a:t>. </a:t>
+            </a:r>
+            <a:r>
+              <a:rPr lang="en-US" sz="1600" dirty="0"/>
+              <a:t>The outputs follow a sinusoidal and complementary trend because the coupler recombines two equal‑amplitude waves with relative phase. This sinusoidal </a:t>
+            </a:r>
+            <a:r>
+              <a:rPr lang="en-US" sz="1600" dirty="0" err="1"/>
+              <a:t>behaviour</a:t>
+            </a:r>
+            <a:r>
+              <a:rPr lang="en-US" sz="1600" dirty="0"/>
+              <a:t> is slow (phase/2) because phase grows extremely slowly with wavelength.  </a:t>
+            </a:r>
+          </a:p>
+          <a:p>
+            <a:pPr algn="just"/>
+            <a:endParaRPr lang="es-ES" sz="1600" dirty="0"/>
+          </a:p>
+        </p:txBody>
+      </p:sp>
+      <p:pic>
+        <p:nvPicPr>
+          <p:cNvPr id="2" name="Imagen 1" descr="Gráfico&#10;&#10;El contenido generado por IA puede ser incorrecto.">
+            <a:extLst>
+              <a:ext uri="{FF2B5EF4-FFF2-40B4-BE49-F238E27FC236}">
+                <a16:creationId xmlns:a16="http://schemas.microsoft.com/office/drawing/2014/main" id="{91C85D87-CAD8-3A85-425C-9E8C8F3D465B}"/>
+              </a:ext>
+            </a:extLst>
+          </p:cNvPr>
+          <p:cNvPicPr>
+            <a:picLocks noChangeAspect="1"/>
+          </p:cNvPicPr>
+          <p:nvPr/>
+        </p:nvPicPr>
+        <p:blipFill>
+          <a:blip r:embed="rId5"/>
+          <a:stretch>
+            <a:fillRect/>
+          </a:stretch>
+        </p:blipFill>
+        <p:spPr>
+          <a:xfrm>
+            <a:off x="1687456" y="533114"/>
+            <a:ext cx="3837044" cy="3079110"/>
+          </a:xfrm>
+          <a:prstGeom prst="rect">
+            <a:avLst/>
+          </a:prstGeom>
+        </p:spPr>
+      </p:pic>
+      <p:pic>
+        <p:nvPicPr>
+          <p:cNvPr id="7" name="Imagen 6" descr="Gráfico, Gráfico de líneas&#10;&#10;El contenido generado por IA puede ser incorrecto.">
+            <a:extLst>
+              <a:ext uri="{FF2B5EF4-FFF2-40B4-BE49-F238E27FC236}">
+                <a16:creationId xmlns:a16="http://schemas.microsoft.com/office/drawing/2014/main" id="{A8B67A7F-9792-4B28-E5A2-A90DCAFBA7E5}"/>
+              </a:ext>
+            </a:extLst>
+          </p:cNvPr>
+          <p:cNvPicPr>
+            <a:picLocks noChangeAspect="1"/>
+          </p:cNvPicPr>
+          <p:nvPr/>
+        </p:nvPicPr>
+        <p:blipFill>
+          <a:blip r:embed="rId6"/>
+          <a:stretch>
+            <a:fillRect/>
+          </a:stretch>
+        </p:blipFill>
+        <p:spPr>
+          <a:xfrm>
+            <a:off x="5524500" y="557818"/>
+            <a:ext cx="4141572" cy="3079110"/>
+          </a:xfrm>
+          <a:prstGeom prst="rect">
+            <a:avLst/>
+          </a:prstGeom>
+        </p:spPr>
+      </p:pic>
+    </p:spTree>
+    <p:extLst>
+      <p:ext uri="{BB962C8B-B14F-4D97-AF65-F5344CB8AC3E}">
+        <p14:creationId xmlns:p14="http://schemas.microsoft.com/office/powerpoint/2010/main" val="1124700757"/>
+      </p:ext>
+    </p:extLst>
+  </p:cSld>
+  <p:clrMapOvr>
+    <a:masterClrMapping/>
+  </p:clrMapOvr>
+</p:sld>
+</file>
+
+<file path=ppt/slides/slide6.xml><?xml version="1.0" encoding="utf-8"?>
+<p:sld xmlns:a="http://schemas.openxmlformats.org/drawingml/2006/main" xmlns:r="http://schemas.openxmlformats.org/officeDocument/2006/relationships" xmlns:p="http://schemas.openxmlformats.org/presentationml/2006/main">
+  <p:cSld>
+    <p:spTree>
+      <p:nvGrpSpPr>
+        <p:cNvPr id="1" name="">
+          <a:extLst>
+            <a:ext uri="{FF2B5EF4-FFF2-40B4-BE49-F238E27FC236}">
+              <a16:creationId xmlns:a16="http://schemas.microsoft.com/office/drawing/2014/main" id="{977991F9-0A8D-EA56-149F-ABF4C9FBD7C6}"/>
+            </a:ext>
+          </a:extLst>
+        </p:cNvPr>
+        <p:cNvGrpSpPr/>
+        <p:nvPr/>
+      </p:nvGrpSpPr>
+      <p:grpSpPr>
+        <a:xfrm>
+          <a:off x="0" y="0"/>
+          <a:ext cx="0" cy="0"/>
+          <a:chOff x="0" y="0"/>
+          <a:chExt cx="0" cy="0"/>
+        </a:xfrm>
+      </p:grpSpPr>
+      <p:pic>
+        <p:nvPicPr>
+          <p:cNvPr id="83" name="Gráfico 82">
+            <a:extLst>
+              <a:ext uri="{FF2B5EF4-FFF2-40B4-BE49-F238E27FC236}">
+                <a16:creationId xmlns:a16="http://schemas.microsoft.com/office/drawing/2014/main" id="{1B844145-16A0-AB26-42D0-ED845AA0F7A0}"/>
+              </a:ext>
+            </a:extLst>
+          </p:cNvPr>
+          <p:cNvPicPr>
+            <a:picLocks noChangeAspect="1"/>
+          </p:cNvPicPr>
+          <p:nvPr/>
+        </p:nvPicPr>
+        <p:blipFill>
+          <a:blip r:embed="rId3">
+            <a:extLst>
+              <a:ext uri="{96DAC541-7B7A-43D3-8B79-37D633B846F1}">
+                <asvg:svgBlip xmlns:asvg="http://schemas.microsoft.com/office/drawing/2016/SVG/main" r:embed="rId4"/>
+              </a:ext>
+            </a:extLst>
+          </a:blip>
+          <a:stretch>
+            <a:fillRect/>
+          </a:stretch>
+        </p:blipFill>
+        <p:spPr>
+          <a:xfrm>
+            <a:off x="5045006" y="6356057"/>
+            <a:ext cx="6409575" cy="363174"/>
+          </a:xfrm>
+          <a:prstGeom prst="rect">
+            <a:avLst/>
+          </a:prstGeom>
+        </p:spPr>
+      </p:pic>
+      <p:sp>
+        <p:nvSpPr>
+          <p:cNvPr id="84" name="Marcador de número de diapositiva 83">
+            <a:extLst>
+              <a:ext uri="{FF2B5EF4-FFF2-40B4-BE49-F238E27FC236}">
+                <a16:creationId xmlns:a16="http://schemas.microsoft.com/office/drawing/2014/main" id="{26A449DB-5ED0-510B-C0EA-6986DCBC89BE}"/>
+              </a:ext>
+            </a:extLst>
+          </p:cNvPr>
+          <p:cNvSpPr>
+            <a:spLocks noGrp="1"/>
+          </p:cNvSpPr>
+          <p:nvPr>
+            <p:ph type="sldNum" sz="quarter" idx="7"/>
+          </p:nvPr>
+        </p:nvSpPr>
+        <p:spPr>
+          <a:xfrm>
+            <a:off x="9311640" y="6377940"/>
+            <a:ext cx="2804160" cy="276999"/>
+          </a:xfrm>
+        </p:spPr>
+        <p:txBody>
+          <a:bodyPr/>
+          <a:lstStyle/>
+          <a:p>
+            <a:fld id="{B6F15528-21DE-4FAA-801E-634DDDAF4B2B}" type="slidenum">
+              <a:rPr lang="es-ES" u="sng" smtClean="0"/>
+              <a:t>6</a:t>
+            </a:fld>
+            <a:endParaRPr lang="es-ES" u="sng" dirty="0"/>
+          </a:p>
+        </p:txBody>
+      </p:sp>
+      <p:sp>
+        <p:nvSpPr>
+          <p:cNvPr id="4" name="Marcador de texto 2">
+            <a:extLst>
+              <a:ext uri="{FF2B5EF4-FFF2-40B4-BE49-F238E27FC236}">
+                <a16:creationId xmlns:a16="http://schemas.microsoft.com/office/drawing/2014/main" id="{4D519C49-6C56-2617-D5D9-34E3A440F2A8}"/>
+              </a:ext>
+            </a:extLst>
+          </p:cNvPr>
+          <p:cNvSpPr txBox="1">
+            <a:spLocks/>
+          </p:cNvSpPr>
+          <p:nvPr/>
+        </p:nvSpPr>
+        <p:spPr>
+          <a:xfrm>
+            <a:off x="608012" y="1295400"/>
+            <a:ext cx="11048999" cy="4958137"/>
+          </a:xfrm>
+          <a:prstGeom prst="rect">
+            <a:avLst/>
+          </a:prstGeom>
+        </p:spPr>
+        <p:txBody>
+          <a:bodyPr>
+            <a:normAutofit/>
+          </a:bodyPr>
+          <a:lstStyle>
+            <a:lvl1pPr marL="0">
+              <a:defRPr>
+                <a:latin typeface="+mn-lt"/>
+                <a:ea typeface="+mn-ea"/>
+                <a:cs typeface="+mn-cs"/>
+              </a:defRPr>
+            </a:lvl1pPr>
+            <a:lvl2pPr marL="457200">
+              <a:defRPr>
+                <a:latin typeface="+mn-lt"/>
+                <a:ea typeface="+mn-ea"/>
+                <a:cs typeface="+mn-cs"/>
+              </a:defRPr>
+            </a:lvl2pPr>
+            <a:lvl3pPr marL="914400">
+              <a:defRPr>
+                <a:latin typeface="+mn-lt"/>
+                <a:ea typeface="+mn-ea"/>
+                <a:cs typeface="+mn-cs"/>
+              </a:defRPr>
+            </a:lvl3pPr>
+            <a:lvl4pPr marL="1371600">
+              <a:defRPr>
+                <a:latin typeface="+mn-lt"/>
+                <a:ea typeface="+mn-ea"/>
+                <a:cs typeface="+mn-cs"/>
+              </a:defRPr>
+            </a:lvl4pPr>
+            <a:lvl5pPr marL="1828800">
+              <a:defRPr>
+                <a:latin typeface="+mn-lt"/>
+                <a:ea typeface="+mn-ea"/>
+                <a:cs typeface="+mn-cs"/>
+              </a:defRPr>
+            </a:lvl5pPr>
+            <a:lvl6pPr marL="2286000">
+              <a:defRPr>
+                <a:latin typeface="+mn-lt"/>
+                <a:ea typeface="+mn-ea"/>
+                <a:cs typeface="+mn-cs"/>
+              </a:defRPr>
+            </a:lvl6pPr>
+            <a:lvl7pPr marL="2743200">
+              <a:defRPr>
+                <a:latin typeface="+mn-lt"/>
+                <a:ea typeface="+mn-ea"/>
+                <a:cs typeface="+mn-cs"/>
+              </a:defRPr>
+            </a:lvl7pPr>
+            <a:lvl8pPr marL="3200400">
+              <a:defRPr>
+                <a:latin typeface="+mn-lt"/>
+                <a:ea typeface="+mn-ea"/>
+                <a:cs typeface="+mn-cs"/>
+              </a:defRPr>
+            </a:lvl8pPr>
+            <a:lvl9pPr marL="3657600">
+              <a:defRPr>
+                <a:latin typeface="+mn-lt"/>
+                <a:ea typeface="+mn-ea"/>
+                <a:cs typeface="+mn-cs"/>
+              </a:defRPr>
+            </a:lvl9pPr>
+          </a:lstStyle>
+          <a:p>
+            <a:r>
+              <a:rPr lang="en-US" sz="2000" dirty="0"/>
+              <a:t> </a:t>
+            </a:r>
+          </a:p>
+          <a:p>
+            <a:pPr algn="just"/>
+            <a:endParaRPr lang="en-US" sz="2000" dirty="0"/>
+          </a:p>
+          <a:p>
+            <a:pPr algn="just"/>
+            <a:endParaRPr lang="en-US" sz="2000" b="1" i="1" dirty="0"/>
+          </a:p>
+          <a:p>
+            <a:pPr algn="just"/>
+            <a:endParaRPr lang="en-US" sz="2000" kern="0" dirty="0">
+              <a:solidFill>
+                <a:sysClr val="windowText" lastClr="000000"/>
+              </a:solidFill>
+            </a:endParaRPr>
+          </a:p>
+          <a:p>
+            <a:endParaRPr lang="en-US" sz="2000" kern="0" dirty="0">
+              <a:solidFill>
+                <a:sysClr val="windowText" lastClr="000000"/>
+              </a:solidFill>
+            </a:endParaRPr>
+          </a:p>
+        </p:txBody>
+      </p:sp>
+      <p:sp>
+        <p:nvSpPr>
+          <p:cNvPr id="5" name="Marcador de pie de página 2">
+            <a:extLst>
+              <a:ext uri="{FF2B5EF4-FFF2-40B4-BE49-F238E27FC236}">
+                <a16:creationId xmlns:a16="http://schemas.microsoft.com/office/drawing/2014/main" id="{9D42CE27-BDDD-AAE2-C559-4ED67D8C843B}"/>
+              </a:ext>
+            </a:extLst>
+          </p:cNvPr>
+          <p:cNvSpPr>
+            <a:spLocks noGrp="1"/>
+          </p:cNvSpPr>
+          <p:nvPr>
+            <p:ph type="ftr" sz="quarter" idx="5"/>
+          </p:nvPr>
+        </p:nvSpPr>
+        <p:spPr>
+          <a:xfrm>
+            <a:off x="609600" y="6457057"/>
+            <a:ext cx="2743200" cy="184666"/>
+          </a:xfrm>
+        </p:spPr>
+        <p:txBody>
+          <a:bodyPr/>
+          <a:lstStyle/>
+          <a:p>
+            <a:pPr marL="12700">
+              <a:spcBef>
+                <a:spcPts val="15"/>
+              </a:spcBef>
+            </a:pPr>
+            <a:r>
+              <a:rPr lang="es-ES" spc="-5"/>
+              <a:t>LAB 3. INTERFEROMETERS I</a:t>
+            </a:r>
+            <a:endParaRPr lang="es-ES" spc="-5" dirty="0"/>
+          </a:p>
+        </p:txBody>
+      </p:sp>
       <p:sp>
         <p:nvSpPr>
           <p:cNvPr id="9" name="CuadroTexto 8">
@@ -5576,7 +8603,7 @@
           <p:nvPr/>
         </p:nvPicPr>
         <p:blipFill>
-          <a:blip r:embed="rId6"/>
+          <a:blip r:embed="rId5"/>
           <a:stretch>
             <a:fillRect/>
           </a:stretch>
@@ -5606,7 +8633,7 @@
           <p:nvPr/>
         </p:nvPicPr>
         <p:blipFill>
-          <a:blip r:embed="rId7"/>
+          <a:blip r:embed="rId6"/>
           <a:stretch>
             <a:fillRect/>
           </a:stretch>
@@ -5636,7 +8663,7 @@
           <p:nvPr/>
         </p:nvPicPr>
         <p:blipFill>
-          <a:blip r:embed="rId8"/>
+          <a:blip r:embed="rId7"/>
           <a:stretch>
             <a:fillRect/>
           </a:stretch>
@@ -5760,7 +8787,7 @@
           <p:nvPr/>
         </p:nvPicPr>
         <p:blipFill>
-          <a:blip r:embed="rId9"/>
+          <a:blip r:embed="rId8"/>
           <a:stretch>
             <a:fillRect/>
           </a:stretch>
@@ -5875,7 +8902,7 @@
 </p:sld>
 </file>
 
-<file path=ppt/slides/slide5.xml><?xml version="1.0" encoding="utf-8"?>
+<file path=ppt/slides/slide7.xml><?xml version="1.0" encoding="utf-8"?>
 <p:sld xmlns:a="http://schemas.openxmlformats.org/drawingml/2006/main" xmlns:r="http://schemas.openxmlformats.org/officeDocument/2006/relationships" xmlns:p="http://schemas.openxmlformats.org/presentationml/2006/main">
   <p:cSld>
     <p:spTree>
@@ -6090,7 +9117,7 @@
           <a:p>
             <a:fld id="{B6F15528-21DE-4FAA-801E-634DDDAF4B2B}" type="slidenum">
               <a:rPr lang="es-ES" smtClean="0"/>
-              <a:t>5</a:t>
+              <a:t>7</a:t>
             </a:fld>
             <a:endParaRPr lang="es-ES"/>
           </a:p>
@@ -6539,7 +9566,7 @@
 </p:sld>
 </file>
 
-<file path=ppt/slides/slide6.xml><?xml version="1.0" encoding="utf-8"?>
+<file path=ppt/slides/slide8.xml><?xml version="1.0" encoding="utf-8"?>
 <p:sld xmlns:a="http://schemas.openxmlformats.org/drawingml/2006/main" xmlns:r="http://schemas.openxmlformats.org/officeDocument/2006/relationships" xmlns:p="http://schemas.openxmlformats.org/presentationml/2006/main">
   <p:cSld>
     <p:spTree>
@@ -6681,7 +9708,7 @@
           <a:p>
             <a:fld id="{B6F15528-21DE-4FAA-801E-634DDDAF4B2B}" type="slidenum">
               <a:rPr lang="es-ES" smtClean="0"/>
-              <a:t>6</a:t>
+              <a:t>8</a:t>
             </a:fld>
             <a:endParaRPr lang="es-ES"/>
           </a:p>
@@ -7267,7 +10294,7 @@
 </p:sld>
 </file>
 
-<file path=ppt/slides/slide7.xml><?xml version="1.0" encoding="utf-8"?>
+<file path=ppt/slides/slide9.xml><?xml version="1.0" encoding="utf-8"?>
 <p:sld xmlns:a="http://schemas.openxmlformats.org/drawingml/2006/main" xmlns:r="http://schemas.openxmlformats.org/officeDocument/2006/relationships" xmlns:p="http://schemas.openxmlformats.org/presentationml/2006/main">
   <p:cSld>
     <p:spTree>
@@ -7307,7 +10334,7 @@
           <a:p>
             <a:fld id="{B6F15528-21DE-4FAA-801E-634DDDAF4B2B}" type="slidenum">
               <a:rPr lang="es-ES" smtClean="0"/>
-              <a:t>7</a:t>
+              <a:t>9</a:t>
             </a:fld>
             <a:endParaRPr lang="es-ES"/>
           </a:p>
@@ -7440,743 +10467,6 @@
     <p:extLst>
       <p:ext uri="{BB962C8B-B14F-4D97-AF65-F5344CB8AC3E}">
         <p14:creationId xmlns:p14="http://schemas.microsoft.com/office/powerpoint/2010/main" val="701476647"/>
-      </p:ext>
-    </p:extLst>
-  </p:cSld>
-  <p:clrMapOvr>
-    <a:masterClrMapping/>
-  </p:clrMapOvr>
-</p:sld>
-</file>
-
-<file path=ppt/slides/slide8.xml><?xml version="1.0" encoding="utf-8"?>
-<p:sld xmlns:a="http://schemas.openxmlformats.org/drawingml/2006/main" xmlns:r="http://schemas.openxmlformats.org/officeDocument/2006/relationships" xmlns:p="http://schemas.openxmlformats.org/presentationml/2006/main">
-  <p:cSld>
-    <p:spTree>
-      <p:nvGrpSpPr>
-        <p:cNvPr id="1" name="">
-          <a:extLst>
-            <a:ext uri="{FF2B5EF4-FFF2-40B4-BE49-F238E27FC236}">
-              <a16:creationId xmlns:a16="http://schemas.microsoft.com/office/drawing/2014/main" id="{25434E70-43B1-3881-1771-20FB4358471D}"/>
-            </a:ext>
-          </a:extLst>
-        </p:cNvPr>
-        <p:cNvGrpSpPr/>
-        <p:nvPr/>
-      </p:nvGrpSpPr>
-      <p:grpSpPr>
-        <a:xfrm>
-          <a:off x="0" y="0"/>
-          <a:ext cx="0" cy="0"/>
-          <a:chOff x="0" y="0"/>
-          <a:chExt cx="0" cy="0"/>
-        </a:xfrm>
-      </p:grpSpPr>
-      <p:sp>
-        <p:nvSpPr>
-          <p:cNvPr id="16" name="object 16">
-            <a:extLst>
-              <a:ext uri="{FF2B5EF4-FFF2-40B4-BE49-F238E27FC236}">
-                <a16:creationId xmlns:a16="http://schemas.microsoft.com/office/drawing/2014/main" id="{742C31CE-19F0-B995-0997-9A2D6A879BF7}"/>
-              </a:ext>
-            </a:extLst>
-          </p:cNvPr>
-          <p:cNvSpPr txBox="1">
-            <a:spLocks noGrp="1"/>
-          </p:cNvSpPr>
-          <p:nvPr>
-            <p:ph type="title"/>
-          </p:nvPr>
-        </p:nvSpPr>
-        <p:spPr>
-          <a:xfrm>
-            <a:off x="685800" y="408883"/>
-            <a:ext cx="10994410" cy="397545"/>
-          </a:xfrm>
-          <a:prstGeom prst="rect">
-            <a:avLst/>
-          </a:prstGeom>
-        </p:spPr>
-        <p:txBody>
-          <a:bodyPr vert="horz" wrap="square" lIns="0" tIns="12700" rIns="0" bIns="0" rtlCol="0">
-            <a:spAutoFit/>
-          </a:bodyPr>
-          <a:lstStyle/>
-          <a:p>
-            <a:pPr marL="12700">
-              <a:lnSpc>
-                <a:spcPct val="100000"/>
-              </a:lnSpc>
-              <a:spcBef>
-                <a:spcPts val="100"/>
-              </a:spcBef>
-            </a:pPr>
-            <a:r>
-              <a:rPr lang="en-US" sz="2500" dirty="0"/>
-              <a:t>Extra assessments </a:t>
-            </a:r>
-            <a:endParaRPr lang="en-US" sz="2500" b="0" dirty="0">
-              <a:latin typeface="+mj-lt"/>
-              <a:cs typeface="Lucida Sans"/>
-            </a:endParaRPr>
-          </a:p>
-        </p:txBody>
-      </p:sp>
-      <p:pic>
-        <p:nvPicPr>
-          <p:cNvPr id="83" name="Gráfico 82">
-            <a:extLst>
-              <a:ext uri="{FF2B5EF4-FFF2-40B4-BE49-F238E27FC236}">
-                <a16:creationId xmlns:a16="http://schemas.microsoft.com/office/drawing/2014/main" id="{D688A609-F3DC-EE34-C536-683E70F32EAE}"/>
-              </a:ext>
-            </a:extLst>
-          </p:cNvPr>
-          <p:cNvPicPr>
-            <a:picLocks noChangeAspect="1"/>
-          </p:cNvPicPr>
-          <p:nvPr/>
-        </p:nvPicPr>
-        <p:blipFill>
-          <a:blip r:embed="rId3">
-            <a:extLst>
-              <a:ext uri="{96DAC541-7B7A-43D3-8B79-37D633B846F1}">
-                <asvg:svgBlip xmlns:asvg="http://schemas.microsoft.com/office/drawing/2016/SVG/main" r:embed="rId4"/>
-              </a:ext>
-            </a:extLst>
-          </a:blip>
-          <a:stretch>
-            <a:fillRect/>
-          </a:stretch>
-        </p:blipFill>
-        <p:spPr>
-          <a:xfrm>
-            <a:off x="5045006" y="6356057"/>
-            <a:ext cx="6409575" cy="363174"/>
-          </a:xfrm>
-          <a:prstGeom prst="rect">
-            <a:avLst/>
-          </a:prstGeom>
-        </p:spPr>
-      </p:pic>
-      <p:sp>
-        <p:nvSpPr>
-          <p:cNvPr id="84" name="Marcador de número de diapositiva 83">
-            <a:extLst>
-              <a:ext uri="{FF2B5EF4-FFF2-40B4-BE49-F238E27FC236}">
-                <a16:creationId xmlns:a16="http://schemas.microsoft.com/office/drawing/2014/main" id="{B6C672C6-89D4-7E67-2B94-811D081786A7}"/>
-              </a:ext>
-            </a:extLst>
-          </p:cNvPr>
-          <p:cNvSpPr>
-            <a:spLocks noGrp="1"/>
-          </p:cNvSpPr>
-          <p:nvPr>
-            <p:ph type="sldNum" sz="quarter" idx="7"/>
-          </p:nvPr>
-        </p:nvSpPr>
-        <p:spPr/>
-        <p:txBody>
-          <a:bodyPr/>
-          <a:lstStyle/>
-          <a:p>
-            <a:fld id="{B6F15528-21DE-4FAA-801E-634DDDAF4B2B}" type="slidenum">
-              <a:rPr lang="es-ES" smtClean="0"/>
-              <a:t>8</a:t>
-            </a:fld>
-            <a:endParaRPr lang="es-ES"/>
-          </a:p>
-        </p:txBody>
-      </p:sp>
-      <p:sp>
-        <p:nvSpPr>
-          <p:cNvPr id="4" name="Marcador de texto 2">
-            <a:extLst>
-              <a:ext uri="{FF2B5EF4-FFF2-40B4-BE49-F238E27FC236}">
-                <a16:creationId xmlns:a16="http://schemas.microsoft.com/office/drawing/2014/main" id="{D838A93A-BFC8-0124-93CE-FDC193435A0C}"/>
-              </a:ext>
-            </a:extLst>
-          </p:cNvPr>
-          <p:cNvSpPr txBox="1">
-            <a:spLocks/>
-          </p:cNvSpPr>
-          <p:nvPr/>
-        </p:nvSpPr>
-        <p:spPr>
-          <a:xfrm>
-            <a:off x="608012" y="1295400"/>
-            <a:ext cx="11048999" cy="4958137"/>
-          </a:xfrm>
-          <a:prstGeom prst="rect">
-            <a:avLst/>
-          </a:prstGeom>
-        </p:spPr>
-        <p:txBody>
-          <a:bodyPr>
-            <a:normAutofit/>
-          </a:bodyPr>
-          <a:lstStyle>
-            <a:lvl1pPr marL="0">
-              <a:defRPr>
-                <a:latin typeface="+mn-lt"/>
-                <a:ea typeface="+mn-ea"/>
-                <a:cs typeface="+mn-cs"/>
-              </a:defRPr>
-            </a:lvl1pPr>
-            <a:lvl2pPr marL="457200">
-              <a:defRPr>
-                <a:latin typeface="+mn-lt"/>
-                <a:ea typeface="+mn-ea"/>
-                <a:cs typeface="+mn-cs"/>
-              </a:defRPr>
-            </a:lvl2pPr>
-            <a:lvl3pPr marL="914400">
-              <a:defRPr>
-                <a:latin typeface="+mn-lt"/>
-                <a:ea typeface="+mn-ea"/>
-                <a:cs typeface="+mn-cs"/>
-              </a:defRPr>
-            </a:lvl3pPr>
-            <a:lvl4pPr marL="1371600">
-              <a:defRPr>
-                <a:latin typeface="+mn-lt"/>
-                <a:ea typeface="+mn-ea"/>
-                <a:cs typeface="+mn-cs"/>
-              </a:defRPr>
-            </a:lvl4pPr>
-            <a:lvl5pPr marL="1828800">
-              <a:defRPr>
-                <a:latin typeface="+mn-lt"/>
-                <a:ea typeface="+mn-ea"/>
-                <a:cs typeface="+mn-cs"/>
-              </a:defRPr>
-            </a:lvl5pPr>
-            <a:lvl6pPr marL="2286000">
-              <a:defRPr>
-                <a:latin typeface="+mn-lt"/>
-                <a:ea typeface="+mn-ea"/>
-                <a:cs typeface="+mn-cs"/>
-              </a:defRPr>
-            </a:lvl6pPr>
-            <a:lvl7pPr marL="2743200">
-              <a:defRPr>
-                <a:latin typeface="+mn-lt"/>
-                <a:ea typeface="+mn-ea"/>
-                <a:cs typeface="+mn-cs"/>
-              </a:defRPr>
-            </a:lvl7pPr>
-            <a:lvl8pPr marL="3200400">
-              <a:defRPr>
-                <a:latin typeface="+mn-lt"/>
-                <a:ea typeface="+mn-ea"/>
-                <a:cs typeface="+mn-cs"/>
-              </a:defRPr>
-            </a:lvl8pPr>
-            <a:lvl9pPr marL="3657600">
-              <a:defRPr>
-                <a:latin typeface="+mn-lt"/>
-                <a:ea typeface="+mn-ea"/>
-                <a:cs typeface="+mn-cs"/>
-              </a:defRPr>
-            </a:lvl9pPr>
-          </a:lstStyle>
-          <a:p>
-            <a:pPr marL="0" indent="0">
-              <a:buNone/>
-            </a:pPr>
-            <a:r>
-              <a:rPr lang="en-US" b="1" dirty="0"/>
-              <a:t>Assessment 4</a:t>
-            </a:r>
-            <a:r>
-              <a:rPr lang="en-US" dirty="0"/>
-              <a:t>. Design an MZI for filtering at a specific wavelength. Calculate and adjust the arm lengths to configure the MZI to have a maximum transmission at 1550 nm.</a:t>
-            </a:r>
-          </a:p>
-          <a:p>
-            <a:endParaRPr lang="en-US" b="1" dirty="0"/>
-          </a:p>
-          <a:p>
-            <a:r>
-              <a:rPr lang="en-US" b="1" dirty="0"/>
-              <a:t>Assessment 5. </a:t>
-            </a:r>
-            <a:r>
-              <a:rPr lang="en-US" dirty="0"/>
-              <a:t>Let's see how the response of the MZI varies with the effective index. Vary the effective index of one of the arms and analyze how the spectrum shifts. To do this, you can use the data provided in the .txt files entitled ‘</a:t>
-            </a:r>
-            <a:r>
-              <a:rPr lang="en-US" dirty="0" err="1"/>
-              <a:t>SiN</a:t>
-            </a:r>
-            <a:r>
-              <a:rPr lang="en-US" dirty="0"/>
-              <a:t>’. Can you give an example of an application where this configuration is used?</a:t>
-            </a:r>
-          </a:p>
-          <a:p>
-            <a:pPr marL="0" indent="0">
-              <a:buNone/>
-            </a:pPr>
-            <a:endParaRPr lang="en-US" dirty="0"/>
-          </a:p>
-          <a:p>
-            <a:r>
-              <a:rPr lang="en-US" b="1" dirty="0"/>
-              <a:t>Advanced level assessment.</a:t>
-            </a:r>
-            <a:r>
-              <a:rPr lang="en-US" dirty="0"/>
-              <a:t> Explore how cascading two MZIs affects the transmission spectrum. To do so, design a system in which two MZIs are cascaded. Simulate and observe the spectrum, explaining how the transmission peaks behave</a:t>
-            </a:r>
-            <a:r>
-              <a:rPr lang="en-US" b="1" dirty="0"/>
-              <a:t>.</a:t>
-            </a:r>
-          </a:p>
-          <a:p>
-            <a:pPr algn="just"/>
-            <a:endParaRPr lang="en-US" sz="2000" kern="0" dirty="0">
-              <a:solidFill>
-                <a:sysClr val="windowText" lastClr="000000"/>
-              </a:solidFill>
-            </a:endParaRPr>
-          </a:p>
-        </p:txBody>
-      </p:sp>
-      <p:sp>
-        <p:nvSpPr>
-          <p:cNvPr id="2" name="CuadroTexto 1">
-            <a:extLst>
-              <a:ext uri="{FF2B5EF4-FFF2-40B4-BE49-F238E27FC236}">
-                <a16:creationId xmlns:a16="http://schemas.microsoft.com/office/drawing/2014/main" id="{FDE3A197-9508-F9F1-1FEB-FF883D78C151}"/>
-              </a:ext>
-            </a:extLst>
-          </p:cNvPr>
-          <p:cNvSpPr txBox="1"/>
-          <p:nvPr/>
-        </p:nvSpPr>
-        <p:spPr>
-          <a:xfrm>
-            <a:off x="609441" y="4860334"/>
-            <a:ext cx="11199971" cy="1200329"/>
-          </a:xfrm>
-          <a:prstGeom prst="rect">
-            <a:avLst/>
-          </a:prstGeom>
-          <a:solidFill>
-            <a:schemeClr val="bg1">
-              <a:lumMod val="95000"/>
-            </a:schemeClr>
-          </a:solidFill>
-          <a:ln w="28575">
-            <a:solidFill>
-              <a:srgbClr val="E0700D"/>
-            </a:solidFill>
-          </a:ln>
-        </p:spPr>
-        <p:txBody>
-          <a:bodyPr wrap="square" rtlCol="0">
-            <a:spAutoFit/>
-          </a:bodyPr>
-          <a:lstStyle/>
-          <a:p>
-            <a:pPr algn="just"/>
-            <a:r>
-              <a:rPr lang="en-US" sz="1200" dirty="0">
-                <a:latin typeface="Arial" panose="020B0604020202020204" pitchFamily="34" charset="0"/>
-                <a:cs typeface="Arial" panose="020B0604020202020204" pitchFamily="34" charset="0"/>
-              </a:rPr>
-              <a:t>Document all your results</a:t>
-            </a:r>
-          </a:p>
-          <a:p>
-            <a:pPr algn="just"/>
-            <a:endParaRPr lang="en-US" sz="1200" dirty="0">
-              <a:latin typeface="Arial" panose="020B0604020202020204" pitchFamily="34" charset="0"/>
-              <a:cs typeface="Arial" panose="020B0604020202020204" pitchFamily="34" charset="0"/>
-            </a:endParaRPr>
-          </a:p>
-          <a:p>
-            <a:pPr algn="just"/>
-            <a:endParaRPr lang="en-US" sz="1200" dirty="0">
-              <a:latin typeface="Arial" panose="020B0604020202020204" pitchFamily="34" charset="0"/>
-              <a:cs typeface="Arial" panose="020B0604020202020204" pitchFamily="34" charset="0"/>
-            </a:endParaRPr>
-          </a:p>
-          <a:p>
-            <a:pPr algn="just"/>
-            <a:endParaRPr lang="en-US" sz="1200" dirty="0">
-              <a:latin typeface="Arial" panose="020B0604020202020204" pitchFamily="34" charset="0"/>
-              <a:cs typeface="Arial" panose="020B0604020202020204" pitchFamily="34" charset="0"/>
-            </a:endParaRPr>
-          </a:p>
-          <a:p>
-            <a:pPr algn="just"/>
-            <a:endParaRPr lang="en-US" sz="1200" dirty="0">
-              <a:latin typeface="Arial" panose="020B0604020202020204" pitchFamily="34" charset="0"/>
-              <a:cs typeface="Arial" panose="020B0604020202020204" pitchFamily="34" charset="0"/>
-            </a:endParaRPr>
-          </a:p>
-          <a:p>
-            <a:pPr algn="just"/>
-            <a:endParaRPr lang="en-US" sz="1200" dirty="0">
-              <a:latin typeface="Arial" panose="020B0604020202020204" pitchFamily="34" charset="0"/>
-              <a:cs typeface="Arial" panose="020B0604020202020204" pitchFamily="34" charset="0"/>
-            </a:endParaRPr>
-          </a:p>
-        </p:txBody>
-      </p:sp>
-      <p:sp>
-        <p:nvSpPr>
-          <p:cNvPr id="6" name="Marcador de pie de página 2">
-            <a:extLst>
-              <a:ext uri="{FF2B5EF4-FFF2-40B4-BE49-F238E27FC236}">
-                <a16:creationId xmlns:a16="http://schemas.microsoft.com/office/drawing/2014/main" id="{04C1A7E9-6C33-172D-E7B9-CCF643221E6A}"/>
-              </a:ext>
-            </a:extLst>
-          </p:cNvPr>
-          <p:cNvSpPr>
-            <a:spLocks noGrp="1"/>
-          </p:cNvSpPr>
-          <p:nvPr>
-            <p:ph type="ftr" sz="quarter" idx="5"/>
-          </p:nvPr>
-        </p:nvSpPr>
-        <p:spPr>
-          <a:xfrm>
-            <a:off x="609600" y="6457057"/>
-            <a:ext cx="2743200" cy="184666"/>
-          </a:xfrm>
-        </p:spPr>
-        <p:txBody>
-          <a:bodyPr/>
-          <a:lstStyle/>
-          <a:p>
-            <a:pPr marL="12700">
-              <a:spcBef>
-                <a:spcPts val="15"/>
-              </a:spcBef>
-            </a:pPr>
-            <a:r>
-              <a:rPr lang="es-ES" spc="-5"/>
-              <a:t>LAB 3. INTERFEROMETERS I</a:t>
-            </a:r>
-            <a:endParaRPr lang="es-ES" spc="-5" dirty="0"/>
-          </a:p>
-        </p:txBody>
-      </p:sp>
-    </p:spTree>
-    <p:extLst>
-      <p:ext uri="{BB962C8B-B14F-4D97-AF65-F5344CB8AC3E}">
-        <p14:creationId xmlns:p14="http://schemas.microsoft.com/office/powerpoint/2010/main" val="3660438245"/>
-      </p:ext>
-    </p:extLst>
-  </p:cSld>
-  <p:clrMapOvr>
-    <a:masterClrMapping/>
-  </p:clrMapOvr>
-</p:sld>
-</file>
-
-<file path=ppt/slides/slide9.xml><?xml version="1.0" encoding="utf-8"?>
-<p:sld xmlns:a="http://schemas.openxmlformats.org/drawingml/2006/main" xmlns:r="http://schemas.openxmlformats.org/officeDocument/2006/relationships" xmlns:p="http://schemas.openxmlformats.org/presentationml/2006/main">
-  <p:cSld>
-    <p:spTree>
-      <p:nvGrpSpPr>
-        <p:cNvPr id="1" name=""/>
-        <p:cNvGrpSpPr/>
-        <p:nvPr/>
-      </p:nvGrpSpPr>
-      <p:grpSpPr>
-        <a:xfrm>
-          <a:off x="0" y="0"/>
-          <a:ext cx="0" cy="0"/>
-          <a:chOff x="0" y="0"/>
-          <a:chExt cx="0" cy="0"/>
-        </a:xfrm>
-      </p:grpSpPr>
-      <p:sp>
-        <p:nvSpPr>
-          <p:cNvPr id="2" name="Marcador de número de diapositiva 1">
-            <a:extLst>
-              <a:ext uri="{FF2B5EF4-FFF2-40B4-BE49-F238E27FC236}">
-                <a16:creationId xmlns:a16="http://schemas.microsoft.com/office/drawing/2014/main" id="{06DE8A1B-D36B-640A-052A-EB519F6309B9}"/>
-              </a:ext>
-            </a:extLst>
-          </p:cNvPr>
-          <p:cNvSpPr>
-            <a:spLocks noGrp="1"/>
-          </p:cNvSpPr>
-          <p:nvPr>
-            <p:ph type="sldNum" sz="quarter" idx="7"/>
-          </p:nvPr>
-        </p:nvSpPr>
-        <p:spPr/>
-        <p:txBody>
-          <a:bodyPr/>
-          <a:lstStyle/>
-          <a:p>
-            <a:fld id="{B6F15528-21DE-4FAA-801E-634DDDAF4B2B}" type="slidenum">
-              <a:rPr lang="es-ES" smtClean="0"/>
-              <a:t>9</a:t>
-            </a:fld>
-            <a:endParaRPr lang="es-ES"/>
-          </a:p>
-        </p:txBody>
-      </p:sp>
-      <p:pic>
-        <p:nvPicPr>
-          <p:cNvPr id="4" name="Imagen 3">
-            <a:extLst>
-              <a:ext uri="{FF2B5EF4-FFF2-40B4-BE49-F238E27FC236}">
-                <a16:creationId xmlns:a16="http://schemas.microsoft.com/office/drawing/2014/main" id="{E3564D6F-B7D2-160A-55F0-B8721146B29A}"/>
-              </a:ext>
-            </a:extLst>
-          </p:cNvPr>
-          <p:cNvPicPr>
-            <a:picLocks noChangeAspect="1"/>
-          </p:cNvPicPr>
-          <p:nvPr/>
-        </p:nvPicPr>
-        <p:blipFill>
-          <a:blip r:embed="rId2"/>
-          <a:stretch>
-            <a:fillRect/>
-          </a:stretch>
-        </p:blipFill>
-        <p:spPr>
-          <a:xfrm>
-            <a:off x="1447800" y="1752600"/>
-            <a:ext cx="3181350" cy="838200"/>
-          </a:xfrm>
-          <a:prstGeom prst="rect">
-            <a:avLst/>
-          </a:prstGeom>
-        </p:spPr>
-      </p:pic>
-      <p:sp>
-        <p:nvSpPr>
-          <p:cNvPr id="5" name="CuadroTexto 4">
-            <a:extLst>
-              <a:ext uri="{FF2B5EF4-FFF2-40B4-BE49-F238E27FC236}">
-                <a16:creationId xmlns:a16="http://schemas.microsoft.com/office/drawing/2014/main" id="{3383DB73-B498-36BE-3CA7-16C3FDD7E8EE}"/>
-              </a:ext>
-            </a:extLst>
-          </p:cNvPr>
-          <p:cNvSpPr txBox="1"/>
-          <p:nvPr/>
-        </p:nvSpPr>
-        <p:spPr>
-          <a:xfrm>
-            <a:off x="304800" y="609600"/>
-            <a:ext cx="6918960" cy="923330"/>
-          </a:xfrm>
-          <a:prstGeom prst="rect">
-            <a:avLst/>
-          </a:prstGeom>
-          <a:noFill/>
-        </p:spPr>
-        <p:txBody>
-          <a:bodyPr wrap="square" rtlCol="0">
-            <a:spAutoFit/>
-          </a:bodyPr>
-          <a:lstStyle/>
-          <a:p>
-            <a:r>
-              <a:rPr lang="es-ES" dirty="0"/>
-              <a:t>Para tener interferencia constructiva en lambda 0 se debe cumplir esa condición: (tenemos en cuenta que estamos en el caso en el que solo hay </a:t>
-            </a:r>
-            <a:r>
-              <a:rPr lang="es-ES" dirty="0" err="1"/>
-              <a:t>dif</a:t>
-            </a:r>
-            <a:r>
-              <a:rPr lang="es-ES" dirty="0"/>
-              <a:t> de longitud en los brazos): </a:t>
-            </a:r>
-          </a:p>
-        </p:txBody>
-      </p:sp>
-      <p:pic>
-        <p:nvPicPr>
-          <p:cNvPr id="7" name="Imagen 6">
-            <a:extLst>
-              <a:ext uri="{FF2B5EF4-FFF2-40B4-BE49-F238E27FC236}">
-                <a16:creationId xmlns:a16="http://schemas.microsoft.com/office/drawing/2014/main" id="{0D31D717-D0AE-75D4-2688-DBA6014492FC}"/>
-              </a:ext>
-            </a:extLst>
-          </p:cNvPr>
-          <p:cNvPicPr>
-            <a:picLocks noChangeAspect="1"/>
-          </p:cNvPicPr>
-          <p:nvPr/>
-        </p:nvPicPr>
-        <p:blipFill>
-          <a:blip r:embed="rId3"/>
-          <a:stretch>
-            <a:fillRect/>
-          </a:stretch>
-        </p:blipFill>
-        <p:spPr>
-          <a:xfrm>
-            <a:off x="5715000" y="1532930"/>
-            <a:ext cx="1752600" cy="923925"/>
-          </a:xfrm>
-          <a:prstGeom prst="rect">
-            <a:avLst/>
-          </a:prstGeom>
-        </p:spPr>
-      </p:pic>
-      <p:sp>
-        <p:nvSpPr>
-          <p:cNvPr id="8" name="CuadroTexto 7">
-            <a:extLst>
-              <a:ext uri="{FF2B5EF4-FFF2-40B4-BE49-F238E27FC236}">
-                <a16:creationId xmlns:a16="http://schemas.microsoft.com/office/drawing/2014/main" id="{4205ABBB-6150-0834-CDF4-24A98BA4EA1D}"/>
-              </a:ext>
-            </a:extLst>
-          </p:cNvPr>
-          <p:cNvSpPr txBox="1"/>
-          <p:nvPr/>
-        </p:nvSpPr>
-        <p:spPr>
-          <a:xfrm>
-            <a:off x="8458200" y="762000"/>
-            <a:ext cx="2438400" cy="2862322"/>
-          </a:xfrm>
-          <a:prstGeom prst="rect">
-            <a:avLst/>
-          </a:prstGeom>
-          <a:noFill/>
-        </p:spPr>
-        <p:txBody>
-          <a:bodyPr wrap="square" rtlCol="0">
-            <a:spAutoFit/>
-          </a:bodyPr>
-          <a:lstStyle/>
-          <a:p>
-            <a:r>
-              <a:rPr lang="es-ES" dirty="0"/>
-              <a:t>Observamos que para m=1 nos queda un </a:t>
-            </a:r>
-            <a:r>
-              <a:rPr lang="es-ES" dirty="0" err="1"/>
-              <a:t>fsr</a:t>
-            </a:r>
-            <a:r>
-              <a:rPr lang="es-ES" dirty="0"/>
-              <a:t> demasiado ancho para una aplicación de filtrado. Por eso hacemos un barrido de m para escoger la m necesaria para la </a:t>
-            </a:r>
-            <a:r>
-              <a:rPr lang="es-ES" dirty="0" err="1"/>
-              <a:t>plicación</a:t>
-            </a:r>
-            <a:r>
-              <a:rPr lang="es-ES" dirty="0"/>
-              <a:t> concreta de nuestro filtro. </a:t>
-            </a:r>
-          </a:p>
-        </p:txBody>
-      </p:sp>
-      <p:pic>
-        <p:nvPicPr>
-          <p:cNvPr id="10" name="Imagen 9">
-            <a:extLst>
-              <a:ext uri="{FF2B5EF4-FFF2-40B4-BE49-F238E27FC236}">
-                <a16:creationId xmlns:a16="http://schemas.microsoft.com/office/drawing/2014/main" id="{26CFADEB-D2F5-E274-9860-ACE0FEF5EBE3}"/>
-              </a:ext>
-            </a:extLst>
-          </p:cNvPr>
-          <p:cNvPicPr>
-            <a:picLocks noChangeAspect="1"/>
-          </p:cNvPicPr>
-          <p:nvPr/>
-        </p:nvPicPr>
-        <p:blipFill>
-          <a:blip r:embed="rId4"/>
-          <a:stretch>
-            <a:fillRect/>
-          </a:stretch>
-        </p:blipFill>
-        <p:spPr>
-          <a:xfrm>
-            <a:off x="381000" y="2915602"/>
-            <a:ext cx="4314606" cy="3462338"/>
-          </a:xfrm>
-          <a:prstGeom prst="rect">
-            <a:avLst/>
-          </a:prstGeom>
-        </p:spPr>
-      </p:pic>
-      <p:sp>
-        <p:nvSpPr>
-          <p:cNvPr id="11" name="CuadroTexto 10">
-            <a:extLst>
-              <a:ext uri="{FF2B5EF4-FFF2-40B4-BE49-F238E27FC236}">
-                <a16:creationId xmlns:a16="http://schemas.microsoft.com/office/drawing/2014/main" id="{BFAF3784-0FF0-9D2F-AF31-5D982A9CA718}"/>
-              </a:ext>
-            </a:extLst>
-          </p:cNvPr>
-          <p:cNvSpPr txBox="1"/>
-          <p:nvPr/>
-        </p:nvSpPr>
-        <p:spPr>
-          <a:xfrm>
-            <a:off x="5257800" y="3686383"/>
-            <a:ext cx="4724400" cy="1200329"/>
-          </a:xfrm>
-          <a:prstGeom prst="rect">
-            <a:avLst/>
-          </a:prstGeom>
-          <a:noFill/>
-        </p:spPr>
-        <p:txBody>
-          <a:bodyPr wrap="square" rtlCol="0">
-            <a:spAutoFit/>
-          </a:bodyPr>
-          <a:lstStyle/>
-          <a:p>
-            <a:r>
-              <a:rPr lang="es-ES" dirty="0"/>
-              <a:t>Podemos elegir la m según lo fino que nos interese que sea nuestro filtro y obtenemos las longitudes de los brazos. He dejado Lu fija solo cambiamos el incremento. </a:t>
-            </a:r>
-          </a:p>
-        </p:txBody>
-      </p:sp>
-      <p:pic>
-        <p:nvPicPr>
-          <p:cNvPr id="13" name="Imagen 12">
-            <a:extLst>
-              <a:ext uri="{FF2B5EF4-FFF2-40B4-BE49-F238E27FC236}">
-                <a16:creationId xmlns:a16="http://schemas.microsoft.com/office/drawing/2014/main" id="{362AAAEC-8C47-B016-8E59-7C040F37A647}"/>
-              </a:ext>
-            </a:extLst>
-          </p:cNvPr>
-          <p:cNvPicPr>
-            <a:picLocks noChangeAspect="1"/>
-          </p:cNvPicPr>
-          <p:nvPr/>
-        </p:nvPicPr>
-        <p:blipFill>
-          <a:blip r:embed="rId5"/>
-          <a:stretch>
-            <a:fillRect/>
-          </a:stretch>
-        </p:blipFill>
-        <p:spPr>
-          <a:xfrm>
-            <a:off x="8133263" y="4646771"/>
-            <a:ext cx="2411131" cy="1934858"/>
-          </a:xfrm>
-          <a:prstGeom prst="rect">
-            <a:avLst/>
-          </a:prstGeom>
-        </p:spPr>
-      </p:pic>
-    </p:spTree>
-    <p:extLst>
-      <p:ext uri="{BB962C8B-B14F-4D97-AF65-F5344CB8AC3E}">
-        <p14:creationId xmlns:p14="http://schemas.microsoft.com/office/powerpoint/2010/main" val="2832491540"/>
       </p:ext>
     </p:extLst>
   </p:cSld>

--- a/LabBook_3.pptx
+++ b/LabBook_3.pptx
@@ -5,10 +5,10 @@
     <p:sldMasterId id="2147483648" r:id="rId1"/>
   </p:sldMasterIdLst>
   <p:notesMasterIdLst>
-    <p:notesMasterId r:id="rId15"/>
+    <p:notesMasterId r:id="rId17"/>
   </p:notesMasterIdLst>
   <p:handoutMasterIdLst>
-    <p:handoutMasterId r:id="rId16"/>
+    <p:handoutMasterId r:id="rId18"/>
   </p:handoutMasterIdLst>
   <p:sldIdLst>
     <p:sldId id="256" r:id="rId2"/>
@@ -16,14 +16,16 @@
     <p:sldId id="290" r:id="rId4"/>
     <p:sldId id="301" r:id="rId5"/>
     <p:sldId id="302" r:id="rId6"/>
-    <p:sldId id="297" r:id="rId7"/>
-    <p:sldId id="295" r:id="rId8"/>
-    <p:sldId id="296" r:id="rId9"/>
-    <p:sldId id="298" r:id="rId10"/>
-    <p:sldId id="293" r:id="rId11"/>
-    <p:sldId id="299" r:id="rId12"/>
-    <p:sldId id="300" r:id="rId13"/>
-    <p:sldId id="288" r:id="rId14"/>
+    <p:sldId id="303" r:id="rId7"/>
+    <p:sldId id="304" r:id="rId8"/>
+    <p:sldId id="297" r:id="rId9"/>
+    <p:sldId id="295" r:id="rId10"/>
+    <p:sldId id="296" r:id="rId11"/>
+    <p:sldId id="298" r:id="rId12"/>
+    <p:sldId id="293" r:id="rId13"/>
+    <p:sldId id="299" r:id="rId14"/>
+    <p:sldId id="300" r:id="rId15"/>
+    <p:sldId id="288" r:id="rId16"/>
   </p:sldIdLst>
   <p:sldSz cx="12192000" cy="6858000"/>
   <p:notesSz cx="12192000" cy="6858000"/>
@@ -238,7 +240,7 @@
           <a:p>
             <a:fld id="{8438F8DC-35B0-48E6-A86E-42F1F08DD00F}" type="datetimeFigureOut">
               <a:rPr lang="es-ES" smtClean="0"/>
-              <a:t>09/03/2026</a:t>
+              <a:t>10/03/2026</a:t>
             </a:fld>
             <a:endParaRPr lang="es-ES"/>
           </a:p>
@@ -415,7 +417,7 @@
           <a:p>
             <a:fld id="{FACBDC12-F39B-4B97-8F4D-6734F9D366FF}" type="datetimeFigureOut">
               <a:rPr lang="es-ES" smtClean="0"/>
-              <a:t>09/03/2026</a:t>
+              <a:t>10/03/2026</a:t>
             </a:fld>
             <a:endParaRPr lang="es-ES"/>
           </a:p>
@@ -990,6 +992,222 @@
         <p:cNvPr id="1" name="">
           <a:extLst>
             <a:ext uri="{FF2B5EF4-FFF2-40B4-BE49-F238E27FC236}">
+              <a16:creationId xmlns:a16="http://schemas.microsoft.com/office/drawing/2014/main" id="{08A9E6B9-9B3E-B11C-43C8-BFCE6EE579F4}"/>
+            </a:ext>
+          </a:extLst>
+        </p:cNvPr>
+        <p:cNvGrpSpPr/>
+        <p:nvPr/>
+      </p:nvGrpSpPr>
+      <p:grpSpPr>
+        <a:xfrm>
+          <a:off x="0" y="0"/>
+          <a:ext cx="0" cy="0"/>
+          <a:chOff x="0" y="0"/>
+          <a:chExt cx="0" cy="0"/>
+        </a:xfrm>
+      </p:grpSpPr>
+      <p:sp>
+        <p:nvSpPr>
+          <p:cNvPr id="2" name="Marcador de imagen de diapositiva 1">
+            <a:extLst>
+              <a:ext uri="{FF2B5EF4-FFF2-40B4-BE49-F238E27FC236}">
+                <a16:creationId xmlns:a16="http://schemas.microsoft.com/office/drawing/2014/main" id="{553D6AF3-D25A-40A7-619D-A75BD3FF30B3}"/>
+              </a:ext>
+            </a:extLst>
+          </p:cNvPr>
+          <p:cNvSpPr>
+            <a:spLocks noGrp="1" noRot="1" noChangeAspect="1"/>
+          </p:cNvSpPr>
+          <p:nvPr>
+            <p:ph type="sldImg"/>
+          </p:nvPr>
+        </p:nvSpPr>
+        <p:spPr/>
+      </p:sp>
+      <p:sp>
+        <p:nvSpPr>
+          <p:cNvPr id="3" name="Marcador de notas 2">
+            <a:extLst>
+              <a:ext uri="{FF2B5EF4-FFF2-40B4-BE49-F238E27FC236}">
+                <a16:creationId xmlns:a16="http://schemas.microsoft.com/office/drawing/2014/main" id="{F4FDDCAE-79AD-159B-73D2-7279ABBFE007}"/>
+              </a:ext>
+            </a:extLst>
+          </p:cNvPr>
+          <p:cNvSpPr>
+            <a:spLocks noGrp="1"/>
+          </p:cNvSpPr>
+          <p:nvPr>
+            <p:ph type="body" idx="1"/>
+          </p:nvPr>
+        </p:nvSpPr>
+        <p:spPr/>
+        <p:txBody>
+          <a:bodyPr/>
+          <a:lstStyle/>
+          <a:p>
+            <a:endParaRPr lang="es-ES" dirty="0"/>
+          </a:p>
+        </p:txBody>
+      </p:sp>
+      <p:sp>
+        <p:nvSpPr>
+          <p:cNvPr id="4" name="Marcador de número de diapositiva 3">
+            <a:extLst>
+              <a:ext uri="{FF2B5EF4-FFF2-40B4-BE49-F238E27FC236}">
+                <a16:creationId xmlns:a16="http://schemas.microsoft.com/office/drawing/2014/main" id="{ACD44221-02DC-B5EC-A3BE-7B783D8614E9}"/>
+              </a:ext>
+            </a:extLst>
+          </p:cNvPr>
+          <p:cNvSpPr>
+            <a:spLocks noGrp="1"/>
+          </p:cNvSpPr>
+          <p:nvPr>
+            <p:ph type="sldNum" sz="quarter" idx="5"/>
+          </p:nvPr>
+        </p:nvSpPr>
+        <p:spPr/>
+        <p:txBody>
+          <a:bodyPr/>
+          <a:lstStyle/>
+          <a:p>
+            <a:fld id="{676223B9-C868-4436-87D9-1A3152E1157A}" type="slidenum">
+              <a:rPr lang="es-ES" smtClean="0"/>
+              <a:t>6</a:t>
+            </a:fld>
+            <a:endParaRPr lang="es-ES"/>
+          </a:p>
+        </p:txBody>
+      </p:sp>
+    </p:spTree>
+    <p:extLst>
+      <p:ext uri="{BB962C8B-B14F-4D97-AF65-F5344CB8AC3E}">
+        <p14:creationId xmlns:p14="http://schemas.microsoft.com/office/powerpoint/2010/main" val="1010954544"/>
+      </p:ext>
+    </p:extLst>
+  </p:cSld>
+  <p:clrMapOvr>
+    <a:masterClrMapping/>
+  </p:clrMapOvr>
+</p:notes>
+</file>
+
+<file path=ppt/notesSlides/notesSlide5.xml><?xml version="1.0" encoding="utf-8"?>
+<p:notes xmlns:a="http://schemas.openxmlformats.org/drawingml/2006/main" xmlns:r="http://schemas.openxmlformats.org/officeDocument/2006/relationships" xmlns:p="http://schemas.openxmlformats.org/presentationml/2006/main">
+  <p:cSld>
+    <p:spTree>
+      <p:nvGrpSpPr>
+        <p:cNvPr id="1" name="">
+          <a:extLst>
+            <a:ext uri="{FF2B5EF4-FFF2-40B4-BE49-F238E27FC236}">
+              <a16:creationId xmlns:a16="http://schemas.microsoft.com/office/drawing/2014/main" id="{14EAF9CB-7A31-33EF-FAD4-9F5D81F6F080}"/>
+            </a:ext>
+          </a:extLst>
+        </p:cNvPr>
+        <p:cNvGrpSpPr/>
+        <p:nvPr/>
+      </p:nvGrpSpPr>
+      <p:grpSpPr>
+        <a:xfrm>
+          <a:off x="0" y="0"/>
+          <a:ext cx="0" cy="0"/>
+          <a:chOff x="0" y="0"/>
+          <a:chExt cx="0" cy="0"/>
+        </a:xfrm>
+      </p:grpSpPr>
+      <p:sp>
+        <p:nvSpPr>
+          <p:cNvPr id="2" name="Marcador de imagen de diapositiva 1">
+            <a:extLst>
+              <a:ext uri="{FF2B5EF4-FFF2-40B4-BE49-F238E27FC236}">
+                <a16:creationId xmlns:a16="http://schemas.microsoft.com/office/drawing/2014/main" id="{54F87352-5E9C-C24F-4D00-7B59899B57DD}"/>
+              </a:ext>
+            </a:extLst>
+          </p:cNvPr>
+          <p:cNvSpPr>
+            <a:spLocks noGrp="1" noRot="1" noChangeAspect="1"/>
+          </p:cNvSpPr>
+          <p:nvPr>
+            <p:ph type="sldImg"/>
+          </p:nvPr>
+        </p:nvSpPr>
+        <p:spPr/>
+      </p:sp>
+      <p:sp>
+        <p:nvSpPr>
+          <p:cNvPr id="3" name="Marcador de notas 2">
+            <a:extLst>
+              <a:ext uri="{FF2B5EF4-FFF2-40B4-BE49-F238E27FC236}">
+                <a16:creationId xmlns:a16="http://schemas.microsoft.com/office/drawing/2014/main" id="{794B4BBC-8F66-0E45-0720-18A7CE4299EF}"/>
+              </a:ext>
+            </a:extLst>
+          </p:cNvPr>
+          <p:cNvSpPr>
+            <a:spLocks noGrp="1"/>
+          </p:cNvSpPr>
+          <p:nvPr>
+            <p:ph type="body" idx="1"/>
+          </p:nvPr>
+        </p:nvSpPr>
+        <p:spPr/>
+        <p:txBody>
+          <a:bodyPr/>
+          <a:lstStyle/>
+          <a:p>
+            <a:endParaRPr lang="es-ES" dirty="0"/>
+          </a:p>
+        </p:txBody>
+      </p:sp>
+      <p:sp>
+        <p:nvSpPr>
+          <p:cNvPr id="4" name="Marcador de número de diapositiva 3">
+            <a:extLst>
+              <a:ext uri="{FF2B5EF4-FFF2-40B4-BE49-F238E27FC236}">
+                <a16:creationId xmlns:a16="http://schemas.microsoft.com/office/drawing/2014/main" id="{6849E2B9-EEB2-D4DB-D442-94B826C7A671}"/>
+              </a:ext>
+            </a:extLst>
+          </p:cNvPr>
+          <p:cNvSpPr>
+            <a:spLocks noGrp="1"/>
+          </p:cNvSpPr>
+          <p:nvPr>
+            <p:ph type="sldNum" sz="quarter" idx="5"/>
+          </p:nvPr>
+        </p:nvSpPr>
+        <p:spPr/>
+        <p:txBody>
+          <a:bodyPr/>
+          <a:lstStyle/>
+          <a:p>
+            <a:fld id="{676223B9-C868-4436-87D9-1A3152E1157A}" type="slidenum">
+              <a:rPr lang="es-ES" smtClean="0"/>
+              <a:t>7</a:t>
+            </a:fld>
+            <a:endParaRPr lang="es-ES"/>
+          </a:p>
+        </p:txBody>
+      </p:sp>
+    </p:spTree>
+    <p:extLst>
+      <p:ext uri="{BB962C8B-B14F-4D97-AF65-F5344CB8AC3E}">
+        <p14:creationId xmlns:p14="http://schemas.microsoft.com/office/powerpoint/2010/main" val="98222993"/>
+      </p:ext>
+    </p:extLst>
+  </p:cSld>
+  <p:clrMapOvr>
+    <a:masterClrMapping/>
+  </p:clrMapOvr>
+</p:notes>
+</file>
+
+<file path=ppt/notesSlides/notesSlide6.xml><?xml version="1.0" encoding="utf-8"?>
+<p:notes xmlns:a="http://schemas.openxmlformats.org/drawingml/2006/main" xmlns:r="http://schemas.openxmlformats.org/officeDocument/2006/relationships" xmlns:p="http://schemas.openxmlformats.org/presentationml/2006/main">
+  <p:cSld>
+    <p:spTree>
+      <p:nvGrpSpPr>
+        <p:cNvPr id="1" name="">
+          <a:extLst>
+            <a:ext uri="{FF2B5EF4-FFF2-40B4-BE49-F238E27FC236}">
               <a16:creationId xmlns:a16="http://schemas.microsoft.com/office/drawing/2014/main" id="{845763E5-B315-6B89-9E6A-296CC0C32BEB}"/>
             </a:ext>
           </a:extLst>
@@ -1071,7 +1289,7 @@
           <a:p>
             <a:fld id="{676223B9-C868-4436-87D9-1A3152E1157A}" type="slidenum">
               <a:rPr lang="es-ES" smtClean="0"/>
-              <a:t>6</a:t>
+              <a:t>8</a:t>
             </a:fld>
             <a:endParaRPr lang="es-ES"/>
           </a:p>
@@ -1090,7 +1308,7 @@
 </p:notes>
 </file>
 
-<file path=ppt/notesSlides/notesSlide5.xml><?xml version="1.0" encoding="utf-8"?>
+<file path=ppt/notesSlides/notesSlide7.xml><?xml version="1.0" encoding="utf-8"?>
 <p:notes xmlns:a="http://schemas.openxmlformats.org/drawingml/2006/main" xmlns:r="http://schemas.openxmlformats.org/officeDocument/2006/relationships" xmlns:p="http://schemas.openxmlformats.org/presentationml/2006/main">
   <p:cSld>
     <p:spTree>
@@ -1179,7 +1397,7 @@
           <a:p>
             <a:fld id="{676223B9-C868-4436-87D9-1A3152E1157A}" type="slidenum">
               <a:rPr lang="es-ES" smtClean="0"/>
-              <a:t>7</a:t>
+              <a:t>9</a:t>
             </a:fld>
             <a:endParaRPr lang="es-ES"/>
           </a:p>
@@ -1198,7 +1416,7 @@
 </p:notes>
 </file>
 
-<file path=ppt/notesSlides/notesSlide6.xml><?xml version="1.0" encoding="utf-8"?>
+<file path=ppt/notesSlides/notesSlide8.xml><?xml version="1.0" encoding="utf-8"?>
 <p:notes xmlns:a="http://schemas.openxmlformats.org/drawingml/2006/main" xmlns:r="http://schemas.openxmlformats.org/officeDocument/2006/relationships" xmlns:p="http://schemas.openxmlformats.org/presentationml/2006/main">
   <p:cSld>
     <p:spTree>
@@ -1287,7 +1505,7 @@
           <a:p>
             <a:fld id="{676223B9-C868-4436-87D9-1A3152E1157A}" type="slidenum">
               <a:rPr lang="es-ES" smtClean="0"/>
-              <a:t>8</a:t>
+              <a:t>10</a:t>
             </a:fld>
             <a:endParaRPr lang="es-ES"/>
           </a:p>
@@ -1306,7 +1524,7 @@
 </p:notes>
 </file>
 
-<file path=ppt/notesSlides/notesSlide7.xml><?xml version="1.0" encoding="utf-8"?>
+<file path=ppt/notesSlides/notesSlide9.xml><?xml version="1.0" encoding="utf-8"?>
 <p:notes xmlns:a="http://schemas.openxmlformats.org/drawingml/2006/main" xmlns:r="http://schemas.openxmlformats.org/officeDocument/2006/relationships" xmlns:p="http://schemas.openxmlformats.org/presentationml/2006/main">
   <p:cSld>
     <p:spTree>
@@ -1395,7 +1613,7 @@
           <a:p>
             <a:fld id="{676223B9-C868-4436-87D9-1A3152E1157A}" type="slidenum">
               <a:rPr lang="es-ES" smtClean="0"/>
-              <a:t>10</a:t>
+              <a:t>12</a:t>
             </a:fld>
             <a:endParaRPr lang="es-ES"/>
           </a:p>
@@ -3063,6 +3281,916 @@
         <p:cNvPr id="1" name="">
           <a:extLst>
             <a:ext uri="{FF2B5EF4-FFF2-40B4-BE49-F238E27FC236}">
+              <a16:creationId xmlns:a16="http://schemas.microsoft.com/office/drawing/2014/main" id="{98CB9552-DF22-1310-10FA-4D2D2AF77601}"/>
+            </a:ext>
+          </a:extLst>
+        </p:cNvPr>
+        <p:cNvGrpSpPr/>
+        <p:nvPr/>
+      </p:nvGrpSpPr>
+      <p:grpSpPr>
+        <a:xfrm>
+          <a:off x="0" y="0"/>
+          <a:ext cx="0" cy="0"/>
+          <a:chOff x="0" y="0"/>
+          <a:chExt cx="0" cy="0"/>
+        </a:xfrm>
+      </p:grpSpPr>
+      <p:sp>
+        <p:nvSpPr>
+          <p:cNvPr id="16" name="object 16">
+            <a:extLst>
+              <a:ext uri="{FF2B5EF4-FFF2-40B4-BE49-F238E27FC236}">
+                <a16:creationId xmlns:a16="http://schemas.microsoft.com/office/drawing/2014/main" id="{B0632A48-0384-0EF1-389E-FBF3F9C3E7CE}"/>
+              </a:ext>
+            </a:extLst>
+          </p:cNvPr>
+          <p:cNvSpPr txBox="1">
+            <a:spLocks noGrp="1"/>
+          </p:cNvSpPr>
+          <p:nvPr>
+            <p:ph type="title"/>
+          </p:nvPr>
+        </p:nvSpPr>
+        <p:spPr>
+          <a:xfrm>
+            <a:off x="685800" y="408883"/>
+            <a:ext cx="10994410" cy="782265"/>
+          </a:xfrm>
+          <a:prstGeom prst="rect">
+            <a:avLst/>
+          </a:prstGeom>
+        </p:spPr>
+        <p:txBody>
+          <a:bodyPr vert="horz" wrap="square" lIns="0" tIns="12700" rIns="0" bIns="0" rtlCol="0">
+            <a:spAutoFit/>
+          </a:bodyPr>
+          <a:lstStyle/>
+          <a:p>
+            <a:pPr marL="12700">
+              <a:lnSpc>
+                <a:spcPct val="100000"/>
+              </a:lnSpc>
+              <a:spcBef>
+                <a:spcPts val="100"/>
+              </a:spcBef>
+            </a:pPr>
+            <a:r>
+              <a:rPr lang="en-US" sz="2400" b="1" dirty="0"/>
+              <a:t>ASSESSMENT #3 </a:t>
+            </a:r>
+            <a:r>
+              <a:rPr lang="en-US" sz="2500" dirty="0"/>
+              <a:t>– SAX implementation </a:t>
+            </a:r>
+            <a:br>
+              <a:rPr lang="es-ES" sz="2500" spc="-5" dirty="0">
+                <a:latin typeface="+mj-lt"/>
+                <a:cs typeface="Lucida Sans"/>
+              </a:rPr>
+            </a:br>
+            <a:endParaRPr sz="2500" b="0" dirty="0">
+              <a:latin typeface="+mj-lt"/>
+              <a:cs typeface="Lucida Sans"/>
+            </a:endParaRPr>
+          </a:p>
+        </p:txBody>
+      </p:sp>
+      <p:pic>
+        <p:nvPicPr>
+          <p:cNvPr id="83" name="Gráfico 82">
+            <a:extLst>
+              <a:ext uri="{FF2B5EF4-FFF2-40B4-BE49-F238E27FC236}">
+                <a16:creationId xmlns:a16="http://schemas.microsoft.com/office/drawing/2014/main" id="{1F43E6A6-5CC3-9B99-14AC-997478150C3D}"/>
+              </a:ext>
+            </a:extLst>
+          </p:cNvPr>
+          <p:cNvPicPr>
+            <a:picLocks noChangeAspect="1"/>
+          </p:cNvPicPr>
+          <p:nvPr/>
+        </p:nvPicPr>
+        <p:blipFill>
+          <a:blip r:embed="rId3">
+            <a:extLst>
+              <a:ext uri="{96DAC541-7B7A-43D3-8B79-37D633B846F1}">
+                <asvg:svgBlip xmlns:asvg="http://schemas.microsoft.com/office/drawing/2016/SVG/main" r:embed="rId4"/>
+              </a:ext>
+            </a:extLst>
+          </a:blip>
+          <a:stretch>
+            <a:fillRect/>
+          </a:stretch>
+        </p:blipFill>
+        <p:spPr>
+          <a:xfrm>
+            <a:off x="5045006" y="6356057"/>
+            <a:ext cx="6409575" cy="363174"/>
+          </a:xfrm>
+          <a:prstGeom prst="rect">
+            <a:avLst/>
+          </a:prstGeom>
+        </p:spPr>
+      </p:pic>
+      <p:sp>
+        <p:nvSpPr>
+          <p:cNvPr id="84" name="Marcador de número de diapositiva 83">
+            <a:extLst>
+              <a:ext uri="{FF2B5EF4-FFF2-40B4-BE49-F238E27FC236}">
+                <a16:creationId xmlns:a16="http://schemas.microsoft.com/office/drawing/2014/main" id="{DFC09DB6-1DF7-C8F9-7414-27BC280DEA0F}"/>
+              </a:ext>
+            </a:extLst>
+          </p:cNvPr>
+          <p:cNvSpPr>
+            <a:spLocks noGrp="1"/>
+          </p:cNvSpPr>
+          <p:nvPr>
+            <p:ph type="sldNum" sz="quarter" idx="7"/>
+          </p:nvPr>
+        </p:nvSpPr>
+        <p:spPr/>
+        <p:txBody>
+          <a:bodyPr/>
+          <a:lstStyle/>
+          <a:p>
+            <a:fld id="{B6F15528-21DE-4FAA-801E-634DDDAF4B2B}" type="slidenum">
+              <a:rPr lang="es-ES" smtClean="0"/>
+              <a:t>10</a:t>
+            </a:fld>
+            <a:endParaRPr lang="es-ES"/>
+          </a:p>
+        </p:txBody>
+      </p:sp>
+      <p:sp>
+        <p:nvSpPr>
+          <p:cNvPr id="4" name="Marcador de texto 2">
+            <a:extLst>
+              <a:ext uri="{FF2B5EF4-FFF2-40B4-BE49-F238E27FC236}">
+                <a16:creationId xmlns:a16="http://schemas.microsoft.com/office/drawing/2014/main" id="{EBC8DCFA-5565-A757-1F8D-F4CCCF573A63}"/>
+              </a:ext>
+            </a:extLst>
+          </p:cNvPr>
+          <p:cNvSpPr txBox="1">
+            <a:spLocks/>
+          </p:cNvSpPr>
+          <p:nvPr/>
+        </p:nvSpPr>
+        <p:spPr>
+          <a:xfrm>
+            <a:off x="571500" y="1066800"/>
+            <a:ext cx="11048999" cy="4958137"/>
+          </a:xfrm>
+          <a:prstGeom prst="rect">
+            <a:avLst/>
+          </a:prstGeom>
+        </p:spPr>
+        <p:txBody>
+          <a:bodyPr>
+            <a:normAutofit/>
+          </a:bodyPr>
+          <a:lstStyle>
+            <a:lvl1pPr marL="0">
+              <a:defRPr>
+                <a:latin typeface="+mn-lt"/>
+                <a:ea typeface="+mn-ea"/>
+                <a:cs typeface="+mn-cs"/>
+              </a:defRPr>
+            </a:lvl1pPr>
+            <a:lvl2pPr marL="457200">
+              <a:defRPr>
+                <a:latin typeface="+mn-lt"/>
+                <a:ea typeface="+mn-ea"/>
+                <a:cs typeface="+mn-cs"/>
+              </a:defRPr>
+            </a:lvl2pPr>
+            <a:lvl3pPr marL="914400">
+              <a:defRPr>
+                <a:latin typeface="+mn-lt"/>
+                <a:ea typeface="+mn-ea"/>
+                <a:cs typeface="+mn-cs"/>
+              </a:defRPr>
+            </a:lvl3pPr>
+            <a:lvl4pPr marL="1371600">
+              <a:defRPr>
+                <a:latin typeface="+mn-lt"/>
+                <a:ea typeface="+mn-ea"/>
+                <a:cs typeface="+mn-cs"/>
+              </a:defRPr>
+            </a:lvl4pPr>
+            <a:lvl5pPr marL="1828800">
+              <a:defRPr>
+                <a:latin typeface="+mn-lt"/>
+                <a:ea typeface="+mn-ea"/>
+                <a:cs typeface="+mn-cs"/>
+              </a:defRPr>
+            </a:lvl5pPr>
+            <a:lvl6pPr marL="2286000">
+              <a:defRPr>
+                <a:latin typeface="+mn-lt"/>
+                <a:ea typeface="+mn-ea"/>
+                <a:cs typeface="+mn-cs"/>
+              </a:defRPr>
+            </a:lvl6pPr>
+            <a:lvl7pPr marL="2743200">
+              <a:defRPr>
+                <a:latin typeface="+mn-lt"/>
+                <a:ea typeface="+mn-ea"/>
+                <a:cs typeface="+mn-cs"/>
+              </a:defRPr>
+            </a:lvl7pPr>
+            <a:lvl8pPr marL="3200400">
+              <a:defRPr>
+                <a:latin typeface="+mn-lt"/>
+                <a:ea typeface="+mn-ea"/>
+                <a:cs typeface="+mn-cs"/>
+              </a:defRPr>
+            </a:lvl8pPr>
+            <a:lvl9pPr marL="3657600">
+              <a:defRPr>
+                <a:latin typeface="+mn-lt"/>
+                <a:ea typeface="+mn-ea"/>
+                <a:cs typeface="+mn-cs"/>
+              </a:defRPr>
+            </a:lvl9pPr>
+          </a:lstStyle>
+          <a:p>
+            <a:r>
+              <a:rPr lang="en-US" dirty="0"/>
+              <a:t>Now, we are going to implement the design parameters in the MZI model developed in SAX and compare the response obtained with the one simulated by mathematical formulation. This will help us to identify any error in the definition of the SAX model single components. </a:t>
+            </a:r>
+          </a:p>
+          <a:p>
+            <a:br>
+              <a:rPr lang="en-US" dirty="0"/>
+            </a:br>
+            <a:r>
+              <a:rPr lang="en-US" dirty="0"/>
+              <a:t>In order to implement the SAX model, take as example the following lines:</a:t>
+            </a:r>
+          </a:p>
+          <a:p>
+            <a:endParaRPr lang="en-US" dirty="0"/>
+          </a:p>
+          <a:p>
+            <a:pPr lvl="2">
+              <a:lnSpc>
+                <a:spcPts val="1425"/>
+              </a:lnSpc>
+            </a:pPr>
+            <a:r>
+              <a:rPr lang="es-ES" sz="1400" b="0" dirty="0">
+                <a:effectLst/>
+                <a:latin typeface="Courier New" panose="02070309020205020404" pitchFamily="49" charset="0"/>
+              </a:rPr>
+              <a:t> </a:t>
+            </a:r>
+            <a:r>
+              <a:rPr lang="es-ES" sz="1400" b="0" dirty="0" err="1">
+                <a:effectLst/>
+                <a:latin typeface="Courier New" panose="02070309020205020404" pitchFamily="49" charset="0"/>
+              </a:rPr>
+              <a:t>mzi_test</a:t>
+            </a:r>
+            <a:r>
+              <a:rPr lang="es-ES" sz="1400" b="0" dirty="0">
+                <a:effectLst/>
+                <a:latin typeface="Courier New" panose="02070309020205020404" pitchFamily="49" charset="0"/>
+              </a:rPr>
+              <a:t> = </a:t>
+            </a:r>
+            <a:r>
+              <a:rPr lang="es-ES" sz="1400" b="0" dirty="0" err="1">
+                <a:effectLst/>
+                <a:latin typeface="Courier New" panose="02070309020205020404" pitchFamily="49" charset="0"/>
+              </a:rPr>
+              <a:t>mzi</a:t>
+            </a:r>
+            <a:r>
+              <a:rPr lang="es-ES" sz="1400" b="0" dirty="0">
+                <a:effectLst/>
+                <a:latin typeface="Courier New" panose="02070309020205020404" pitchFamily="49" charset="0"/>
+              </a:rPr>
+              <a:t>(</a:t>
+            </a:r>
+            <a:r>
+              <a:rPr lang="es-ES" sz="1400" b="0" dirty="0" err="1">
+                <a:effectLst/>
+                <a:latin typeface="Courier New" panose="02070309020205020404" pitchFamily="49" charset="0"/>
+              </a:rPr>
+              <a:t>wl</a:t>
+            </a:r>
+            <a:r>
+              <a:rPr lang="es-ES" sz="1400" b="0" dirty="0">
+                <a:effectLst/>
+                <a:latin typeface="Courier New" panose="02070309020205020404" pitchFamily="49" charset="0"/>
+              </a:rPr>
+              <a:t>=</a:t>
+            </a:r>
+            <a:r>
+              <a:rPr lang="es-ES" sz="1400" b="0" dirty="0" err="1">
+                <a:effectLst/>
+                <a:latin typeface="Courier New" panose="02070309020205020404" pitchFamily="49" charset="0"/>
+              </a:rPr>
+              <a:t>wl</a:t>
+            </a:r>
+            <a:r>
+              <a:rPr lang="es-ES" sz="1400" b="0" dirty="0">
+                <a:effectLst/>
+                <a:latin typeface="Courier New" panose="02070309020205020404" pitchFamily="49" charset="0"/>
+              </a:rPr>
+              <a:t>, </a:t>
+            </a:r>
+          </a:p>
+          <a:p>
+            <a:pPr lvl="2">
+              <a:lnSpc>
+                <a:spcPts val="1425"/>
+              </a:lnSpc>
+            </a:pPr>
+            <a:r>
+              <a:rPr lang="es-ES" sz="1400" b="0" dirty="0">
+                <a:effectLst/>
+                <a:latin typeface="Courier New" panose="02070309020205020404" pitchFamily="49" charset="0"/>
+              </a:rPr>
+              <a:t>    </a:t>
+            </a:r>
+            <a:r>
+              <a:rPr lang="es-ES" sz="1400" b="0" dirty="0" err="1">
+                <a:effectLst/>
+                <a:latin typeface="Courier New" panose="02070309020205020404" pitchFamily="49" charset="0"/>
+              </a:rPr>
+              <a:t>coup_a</a:t>
+            </a:r>
+            <a:r>
+              <a:rPr lang="es-ES" sz="1400" b="0" dirty="0">
+                <a:effectLst/>
+                <a:latin typeface="Courier New" panose="02070309020205020404" pitchFamily="49" charset="0"/>
+              </a:rPr>
+              <a:t> = ...</a:t>
+            </a:r>
+          </a:p>
+          <a:p>
+            <a:pPr lvl="2">
+              <a:lnSpc>
+                <a:spcPts val="1425"/>
+              </a:lnSpc>
+            </a:pPr>
+            <a:r>
+              <a:rPr lang="es-ES" sz="1400" b="0" dirty="0">
+                <a:effectLst/>
+                <a:latin typeface="Courier New" panose="02070309020205020404" pitchFamily="49" charset="0"/>
+              </a:rPr>
+              <a:t>    </a:t>
+            </a:r>
+            <a:r>
+              <a:rPr lang="es-ES" sz="1400" b="0" dirty="0" err="1">
+                <a:effectLst/>
+                <a:latin typeface="Courier New" panose="02070309020205020404" pitchFamily="49" charset="0"/>
+              </a:rPr>
+              <a:t>wvg_d</a:t>
+            </a:r>
+            <a:r>
+              <a:rPr lang="es-ES" sz="1400" b="0" dirty="0">
+                <a:effectLst/>
+                <a:latin typeface="Courier New" panose="02070309020205020404" pitchFamily="49" charset="0"/>
+              </a:rPr>
+              <a:t>={"</a:t>
+            </a:r>
+            <a:r>
+              <a:rPr lang="es-ES" sz="1400" b="0" dirty="0" err="1">
+                <a:effectLst/>
+                <a:latin typeface="Courier New" panose="02070309020205020404" pitchFamily="49" charset="0"/>
+              </a:rPr>
+              <a:t>length</a:t>
+            </a:r>
+            <a:r>
+              <a:rPr lang="es-ES" sz="1400" b="0" dirty="0">
+                <a:effectLst/>
+                <a:latin typeface="Courier New" panose="02070309020205020404" pitchFamily="49" charset="0"/>
+              </a:rPr>
+              <a:t>": </a:t>
+            </a:r>
+            <a:r>
+              <a:rPr lang="es-ES" sz="1400" b="0" dirty="0" err="1">
+                <a:effectLst/>
+                <a:latin typeface="Courier New" panose="02070309020205020404" pitchFamily="49" charset="0"/>
+              </a:rPr>
+              <a:t>l_d</a:t>
+            </a:r>
+            <a:r>
+              <a:rPr lang="es-ES" sz="1400" b="0" dirty="0">
+                <a:effectLst/>
+                <a:latin typeface="Courier New" panose="02070309020205020404" pitchFamily="49" charset="0"/>
+              </a:rPr>
+              <a:t>, "</a:t>
+            </a:r>
+            <a:r>
+              <a:rPr lang="es-ES" sz="1400" b="0" dirty="0" err="1">
+                <a:effectLst/>
+                <a:latin typeface="Courier New" panose="02070309020205020404" pitchFamily="49" charset="0"/>
+              </a:rPr>
+              <a:t>neff</a:t>
+            </a:r>
+            <a:r>
+              <a:rPr lang="es-ES" sz="1400" b="0" dirty="0">
+                <a:effectLst/>
+                <a:latin typeface="Courier New" panose="02070309020205020404" pitchFamily="49" charset="0"/>
+              </a:rPr>
+              <a:t>": ...}, </a:t>
+            </a:r>
+          </a:p>
+          <a:p>
+            <a:pPr lvl="2">
+              <a:lnSpc>
+                <a:spcPts val="1425"/>
+              </a:lnSpc>
+            </a:pPr>
+            <a:r>
+              <a:rPr lang="es-ES" sz="1400" b="0" dirty="0">
+                <a:effectLst/>
+                <a:latin typeface="Courier New" panose="02070309020205020404" pitchFamily="49" charset="0"/>
+              </a:rPr>
+              <a:t>    </a:t>
+            </a:r>
+            <a:r>
+              <a:rPr lang="es-ES" sz="1400" b="0" dirty="0" err="1">
+                <a:effectLst/>
+                <a:latin typeface="Courier New" panose="02070309020205020404" pitchFamily="49" charset="0"/>
+              </a:rPr>
+              <a:t>wvg_u</a:t>
+            </a:r>
+            <a:r>
+              <a:rPr lang="es-ES" sz="1400" b="0" dirty="0">
+                <a:effectLst/>
+                <a:latin typeface="Courier New" panose="02070309020205020404" pitchFamily="49" charset="0"/>
+              </a:rPr>
+              <a:t>={"</a:t>
+            </a:r>
+            <a:r>
+              <a:rPr lang="es-ES" sz="1400" b="0" dirty="0" err="1">
+                <a:effectLst/>
+                <a:latin typeface="Courier New" panose="02070309020205020404" pitchFamily="49" charset="0"/>
+              </a:rPr>
+              <a:t>length</a:t>
+            </a:r>
+            <a:r>
+              <a:rPr lang="es-ES" sz="1400" b="0" dirty="0">
+                <a:effectLst/>
+                <a:latin typeface="Courier New" panose="02070309020205020404" pitchFamily="49" charset="0"/>
+              </a:rPr>
+              <a:t>": </a:t>
+            </a:r>
+            <a:r>
+              <a:rPr lang="es-ES" sz="1400" b="0" dirty="0" err="1">
+                <a:effectLst/>
+                <a:latin typeface="Courier New" panose="02070309020205020404" pitchFamily="49" charset="0"/>
+              </a:rPr>
+              <a:t>l_u</a:t>
+            </a:r>
+            <a:r>
+              <a:rPr lang="es-ES" sz="1400" b="0" dirty="0">
+                <a:effectLst/>
+                <a:latin typeface="Courier New" panose="02070309020205020404" pitchFamily="49" charset="0"/>
+              </a:rPr>
+              <a:t>, "</a:t>
+            </a:r>
+            <a:r>
+              <a:rPr lang="es-ES" sz="1400" b="0" dirty="0" err="1">
+                <a:effectLst/>
+                <a:latin typeface="Courier New" panose="02070309020205020404" pitchFamily="49" charset="0"/>
+              </a:rPr>
+              <a:t>neff</a:t>
+            </a:r>
+            <a:r>
+              <a:rPr lang="es-ES" sz="1400" b="0" dirty="0">
+                <a:effectLst/>
+                <a:latin typeface="Courier New" panose="02070309020205020404" pitchFamily="49" charset="0"/>
+              </a:rPr>
+              <a:t>": ...},</a:t>
+            </a:r>
+          </a:p>
+          <a:p>
+            <a:pPr lvl="2">
+              <a:lnSpc>
+                <a:spcPts val="1425"/>
+              </a:lnSpc>
+            </a:pPr>
+            <a:r>
+              <a:rPr lang="es-ES" sz="1400" b="0" dirty="0">
+                <a:effectLst/>
+                <a:latin typeface="Courier New" panose="02070309020205020404" pitchFamily="49" charset="0"/>
+              </a:rPr>
+              <a:t>    </a:t>
+            </a:r>
+            <a:r>
+              <a:rPr lang="es-ES" sz="1400" b="0" dirty="0" err="1">
+                <a:effectLst/>
+                <a:latin typeface="Courier New" panose="02070309020205020404" pitchFamily="49" charset="0"/>
+              </a:rPr>
+              <a:t>coup_b</a:t>
+            </a:r>
+            <a:r>
+              <a:rPr lang="es-ES" sz="1400" b="0" dirty="0">
+                <a:effectLst/>
+                <a:latin typeface="Courier New" panose="02070309020205020404" pitchFamily="49" charset="0"/>
+              </a:rPr>
+              <a:t> = ... )</a:t>
+            </a:r>
+          </a:p>
+          <a:p>
+            <a:pPr lvl="2">
+              <a:lnSpc>
+                <a:spcPts val="1425"/>
+              </a:lnSpc>
+            </a:pPr>
+            <a:br>
+              <a:rPr lang="es-ES" sz="1400" b="0" dirty="0">
+                <a:effectLst/>
+                <a:latin typeface="Courier New" panose="02070309020205020404" pitchFamily="49" charset="0"/>
+              </a:rPr>
+            </a:br>
+            <a:r>
+              <a:rPr lang="es-ES" sz="1400" b="0" dirty="0">
+                <a:effectLst/>
+                <a:latin typeface="Courier New" panose="02070309020205020404" pitchFamily="49" charset="0"/>
+              </a:rPr>
+              <a:t>    H00 = </a:t>
+            </a:r>
+            <a:r>
+              <a:rPr lang="es-ES" sz="1400" b="0" dirty="0" err="1">
+                <a:effectLst/>
+                <a:latin typeface="Courier New" panose="02070309020205020404" pitchFamily="49" charset="0"/>
+              </a:rPr>
+              <a:t>mzi_test</a:t>
+            </a:r>
+            <a:r>
+              <a:rPr lang="es-ES" sz="1400" b="0" dirty="0">
+                <a:effectLst/>
+                <a:latin typeface="Courier New" panose="02070309020205020404" pitchFamily="49" charset="0"/>
+              </a:rPr>
+              <a:t>["in0", "out0"]</a:t>
+            </a:r>
+          </a:p>
+          <a:p>
+            <a:endParaRPr lang="en-US" sz="2000" dirty="0"/>
+          </a:p>
+          <a:p>
+            <a:pPr algn="just"/>
+            <a:endParaRPr lang="en-US" sz="2000" dirty="0"/>
+          </a:p>
+          <a:p>
+            <a:pPr algn="just"/>
+            <a:endParaRPr lang="en-US" sz="2000" b="1" i="1" dirty="0"/>
+          </a:p>
+          <a:p>
+            <a:pPr algn="just"/>
+            <a:endParaRPr lang="en-US" sz="2000" kern="0" dirty="0">
+              <a:solidFill>
+                <a:sysClr val="windowText" lastClr="000000"/>
+              </a:solidFill>
+            </a:endParaRPr>
+          </a:p>
+          <a:p>
+            <a:endParaRPr lang="en-US" sz="2000" kern="0" dirty="0">
+              <a:solidFill>
+                <a:sysClr val="windowText" lastClr="000000"/>
+              </a:solidFill>
+            </a:endParaRPr>
+          </a:p>
+        </p:txBody>
+      </p:sp>
+      <p:sp>
+        <p:nvSpPr>
+          <p:cNvPr id="2" name="CuadroTexto 1">
+            <a:extLst>
+              <a:ext uri="{FF2B5EF4-FFF2-40B4-BE49-F238E27FC236}">
+                <a16:creationId xmlns:a16="http://schemas.microsoft.com/office/drawing/2014/main" id="{CA4A2D6E-5993-52B3-D251-1ADF2B0C8355}"/>
+              </a:ext>
+            </a:extLst>
+          </p:cNvPr>
+          <p:cNvSpPr txBox="1"/>
+          <p:nvPr/>
+        </p:nvSpPr>
+        <p:spPr>
+          <a:xfrm>
+            <a:off x="609441" y="4860334"/>
+            <a:ext cx="11199971" cy="1384995"/>
+          </a:xfrm>
+          <a:prstGeom prst="rect">
+            <a:avLst/>
+          </a:prstGeom>
+          <a:solidFill>
+            <a:schemeClr val="bg1">
+              <a:lumMod val="95000"/>
+            </a:schemeClr>
+          </a:solidFill>
+          <a:ln w="28575">
+            <a:solidFill>
+              <a:srgbClr val="E0700D"/>
+            </a:solidFill>
+          </a:ln>
+        </p:spPr>
+        <p:txBody>
+          <a:bodyPr wrap="square" rtlCol="0">
+            <a:spAutoFit/>
+          </a:bodyPr>
+          <a:lstStyle/>
+          <a:p>
+            <a:pPr algn="just"/>
+            <a:r>
+              <a:rPr lang="en-US" sz="1200" dirty="0">
+                <a:latin typeface="Arial" panose="020B0604020202020204" pitchFamily="34" charset="0"/>
+                <a:cs typeface="Arial" panose="020B0604020202020204" pitchFamily="34" charset="0"/>
+              </a:rPr>
+              <a:t>Document all your results (copy here the code employed to obtain the transfer function employing SAX modeling and include the comparative plot of the models)</a:t>
+            </a:r>
+          </a:p>
+          <a:p>
+            <a:pPr algn="just"/>
+            <a:endParaRPr lang="en-US" sz="1200" dirty="0">
+              <a:latin typeface="Arial" panose="020B0604020202020204" pitchFamily="34" charset="0"/>
+              <a:cs typeface="Arial" panose="020B0604020202020204" pitchFamily="34" charset="0"/>
+            </a:endParaRPr>
+          </a:p>
+          <a:p>
+            <a:pPr algn="just"/>
+            <a:endParaRPr lang="en-US" sz="1200" dirty="0">
+              <a:latin typeface="Arial" panose="020B0604020202020204" pitchFamily="34" charset="0"/>
+              <a:cs typeface="Arial" panose="020B0604020202020204" pitchFamily="34" charset="0"/>
+            </a:endParaRPr>
+          </a:p>
+          <a:p>
+            <a:pPr algn="just"/>
+            <a:endParaRPr lang="en-US" sz="1200" dirty="0">
+              <a:latin typeface="Arial" panose="020B0604020202020204" pitchFamily="34" charset="0"/>
+              <a:cs typeface="Arial" panose="020B0604020202020204" pitchFamily="34" charset="0"/>
+            </a:endParaRPr>
+          </a:p>
+          <a:p>
+            <a:pPr algn="just"/>
+            <a:endParaRPr lang="en-US" sz="1200" dirty="0">
+              <a:latin typeface="Arial" panose="020B0604020202020204" pitchFamily="34" charset="0"/>
+              <a:cs typeface="Arial" panose="020B0604020202020204" pitchFamily="34" charset="0"/>
+            </a:endParaRPr>
+          </a:p>
+          <a:p>
+            <a:pPr algn="just"/>
+            <a:endParaRPr lang="en-US" sz="1200" dirty="0">
+              <a:latin typeface="Arial" panose="020B0604020202020204" pitchFamily="34" charset="0"/>
+              <a:cs typeface="Arial" panose="020B0604020202020204" pitchFamily="34" charset="0"/>
+            </a:endParaRPr>
+          </a:p>
+          <a:p>
+            <a:pPr algn="just"/>
+            <a:endParaRPr lang="en-US" sz="1200" dirty="0">
+              <a:latin typeface="Arial" panose="020B0604020202020204" pitchFamily="34" charset="0"/>
+              <a:cs typeface="Arial" panose="020B0604020202020204" pitchFamily="34" charset="0"/>
+            </a:endParaRPr>
+          </a:p>
+        </p:txBody>
+      </p:sp>
+      <p:sp>
+        <p:nvSpPr>
+          <p:cNvPr id="5" name="Marcador de pie de página 2">
+            <a:extLst>
+              <a:ext uri="{FF2B5EF4-FFF2-40B4-BE49-F238E27FC236}">
+                <a16:creationId xmlns:a16="http://schemas.microsoft.com/office/drawing/2014/main" id="{ED97C9D0-256C-D4CA-42E7-79330F040B30}"/>
+              </a:ext>
+            </a:extLst>
+          </p:cNvPr>
+          <p:cNvSpPr>
+            <a:spLocks noGrp="1"/>
+          </p:cNvSpPr>
+          <p:nvPr>
+            <p:ph type="ftr" sz="quarter" idx="5"/>
+          </p:nvPr>
+        </p:nvSpPr>
+        <p:spPr>
+          <a:xfrm>
+            <a:off x="609600" y="6457057"/>
+            <a:ext cx="2743200" cy="184666"/>
+          </a:xfrm>
+        </p:spPr>
+        <p:txBody>
+          <a:bodyPr/>
+          <a:lstStyle/>
+          <a:p>
+            <a:pPr marL="12700">
+              <a:spcBef>
+                <a:spcPts val="15"/>
+              </a:spcBef>
+            </a:pPr>
+            <a:r>
+              <a:rPr lang="es-ES" spc="-5"/>
+              <a:t>LAB 3. INTERFEROMETERS I</a:t>
+            </a:r>
+            <a:endParaRPr lang="es-ES" spc="-5" dirty="0"/>
+          </a:p>
+        </p:txBody>
+      </p:sp>
+    </p:spTree>
+    <p:extLst>
+      <p:ext uri="{BB962C8B-B14F-4D97-AF65-F5344CB8AC3E}">
+        <p14:creationId xmlns:p14="http://schemas.microsoft.com/office/powerpoint/2010/main" val="3666436811"/>
+      </p:ext>
+    </p:extLst>
+  </p:cSld>
+  <p:clrMapOvr>
+    <a:masterClrMapping/>
+  </p:clrMapOvr>
+</p:sld>
+</file>
+
+<file path=ppt/slides/slide11.xml><?xml version="1.0" encoding="utf-8"?>
+<p:sld xmlns:a="http://schemas.openxmlformats.org/drawingml/2006/main" xmlns:r="http://schemas.openxmlformats.org/officeDocument/2006/relationships" xmlns:p="http://schemas.openxmlformats.org/presentationml/2006/main">
+  <p:cSld>
+    <p:spTree>
+      <p:nvGrpSpPr>
+        <p:cNvPr id="1" name=""/>
+        <p:cNvGrpSpPr/>
+        <p:nvPr/>
+      </p:nvGrpSpPr>
+      <p:grpSpPr>
+        <a:xfrm>
+          <a:off x="0" y="0"/>
+          <a:ext cx="0" cy="0"/>
+          <a:chOff x="0" y="0"/>
+          <a:chExt cx="0" cy="0"/>
+        </a:xfrm>
+      </p:grpSpPr>
+      <p:sp>
+        <p:nvSpPr>
+          <p:cNvPr id="2" name="Marcador de número de diapositiva 1">
+            <a:extLst>
+              <a:ext uri="{FF2B5EF4-FFF2-40B4-BE49-F238E27FC236}">
+                <a16:creationId xmlns:a16="http://schemas.microsoft.com/office/drawing/2014/main" id="{5A262B9B-63C7-D050-29CE-69C0673EA18E}"/>
+              </a:ext>
+            </a:extLst>
+          </p:cNvPr>
+          <p:cNvSpPr>
+            <a:spLocks noGrp="1"/>
+          </p:cNvSpPr>
+          <p:nvPr>
+            <p:ph type="sldNum" sz="quarter" idx="7"/>
+          </p:nvPr>
+        </p:nvSpPr>
+        <p:spPr/>
+        <p:txBody>
+          <a:bodyPr/>
+          <a:lstStyle/>
+          <a:p>
+            <a:fld id="{B6F15528-21DE-4FAA-801E-634DDDAF4B2B}" type="slidenum">
+              <a:rPr lang="es-ES" smtClean="0"/>
+              <a:t>11</a:t>
+            </a:fld>
+            <a:endParaRPr lang="es-ES"/>
+          </a:p>
+        </p:txBody>
+      </p:sp>
+      <p:pic>
+        <p:nvPicPr>
+          <p:cNvPr id="8" name="Imagen 7">
+            <a:extLst>
+              <a:ext uri="{FF2B5EF4-FFF2-40B4-BE49-F238E27FC236}">
+                <a16:creationId xmlns:a16="http://schemas.microsoft.com/office/drawing/2014/main" id="{6E6A95D7-6F7D-A4CD-0DB7-37860A54D1D6}"/>
+              </a:ext>
+            </a:extLst>
+          </p:cNvPr>
+          <p:cNvPicPr>
+            <a:picLocks noChangeAspect="1"/>
+          </p:cNvPicPr>
+          <p:nvPr/>
+        </p:nvPicPr>
+        <p:blipFill>
+          <a:blip r:embed="rId2"/>
+          <a:stretch>
+            <a:fillRect/>
+          </a:stretch>
+        </p:blipFill>
+        <p:spPr>
+          <a:xfrm>
+            <a:off x="4191000" y="303789"/>
+            <a:ext cx="3989450" cy="3201411"/>
+          </a:xfrm>
+          <a:prstGeom prst="rect">
+            <a:avLst/>
+          </a:prstGeom>
+        </p:spPr>
+      </p:pic>
+      <p:pic>
+        <p:nvPicPr>
+          <p:cNvPr id="10" name="Imagen 9">
+            <a:extLst>
+              <a:ext uri="{FF2B5EF4-FFF2-40B4-BE49-F238E27FC236}">
+                <a16:creationId xmlns:a16="http://schemas.microsoft.com/office/drawing/2014/main" id="{A8B83A4A-197F-1857-FB32-1782C497CC3B}"/>
+              </a:ext>
+            </a:extLst>
+          </p:cNvPr>
+          <p:cNvPicPr>
+            <a:picLocks noChangeAspect="1"/>
+          </p:cNvPicPr>
+          <p:nvPr/>
+        </p:nvPicPr>
+        <p:blipFill>
+          <a:blip r:embed="rId3"/>
+          <a:stretch>
+            <a:fillRect/>
+          </a:stretch>
+        </p:blipFill>
+        <p:spPr>
+          <a:xfrm>
+            <a:off x="152400" y="195262"/>
+            <a:ext cx="4124692" cy="3309938"/>
+          </a:xfrm>
+          <a:prstGeom prst="rect">
+            <a:avLst/>
+          </a:prstGeom>
+        </p:spPr>
+      </p:pic>
+      <p:sp>
+        <p:nvSpPr>
+          <p:cNvPr id="11" name="CuadroTexto 10">
+            <a:extLst>
+              <a:ext uri="{FF2B5EF4-FFF2-40B4-BE49-F238E27FC236}">
+                <a16:creationId xmlns:a16="http://schemas.microsoft.com/office/drawing/2014/main" id="{D4799E6C-0660-BA35-BAA0-7AB4AAC8C92C}"/>
+              </a:ext>
+            </a:extLst>
+          </p:cNvPr>
+          <p:cNvSpPr txBox="1"/>
+          <p:nvPr/>
+        </p:nvSpPr>
+        <p:spPr>
+          <a:xfrm>
+            <a:off x="8686800" y="914400"/>
+            <a:ext cx="2667000" cy="1477328"/>
+          </a:xfrm>
+          <a:prstGeom prst="rect">
+            <a:avLst/>
+          </a:prstGeom>
+          <a:noFill/>
+        </p:spPr>
+        <p:txBody>
+          <a:bodyPr wrap="square" rtlCol="0">
+            <a:spAutoFit/>
+          </a:bodyPr>
+          <a:lstStyle/>
+          <a:p>
+            <a:r>
+              <a:rPr lang="es-ES" dirty="0"/>
+              <a:t>HACER MÁS EJEMPLOS</a:t>
+            </a:r>
+          </a:p>
+          <a:p>
+            <a:r>
+              <a:rPr lang="es-ES" dirty="0"/>
+              <a:t>En </a:t>
+            </a:r>
+            <a:r>
+              <a:rPr lang="es-ES" dirty="0" err="1"/>
+              <a:t>sax</a:t>
+            </a:r>
+            <a:r>
+              <a:rPr lang="es-ES" dirty="0"/>
+              <a:t> los puertos son 0, 1</a:t>
+            </a:r>
+          </a:p>
+          <a:p>
+            <a:r>
+              <a:rPr lang="es-ES" dirty="0"/>
+              <a:t>Por lo que 1 en </a:t>
+            </a:r>
+            <a:r>
+              <a:rPr lang="es-ES" dirty="0" err="1"/>
+              <a:t>sax</a:t>
+            </a:r>
+            <a:r>
+              <a:rPr lang="es-ES" dirty="0"/>
+              <a:t> corresponde a 2 en el otro. </a:t>
+            </a:r>
+          </a:p>
+        </p:txBody>
+      </p:sp>
+    </p:spTree>
+    <p:extLst>
+      <p:ext uri="{BB962C8B-B14F-4D97-AF65-F5344CB8AC3E}">
+        <p14:creationId xmlns:p14="http://schemas.microsoft.com/office/powerpoint/2010/main" val="701476647"/>
+      </p:ext>
+    </p:extLst>
+  </p:cSld>
+  <p:clrMapOvr>
+    <a:masterClrMapping/>
+  </p:clrMapOvr>
+</p:sld>
+</file>
+
+<file path=ppt/slides/slide12.xml><?xml version="1.0" encoding="utf-8"?>
+<p:sld xmlns:a="http://schemas.openxmlformats.org/drawingml/2006/main" xmlns:r="http://schemas.openxmlformats.org/officeDocument/2006/relationships" xmlns:p="http://schemas.openxmlformats.org/presentationml/2006/main">
+  <p:cSld>
+    <p:spTree>
+      <p:nvGrpSpPr>
+        <p:cNvPr id="1" name="">
+          <a:extLst>
+            <a:ext uri="{FF2B5EF4-FFF2-40B4-BE49-F238E27FC236}">
               <a16:creationId xmlns:a16="http://schemas.microsoft.com/office/drawing/2014/main" id="{25434E70-43B1-3881-1771-20FB4358471D}"/>
             </a:ext>
           </a:extLst>
@@ -3187,7 +4315,7 @@
           <a:p>
             <a:fld id="{B6F15528-21DE-4FAA-801E-634DDDAF4B2B}" type="slidenum">
               <a:rPr lang="es-ES" smtClean="0"/>
-              <a:t>10</a:t>
+              <a:t>12</a:t>
             </a:fld>
             <a:endParaRPr lang="es-ES"/>
           </a:p>
@@ -3484,7 +4612,7 @@
 </p:sld>
 </file>
 
-<file path=ppt/slides/slide11.xml><?xml version="1.0" encoding="utf-8"?>
+<file path=ppt/slides/slide13.xml><?xml version="1.0" encoding="utf-8"?>
 <p:sld xmlns:a="http://schemas.openxmlformats.org/drawingml/2006/main" xmlns:r="http://schemas.openxmlformats.org/officeDocument/2006/relationships" xmlns:p="http://schemas.openxmlformats.org/presentationml/2006/main">
   <p:cSld>
     <p:spTree>
@@ -3524,7 +4652,7 @@
           <a:p>
             <a:fld id="{B6F15528-21DE-4FAA-801E-634DDDAF4B2B}" type="slidenum">
               <a:rPr lang="es-ES" smtClean="0"/>
-              <a:t>11</a:t>
+              <a:t>13</a:t>
             </a:fld>
             <a:endParaRPr lang="es-ES"/>
           </a:p>
@@ -3792,7 +4920,7 @@
 </p:sld>
 </file>
 
-<file path=ppt/slides/slide12.xml><?xml version="1.0" encoding="utf-8"?>
+<file path=ppt/slides/slide14.xml><?xml version="1.0" encoding="utf-8"?>
 <p:sld xmlns:a="http://schemas.openxmlformats.org/drawingml/2006/main" xmlns:r="http://schemas.openxmlformats.org/officeDocument/2006/relationships" xmlns:p="http://schemas.openxmlformats.org/presentationml/2006/main">
   <p:cSld>
     <p:spTree>
@@ -3832,7 +4960,7 @@
           <a:p>
             <a:fld id="{B6F15528-21DE-4FAA-801E-634DDDAF4B2B}" type="slidenum">
               <a:rPr lang="es-ES" smtClean="0"/>
-              <a:t>12</a:t>
+              <a:t>14</a:t>
             </a:fld>
             <a:endParaRPr lang="es-ES"/>
           </a:p>
@@ -3851,7 +4979,7 @@
 </p:sld>
 </file>
 
-<file path=ppt/slides/slide13.xml><?xml version="1.0" encoding="utf-8"?>
+<file path=ppt/slides/slide15.xml><?xml version="1.0" encoding="utf-8"?>
 <p:sld xmlns:a="http://schemas.openxmlformats.org/drawingml/2006/main" xmlns:r="http://schemas.openxmlformats.org/officeDocument/2006/relationships" xmlns:p="http://schemas.openxmlformats.org/presentationml/2006/main">
   <p:cSld>
     <p:spTree>
@@ -3990,7 +5118,7 @@
           <a:p>
             <a:fld id="{B6F15528-21DE-4FAA-801E-634DDDAF4B2B}" type="slidenum">
               <a:rPr lang="es-ES" smtClean="0"/>
-              <a:t>13</a:t>
+              <a:t>15</a:t>
             </a:fld>
             <a:endParaRPr lang="es-ES"/>
           </a:p>
@@ -5900,7 +7028,14 @@
                         <a:latin typeface="Cambria Math" panose="02040503050406030204" pitchFamily="18" charset="0"/>
                         <a:ea typeface="Cambria Math" panose="02040503050406030204" pitchFamily="18" charset="0"/>
                       </a:rPr>
-                      <m:t>≠0</m:t>
+                      <m:t>≠</m:t>
+                    </m:r>
+                    <m:r>
+                      <a:rPr lang="es-ES" sz="2000" i="1">
+                        <a:latin typeface="Cambria Math" panose="02040503050406030204" pitchFamily="18" charset="0"/>
+                        <a:ea typeface="Cambria Math" panose="02040503050406030204" pitchFamily="18" charset="0"/>
+                      </a:rPr>
+                      <m:t>0</m:t>
                     </m:r>
                   </m:oMath>
                 </a14:m>
@@ -5928,7 +7063,14 @@
                         <a:latin typeface="Cambria Math" panose="02040503050406030204" pitchFamily="18" charset="0"/>
                         <a:ea typeface="Cambria Math" panose="02040503050406030204" pitchFamily="18" charset="0"/>
                       </a:rPr>
-                      <m:t>≠0</m:t>
+                      <m:t>≠</m:t>
+                    </m:r>
+                    <m:r>
+                      <a:rPr lang="es-ES" sz="2000" i="1">
+                        <a:latin typeface="Cambria Math" panose="02040503050406030204" pitchFamily="18" charset="0"/>
+                        <a:ea typeface="Cambria Math" panose="02040503050406030204" pitchFamily="18" charset="0"/>
+                      </a:rPr>
+                      <m:t>0</m:t>
                     </m:r>
                   </m:oMath>
                 </a14:m>
@@ -7537,8 +8679,8 @@
         </p:nvSpPr>
         <p:spPr>
           <a:xfrm>
-            <a:off x="491990" y="3658811"/>
-            <a:ext cx="11208020" cy="3046988"/>
+            <a:off x="491990" y="3430062"/>
+            <a:ext cx="11208020" cy="3293209"/>
           </a:xfrm>
           <a:prstGeom prst="rect">
             <a:avLst/>
@@ -7949,7 +9091,87 @@
             </a:r>
             <a:r>
               <a:rPr lang="es-ES" sz="1600" dirty="0"/>
-              <a:t> flat. </a:t>
+              <a:t> flat: </a:t>
+            </a:r>
+            <a:r>
+              <a:rPr lang="es-ES" sz="1600" dirty="0" err="1"/>
+              <a:t>the</a:t>
+            </a:r>
+            <a:r>
+              <a:rPr lang="es-ES" sz="1600" dirty="0"/>
+              <a:t> MZI </a:t>
+            </a:r>
+            <a:r>
+              <a:rPr lang="es-ES" sz="1600" dirty="0" err="1"/>
+              <a:t>behaves</a:t>
+            </a:r>
+            <a:r>
+              <a:rPr lang="es-ES" sz="1600" dirty="0"/>
+              <a:t> </a:t>
+            </a:r>
+            <a:r>
+              <a:rPr lang="es-ES" sz="1600" dirty="0" err="1"/>
+              <a:t>like</a:t>
+            </a:r>
+            <a:r>
+              <a:rPr lang="es-ES" sz="1600" dirty="0"/>
+              <a:t> a </a:t>
+            </a:r>
+            <a:r>
+              <a:rPr lang="es-ES" sz="1600" dirty="0" err="1"/>
+              <a:t>tunable</a:t>
+            </a:r>
+            <a:r>
+              <a:rPr lang="es-ES" sz="1600" dirty="0"/>
+              <a:t> </a:t>
+            </a:r>
+            <a:r>
+              <a:rPr lang="es-ES" sz="1600" dirty="0" err="1"/>
+              <a:t>power</a:t>
+            </a:r>
+            <a:r>
+              <a:rPr lang="es-ES" sz="1600" dirty="0"/>
+              <a:t> </a:t>
+            </a:r>
+            <a:r>
+              <a:rPr lang="es-ES" sz="1600" dirty="0" err="1"/>
+              <a:t>coupler</a:t>
+            </a:r>
+            <a:r>
+              <a:rPr lang="es-ES" sz="1600" dirty="0"/>
+              <a:t> </a:t>
+            </a:r>
+            <a:r>
+              <a:rPr lang="es-ES" sz="1600" dirty="0" err="1"/>
+              <a:t>rather</a:t>
+            </a:r>
+            <a:r>
+              <a:rPr lang="es-ES" sz="1600" dirty="0"/>
+              <a:t> </a:t>
+            </a:r>
+            <a:r>
+              <a:rPr lang="es-ES" sz="1600" dirty="0" err="1"/>
+              <a:t>than</a:t>
+            </a:r>
+            <a:r>
+              <a:rPr lang="es-ES" sz="1600" dirty="0"/>
+              <a:t> a </a:t>
+            </a:r>
+            <a:r>
+              <a:rPr lang="es-ES" sz="1600" dirty="0" err="1"/>
+              <a:t>wavelength</a:t>
+            </a:r>
+            <a:r>
+              <a:rPr lang="es-ES" sz="1600" dirty="0"/>
+              <a:t> </a:t>
+            </a:r>
+            <a:r>
+              <a:rPr lang="es-ES" sz="1600" dirty="0" err="1"/>
+              <a:t>filter</a:t>
+            </a:r>
+            <a:r>
+              <a:rPr lang="es-ES" sz="1600" dirty="0"/>
+              <a:t>.</a:t>
             </a:r>
           </a:p>
           <a:p>
@@ -8211,7 +9433,7 @@
         </p:blipFill>
         <p:spPr>
           <a:xfrm>
-            <a:off x="1687456" y="533114"/>
+            <a:off x="1687456" y="400012"/>
             <a:ext cx="3837044" cy="3079110"/>
           </a:xfrm>
           <a:prstGeom prst="rect">
@@ -8241,7 +9463,7 @@
         </p:blipFill>
         <p:spPr>
           <a:xfrm>
-            <a:off x="5524500" y="557818"/>
+            <a:off x="5520752" y="421895"/>
             <a:ext cx="4141572" cy="3079110"/>
           </a:xfrm>
           <a:prstGeom prst="rect">
@@ -8263,6 +9485,2331 @@
 </file>
 
 <file path=ppt/slides/slide6.xml><?xml version="1.0" encoding="utf-8"?>
+<p:sld xmlns:a="http://schemas.openxmlformats.org/drawingml/2006/main" xmlns:r="http://schemas.openxmlformats.org/officeDocument/2006/relationships" xmlns:p="http://schemas.openxmlformats.org/presentationml/2006/main">
+  <p:cSld>
+    <p:spTree>
+      <p:nvGrpSpPr>
+        <p:cNvPr id="1" name="">
+          <a:extLst>
+            <a:ext uri="{FF2B5EF4-FFF2-40B4-BE49-F238E27FC236}">
+              <a16:creationId xmlns:a16="http://schemas.microsoft.com/office/drawing/2014/main" id="{610819BC-48C0-FADC-808A-E83CB45C5422}"/>
+            </a:ext>
+          </a:extLst>
+        </p:cNvPr>
+        <p:cNvGrpSpPr/>
+        <p:nvPr/>
+      </p:nvGrpSpPr>
+      <p:grpSpPr>
+        <a:xfrm>
+          <a:off x="0" y="0"/>
+          <a:ext cx="0" cy="0"/>
+          <a:chOff x="0" y="0"/>
+          <a:chExt cx="0" cy="0"/>
+        </a:xfrm>
+      </p:grpSpPr>
+      <p:sp>
+        <p:nvSpPr>
+          <p:cNvPr id="16" name="object 16">
+            <a:extLst>
+              <a:ext uri="{FF2B5EF4-FFF2-40B4-BE49-F238E27FC236}">
+                <a16:creationId xmlns:a16="http://schemas.microsoft.com/office/drawing/2014/main" id="{26A0561E-6CF7-032D-2249-5BE6A65FC966}"/>
+              </a:ext>
+            </a:extLst>
+          </p:cNvPr>
+          <p:cNvSpPr txBox="1">
+            <a:spLocks noGrp="1"/>
+          </p:cNvSpPr>
+          <p:nvPr>
+            <p:ph type="title"/>
+          </p:nvPr>
+        </p:nvSpPr>
+        <p:spPr>
+          <a:xfrm>
+            <a:off x="304800" y="157942"/>
+            <a:ext cx="10994410" cy="782265"/>
+          </a:xfrm>
+          <a:prstGeom prst="rect">
+            <a:avLst/>
+          </a:prstGeom>
+        </p:spPr>
+        <p:txBody>
+          <a:bodyPr vert="horz" wrap="square" lIns="0" tIns="12700" rIns="0" bIns="0" rtlCol="0">
+            <a:spAutoFit/>
+          </a:bodyPr>
+          <a:lstStyle/>
+          <a:p>
+            <a:pPr marL="12700">
+              <a:lnSpc>
+                <a:spcPct val="100000"/>
+              </a:lnSpc>
+              <a:spcBef>
+                <a:spcPts val="100"/>
+              </a:spcBef>
+            </a:pPr>
+            <a:br>
+              <a:rPr lang="es-ES" sz="2500" spc="-5" dirty="0">
+                <a:latin typeface="+mj-lt"/>
+                <a:cs typeface="Lucida Sans"/>
+              </a:rPr>
+            </a:br>
+            <a:endParaRPr sz="2500" b="0" dirty="0">
+              <a:latin typeface="+mj-lt"/>
+              <a:cs typeface="Lucida Sans"/>
+            </a:endParaRPr>
+          </a:p>
+        </p:txBody>
+      </p:sp>
+      <p:pic>
+        <p:nvPicPr>
+          <p:cNvPr id="83" name="Gráfico 82">
+            <a:extLst>
+              <a:ext uri="{FF2B5EF4-FFF2-40B4-BE49-F238E27FC236}">
+                <a16:creationId xmlns:a16="http://schemas.microsoft.com/office/drawing/2014/main" id="{9C27F2CA-6311-0F68-A23E-E0DA5380CD04}"/>
+              </a:ext>
+            </a:extLst>
+          </p:cNvPr>
+          <p:cNvPicPr>
+            <a:picLocks noChangeAspect="1"/>
+          </p:cNvPicPr>
+          <p:nvPr/>
+        </p:nvPicPr>
+        <p:blipFill>
+          <a:blip r:embed="rId3">
+            <a:extLst>
+              <a:ext uri="{96DAC541-7B7A-43D3-8B79-37D633B846F1}">
+                <asvg:svgBlip xmlns:asvg="http://schemas.microsoft.com/office/drawing/2016/SVG/main" r:embed="rId4"/>
+              </a:ext>
+            </a:extLst>
+          </a:blip>
+          <a:stretch>
+            <a:fillRect/>
+          </a:stretch>
+        </p:blipFill>
+        <p:spPr>
+          <a:xfrm>
+            <a:off x="5045006" y="6356057"/>
+            <a:ext cx="6409575" cy="363174"/>
+          </a:xfrm>
+          <a:prstGeom prst="rect">
+            <a:avLst/>
+          </a:prstGeom>
+        </p:spPr>
+      </p:pic>
+      <p:sp>
+        <p:nvSpPr>
+          <p:cNvPr id="84" name="Marcador de número de diapositiva 83">
+            <a:extLst>
+              <a:ext uri="{FF2B5EF4-FFF2-40B4-BE49-F238E27FC236}">
+                <a16:creationId xmlns:a16="http://schemas.microsoft.com/office/drawing/2014/main" id="{34634C91-3E66-1917-75AE-413FE20FA42C}"/>
+              </a:ext>
+            </a:extLst>
+          </p:cNvPr>
+          <p:cNvSpPr>
+            <a:spLocks noGrp="1"/>
+          </p:cNvSpPr>
+          <p:nvPr>
+            <p:ph type="sldNum" sz="quarter" idx="7"/>
+          </p:nvPr>
+        </p:nvSpPr>
+        <p:spPr/>
+        <p:txBody>
+          <a:bodyPr/>
+          <a:lstStyle/>
+          <a:p>
+            <a:fld id="{B6F15528-21DE-4FAA-801E-634DDDAF4B2B}" type="slidenum">
+              <a:rPr lang="es-ES" smtClean="0"/>
+              <a:t>6</a:t>
+            </a:fld>
+            <a:endParaRPr lang="es-ES"/>
+          </a:p>
+        </p:txBody>
+      </p:sp>
+      <p:sp>
+        <p:nvSpPr>
+          <p:cNvPr id="4" name="Marcador de texto 2">
+            <a:extLst>
+              <a:ext uri="{FF2B5EF4-FFF2-40B4-BE49-F238E27FC236}">
+                <a16:creationId xmlns:a16="http://schemas.microsoft.com/office/drawing/2014/main" id="{622F8EFD-38E2-A94D-BBBC-F7BFD3230EF8}"/>
+              </a:ext>
+            </a:extLst>
+          </p:cNvPr>
+          <p:cNvSpPr txBox="1">
+            <a:spLocks/>
+          </p:cNvSpPr>
+          <p:nvPr/>
+        </p:nvSpPr>
+        <p:spPr>
+          <a:xfrm>
+            <a:off x="-228600" y="91194"/>
+            <a:ext cx="11048999" cy="4958137"/>
+          </a:xfrm>
+          <a:prstGeom prst="rect">
+            <a:avLst/>
+          </a:prstGeom>
+        </p:spPr>
+        <p:txBody>
+          <a:bodyPr>
+            <a:normAutofit/>
+          </a:bodyPr>
+          <a:lstStyle>
+            <a:lvl1pPr marL="0">
+              <a:defRPr>
+                <a:latin typeface="+mn-lt"/>
+                <a:ea typeface="+mn-ea"/>
+                <a:cs typeface="+mn-cs"/>
+              </a:defRPr>
+            </a:lvl1pPr>
+            <a:lvl2pPr marL="457200">
+              <a:defRPr>
+                <a:latin typeface="+mn-lt"/>
+                <a:ea typeface="+mn-ea"/>
+                <a:cs typeface="+mn-cs"/>
+              </a:defRPr>
+            </a:lvl2pPr>
+            <a:lvl3pPr marL="914400">
+              <a:defRPr>
+                <a:latin typeface="+mn-lt"/>
+                <a:ea typeface="+mn-ea"/>
+                <a:cs typeface="+mn-cs"/>
+              </a:defRPr>
+            </a:lvl3pPr>
+            <a:lvl4pPr marL="1371600">
+              <a:defRPr>
+                <a:latin typeface="+mn-lt"/>
+                <a:ea typeface="+mn-ea"/>
+                <a:cs typeface="+mn-cs"/>
+              </a:defRPr>
+            </a:lvl4pPr>
+            <a:lvl5pPr marL="1828800">
+              <a:defRPr>
+                <a:latin typeface="+mn-lt"/>
+                <a:ea typeface="+mn-ea"/>
+                <a:cs typeface="+mn-cs"/>
+              </a:defRPr>
+            </a:lvl5pPr>
+            <a:lvl6pPr marL="2286000">
+              <a:defRPr>
+                <a:latin typeface="+mn-lt"/>
+                <a:ea typeface="+mn-ea"/>
+                <a:cs typeface="+mn-cs"/>
+              </a:defRPr>
+            </a:lvl6pPr>
+            <a:lvl7pPr marL="2743200">
+              <a:defRPr>
+                <a:latin typeface="+mn-lt"/>
+                <a:ea typeface="+mn-ea"/>
+                <a:cs typeface="+mn-cs"/>
+              </a:defRPr>
+            </a:lvl7pPr>
+            <a:lvl8pPr marL="3200400">
+              <a:defRPr>
+                <a:latin typeface="+mn-lt"/>
+                <a:ea typeface="+mn-ea"/>
+                <a:cs typeface="+mn-cs"/>
+              </a:defRPr>
+            </a:lvl8pPr>
+            <a:lvl9pPr marL="3657600">
+              <a:defRPr>
+                <a:latin typeface="+mn-lt"/>
+                <a:ea typeface="+mn-ea"/>
+                <a:cs typeface="+mn-cs"/>
+              </a:defRPr>
+            </a:lvl9pPr>
+          </a:lstStyle>
+          <a:p>
+            <a:pPr lvl="1"/>
+            <a:r>
+              <a:rPr lang="en-US" sz="2000" b="1" dirty="0"/>
+              <a:t>1. Unbalanced configuration: delay imbalance</a:t>
+            </a:r>
+          </a:p>
+          <a:p>
+            <a:pPr lvl="1"/>
+            <a:endParaRPr lang="en-US" sz="2000" dirty="0"/>
+          </a:p>
+          <a:p>
+            <a:pPr algn="just"/>
+            <a:endParaRPr lang="en-US" sz="2000" dirty="0"/>
+          </a:p>
+          <a:p>
+            <a:pPr algn="just"/>
+            <a:endParaRPr lang="en-US" sz="2000" b="1" i="1" dirty="0"/>
+          </a:p>
+          <a:p>
+            <a:pPr algn="just"/>
+            <a:endParaRPr lang="en-US" sz="2000" kern="0" dirty="0">
+              <a:solidFill>
+                <a:sysClr val="windowText" lastClr="000000"/>
+              </a:solidFill>
+            </a:endParaRPr>
+          </a:p>
+          <a:p>
+            <a:endParaRPr lang="en-US" sz="2000" kern="0" dirty="0">
+              <a:solidFill>
+                <a:sysClr val="windowText" lastClr="000000"/>
+              </a:solidFill>
+            </a:endParaRPr>
+          </a:p>
+        </p:txBody>
+      </p:sp>
+      <p:sp>
+        <p:nvSpPr>
+          <p:cNvPr id="5" name="Marcador de pie de página 2">
+            <a:extLst>
+              <a:ext uri="{FF2B5EF4-FFF2-40B4-BE49-F238E27FC236}">
+                <a16:creationId xmlns:a16="http://schemas.microsoft.com/office/drawing/2014/main" id="{EC6FC36C-94AF-6598-7467-103541144E07}"/>
+              </a:ext>
+            </a:extLst>
+          </p:cNvPr>
+          <p:cNvSpPr>
+            <a:spLocks noGrp="1"/>
+          </p:cNvSpPr>
+          <p:nvPr>
+            <p:ph type="ftr" sz="quarter" idx="5"/>
+          </p:nvPr>
+        </p:nvSpPr>
+        <p:spPr>
+          <a:xfrm>
+            <a:off x="609600" y="6457057"/>
+            <a:ext cx="2743200" cy="184666"/>
+          </a:xfrm>
+        </p:spPr>
+        <p:txBody>
+          <a:bodyPr/>
+          <a:lstStyle/>
+          <a:p>
+            <a:pPr marL="12700">
+              <a:spcBef>
+                <a:spcPts val="15"/>
+              </a:spcBef>
+            </a:pPr>
+            <a:r>
+              <a:rPr lang="es-ES" spc="-5"/>
+              <a:t>LAB 3. INTERFEROMETERS I</a:t>
+            </a:r>
+            <a:endParaRPr lang="es-ES" spc="-5" dirty="0"/>
+          </a:p>
+        </p:txBody>
+      </p:sp>
+      <p:sp>
+        <p:nvSpPr>
+          <p:cNvPr id="6" name="CuadroTexto 5">
+            <a:extLst>
+              <a:ext uri="{FF2B5EF4-FFF2-40B4-BE49-F238E27FC236}">
+                <a16:creationId xmlns:a16="http://schemas.microsoft.com/office/drawing/2014/main" id="{F8E6E131-33F7-BF28-C249-1ADCB2075481}"/>
+              </a:ext>
+            </a:extLst>
+          </p:cNvPr>
+          <p:cNvSpPr txBox="1"/>
+          <p:nvPr/>
+        </p:nvSpPr>
+        <p:spPr>
+          <a:xfrm>
+            <a:off x="491990" y="3547720"/>
+            <a:ext cx="11208020" cy="2800767"/>
+          </a:xfrm>
+          <a:prstGeom prst="rect">
+            <a:avLst/>
+          </a:prstGeom>
+          <a:noFill/>
+        </p:spPr>
+        <p:txBody>
+          <a:bodyPr wrap="square" rtlCol="0">
+            <a:spAutoFit/>
+          </a:bodyPr>
+          <a:lstStyle/>
+          <a:p>
+            <a:pPr algn="just"/>
+            <a:r>
+              <a:rPr lang="es-ES" sz="1600" dirty="0" err="1"/>
+              <a:t>The</a:t>
+            </a:r>
+            <a:r>
+              <a:rPr lang="es-ES" sz="1600" dirty="0"/>
+              <a:t> </a:t>
+            </a:r>
+            <a:r>
+              <a:rPr lang="es-ES" sz="1600" dirty="0" err="1"/>
+              <a:t>phase</a:t>
+            </a:r>
+            <a:r>
+              <a:rPr lang="es-ES" sz="1600" dirty="0"/>
+              <a:t> </a:t>
+            </a:r>
+            <a:r>
+              <a:rPr lang="es-ES" sz="1600" dirty="0" err="1"/>
+              <a:t>difference</a:t>
+            </a:r>
+            <a:r>
+              <a:rPr lang="es-ES" sz="1600" dirty="0"/>
+              <a:t> in </a:t>
+            </a:r>
+            <a:r>
+              <a:rPr lang="es-ES" sz="1600" dirty="0" err="1"/>
+              <a:t>these</a:t>
+            </a:r>
+            <a:r>
+              <a:rPr lang="es-ES" sz="1600" dirty="0"/>
+              <a:t> </a:t>
+            </a:r>
+            <a:r>
+              <a:rPr lang="es-ES" sz="1600" dirty="0" err="1"/>
+              <a:t>simulations</a:t>
+            </a:r>
+            <a:r>
+              <a:rPr lang="es-ES" sz="1600" dirty="0"/>
+              <a:t> is </a:t>
+            </a:r>
+            <a:r>
+              <a:rPr lang="es-ES" sz="1600" dirty="0" err="1"/>
+              <a:t>introduced</a:t>
+            </a:r>
+            <a:r>
+              <a:rPr lang="es-ES" sz="1600" dirty="0"/>
+              <a:t> by </a:t>
+            </a:r>
+            <a:r>
+              <a:rPr lang="es-ES" sz="1600" dirty="0" err="1"/>
+              <a:t>varying</a:t>
+            </a:r>
+            <a:r>
+              <a:rPr lang="es-ES" sz="1600" dirty="0"/>
+              <a:t> </a:t>
+            </a:r>
+            <a:r>
+              <a:rPr lang="es-ES" sz="1600" dirty="0" err="1"/>
+              <a:t>the</a:t>
+            </a:r>
+            <a:r>
+              <a:rPr lang="es-ES" sz="1600" dirty="0"/>
+              <a:t> </a:t>
+            </a:r>
+            <a:r>
+              <a:rPr lang="es-ES" sz="1600" dirty="0" err="1"/>
+              <a:t>length</a:t>
+            </a:r>
+            <a:r>
+              <a:rPr lang="es-ES" sz="1600" dirty="0"/>
+              <a:t> </a:t>
+            </a:r>
+            <a:r>
+              <a:rPr lang="es-ES" sz="1600" dirty="0" err="1"/>
+              <a:t>of</a:t>
+            </a:r>
+            <a:r>
+              <a:rPr lang="es-ES" sz="1600" dirty="0"/>
+              <a:t> </a:t>
+            </a:r>
+            <a:r>
+              <a:rPr lang="es-ES" sz="1600" dirty="0" err="1"/>
+              <a:t>the</a:t>
+            </a:r>
+            <a:r>
+              <a:rPr lang="es-ES" sz="1600" dirty="0"/>
+              <a:t> MZI </a:t>
+            </a:r>
+            <a:r>
+              <a:rPr lang="es-ES" sz="1600" dirty="0" err="1"/>
+              <a:t>arms</a:t>
+            </a:r>
+            <a:r>
+              <a:rPr lang="es-ES" sz="1600" dirty="0"/>
+              <a:t>:  </a:t>
+            </a:r>
+            <a:r>
+              <a:rPr lang="el-GR" sz="1600" dirty="0"/>
+              <a:t>Δ</a:t>
+            </a:r>
+            <a:r>
+              <a:rPr lang="es-ES" sz="1600" dirty="0"/>
+              <a:t>L ≠ 0.  </a:t>
+            </a:r>
+          </a:p>
+          <a:p>
+            <a:pPr algn="just"/>
+            <a:endParaRPr lang="es-ES" sz="1600" dirty="0"/>
+          </a:p>
+          <a:p>
+            <a:pPr algn="just"/>
+            <a:r>
+              <a:rPr lang="es-ES" sz="1600" dirty="0"/>
+              <a:t>As </a:t>
+            </a:r>
+            <a:r>
+              <a:rPr lang="es-ES" sz="1600" dirty="0" err="1"/>
+              <a:t>we</a:t>
+            </a:r>
+            <a:r>
+              <a:rPr lang="es-ES" sz="1600" dirty="0"/>
+              <a:t> can observe in </a:t>
+            </a:r>
+            <a:r>
+              <a:rPr lang="es-ES" sz="1600" dirty="0" err="1"/>
+              <a:t>the</a:t>
+            </a:r>
+            <a:r>
+              <a:rPr lang="es-ES" sz="1600" dirty="0"/>
+              <a:t> </a:t>
+            </a:r>
+            <a:r>
+              <a:rPr lang="es-ES" sz="1600" dirty="0" err="1"/>
+              <a:t>second</a:t>
+            </a:r>
+            <a:r>
+              <a:rPr lang="es-ES" sz="1600" dirty="0"/>
+              <a:t> </a:t>
+            </a:r>
+            <a:r>
+              <a:rPr lang="es-ES" sz="1600" dirty="0" err="1"/>
+              <a:t>plot</a:t>
+            </a:r>
+            <a:r>
+              <a:rPr lang="es-ES" sz="1600" dirty="0"/>
+              <a:t>, </a:t>
+            </a:r>
+            <a:r>
+              <a:rPr lang="es-ES" sz="1600" dirty="0" err="1"/>
+              <a:t>comparing</a:t>
+            </a:r>
+            <a:r>
+              <a:rPr lang="es-ES" sz="1600" dirty="0"/>
+              <a:t> </a:t>
+            </a:r>
+            <a:r>
+              <a:rPr lang="es-ES" sz="1600" dirty="0" err="1"/>
+              <a:t>it</a:t>
+            </a:r>
+            <a:r>
+              <a:rPr lang="es-ES" sz="1600" dirty="0"/>
+              <a:t> </a:t>
+            </a:r>
+            <a:r>
+              <a:rPr lang="es-ES" sz="1600" dirty="0" err="1"/>
+              <a:t>with</a:t>
+            </a:r>
+            <a:r>
+              <a:rPr lang="es-ES" sz="1600" dirty="0"/>
+              <a:t> </a:t>
+            </a:r>
+            <a:r>
+              <a:rPr lang="es-ES" sz="1600" dirty="0" err="1"/>
+              <a:t>the</a:t>
+            </a:r>
+            <a:r>
+              <a:rPr lang="es-ES" sz="1600" dirty="0"/>
+              <a:t> </a:t>
+            </a:r>
+            <a:r>
+              <a:rPr lang="es-ES" sz="1600" dirty="0" err="1"/>
+              <a:t>first</a:t>
+            </a:r>
+            <a:r>
+              <a:rPr lang="es-ES" sz="1600" dirty="0"/>
+              <a:t> </a:t>
+            </a:r>
+            <a:r>
+              <a:rPr lang="es-ES" sz="1600" dirty="0" err="1"/>
+              <a:t>plot</a:t>
+            </a:r>
+            <a:r>
+              <a:rPr lang="es-ES" sz="1600" dirty="0"/>
+              <a:t>, </a:t>
+            </a:r>
+            <a:r>
+              <a:rPr lang="es-ES" sz="1600" dirty="0" err="1"/>
+              <a:t>increasing</a:t>
+            </a:r>
+            <a:r>
+              <a:rPr lang="es-ES" sz="1600" dirty="0"/>
+              <a:t> </a:t>
+            </a:r>
+            <a:r>
+              <a:rPr lang="es-ES" sz="1600" dirty="0" err="1"/>
+              <a:t>the</a:t>
+            </a:r>
+            <a:r>
+              <a:rPr lang="es-ES" sz="1600" dirty="0"/>
+              <a:t> </a:t>
+            </a:r>
+            <a:r>
+              <a:rPr lang="es-ES" sz="1600" dirty="0" err="1"/>
+              <a:t>path-length</a:t>
+            </a:r>
+            <a:r>
+              <a:rPr lang="es-ES" sz="1600" dirty="0"/>
+              <a:t> </a:t>
+            </a:r>
+            <a:r>
+              <a:rPr lang="es-ES" sz="1600" dirty="0" err="1"/>
+              <a:t>difference</a:t>
+            </a:r>
+            <a:r>
+              <a:rPr lang="es-ES" sz="1600" dirty="0"/>
+              <a:t> reduces </a:t>
+            </a:r>
+            <a:r>
+              <a:rPr lang="es-ES" sz="1600" dirty="0" err="1"/>
+              <a:t>the</a:t>
+            </a:r>
+            <a:r>
+              <a:rPr lang="es-ES" sz="1600" dirty="0"/>
+              <a:t> Free </a:t>
+            </a:r>
+            <a:r>
+              <a:rPr lang="es-ES" sz="1600" dirty="0" err="1"/>
+              <a:t>Spectral</a:t>
+            </a:r>
+            <a:r>
+              <a:rPr lang="es-ES" sz="1600" dirty="0"/>
+              <a:t> </a:t>
+            </a:r>
+            <a:r>
+              <a:rPr lang="es-ES" sz="1600" dirty="0" err="1"/>
+              <a:t>Range</a:t>
+            </a:r>
+            <a:r>
+              <a:rPr lang="es-ES" sz="1600" dirty="0"/>
+              <a:t> (FSR). </a:t>
+            </a:r>
+            <a:r>
+              <a:rPr lang="es-ES" sz="1600" dirty="0" err="1"/>
+              <a:t>On</a:t>
+            </a:r>
+            <a:r>
+              <a:rPr lang="es-ES" sz="1600" dirty="0"/>
+              <a:t> </a:t>
+            </a:r>
+            <a:r>
+              <a:rPr lang="es-ES" sz="1600" dirty="0" err="1"/>
+              <a:t>the</a:t>
+            </a:r>
+            <a:r>
+              <a:rPr lang="es-ES" sz="1600" dirty="0"/>
+              <a:t> </a:t>
+            </a:r>
+            <a:r>
+              <a:rPr lang="es-ES" sz="1600" dirty="0" err="1"/>
+              <a:t>contrary</a:t>
+            </a:r>
+            <a:r>
+              <a:rPr lang="es-ES" sz="1600" dirty="0"/>
+              <a:t>, as </a:t>
+            </a:r>
+            <a:r>
+              <a:rPr lang="es-ES" sz="1600" dirty="0" err="1"/>
+              <a:t>shown</a:t>
+            </a:r>
+            <a:r>
+              <a:rPr lang="es-ES" sz="1600" dirty="0"/>
+              <a:t> in </a:t>
+            </a:r>
+            <a:r>
+              <a:rPr lang="es-ES" sz="1600" dirty="0" err="1"/>
+              <a:t>the</a:t>
+            </a:r>
+            <a:r>
+              <a:rPr lang="es-ES" sz="1600" dirty="0"/>
+              <a:t> </a:t>
+            </a:r>
+            <a:r>
+              <a:rPr lang="es-ES" sz="1600" dirty="0" err="1"/>
+              <a:t>third</a:t>
+            </a:r>
+            <a:r>
+              <a:rPr lang="es-ES" sz="1600" dirty="0"/>
+              <a:t> </a:t>
+            </a:r>
+            <a:r>
+              <a:rPr lang="es-ES" sz="1600" dirty="0" err="1"/>
+              <a:t>plot</a:t>
+            </a:r>
+            <a:r>
+              <a:rPr lang="es-ES" sz="1600" dirty="0"/>
+              <a:t>, </a:t>
+            </a:r>
+            <a:r>
+              <a:rPr lang="es-ES" sz="1600" dirty="0" err="1"/>
+              <a:t>decreasing</a:t>
+            </a:r>
+            <a:r>
+              <a:rPr lang="es-ES" sz="1600" dirty="0"/>
+              <a:t> </a:t>
+            </a:r>
+            <a:r>
+              <a:rPr lang="el-GR" sz="1600" dirty="0"/>
+              <a:t>Δ</a:t>
+            </a:r>
+            <a:r>
+              <a:rPr lang="es-ES" sz="1600" dirty="0"/>
+              <a:t>L </a:t>
+            </a:r>
+            <a:r>
+              <a:rPr lang="es-ES" sz="1600" dirty="0" err="1"/>
+              <a:t>increases</a:t>
+            </a:r>
+            <a:r>
+              <a:rPr lang="es-ES" sz="1600" dirty="0"/>
+              <a:t> </a:t>
+            </a:r>
+            <a:r>
+              <a:rPr lang="es-ES" sz="1600" dirty="0" err="1"/>
+              <a:t>the</a:t>
+            </a:r>
+            <a:r>
+              <a:rPr lang="es-ES" sz="1600" dirty="0"/>
+              <a:t> FSR.  </a:t>
+            </a:r>
+            <a:r>
+              <a:rPr lang="es-ES" sz="1600" dirty="0" err="1"/>
+              <a:t>We</a:t>
+            </a:r>
+            <a:r>
+              <a:rPr lang="es-ES" sz="1600" dirty="0"/>
+              <a:t> </a:t>
+            </a:r>
+            <a:r>
+              <a:rPr lang="es-ES" sz="1600" dirty="0" err="1"/>
+              <a:t>notice</a:t>
+            </a:r>
+            <a:r>
+              <a:rPr lang="es-ES" sz="1600" dirty="0"/>
+              <a:t> </a:t>
+            </a:r>
+            <a:r>
+              <a:rPr lang="es-ES" sz="1600" dirty="0" err="1"/>
+              <a:t>that</a:t>
+            </a:r>
+            <a:r>
+              <a:rPr lang="es-ES" sz="1600" dirty="0"/>
+              <a:t> </a:t>
+            </a:r>
+            <a:r>
+              <a:rPr lang="es-ES" sz="1600" dirty="0" err="1"/>
+              <a:t>the</a:t>
+            </a:r>
+            <a:r>
+              <a:rPr lang="es-ES" sz="1600" dirty="0"/>
+              <a:t> FSR is </a:t>
+            </a:r>
+            <a:r>
+              <a:rPr lang="es-ES" sz="1600" dirty="0" err="1"/>
+              <a:t>inversely</a:t>
+            </a:r>
+            <a:r>
+              <a:rPr lang="es-ES" sz="1600" dirty="0"/>
+              <a:t> </a:t>
+            </a:r>
+            <a:r>
+              <a:rPr lang="es-ES" sz="1600" dirty="0" err="1"/>
+              <a:t>proportional</a:t>
+            </a:r>
+            <a:r>
+              <a:rPr lang="es-ES" sz="1600" dirty="0"/>
+              <a:t> </a:t>
+            </a:r>
+            <a:r>
+              <a:rPr lang="es-ES" sz="1600" dirty="0" err="1"/>
+              <a:t>to</a:t>
+            </a:r>
+            <a:r>
+              <a:rPr lang="es-ES" sz="1600" dirty="0"/>
+              <a:t> </a:t>
+            </a:r>
+            <a:r>
+              <a:rPr lang="es-ES" sz="1600" dirty="0" err="1"/>
+              <a:t>the</a:t>
+            </a:r>
+            <a:r>
+              <a:rPr lang="es-ES" sz="1600" dirty="0"/>
+              <a:t> </a:t>
+            </a:r>
+            <a:r>
+              <a:rPr lang="es-ES" sz="1600" dirty="0" err="1"/>
+              <a:t>path-length</a:t>
+            </a:r>
+            <a:r>
+              <a:rPr lang="es-ES" sz="1600" dirty="0"/>
+              <a:t> </a:t>
+            </a:r>
+            <a:r>
+              <a:rPr lang="es-ES" sz="1600" dirty="0" err="1"/>
+              <a:t>difference</a:t>
+            </a:r>
+            <a:r>
+              <a:rPr lang="es-ES" sz="1600" dirty="0"/>
+              <a:t>. </a:t>
+            </a:r>
+          </a:p>
+          <a:p>
+            <a:pPr algn="just"/>
+            <a:endParaRPr lang="es-ES" sz="1600" dirty="0"/>
+          </a:p>
+          <a:p>
+            <a:pPr algn="just"/>
+            <a:r>
+              <a:rPr lang="es-ES" sz="1600" dirty="0" err="1"/>
+              <a:t>Although</a:t>
+            </a:r>
+            <a:r>
+              <a:rPr lang="es-ES" sz="1600" dirty="0"/>
+              <a:t> </a:t>
+            </a:r>
+            <a:r>
+              <a:rPr lang="es-ES" sz="1600" dirty="0" err="1"/>
+              <a:t>it</a:t>
+            </a:r>
+            <a:r>
+              <a:rPr lang="es-ES" sz="1600" dirty="0"/>
+              <a:t> is </a:t>
+            </a:r>
+            <a:r>
+              <a:rPr lang="es-ES" sz="1600" dirty="0" err="1"/>
+              <a:t>not</a:t>
+            </a:r>
+            <a:r>
+              <a:rPr lang="es-ES" sz="1600" dirty="0"/>
+              <a:t> </a:t>
+            </a:r>
+            <a:r>
+              <a:rPr lang="es-ES" sz="1600" dirty="0" err="1"/>
+              <a:t>clearly</a:t>
+            </a:r>
+            <a:r>
+              <a:rPr lang="es-ES" sz="1600" dirty="0"/>
+              <a:t> </a:t>
+            </a:r>
+            <a:r>
+              <a:rPr lang="es-ES" sz="1600" dirty="0" err="1"/>
+              <a:t>noticeable</a:t>
+            </a:r>
+            <a:r>
+              <a:rPr lang="es-ES" sz="1600" dirty="0"/>
+              <a:t> in </a:t>
+            </a:r>
+            <a:r>
+              <a:rPr lang="es-ES" sz="1600" dirty="0" err="1"/>
+              <a:t>the</a:t>
+            </a:r>
+            <a:r>
+              <a:rPr lang="es-ES" sz="1600" dirty="0"/>
+              <a:t> </a:t>
+            </a:r>
+            <a:r>
+              <a:rPr lang="es-ES" sz="1600" dirty="0" err="1"/>
+              <a:t>simulated</a:t>
+            </a:r>
+            <a:r>
+              <a:rPr lang="es-ES" sz="1600" dirty="0"/>
+              <a:t> </a:t>
+            </a:r>
+            <a:r>
+              <a:rPr lang="es-ES" sz="1600" dirty="0" err="1"/>
+              <a:t>graphics</a:t>
+            </a:r>
+            <a:r>
+              <a:rPr lang="es-ES" sz="1600" dirty="0"/>
+              <a:t>, </a:t>
+            </a:r>
+            <a:r>
+              <a:rPr lang="es-ES" sz="1600" dirty="0" err="1"/>
+              <a:t>dispersion</a:t>
+            </a:r>
+            <a:r>
+              <a:rPr lang="es-ES" sz="1600" dirty="0"/>
+              <a:t> causes </a:t>
+            </a:r>
+            <a:r>
+              <a:rPr lang="es-ES" sz="1600" dirty="0" err="1"/>
+              <a:t>the</a:t>
+            </a:r>
+            <a:r>
+              <a:rPr lang="es-ES" sz="1600" dirty="0"/>
+              <a:t> </a:t>
+            </a:r>
+            <a:r>
+              <a:rPr lang="es-ES" sz="1600" dirty="0" err="1"/>
+              <a:t>fringes</a:t>
+            </a:r>
+            <a:r>
+              <a:rPr lang="es-ES" sz="1600" dirty="0"/>
+              <a:t> </a:t>
+            </a:r>
+            <a:r>
+              <a:rPr lang="es-ES" sz="1600" dirty="0" err="1"/>
+              <a:t>to</a:t>
+            </a:r>
+            <a:r>
+              <a:rPr lang="es-ES" sz="1600" dirty="0"/>
+              <a:t> </a:t>
+            </a:r>
+            <a:r>
+              <a:rPr lang="es-ES" sz="1600" dirty="0" err="1"/>
+              <a:t>appear</a:t>
+            </a:r>
+            <a:r>
+              <a:rPr lang="es-ES" sz="1600" dirty="0"/>
+              <a:t> </a:t>
+            </a:r>
+            <a:r>
+              <a:rPr lang="es-ES" sz="1600" dirty="0" err="1"/>
+              <a:t>chirped</a:t>
+            </a:r>
+            <a:r>
+              <a:rPr lang="es-ES" sz="1600" dirty="0"/>
+              <a:t> </a:t>
+            </a:r>
+            <a:r>
+              <a:rPr lang="es-ES" sz="1600" dirty="0" err="1"/>
+              <a:t>because</a:t>
+            </a:r>
+            <a:r>
+              <a:rPr lang="es-ES" sz="1600" dirty="0"/>
+              <a:t> </a:t>
+            </a:r>
+            <a:r>
+              <a:rPr lang="es-ES" sz="1600" dirty="0" err="1"/>
+              <a:t>the</a:t>
+            </a:r>
+            <a:r>
+              <a:rPr lang="es-ES" sz="1600" dirty="0"/>
+              <a:t> </a:t>
+            </a:r>
+            <a:r>
+              <a:rPr lang="es-ES" sz="1600" dirty="0" err="1"/>
+              <a:t>propagation</a:t>
+            </a:r>
+            <a:r>
+              <a:rPr lang="es-ES" sz="1600" dirty="0"/>
+              <a:t> </a:t>
+            </a:r>
+            <a:r>
+              <a:rPr lang="es-ES" sz="1600" dirty="0" err="1"/>
+              <a:t>constant</a:t>
+            </a:r>
+            <a:r>
+              <a:rPr lang="es-ES" sz="1600" dirty="0"/>
+              <a:t> </a:t>
+            </a:r>
+            <a:r>
+              <a:rPr lang="es-ES" sz="1600" dirty="0" err="1"/>
+              <a:t>does</a:t>
+            </a:r>
+            <a:r>
+              <a:rPr lang="es-ES" sz="1600" dirty="0"/>
+              <a:t> </a:t>
+            </a:r>
+            <a:r>
+              <a:rPr lang="es-ES" sz="1600" dirty="0" err="1"/>
+              <a:t>not</a:t>
+            </a:r>
+            <a:r>
+              <a:rPr lang="es-ES" sz="1600" dirty="0"/>
+              <a:t> </a:t>
+            </a:r>
+            <a:r>
+              <a:rPr lang="es-ES" sz="1600" dirty="0" err="1"/>
+              <a:t>vary</a:t>
+            </a:r>
+            <a:r>
+              <a:rPr lang="es-ES" sz="1600" dirty="0"/>
+              <a:t> </a:t>
+            </a:r>
+            <a:r>
+              <a:rPr lang="es-ES" sz="1600" dirty="0" err="1"/>
+              <a:t>linearly</a:t>
+            </a:r>
+            <a:r>
+              <a:rPr lang="es-ES" sz="1600" dirty="0"/>
+              <a:t> </a:t>
+            </a:r>
+            <a:r>
+              <a:rPr lang="es-ES" sz="1600" dirty="0" err="1"/>
+              <a:t>with</a:t>
+            </a:r>
+            <a:r>
+              <a:rPr lang="es-ES" sz="1600" dirty="0"/>
+              <a:t> </a:t>
+            </a:r>
+            <a:r>
+              <a:rPr lang="es-ES" sz="1600" dirty="0" err="1"/>
+              <a:t>wavelength</a:t>
+            </a:r>
+            <a:r>
+              <a:rPr lang="es-ES" sz="1600" dirty="0"/>
+              <a:t>. </a:t>
+            </a:r>
+            <a:r>
+              <a:rPr lang="es-ES" sz="1600" dirty="0" err="1"/>
+              <a:t>The</a:t>
+            </a:r>
+            <a:r>
+              <a:rPr lang="es-ES" sz="1600" dirty="0"/>
+              <a:t> </a:t>
+            </a:r>
+            <a:r>
+              <a:rPr lang="es-ES" sz="1600" dirty="0" err="1"/>
+              <a:t>group</a:t>
+            </a:r>
+            <a:r>
+              <a:rPr lang="es-ES" sz="1600" dirty="0"/>
+              <a:t> index determines </a:t>
+            </a:r>
+            <a:r>
+              <a:rPr lang="es-ES" sz="1600" dirty="0" err="1"/>
+              <a:t>the</a:t>
+            </a:r>
+            <a:r>
+              <a:rPr lang="es-ES" sz="1600" dirty="0"/>
+              <a:t> </a:t>
+            </a:r>
+            <a:r>
+              <a:rPr lang="es-ES" sz="1600" dirty="0" err="1"/>
+              <a:t>spectral</a:t>
+            </a:r>
+            <a:r>
+              <a:rPr lang="es-ES" sz="1600" dirty="0"/>
+              <a:t> </a:t>
+            </a:r>
+            <a:r>
+              <a:rPr lang="es-ES" sz="1600" dirty="0" err="1"/>
+              <a:t>period</a:t>
+            </a:r>
+            <a:r>
+              <a:rPr lang="es-ES" sz="1600" dirty="0"/>
+              <a:t> </a:t>
+            </a:r>
+            <a:r>
+              <a:rPr lang="es-ES" sz="1600" dirty="0" err="1"/>
+              <a:t>because</a:t>
+            </a:r>
+            <a:r>
+              <a:rPr lang="es-ES" sz="1600" dirty="0"/>
+              <a:t> </a:t>
+            </a:r>
+            <a:r>
+              <a:rPr lang="es-ES" sz="1600" dirty="0" err="1"/>
+              <a:t>it</a:t>
+            </a:r>
+            <a:r>
+              <a:rPr lang="es-ES" sz="1600" dirty="0"/>
+              <a:t> describes </a:t>
+            </a:r>
+            <a:r>
+              <a:rPr lang="es-ES" sz="1600" dirty="0" err="1"/>
+              <a:t>how</a:t>
+            </a:r>
+            <a:r>
+              <a:rPr lang="es-ES" sz="1600" dirty="0"/>
+              <a:t> </a:t>
+            </a:r>
+            <a:r>
+              <a:rPr lang="es-ES" sz="1600" dirty="0" err="1"/>
+              <a:t>quickly</a:t>
+            </a:r>
+            <a:r>
+              <a:rPr lang="es-ES" sz="1600" dirty="0"/>
+              <a:t> </a:t>
+            </a:r>
+            <a:r>
+              <a:rPr lang="es-ES" sz="1600" dirty="0" err="1"/>
+              <a:t>the</a:t>
+            </a:r>
+            <a:r>
+              <a:rPr lang="es-ES" sz="1600" dirty="0"/>
+              <a:t> </a:t>
+            </a:r>
+            <a:r>
+              <a:rPr lang="es-ES" sz="1600" dirty="0" err="1"/>
+              <a:t>optical</a:t>
+            </a:r>
+            <a:r>
+              <a:rPr lang="es-ES" sz="1600" dirty="0"/>
+              <a:t> </a:t>
+            </a:r>
+            <a:r>
+              <a:rPr lang="es-ES" sz="1600" dirty="0" err="1"/>
+              <a:t>phase</a:t>
+            </a:r>
+            <a:r>
+              <a:rPr lang="es-ES" sz="1600" dirty="0"/>
+              <a:t> </a:t>
+            </a:r>
+            <a:r>
+              <a:rPr lang="es-ES" sz="1600" dirty="0" err="1"/>
+              <a:t>changes</a:t>
+            </a:r>
+            <a:r>
+              <a:rPr lang="es-ES" sz="1600" dirty="0"/>
+              <a:t> </a:t>
+            </a:r>
+            <a:r>
+              <a:rPr lang="es-ES" sz="1600" dirty="0" err="1"/>
+              <a:t>with</a:t>
+            </a:r>
+            <a:r>
+              <a:rPr lang="es-ES" sz="1600" dirty="0"/>
+              <a:t> </a:t>
+            </a:r>
+            <a:r>
+              <a:rPr lang="es-ES" sz="1600" dirty="0" err="1"/>
+              <a:t>wavelength</a:t>
+            </a:r>
+            <a:r>
+              <a:rPr lang="es-ES" sz="1600" dirty="0"/>
+              <a:t> </a:t>
+            </a:r>
+            <a:r>
+              <a:rPr lang="es-ES" sz="1600" dirty="0" err="1"/>
+              <a:t>due</a:t>
+            </a:r>
+            <a:r>
+              <a:rPr lang="es-ES" sz="1600" dirty="0"/>
+              <a:t> </a:t>
+            </a:r>
+            <a:r>
+              <a:rPr lang="es-ES" sz="1600" dirty="0" err="1"/>
+              <a:t>to</a:t>
+            </a:r>
+            <a:r>
+              <a:rPr lang="es-ES" sz="1600" dirty="0"/>
+              <a:t> </a:t>
+            </a:r>
+            <a:r>
+              <a:rPr lang="es-ES" sz="1600" dirty="0" err="1"/>
+              <a:t>dispersion</a:t>
+            </a:r>
+            <a:r>
+              <a:rPr lang="es-ES" sz="1600" dirty="0"/>
+              <a:t>. </a:t>
+            </a:r>
+            <a:r>
+              <a:rPr lang="es-ES" sz="1600" dirty="0" err="1"/>
+              <a:t>Spectral</a:t>
+            </a:r>
+            <a:r>
+              <a:rPr lang="es-ES" sz="1600" dirty="0"/>
+              <a:t> </a:t>
+            </a:r>
+            <a:r>
+              <a:rPr lang="es-ES" sz="1600" dirty="0" err="1"/>
+              <a:t>period</a:t>
+            </a:r>
+            <a:r>
+              <a:rPr lang="es-ES" sz="1600" dirty="0"/>
+              <a:t> is </a:t>
+            </a:r>
+            <a:r>
+              <a:rPr lang="es-ES" sz="1600" dirty="0" err="1"/>
+              <a:t>inversely</a:t>
+            </a:r>
+            <a:r>
+              <a:rPr lang="es-ES" sz="1600" dirty="0"/>
+              <a:t> </a:t>
+            </a:r>
+            <a:r>
+              <a:rPr lang="es-ES" sz="1600" dirty="0" err="1"/>
+              <a:t>proportional</a:t>
+            </a:r>
+            <a:r>
+              <a:rPr lang="es-ES" sz="1600" dirty="0"/>
+              <a:t> </a:t>
+            </a:r>
+            <a:r>
+              <a:rPr lang="es-ES" sz="1600" dirty="0" err="1"/>
+              <a:t>to</a:t>
+            </a:r>
+            <a:r>
+              <a:rPr lang="es-ES" sz="1600" dirty="0"/>
+              <a:t> </a:t>
+            </a:r>
+            <a:r>
+              <a:rPr lang="es-ES" sz="1600" dirty="0" err="1"/>
+              <a:t>the</a:t>
+            </a:r>
+            <a:r>
+              <a:rPr lang="es-ES" sz="1600" dirty="0"/>
+              <a:t> </a:t>
+            </a:r>
+            <a:r>
+              <a:rPr lang="es-ES" sz="1600" dirty="0" err="1"/>
+              <a:t>group</a:t>
+            </a:r>
+            <a:r>
+              <a:rPr lang="es-ES" sz="1600" dirty="0"/>
+              <a:t> index. </a:t>
+            </a:r>
+          </a:p>
+          <a:p>
+            <a:pPr algn="just"/>
+            <a:endParaRPr lang="es-ES" sz="1600" dirty="0"/>
+          </a:p>
+        </p:txBody>
+      </p:sp>
+      <p:pic>
+        <p:nvPicPr>
+          <p:cNvPr id="3" name="Imagen 2" descr="Gráfico, Gráfico de líneas&#10;&#10;El contenido generado por IA puede ser incorrecto.">
+            <a:extLst>
+              <a:ext uri="{FF2B5EF4-FFF2-40B4-BE49-F238E27FC236}">
+                <a16:creationId xmlns:a16="http://schemas.microsoft.com/office/drawing/2014/main" id="{308B7B7E-A2BF-3C71-93DF-FF6CA769106E}"/>
+              </a:ext>
+            </a:extLst>
+          </p:cNvPr>
+          <p:cNvPicPr>
+            <a:picLocks noChangeAspect="1"/>
+          </p:cNvPicPr>
+          <p:nvPr/>
+        </p:nvPicPr>
+        <p:blipFill>
+          <a:blip r:embed="rId5"/>
+          <a:stretch>
+            <a:fillRect/>
+          </a:stretch>
+        </p:blipFill>
+        <p:spPr>
+          <a:xfrm>
+            <a:off x="491990" y="496987"/>
+            <a:ext cx="3815821" cy="3062079"/>
+          </a:xfrm>
+          <a:prstGeom prst="rect">
+            <a:avLst/>
+          </a:prstGeom>
+        </p:spPr>
+      </p:pic>
+      <p:pic>
+        <p:nvPicPr>
+          <p:cNvPr id="9" name="Imagen 8">
+            <a:extLst>
+              <a:ext uri="{FF2B5EF4-FFF2-40B4-BE49-F238E27FC236}">
+                <a16:creationId xmlns:a16="http://schemas.microsoft.com/office/drawing/2014/main" id="{81A19E99-CD44-6A7C-32F4-E9B8DC04AE9F}"/>
+              </a:ext>
+            </a:extLst>
+          </p:cNvPr>
+          <p:cNvPicPr>
+            <a:picLocks noChangeAspect="1"/>
+          </p:cNvPicPr>
+          <p:nvPr/>
+        </p:nvPicPr>
+        <p:blipFill>
+          <a:blip r:embed="rId6"/>
+          <a:stretch>
+            <a:fillRect/>
+          </a:stretch>
+        </p:blipFill>
+        <p:spPr>
+          <a:xfrm>
+            <a:off x="7986809" y="559161"/>
+            <a:ext cx="3815821" cy="2937730"/>
+          </a:xfrm>
+          <a:prstGeom prst="rect">
+            <a:avLst/>
+          </a:prstGeom>
+        </p:spPr>
+      </p:pic>
+      <p:pic>
+        <p:nvPicPr>
+          <p:cNvPr id="11" name="Imagen 10">
+            <a:extLst>
+              <a:ext uri="{FF2B5EF4-FFF2-40B4-BE49-F238E27FC236}">
+                <a16:creationId xmlns:a16="http://schemas.microsoft.com/office/drawing/2014/main" id="{947ED722-A2E4-B890-026F-CA266573A86F}"/>
+              </a:ext>
+            </a:extLst>
+          </p:cNvPr>
+          <p:cNvPicPr>
+            <a:picLocks noChangeAspect="1"/>
+          </p:cNvPicPr>
+          <p:nvPr/>
+        </p:nvPicPr>
+        <p:blipFill>
+          <a:blip r:embed="rId7"/>
+          <a:stretch>
+            <a:fillRect/>
+          </a:stretch>
+        </p:blipFill>
+        <p:spPr>
+          <a:xfrm>
+            <a:off x="4307811" y="549074"/>
+            <a:ext cx="3815821" cy="2942709"/>
+          </a:xfrm>
+          <a:prstGeom prst="rect">
+            <a:avLst/>
+          </a:prstGeom>
+        </p:spPr>
+      </p:pic>
+    </p:spTree>
+    <p:extLst>
+      <p:ext uri="{BB962C8B-B14F-4D97-AF65-F5344CB8AC3E}">
+        <p14:creationId xmlns:p14="http://schemas.microsoft.com/office/powerpoint/2010/main" val="3485328452"/>
+      </p:ext>
+    </p:extLst>
+  </p:cSld>
+  <p:clrMapOvr>
+    <a:masterClrMapping/>
+  </p:clrMapOvr>
+</p:sld>
+</file>
+
+<file path=ppt/slides/slide7.xml><?xml version="1.0" encoding="utf-8"?>
+<p:sld xmlns:a="http://schemas.openxmlformats.org/drawingml/2006/main" xmlns:r="http://schemas.openxmlformats.org/officeDocument/2006/relationships" xmlns:p="http://schemas.openxmlformats.org/presentationml/2006/main">
+  <p:cSld>
+    <p:spTree>
+      <p:nvGrpSpPr>
+        <p:cNvPr id="1" name="">
+          <a:extLst>
+            <a:ext uri="{FF2B5EF4-FFF2-40B4-BE49-F238E27FC236}">
+              <a16:creationId xmlns:a16="http://schemas.microsoft.com/office/drawing/2014/main" id="{C742B0D9-BC58-B5A0-E252-636C1551E464}"/>
+            </a:ext>
+          </a:extLst>
+        </p:cNvPr>
+        <p:cNvGrpSpPr/>
+        <p:nvPr/>
+      </p:nvGrpSpPr>
+      <p:grpSpPr>
+        <a:xfrm>
+          <a:off x="0" y="0"/>
+          <a:ext cx="0" cy="0"/>
+          <a:chOff x="0" y="0"/>
+          <a:chExt cx="0" cy="0"/>
+        </a:xfrm>
+      </p:grpSpPr>
+      <p:sp>
+        <p:nvSpPr>
+          <p:cNvPr id="16" name="object 16">
+            <a:extLst>
+              <a:ext uri="{FF2B5EF4-FFF2-40B4-BE49-F238E27FC236}">
+                <a16:creationId xmlns:a16="http://schemas.microsoft.com/office/drawing/2014/main" id="{E43F1E72-73EC-AA1C-E6F7-8507BAF1B7CD}"/>
+              </a:ext>
+            </a:extLst>
+          </p:cNvPr>
+          <p:cNvSpPr txBox="1">
+            <a:spLocks noGrp="1"/>
+          </p:cNvSpPr>
+          <p:nvPr>
+            <p:ph type="title"/>
+          </p:nvPr>
+        </p:nvSpPr>
+        <p:spPr>
+          <a:xfrm>
+            <a:off x="304800" y="157942"/>
+            <a:ext cx="10994410" cy="782265"/>
+          </a:xfrm>
+          <a:prstGeom prst="rect">
+            <a:avLst/>
+          </a:prstGeom>
+        </p:spPr>
+        <p:txBody>
+          <a:bodyPr vert="horz" wrap="square" lIns="0" tIns="12700" rIns="0" bIns="0" rtlCol="0">
+            <a:spAutoFit/>
+          </a:bodyPr>
+          <a:lstStyle/>
+          <a:p>
+            <a:pPr marL="12700">
+              <a:lnSpc>
+                <a:spcPct val="100000"/>
+              </a:lnSpc>
+              <a:spcBef>
+                <a:spcPts val="100"/>
+              </a:spcBef>
+            </a:pPr>
+            <a:br>
+              <a:rPr lang="es-ES" sz="2500" spc="-5" dirty="0">
+                <a:latin typeface="+mj-lt"/>
+                <a:cs typeface="Lucida Sans"/>
+              </a:rPr>
+            </a:br>
+            <a:endParaRPr sz="2500" b="0" dirty="0">
+              <a:latin typeface="+mj-lt"/>
+              <a:cs typeface="Lucida Sans"/>
+            </a:endParaRPr>
+          </a:p>
+        </p:txBody>
+      </p:sp>
+      <p:pic>
+        <p:nvPicPr>
+          <p:cNvPr id="83" name="Gráfico 82">
+            <a:extLst>
+              <a:ext uri="{FF2B5EF4-FFF2-40B4-BE49-F238E27FC236}">
+                <a16:creationId xmlns:a16="http://schemas.microsoft.com/office/drawing/2014/main" id="{B88CA231-C33A-19F0-08F2-FAC35ADE1CB5}"/>
+              </a:ext>
+            </a:extLst>
+          </p:cNvPr>
+          <p:cNvPicPr>
+            <a:picLocks noChangeAspect="1"/>
+          </p:cNvPicPr>
+          <p:nvPr/>
+        </p:nvPicPr>
+        <p:blipFill>
+          <a:blip r:embed="rId3">
+            <a:extLst>
+              <a:ext uri="{96DAC541-7B7A-43D3-8B79-37D633B846F1}">
+                <asvg:svgBlip xmlns:asvg="http://schemas.microsoft.com/office/drawing/2016/SVG/main" r:embed="rId4"/>
+              </a:ext>
+            </a:extLst>
+          </a:blip>
+          <a:stretch>
+            <a:fillRect/>
+          </a:stretch>
+        </p:blipFill>
+        <p:spPr>
+          <a:xfrm>
+            <a:off x="5045006" y="6356057"/>
+            <a:ext cx="6409575" cy="363174"/>
+          </a:xfrm>
+          <a:prstGeom prst="rect">
+            <a:avLst/>
+          </a:prstGeom>
+        </p:spPr>
+      </p:pic>
+      <p:sp>
+        <p:nvSpPr>
+          <p:cNvPr id="84" name="Marcador de número de diapositiva 83">
+            <a:extLst>
+              <a:ext uri="{FF2B5EF4-FFF2-40B4-BE49-F238E27FC236}">
+                <a16:creationId xmlns:a16="http://schemas.microsoft.com/office/drawing/2014/main" id="{6F06917E-44F6-B254-8D10-EA163022D3F3}"/>
+              </a:ext>
+            </a:extLst>
+          </p:cNvPr>
+          <p:cNvSpPr>
+            <a:spLocks noGrp="1"/>
+          </p:cNvSpPr>
+          <p:nvPr>
+            <p:ph type="sldNum" sz="quarter" idx="7"/>
+          </p:nvPr>
+        </p:nvSpPr>
+        <p:spPr/>
+        <p:txBody>
+          <a:bodyPr/>
+          <a:lstStyle/>
+          <a:p>
+            <a:fld id="{B6F15528-21DE-4FAA-801E-634DDDAF4B2B}" type="slidenum">
+              <a:rPr lang="es-ES" smtClean="0"/>
+              <a:t>7</a:t>
+            </a:fld>
+            <a:endParaRPr lang="es-ES"/>
+          </a:p>
+        </p:txBody>
+      </p:sp>
+      <p:sp>
+        <p:nvSpPr>
+          <p:cNvPr id="4" name="Marcador de texto 2">
+            <a:extLst>
+              <a:ext uri="{FF2B5EF4-FFF2-40B4-BE49-F238E27FC236}">
+                <a16:creationId xmlns:a16="http://schemas.microsoft.com/office/drawing/2014/main" id="{35FDC3AD-21DC-F12D-1461-39BB24DF56BF}"/>
+              </a:ext>
+            </a:extLst>
+          </p:cNvPr>
+          <p:cNvSpPr txBox="1">
+            <a:spLocks/>
+          </p:cNvSpPr>
+          <p:nvPr/>
+        </p:nvSpPr>
+        <p:spPr>
+          <a:xfrm>
+            <a:off x="-228600" y="91194"/>
+            <a:ext cx="11048999" cy="4958137"/>
+          </a:xfrm>
+          <a:prstGeom prst="rect">
+            <a:avLst/>
+          </a:prstGeom>
+        </p:spPr>
+        <p:txBody>
+          <a:bodyPr>
+            <a:normAutofit/>
+          </a:bodyPr>
+          <a:lstStyle>
+            <a:lvl1pPr marL="0">
+              <a:defRPr>
+                <a:latin typeface="+mn-lt"/>
+                <a:ea typeface="+mn-ea"/>
+                <a:cs typeface="+mn-cs"/>
+              </a:defRPr>
+            </a:lvl1pPr>
+            <a:lvl2pPr marL="457200">
+              <a:defRPr>
+                <a:latin typeface="+mn-lt"/>
+                <a:ea typeface="+mn-ea"/>
+                <a:cs typeface="+mn-cs"/>
+              </a:defRPr>
+            </a:lvl2pPr>
+            <a:lvl3pPr marL="914400">
+              <a:defRPr>
+                <a:latin typeface="+mn-lt"/>
+                <a:ea typeface="+mn-ea"/>
+                <a:cs typeface="+mn-cs"/>
+              </a:defRPr>
+            </a:lvl3pPr>
+            <a:lvl4pPr marL="1371600">
+              <a:defRPr>
+                <a:latin typeface="+mn-lt"/>
+                <a:ea typeface="+mn-ea"/>
+                <a:cs typeface="+mn-cs"/>
+              </a:defRPr>
+            </a:lvl4pPr>
+            <a:lvl5pPr marL="1828800">
+              <a:defRPr>
+                <a:latin typeface="+mn-lt"/>
+                <a:ea typeface="+mn-ea"/>
+                <a:cs typeface="+mn-cs"/>
+              </a:defRPr>
+            </a:lvl5pPr>
+            <a:lvl6pPr marL="2286000">
+              <a:defRPr>
+                <a:latin typeface="+mn-lt"/>
+                <a:ea typeface="+mn-ea"/>
+                <a:cs typeface="+mn-cs"/>
+              </a:defRPr>
+            </a:lvl6pPr>
+            <a:lvl7pPr marL="2743200">
+              <a:defRPr>
+                <a:latin typeface="+mn-lt"/>
+                <a:ea typeface="+mn-ea"/>
+                <a:cs typeface="+mn-cs"/>
+              </a:defRPr>
+            </a:lvl7pPr>
+            <a:lvl8pPr marL="3200400">
+              <a:defRPr>
+                <a:latin typeface="+mn-lt"/>
+                <a:ea typeface="+mn-ea"/>
+                <a:cs typeface="+mn-cs"/>
+              </a:defRPr>
+            </a:lvl8pPr>
+            <a:lvl9pPr marL="3657600">
+              <a:defRPr>
+                <a:latin typeface="+mn-lt"/>
+                <a:ea typeface="+mn-ea"/>
+                <a:cs typeface="+mn-cs"/>
+              </a:defRPr>
+            </a:lvl9pPr>
+          </a:lstStyle>
+          <a:p>
+            <a:pPr lvl="1"/>
+            <a:r>
+              <a:rPr lang="en-US" sz="2000" b="1" dirty="0"/>
+              <a:t>1. Unbalanced configuration: delay and amplitude imbalance</a:t>
+            </a:r>
+          </a:p>
+          <a:p>
+            <a:pPr lvl="1"/>
+            <a:endParaRPr lang="en-US" sz="2000" dirty="0"/>
+          </a:p>
+          <a:p>
+            <a:pPr algn="just"/>
+            <a:endParaRPr lang="en-US" sz="2000" dirty="0"/>
+          </a:p>
+          <a:p>
+            <a:pPr algn="just"/>
+            <a:endParaRPr lang="en-US" sz="2000" b="1" i="1" dirty="0"/>
+          </a:p>
+          <a:p>
+            <a:pPr algn="just"/>
+            <a:endParaRPr lang="en-US" sz="2000" kern="0" dirty="0">
+              <a:solidFill>
+                <a:sysClr val="windowText" lastClr="000000"/>
+              </a:solidFill>
+            </a:endParaRPr>
+          </a:p>
+          <a:p>
+            <a:endParaRPr lang="en-US" sz="2000" kern="0" dirty="0">
+              <a:solidFill>
+                <a:sysClr val="windowText" lastClr="000000"/>
+              </a:solidFill>
+            </a:endParaRPr>
+          </a:p>
+        </p:txBody>
+      </p:sp>
+      <p:sp>
+        <p:nvSpPr>
+          <p:cNvPr id="5" name="Marcador de pie de página 2">
+            <a:extLst>
+              <a:ext uri="{FF2B5EF4-FFF2-40B4-BE49-F238E27FC236}">
+                <a16:creationId xmlns:a16="http://schemas.microsoft.com/office/drawing/2014/main" id="{DE36EA9C-DF80-E42F-7290-83E4CB9456C5}"/>
+              </a:ext>
+            </a:extLst>
+          </p:cNvPr>
+          <p:cNvSpPr>
+            <a:spLocks noGrp="1"/>
+          </p:cNvSpPr>
+          <p:nvPr>
+            <p:ph type="ftr" sz="quarter" idx="5"/>
+          </p:nvPr>
+        </p:nvSpPr>
+        <p:spPr>
+          <a:xfrm>
+            <a:off x="609600" y="6457057"/>
+            <a:ext cx="2743200" cy="184666"/>
+          </a:xfrm>
+        </p:spPr>
+        <p:txBody>
+          <a:bodyPr/>
+          <a:lstStyle/>
+          <a:p>
+            <a:pPr marL="12700">
+              <a:spcBef>
+                <a:spcPts val="15"/>
+              </a:spcBef>
+            </a:pPr>
+            <a:r>
+              <a:rPr lang="es-ES" spc="-5"/>
+              <a:t>LAB 3. INTERFEROMETERS I</a:t>
+            </a:r>
+            <a:endParaRPr lang="es-ES" spc="-5" dirty="0"/>
+          </a:p>
+        </p:txBody>
+      </p:sp>
+      <p:sp>
+        <p:nvSpPr>
+          <p:cNvPr id="6" name="CuadroTexto 5">
+            <a:extLst>
+              <a:ext uri="{FF2B5EF4-FFF2-40B4-BE49-F238E27FC236}">
+                <a16:creationId xmlns:a16="http://schemas.microsoft.com/office/drawing/2014/main" id="{CC89707C-0668-99E3-5D9F-19B218BF6FD5}"/>
+              </a:ext>
+            </a:extLst>
+          </p:cNvPr>
+          <p:cNvSpPr txBox="1"/>
+          <p:nvPr/>
+        </p:nvSpPr>
+        <p:spPr>
+          <a:xfrm>
+            <a:off x="491990" y="3547720"/>
+            <a:ext cx="11208020" cy="2800767"/>
+          </a:xfrm>
+          <a:prstGeom prst="rect">
+            <a:avLst/>
+          </a:prstGeom>
+          <a:noFill/>
+        </p:spPr>
+        <p:txBody>
+          <a:bodyPr wrap="square" rtlCol="0">
+            <a:spAutoFit/>
+          </a:bodyPr>
+          <a:lstStyle/>
+          <a:p>
+            <a:pPr algn="just"/>
+            <a:r>
+              <a:rPr lang="es-ES" sz="1600" dirty="0" err="1"/>
+              <a:t>The</a:t>
+            </a:r>
+            <a:r>
+              <a:rPr lang="es-ES" sz="1600" dirty="0"/>
+              <a:t> </a:t>
+            </a:r>
+            <a:r>
+              <a:rPr lang="es-ES" sz="1600" dirty="0" err="1"/>
+              <a:t>phase</a:t>
+            </a:r>
+            <a:r>
+              <a:rPr lang="es-ES" sz="1600" dirty="0"/>
+              <a:t> </a:t>
+            </a:r>
+            <a:r>
+              <a:rPr lang="es-ES" sz="1600" dirty="0" err="1"/>
+              <a:t>difference</a:t>
+            </a:r>
+            <a:r>
+              <a:rPr lang="es-ES" sz="1600" dirty="0"/>
+              <a:t> in </a:t>
+            </a:r>
+            <a:r>
+              <a:rPr lang="es-ES" sz="1600" dirty="0" err="1"/>
+              <a:t>these</a:t>
+            </a:r>
+            <a:r>
+              <a:rPr lang="es-ES" sz="1600" dirty="0"/>
+              <a:t> </a:t>
+            </a:r>
+            <a:r>
+              <a:rPr lang="es-ES" sz="1600" dirty="0" err="1"/>
+              <a:t>simulations</a:t>
+            </a:r>
+            <a:r>
+              <a:rPr lang="es-ES" sz="1600" dirty="0"/>
+              <a:t> is </a:t>
+            </a:r>
+            <a:r>
+              <a:rPr lang="es-ES" sz="1600" dirty="0" err="1"/>
+              <a:t>introduced</a:t>
+            </a:r>
+            <a:r>
+              <a:rPr lang="es-ES" sz="1600" dirty="0"/>
+              <a:t> by </a:t>
+            </a:r>
+            <a:r>
+              <a:rPr lang="es-ES" sz="1600" dirty="0" err="1"/>
+              <a:t>varying</a:t>
+            </a:r>
+            <a:r>
+              <a:rPr lang="es-ES" sz="1600" dirty="0"/>
+              <a:t> </a:t>
+            </a:r>
+            <a:r>
+              <a:rPr lang="es-ES" sz="1600" dirty="0" err="1"/>
+              <a:t>the</a:t>
+            </a:r>
+            <a:r>
+              <a:rPr lang="es-ES" sz="1600" dirty="0"/>
+              <a:t> </a:t>
+            </a:r>
+            <a:r>
+              <a:rPr lang="es-ES" sz="1600" dirty="0" err="1"/>
+              <a:t>length</a:t>
+            </a:r>
+            <a:r>
+              <a:rPr lang="es-ES" sz="1600" dirty="0"/>
+              <a:t> </a:t>
+            </a:r>
+            <a:r>
+              <a:rPr lang="es-ES" sz="1600" dirty="0" err="1"/>
+              <a:t>of</a:t>
+            </a:r>
+            <a:r>
+              <a:rPr lang="es-ES" sz="1600" dirty="0"/>
+              <a:t> </a:t>
+            </a:r>
+            <a:r>
+              <a:rPr lang="es-ES" sz="1600" dirty="0" err="1"/>
+              <a:t>the</a:t>
+            </a:r>
+            <a:r>
+              <a:rPr lang="es-ES" sz="1600" dirty="0"/>
+              <a:t> MZI </a:t>
+            </a:r>
+            <a:r>
+              <a:rPr lang="es-ES" sz="1600" dirty="0" err="1"/>
+              <a:t>arms</a:t>
+            </a:r>
+            <a:r>
+              <a:rPr lang="es-ES" sz="1600" dirty="0"/>
+              <a:t> and </a:t>
+            </a:r>
+            <a:r>
+              <a:rPr lang="es-ES" sz="1600" dirty="0" err="1"/>
+              <a:t>modifying</a:t>
+            </a:r>
+            <a:r>
+              <a:rPr lang="es-ES" sz="1600" dirty="0"/>
+              <a:t> </a:t>
+            </a:r>
+            <a:r>
+              <a:rPr lang="es-ES" sz="1600" dirty="0" err="1"/>
+              <a:t>the</a:t>
+            </a:r>
+            <a:r>
+              <a:rPr lang="es-ES" sz="1600" dirty="0"/>
+              <a:t> </a:t>
+            </a:r>
+            <a:r>
+              <a:rPr lang="es-ES" sz="1600" dirty="0" err="1"/>
+              <a:t>coupling</a:t>
+            </a:r>
+            <a:r>
+              <a:rPr lang="es-ES" sz="1600" dirty="0"/>
+              <a:t> </a:t>
+            </a:r>
+            <a:r>
+              <a:rPr lang="es-ES" sz="1600" dirty="0" err="1"/>
+              <a:t>coefficients</a:t>
+            </a:r>
+            <a:endParaRPr lang="es-ES" sz="1600" dirty="0"/>
+          </a:p>
+          <a:p>
+            <a:pPr algn="just"/>
+            <a:endParaRPr lang="es-ES" sz="1600" dirty="0"/>
+          </a:p>
+          <a:p>
+            <a:pPr algn="just"/>
+            <a:r>
+              <a:rPr lang="es-ES" sz="1600" dirty="0" err="1"/>
+              <a:t>If</a:t>
+            </a:r>
+            <a:r>
+              <a:rPr lang="es-ES" sz="1600" dirty="0"/>
+              <a:t> </a:t>
+            </a:r>
+            <a:r>
+              <a:rPr lang="es-ES" sz="1600" dirty="0" err="1"/>
+              <a:t>the</a:t>
+            </a:r>
+            <a:r>
+              <a:rPr lang="es-ES" sz="1600" dirty="0"/>
+              <a:t> </a:t>
+            </a:r>
+            <a:r>
+              <a:rPr lang="es-ES" sz="1600" dirty="0" err="1"/>
+              <a:t>couplers</a:t>
+            </a:r>
+            <a:r>
+              <a:rPr lang="es-ES" sz="1600" dirty="0"/>
+              <a:t> </a:t>
+            </a:r>
+            <a:r>
+              <a:rPr lang="es-ES" sz="1600" dirty="0" err="1"/>
+              <a:t>split</a:t>
+            </a:r>
+            <a:r>
+              <a:rPr lang="es-ES" sz="1600" dirty="0"/>
+              <a:t> </a:t>
+            </a:r>
+            <a:r>
+              <a:rPr lang="es-ES" sz="1600" dirty="0" err="1"/>
+              <a:t>the</a:t>
+            </a:r>
+            <a:r>
+              <a:rPr lang="es-ES" sz="1600" dirty="0"/>
+              <a:t> </a:t>
+            </a:r>
+            <a:r>
+              <a:rPr lang="es-ES" sz="1600" dirty="0" err="1"/>
+              <a:t>optical</a:t>
+            </a:r>
+            <a:r>
+              <a:rPr lang="es-ES" sz="1600" dirty="0"/>
+              <a:t> </a:t>
+            </a:r>
+            <a:r>
+              <a:rPr lang="es-ES" sz="1600" dirty="0" err="1"/>
+              <a:t>power</a:t>
+            </a:r>
+            <a:r>
+              <a:rPr lang="es-ES" sz="1600" dirty="0"/>
+              <a:t> </a:t>
+            </a:r>
+            <a:r>
+              <a:rPr lang="es-ES" sz="1600" dirty="0" err="1"/>
+              <a:t>unevenly</a:t>
+            </a:r>
+            <a:r>
+              <a:rPr lang="es-ES" sz="1600" dirty="0"/>
+              <a:t> (Ka ≠ Kb), </a:t>
+            </a:r>
+            <a:r>
+              <a:rPr lang="es-ES" sz="1600" dirty="0" err="1"/>
+              <a:t>the</a:t>
+            </a:r>
+            <a:r>
+              <a:rPr lang="es-ES" sz="1600" dirty="0"/>
+              <a:t> amplitudes </a:t>
+            </a:r>
+            <a:r>
+              <a:rPr lang="es-ES" sz="1600" dirty="0" err="1"/>
+              <a:t>of</a:t>
+            </a:r>
+            <a:r>
+              <a:rPr lang="es-ES" sz="1600" dirty="0"/>
+              <a:t> </a:t>
+            </a:r>
+            <a:r>
+              <a:rPr lang="es-ES" sz="1600" dirty="0" err="1"/>
+              <a:t>the</a:t>
+            </a:r>
+            <a:r>
+              <a:rPr lang="es-ES" sz="1600" dirty="0"/>
+              <a:t> </a:t>
+            </a:r>
+            <a:r>
+              <a:rPr lang="es-ES" sz="1600" dirty="0" err="1"/>
+              <a:t>fields</a:t>
+            </a:r>
+            <a:r>
+              <a:rPr lang="es-ES" sz="1600" dirty="0"/>
+              <a:t> </a:t>
+            </a:r>
+            <a:r>
+              <a:rPr lang="es-ES" sz="1600" dirty="0" err="1"/>
+              <a:t>propagating</a:t>
+            </a:r>
+            <a:r>
+              <a:rPr lang="es-ES" sz="1600" dirty="0"/>
+              <a:t> in </a:t>
+            </a:r>
+            <a:r>
+              <a:rPr lang="es-ES" sz="1600" dirty="0" err="1"/>
+              <a:t>the</a:t>
+            </a:r>
+            <a:r>
+              <a:rPr lang="es-ES" sz="1600" dirty="0"/>
+              <a:t> </a:t>
+            </a:r>
+            <a:r>
+              <a:rPr lang="es-ES" sz="1600" dirty="0" err="1"/>
+              <a:t>two</a:t>
+            </a:r>
+            <a:r>
+              <a:rPr lang="es-ES" sz="1600" dirty="0"/>
+              <a:t> </a:t>
+            </a:r>
+            <a:r>
+              <a:rPr lang="es-ES" sz="1600" dirty="0" err="1"/>
+              <a:t>arms</a:t>
+            </a:r>
+            <a:r>
+              <a:rPr lang="es-ES" sz="1600" dirty="0"/>
+              <a:t> </a:t>
+            </a:r>
+            <a:r>
+              <a:rPr lang="es-ES" sz="1600" dirty="0" err="1"/>
+              <a:t>become</a:t>
+            </a:r>
+            <a:r>
+              <a:rPr lang="es-ES" sz="1600" dirty="0"/>
+              <a:t> </a:t>
+            </a:r>
+            <a:r>
+              <a:rPr lang="es-ES" sz="1600" dirty="0" err="1"/>
+              <a:t>different</a:t>
+            </a:r>
+            <a:r>
+              <a:rPr lang="es-ES" sz="1600" dirty="0"/>
+              <a:t>. </a:t>
+            </a:r>
+            <a:r>
+              <a:rPr lang="es-ES" sz="1600" dirty="0" err="1"/>
+              <a:t>Even</a:t>
+            </a:r>
+            <a:r>
+              <a:rPr lang="es-ES" sz="1600" dirty="0"/>
+              <a:t> </a:t>
+            </a:r>
+            <a:r>
+              <a:rPr lang="es-ES" sz="1600" dirty="0" err="1"/>
+              <a:t>when</a:t>
+            </a:r>
+            <a:r>
+              <a:rPr lang="es-ES" sz="1600" dirty="0"/>
+              <a:t> </a:t>
+            </a:r>
+            <a:r>
+              <a:rPr lang="es-ES" sz="1600" dirty="0" err="1"/>
+              <a:t>the</a:t>
+            </a:r>
+            <a:r>
+              <a:rPr lang="es-ES" sz="1600" dirty="0"/>
+              <a:t> </a:t>
+            </a:r>
+            <a:r>
+              <a:rPr lang="es-ES" sz="1600" dirty="0" err="1"/>
+              <a:t>phase</a:t>
+            </a:r>
+            <a:r>
+              <a:rPr lang="es-ES" sz="1600" dirty="0"/>
+              <a:t> </a:t>
+            </a:r>
+            <a:r>
+              <a:rPr lang="es-ES" sz="1600" dirty="0" err="1"/>
+              <a:t>condition</a:t>
+            </a:r>
+            <a:r>
+              <a:rPr lang="es-ES" sz="1600" dirty="0"/>
+              <a:t> for constructive </a:t>
+            </a:r>
+            <a:r>
+              <a:rPr lang="es-ES" sz="1600" dirty="0" err="1"/>
+              <a:t>interference</a:t>
+            </a:r>
+            <a:r>
+              <a:rPr lang="es-ES" sz="1600" dirty="0"/>
+              <a:t> is </a:t>
+            </a:r>
+            <a:r>
+              <a:rPr lang="es-ES" sz="1600" dirty="0" err="1"/>
+              <a:t>satisfied</a:t>
+            </a:r>
+            <a:r>
+              <a:rPr lang="es-ES" sz="1600" dirty="0"/>
+              <a:t>, </a:t>
+            </a:r>
+            <a:r>
+              <a:rPr lang="es-ES" sz="1600" dirty="0" err="1"/>
+              <a:t>the</a:t>
+            </a:r>
+            <a:r>
+              <a:rPr lang="es-ES" sz="1600" dirty="0"/>
+              <a:t> </a:t>
+            </a:r>
+            <a:r>
+              <a:rPr lang="es-ES" sz="1600" dirty="0" err="1"/>
+              <a:t>fields</a:t>
+            </a:r>
+            <a:r>
+              <a:rPr lang="es-ES" sz="1600" dirty="0"/>
+              <a:t> do </a:t>
+            </a:r>
+            <a:r>
+              <a:rPr lang="es-ES" sz="1600" dirty="0" err="1"/>
+              <a:t>not</a:t>
+            </a:r>
+            <a:r>
+              <a:rPr lang="es-ES" sz="1600" dirty="0"/>
+              <a:t> </a:t>
+            </a:r>
+            <a:r>
+              <a:rPr lang="es-ES" sz="1600" dirty="0" err="1"/>
+              <a:t>add</a:t>
+            </a:r>
+            <a:r>
+              <a:rPr lang="es-ES" sz="1600" dirty="0"/>
+              <a:t> </a:t>
+            </a:r>
+            <a:r>
+              <a:rPr lang="es-ES" sz="1600" dirty="0" err="1"/>
+              <a:t>perfectly</a:t>
+            </a:r>
+            <a:r>
+              <a:rPr lang="es-ES" sz="1600" dirty="0"/>
+              <a:t>, which reduces </a:t>
+            </a:r>
+            <a:r>
+              <a:rPr lang="es-ES" sz="1600" dirty="0" err="1"/>
+              <a:t>the</a:t>
+            </a:r>
+            <a:r>
+              <a:rPr lang="es-ES" sz="1600" dirty="0"/>
+              <a:t> </a:t>
+            </a:r>
+            <a:r>
+              <a:rPr lang="es-ES" sz="1600" dirty="0" err="1"/>
+              <a:t>peak</a:t>
+            </a:r>
+            <a:r>
+              <a:rPr lang="es-ES" sz="1600" dirty="0"/>
+              <a:t> </a:t>
+            </a:r>
+            <a:r>
+              <a:rPr lang="es-ES" sz="1600" dirty="0" err="1"/>
+              <a:t>transmission</a:t>
+            </a:r>
+            <a:r>
+              <a:rPr lang="es-ES" sz="1600" dirty="0"/>
+              <a:t> as </a:t>
+            </a:r>
+            <a:r>
+              <a:rPr lang="es-ES" sz="1600" dirty="0" err="1"/>
+              <a:t>shown</a:t>
+            </a:r>
+            <a:r>
+              <a:rPr lang="es-ES" sz="1600" dirty="0"/>
+              <a:t> in </a:t>
+            </a:r>
+            <a:r>
+              <a:rPr lang="es-ES" sz="1600" dirty="0" err="1"/>
+              <a:t>the</a:t>
+            </a:r>
+            <a:r>
+              <a:rPr lang="es-ES" sz="1600" dirty="0"/>
+              <a:t> </a:t>
+            </a:r>
+            <a:r>
+              <a:rPr lang="es-ES" sz="1600" dirty="0" err="1"/>
+              <a:t>plot</a:t>
+            </a:r>
+            <a:r>
+              <a:rPr lang="es-ES" sz="1600" dirty="0"/>
+              <a:t>. </a:t>
+            </a:r>
+            <a:r>
+              <a:rPr lang="es-ES" sz="1600" dirty="0" err="1"/>
+              <a:t>This</a:t>
+            </a:r>
+            <a:r>
+              <a:rPr lang="es-ES" sz="1600" dirty="0"/>
+              <a:t> is, </a:t>
+            </a:r>
+            <a:r>
+              <a:rPr lang="es-ES" sz="1600" dirty="0" err="1"/>
+              <a:t>it</a:t>
+            </a:r>
+            <a:r>
+              <a:rPr lang="es-ES" sz="1600" dirty="0"/>
+              <a:t> reduces </a:t>
+            </a:r>
+            <a:r>
+              <a:rPr lang="es-ES" sz="1600" dirty="0" err="1"/>
+              <a:t>the</a:t>
+            </a:r>
+            <a:r>
+              <a:rPr lang="es-ES" sz="1600" dirty="0"/>
+              <a:t> </a:t>
+            </a:r>
+            <a:r>
+              <a:rPr lang="es-ES" sz="1600" dirty="0" err="1"/>
+              <a:t>extinction</a:t>
+            </a:r>
+            <a:r>
+              <a:rPr lang="es-ES" sz="1600" dirty="0"/>
+              <a:t> ratio. </a:t>
+            </a:r>
+          </a:p>
+          <a:p>
+            <a:pPr algn="just"/>
+            <a:endParaRPr lang="es-ES" sz="1600" dirty="0"/>
+          </a:p>
+          <a:p>
+            <a:pPr algn="just"/>
+            <a:r>
+              <a:rPr lang="es-ES" sz="1600" dirty="0"/>
+              <a:t>In </a:t>
+            </a:r>
+            <a:r>
+              <a:rPr lang="es-ES" sz="1600" dirty="0" err="1"/>
+              <a:t>the</a:t>
+            </a:r>
+            <a:r>
+              <a:rPr lang="es-ES" sz="1600" dirty="0"/>
+              <a:t> </a:t>
+            </a:r>
+            <a:r>
+              <a:rPr lang="es-ES" sz="1600" dirty="0" err="1"/>
+              <a:t>lossless</a:t>
+            </a:r>
+            <a:r>
+              <a:rPr lang="es-ES" sz="1600" dirty="0"/>
+              <a:t> case, </a:t>
+            </a:r>
+            <a:r>
+              <a:rPr lang="es-ES" sz="1600" dirty="0" err="1"/>
+              <a:t>maximum</a:t>
+            </a:r>
+            <a:r>
+              <a:rPr lang="es-ES" sz="1600" dirty="0"/>
+              <a:t> </a:t>
+            </a:r>
+            <a:r>
+              <a:rPr lang="es-ES" sz="1600" dirty="0" err="1"/>
+              <a:t>rejection</a:t>
+            </a:r>
+            <a:r>
+              <a:rPr lang="es-ES" sz="1600" dirty="0"/>
+              <a:t> is </a:t>
+            </a:r>
+            <a:r>
+              <a:rPr lang="es-ES" sz="1600" dirty="0" err="1"/>
+              <a:t>obtained</a:t>
+            </a:r>
+            <a:r>
+              <a:rPr lang="es-ES" sz="1600" dirty="0"/>
+              <a:t> </a:t>
+            </a:r>
+            <a:r>
+              <a:rPr lang="es-ES" sz="1600" dirty="0" err="1"/>
+              <a:t>when</a:t>
+            </a:r>
+            <a:r>
+              <a:rPr lang="es-ES" sz="1600" dirty="0"/>
+              <a:t> </a:t>
+            </a:r>
+            <a:r>
+              <a:rPr lang="es-ES" sz="1600" dirty="0" err="1"/>
+              <a:t>the</a:t>
+            </a:r>
+            <a:r>
+              <a:rPr lang="es-ES" sz="1600" dirty="0"/>
+              <a:t> </a:t>
+            </a:r>
+            <a:r>
+              <a:rPr lang="es-ES" sz="1600" dirty="0" err="1"/>
+              <a:t>two</a:t>
+            </a:r>
+            <a:r>
+              <a:rPr lang="es-ES" sz="1600" dirty="0"/>
+              <a:t> </a:t>
+            </a:r>
+            <a:r>
+              <a:rPr lang="es-ES" sz="1600" dirty="0" err="1"/>
+              <a:t>paths</a:t>
+            </a:r>
+            <a:r>
+              <a:rPr lang="es-ES" sz="1600" dirty="0"/>
+              <a:t> </a:t>
+            </a:r>
+            <a:r>
+              <a:rPr lang="es-ES" sz="1600" dirty="0" err="1"/>
+              <a:t>have</a:t>
+            </a:r>
+            <a:r>
+              <a:rPr lang="es-ES" sz="1600" dirty="0"/>
+              <a:t> </a:t>
+            </a:r>
+            <a:r>
+              <a:rPr lang="es-ES" sz="1600" dirty="0" err="1"/>
+              <a:t>equal</a:t>
+            </a:r>
+            <a:r>
+              <a:rPr lang="es-ES" sz="1600" dirty="0"/>
+              <a:t> amplitudes as </a:t>
+            </a:r>
+            <a:r>
+              <a:rPr lang="es-ES" sz="1600" dirty="0" err="1"/>
+              <a:t>shown</a:t>
+            </a:r>
+            <a:r>
+              <a:rPr lang="es-ES" sz="1600" dirty="0"/>
+              <a:t> </a:t>
+            </a:r>
+            <a:r>
+              <a:rPr lang="es-ES" sz="1600" dirty="0" err="1"/>
+              <a:t>ìn</a:t>
+            </a:r>
+            <a:r>
+              <a:rPr lang="es-ES" sz="1600" dirty="0"/>
+              <a:t> </a:t>
+            </a:r>
+            <a:r>
+              <a:rPr lang="es-ES" sz="1600" dirty="0" err="1"/>
+              <a:t>the</a:t>
+            </a:r>
+            <a:r>
+              <a:rPr lang="es-ES" sz="1600" dirty="0"/>
+              <a:t> </a:t>
+            </a:r>
+            <a:r>
+              <a:rPr lang="es-ES" sz="1600" dirty="0" err="1"/>
+              <a:t>second</a:t>
+            </a:r>
+            <a:r>
+              <a:rPr lang="es-ES" sz="1600" dirty="0"/>
+              <a:t> </a:t>
+            </a:r>
+            <a:r>
+              <a:rPr lang="es-ES" sz="1600" dirty="0" err="1"/>
+              <a:t>plot</a:t>
+            </a:r>
+            <a:r>
+              <a:rPr lang="es-ES" sz="1600" dirty="0"/>
+              <a:t>. </a:t>
+            </a:r>
+          </a:p>
+          <a:p>
+            <a:pPr algn="just"/>
+            <a:endParaRPr lang="es-ES" sz="1600" dirty="0"/>
+          </a:p>
+          <a:p>
+            <a:pPr algn="just"/>
+            <a:endParaRPr lang="es-ES" sz="1600" dirty="0"/>
+          </a:p>
+          <a:p>
+            <a:pPr algn="just"/>
+            <a:r>
+              <a:rPr lang="es-ES" sz="1600" dirty="0"/>
+              <a:t>´</a:t>
+            </a:r>
+          </a:p>
+          <a:p>
+            <a:pPr algn="just"/>
+            <a:endParaRPr lang="es-ES" sz="1600" dirty="0"/>
+          </a:p>
+        </p:txBody>
+      </p:sp>
+      <p:pic>
+        <p:nvPicPr>
+          <p:cNvPr id="2" name="Imagen 1" descr="Gráfico&#10;&#10;El contenido generado por IA puede ser incorrecto.">
+            <a:extLst>
+              <a:ext uri="{FF2B5EF4-FFF2-40B4-BE49-F238E27FC236}">
+                <a16:creationId xmlns:a16="http://schemas.microsoft.com/office/drawing/2014/main" id="{C26E2AE1-9B38-22F2-0297-241D7F397DA8}"/>
+              </a:ext>
+            </a:extLst>
+          </p:cNvPr>
+          <p:cNvPicPr>
+            <a:picLocks noChangeAspect="1"/>
+          </p:cNvPicPr>
+          <p:nvPr/>
+        </p:nvPicPr>
+        <p:blipFill>
+          <a:blip r:embed="rId5"/>
+          <a:stretch>
+            <a:fillRect/>
+          </a:stretch>
+        </p:blipFill>
+        <p:spPr>
+          <a:xfrm>
+            <a:off x="382303" y="525752"/>
+            <a:ext cx="3843338" cy="3084160"/>
+          </a:xfrm>
+          <a:prstGeom prst="rect">
+            <a:avLst/>
+          </a:prstGeom>
+        </p:spPr>
+      </p:pic>
+      <p:pic>
+        <p:nvPicPr>
+          <p:cNvPr id="8" name="Imagen 7">
+            <a:extLst>
+              <a:ext uri="{FF2B5EF4-FFF2-40B4-BE49-F238E27FC236}">
+                <a16:creationId xmlns:a16="http://schemas.microsoft.com/office/drawing/2014/main" id="{F3C60D2D-991F-6928-B15C-C89235F3271E}"/>
+              </a:ext>
+            </a:extLst>
+          </p:cNvPr>
+          <p:cNvPicPr>
+            <a:picLocks noChangeAspect="1"/>
+          </p:cNvPicPr>
+          <p:nvPr/>
+        </p:nvPicPr>
+        <p:blipFill>
+          <a:blip r:embed="rId6"/>
+          <a:stretch>
+            <a:fillRect/>
+          </a:stretch>
+        </p:blipFill>
+        <p:spPr>
+          <a:xfrm>
+            <a:off x="4225641" y="600301"/>
+            <a:ext cx="3973622" cy="2935062"/>
+          </a:xfrm>
+          <a:prstGeom prst="rect">
+            <a:avLst/>
+          </a:prstGeom>
+        </p:spPr>
+      </p:pic>
+      <p:sp>
+        <p:nvSpPr>
+          <p:cNvPr id="10" name="CuadroTexto 9">
+            <a:extLst>
+              <a:ext uri="{FF2B5EF4-FFF2-40B4-BE49-F238E27FC236}">
+                <a16:creationId xmlns:a16="http://schemas.microsoft.com/office/drawing/2014/main" id="{3E53BAA1-58EE-485C-9535-965D889CB3B0}"/>
+              </a:ext>
+            </a:extLst>
+          </p:cNvPr>
+          <p:cNvSpPr txBox="1"/>
+          <p:nvPr/>
+        </p:nvSpPr>
+        <p:spPr>
+          <a:xfrm>
+            <a:off x="8199263" y="1600200"/>
+            <a:ext cx="3002137" cy="646331"/>
+          </a:xfrm>
+          <a:prstGeom prst="rect">
+            <a:avLst/>
+          </a:prstGeom>
+          <a:noFill/>
+        </p:spPr>
+        <p:txBody>
+          <a:bodyPr wrap="square" rtlCol="0">
+            <a:spAutoFit/>
+          </a:bodyPr>
+          <a:lstStyle/>
+          <a:p>
+            <a:r>
+              <a:rPr lang="es-ES" dirty="0">
+                <a:solidFill>
+                  <a:srgbClr val="FF0000"/>
+                </a:solidFill>
+              </a:rPr>
+              <a:t>FALTA LA ÚLTIMS PREGUNTA !!!!!</a:t>
+            </a:r>
+          </a:p>
+        </p:txBody>
+      </p:sp>
+    </p:spTree>
+    <p:extLst>
+      <p:ext uri="{BB962C8B-B14F-4D97-AF65-F5344CB8AC3E}">
+        <p14:creationId xmlns:p14="http://schemas.microsoft.com/office/powerpoint/2010/main" val="1222120110"/>
+      </p:ext>
+    </p:extLst>
+  </p:cSld>
+  <p:clrMapOvr>
+    <a:masterClrMapping/>
+  </p:clrMapOvr>
+</p:sld>
+</file>
+
+<file path=ppt/slides/slide8.xml><?xml version="1.0" encoding="utf-8"?>
 <p:sld xmlns:a="http://schemas.openxmlformats.org/drawingml/2006/main" xmlns:r="http://schemas.openxmlformats.org/officeDocument/2006/relationships" xmlns:p="http://schemas.openxmlformats.org/presentationml/2006/main">
   <p:cSld>
     <p:spTree>
@@ -8349,7 +11896,7 @@
           <a:p>
             <a:fld id="{B6F15528-21DE-4FAA-801E-634DDDAF4B2B}" type="slidenum">
               <a:rPr lang="es-ES" u="sng" smtClean="0"/>
-              <a:t>6</a:t>
+              <a:t>8</a:t>
             </a:fld>
             <a:endParaRPr lang="es-ES" u="sng" dirty="0"/>
           </a:p>
@@ -8517,83 +12064,12 @@
           </a:p>
         </p:txBody>
       </p:sp>
-      <p:sp>
-        <p:nvSpPr>
-          <p:cNvPr id="9" name="CuadroTexto 8">
+      <p:pic>
+        <p:nvPicPr>
+          <p:cNvPr id="13" name="Imagen 12" descr="Gráfico&#10;&#10;El contenido generado por IA puede ser incorrecto.">
             <a:extLst>
               <a:ext uri="{FF2B5EF4-FFF2-40B4-BE49-F238E27FC236}">
-                <a16:creationId xmlns:a16="http://schemas.microsoft.com/office/drawing/2014/main" id="{35CCEBD4-6A73-92F4-CD2C-BA744D2AA23B}"/>
-              </a:ext>
-            </a:extLst>
-          </p:cNvPr>
-          <p:cNvSpPr txBox="1"/>
-          <p:nvPr/>
-        </p:nvSpPr>
-        <p:spPr>
-          <a:xfrm>
-            <a:off x="6325378" y="3429000"/>
-            <a:ext cx="1219200" cy="1384995"/>
-          </a:xfrm>
-          <a:prstGeom prst="rect">
-            <a:avLst/>
-          </a:prstGeom>
-          <a:noFill/>
-        </p:spPr>
-        <p:txBody>
-          <a:bodyPr wrap="square" rtlCol="0">
-            <a:spAutoFit/>
-          </a:bodyPr>
-          <a:lstStyle/>
-          <a:p>
-            <a:r>
-              <a:rPr lang="es-ES" sz="1400" dirty="0">
-                <a:solidFill>
-                  <a:srgbClr val="FF0000"/>
-                </a:solidFill>
-              </a:rPr>
-              <a:t>Con </a:t>
-            </a:r>
-            <a:r>
-              <a:rPr lang="es-ES" sz="1400" dirty="0" err="1">
-                <a:solidFill>
-                  <a:srgbClr val="FF0000"/>
-                </a:solidFill>
-              </a:rPr>
-              <a:t>SiN</a:t>
-            </a:r>
-            <a:r>
-              <a:rPr lang="es-ES" sz="1400" dirty="0">
-                <a:solidFill>
-                  <a:srgbClr val="FF0000"/>
-                </a:solidFill>
-              </a:rPr>
-              <a:t>. Cambio de fase mediante poner una guía en aire y una en </a:t>
-            </a:r>
-            <a:r>
-              <a:rPr lang="es-ES" sz="1400" dirty="0" err="1">
-                <a:solidFill>
-                  <a:srgbClr val="FF0000"/>
-                </a:solidFill>
-              </a:rPr>
-              <a:t>clad</a:t>
-            </a:r>
-            <a:r>
-              <a:rPr lang="es-ES" sz="1400" dirty="0">
-                <a:solidFill>
-                  <a:srgbClr val="FF0000"/>
-                </a:solidFill>
-              </a:rPr>
-              <a:t>. </a:t>
-            </a:r>
-          </a:p>
-        </p:txBody>
-      </p:sp>
-      <p:pic>
-        <p:nvPicPr>
-          <p:cNvPr id="11" name="Imagen 10" descr="Gráfico, Gráfico de líneas&#10;&#10;El contenido generado por IA puede ser incorrecto.">
-            <a:extLst>
-              <a:ext uri="{FF2B5EF4-FFF2-40B4-BE49-F238E27FC236}">
-                <a16:creationId xmlns:a16="http://schemas.microsoft.com/office/drawing/2014/main" id="{824090E0-5133-2592-7A46-FF062E4B2DD1}"/>
+                <a16:creationId xmlns:a16="http://schemas.microsoft.com/office/drawing/2014/main" id="{F9BEA475-2622-9D82-08DC-02B387AD3A43}"/>
               </a:ext>
             </a:extLst>
           </p:cNvPr>
@@ -8610,36 +12086,6 @@
         </p:blipFill>
         <p:spPr>
           <a:xfrm>
-            <a:off x="7528414" y="332509"/>
-            <a:ext cx="3914796" cy="3141503"/>
-          </a:xfrm>
-          <a:prstGeom prst="rect">
-            <a:avLst/>
-          </a:prstGeom>
-        </p:spPr>
-      </p:pic>
-      <p:pic>
-        <p:nvPicPr>
-          <p:cNvPr id="13" name="Imagen 12" descr="Gráfico&#10;&#10;El contenido generado por IA puede ser incorrecto.">
-            <a:extLst>
-              <a:ext uri="{FF2B5EF4-FFF2-40B4-BE49-F238E27FC236}">
-                <a16:creationId xmlns:a16="http://schemas.microsoft.com/office/drawing/2014/main" id="{F9BEA475-2622-9D82-08DC-02B387AD3A43}"/>
-              </a:ext>
-            </a:extLst>
-          </p:cNvPr>
-          <p:cNvPicPr>
-            <a:picLocks noChangeAspect="1"/>
-          </p:cNvPicPr>
-          <p:nvPr/>
-        </p:nvPicPr>
-        <p:blipFill>
-          <a:blip r:embed="rId6"/>
-          <a:stretch>
-            <a:fillRect/>
-          </a:stretch>
-        </p:blipFill>
-        <p:spPr>
-          <a:xfrm>
             <a:off x="228600" y="3471957"/>
             <a:ext cx="3843338" cy="3084160"/>
           </a:xfrm>
@@ -8648,247 +12094,6 @@
           </a:prstGeom>
         </p:spPr>
       </p:pic>
-      <p:pic>
-        <p:nvPicPr>
-          <p:cNvPr id="15" name="Imagen 14" descr="Gráfico, Gráfico de líneas&#10;&#10;El contenido generado por IA puede ser incorrecto.">
-            <a:extLst>
-              <a:ext uri="{FF2B5EF4-FFF2-40B4-BE49-F238E27FC236}">
-                <a16:creationId xmlns:a16="http://schemas.microsoft.com/office/drawing/2014/main" id="{DD96DAE0-4FB8-2E44-72B2-D2675BB7620C}"/>
-              </a:ext>
-            </a:extLst>
-          </p:cNvPr>
-          <p:cNvPicPr>
-            <a:picLocks noChangeAspect="1"/>
-          </p:cNvPicPr>
-          <p:nvPr/>
-        </p:nvPicPr>
-        <p:blipFill>
-          <a:blip r:embed="rId7"/>
-          <a:stretch>
-            <a:fillRect/>
-          </a:stretch>
-        </p:blipFill>
-        <p:spPr>
-          <a:xfrm>
-            <a:off x="7342433" y="3319147"/>
-            <a:ext cx="4540495" cy="3375695"/>
-          </a:xfrm>
-          <a:prstGeom prst="rect">
-            <a:avLst/>
-          </a:prstGeom>
-        </p:spPr>
-      </p:pic>
-      <p:sp>
-        <p:nvSpPr>
-          <p:cNvPr id="17" name="CuadroTexto 16">
-            <a:extLst>
-              <a:ext uri="{FF2B5EF4-FFF2-40B4-BE49-F238E27FC236}">
-                <a16:creationId xmlns:a16="http://schemas.microsoft.com/office/drawing/2014/main" id="{CA26DD12-C5BA-B952-33AD-A90369715974}"/>
-              </a:ext>
-            </a:extLst>
-          </p:cNvPr>
-          <p:cNvSpPr txBox="1"/>
-          <p:nvPr/>
-        </p:nvSpPr>
-        <p:spPr>
-          <a:xfrm>
-            <a:off x="6705600" y="823548"/>
-            <a:ext cx="1066800" cy="738664"/>
-          </a:xfrm>
-          <a:prstGeom prst="rect">
-            <a:avLst/>
-          </a:prstGeom>
-          <a:noFill/>
-        </p:spPr>
-        <p:txBody>
-          <a:bodyPr wrap="square" rtlCol="0">
-            <a:spAutoFit/>
-          </a:bodyPr>
-          <a:lstStyle/>
-          <a:p>
-            <a:r>
-              <a:rPr lang="es-ES" sz="1400" dirty="0">
-                <a:solidFill>
-                  <a:srgbClr val="FF0000"/>
-                </a:solidFill>
-              </a:rPr>
-              <a:t>Cambio de longitud en los brazos</a:t>
-            </a:r>
-          </a:p>
-        </p:txBody>
-      </p:sp>
-      <p:sp>
-        <p:nvSpPr>
-          <p:cNvPr id="18" name="CuadroTexto 17">
-            <a:extLst>
-              <a:ext uri="{FF2B5EF4-FFF2-40B4-BE49-F238E27FC236}">
-                <a16:creationId xmlns:a16="http://schemas.microsoft.com/office/drawing/2014/main" id="{D6514099-5CD2-C9F2-EFD9-90C7F6EC7A3F}"/>
-              </a:ext>
-            </a:extLst>
-          </p:cNvPr>
-          <p:cNvSpPr txBox="1"/>
-          <p:nvPr/>
-        </p:nvSpPr>
-        <p:spPr>
-          <a:xfrm>
-            <a:off x="3706568" y="3916233"/>
-            <a:ext cx="1143000" cy="738664"/>
-          </a:xfrm>
-          <a:prstGeom prst="rect">
-            <a:avLst/>
-          </a:prstGeom>
-          <a:noFill/>
-        </p:spPr>
-        <p:txBody>
-          <a:bodyPr wrap="square" rtlCol="0">
-            <a:spAutoFit/>
-          </a:bodyPr>
-          <a:lstStyle/>
-          <a:p>
-            <a:r>
-              <a:rPr lang="es-ES" sz="1400" dirty="0">
-                <a:solidFill>
-                  <a:srgbClr val="FF0000"/>
-                </a:solidFill>
-              </a:rPr>
-              <a:t>Cambio en </a:t>
-            </a:r>
-            <a:r>
-              <a:rPr lang="es-ES" sz="1400" dirty="0" err="1">
-                <a:solidFill>
-                  <a:srgbClr val="FF0000"/>
-                </a:solidFill>
-              </a:rPr>
-              <a:t>cte</a:t>
-            </a:r>
-            <a:r>
-              <a:rPr lang="es-ES" sz="1400" dirty="0">
-                <a:solidFill>
-                  <a:srgbClr val="FF0000"/>
-                </a:solidFill>
-              </a:rPr>
-              <a:t> de acoplo</a:t>
-            </a:r>
-          </a:p>
-        </p:txBody>
-      </p:sp>
-      <p:pic>
-        <p:nvPicPr>
-          <p:cNvPr id="20" name="Imagen 19" descr="Gráfico&#10;&#10;El contenido generado por IA puede ser incorrecto.">
-            <a:extLst>
-              <a:ext uri="{FF2B5EF4-FFF2-40B4-BE49-F238E27FC236}">
-                <a16:creationId xmlns:a16="http://schemas.microsoft.com/office/drawing/2014/main" id="{1653191D-5E5F-EFFE-B541-D2451EB81DF6}"/>
-              </a:ext>
-            </a:extLst>
-          </p:cNvPr>
-          <p:cNvPicPr>
-            <a:picLocks noChangeAspect="1"/>
-          </p:cNvPicPr>
-          <p:nvPr/>
-        </p:nvPicPr>
-        <p:blipFill>
-          <a:blip r:embed="rId8"/>
-          <a:stretch>
-            <a:fillRect/>
-          </a:stretch>
-        </p:blipFill>
-        <p:spPr>
-          <a:xfrm>
-            <a:off x="3706134" y="1327498"/>
-            <a:ext cx="2547938" cy="2044642"/>
-          </a:xfrm>
-          <a:prstGeom prst="rect">
-            <a:avLst/>
-          </a:prstGeom>
-        </p:spPr>
-      </p:pic>
-      <p:sp>
-        <p:nvSpPr>
-          <p:cNvPr id="21" name="CuadroTexto 20">
-            <a:extLst>
-              <a:ext uri="{FF2B5EF4-FFF2-40B4-BE49-F238E27FC236}">
-                <a16:creationId xmlns:a16="http://schemas.microsoft.com/office/drawing/2014/main" id="{A0F9B25B-89E1-CEC4-C0A9-B3DAB73301DF}"/>
-              </a:ext>
-            </a:extLst>
-          </p:cNvPr>
-          <p:cNvSpPr txBox="1"/>
-          <p:nvPr/>
-        </p:nvSpPr>
-        <p:spPr>
-          <a:xfrm>
-            <a:off x="5394035" y="2042636"/>
-            <a:ext cx="990600" cy="738664"/>
-          </a:xfrm>
-          <a:prstGeom prst="rect">
-            <a:avLst/>
-          </a:prstGeom>
-          <a:noFill/>
-        </p:spPr>
-        <p:txBody>
-          <a:bodyPr wrap="square" rtlCol="0">
-            <a:spAutoFit/>
-          </a:bodyPr>
-          <a:lstStyle/>
-          <a:p>
-            <a:r>
-              <a:rPr lang="es-ES" sz="1400" dirty="0">
-                <a:solidFill>
-                  <a:srgbClr val="FF0000"/>
-                </a:solidFill>
-              </a:rPr>
-              <a:t>Con </a:t>
-            </a:r>
-            <a:r>
-              <a:rPr lang="es-ES" sz="1400" dirty="0" err="1">
-                <a:solidFill>
-                  <a:srgbClr val="FF0000"/>
-                </a:solidFill>
-              </a:rPr>
-              <a:t>SiN</a:t>
-            </a:r>
-            <a:r>
-              <a:rPr lang="es-ES" sz="1400" dirty="0">
-                <a:solidFill>
-                  <a:srgbClr val="FF0000"/>
-                </a:solidFill>
-              </a:rPr>
-              <a:t>. </a:t>
-            </a:r>
-            <a:r>
-              <a:rPr lang="es-ES" sz="1400" dirty="0" err="1">
-                <a:solidFill>
-                  <a:srgbClr val="FF0000"/>
-                </a:solidFill>
-              </a:rPr>
-              <a:t>Water</a:t>
-            </a:r>
-            <a:r>
-              <a:rPr lang="es-ES" sz="1400" dirty="0">
-                <a:solidFill>
-                  <a:srgbClr val="FF0000"/>
-                </a:solidFill>
-              </a:rPr>
-              <a:t> y </a:t>
-            </a:r>
-            <a:r>
-              <a:rPr lang="es-ES" sz="1400" dirty="0" err="1">
-                <a:solidFill>
-                  <a:srgbClr val="FF0000"/>
-                </a:solidFill>
-              </a:rPr>
-              <a:t>clad</a:t>
-            </a:r>
-            <a:r>
-              <a:rPr lang="es-ES" sz="1400" dirty="0">
-                <a:solidFill>
-                  <a:srgbClr val="FF0000"/>
-                </a:solidFill>
-              </a:rPr>
-              <a:t>. </a:t>
-            </a:r>
-          </a:p>
-        </p:txBody>
-      </p:sp>
     </p:spTree>
     <p:extLst>
       <p:ext uri="{BB962C8B-B14F-4D97-AF65-F5344CB8AC3E}">
@@ -8902,7 +12107,7 @@
 </p:sld>
 </file>
 
-<file path=ppt/slides/slide7.xml><?xml version="1.0" encoding="utf-8"?>
+<file path=ppt/slides/slide9.xml><?xml version="1.0" encoding="utf-8"?>
 <p:sld xmlns:a="http://schemas.openxmlformats.org/drawingml/2006/main" xmlns:r="http://schemas.openxmlformats.org/officeDocument/2006/relationships" xmlns:p="http://schemas.openxmlformats.org/presentationml/2006/main">
   <p:cSld>
     <p:spTree>
@@ -9117,7 +12322,7 @@
           <a:p>
             <a:fld id="{B6F15528-21DE-4FAA-801E-634DDDAF4B2B}" type="slidenum">
               <a:rPr lang="es-ES" smtClean="0"/>
-              <a:t>7</a:t>
+              <a:t>9</a:t>
             </a:fld>
             <a:endParaRPr lang="es-ES"/>
           </a:p>
@@ -9557,916 +12762,6 @@
     <p:extLst>
       <p:ext uri="{BB962C8B-B14F-4D97-AF65-F5344CB8AC3E}">
         <p14:creationId xmlns:p14="http://schemas.microsoft.com/office/powerpoint/2010/main" val="2337098194"/>
-      </p:ext>
-    </p:extLst>
-  </p:cSld>
-  <p:clrMapOvr>
-    <a:masterClrMapping/>
-  </p:clrMapOvr>
-</p:sld>
-</file>
-
-<file path=ppt/slides/slide8.xml><?xml version="1.0" encoding="utf-8"?>
-<p:sld xmlns:a="http://schemas.openxmlformats.org/drawingml/2006/main" xmlns:r="http://schemas.openxmlformats.org/officeDocument/2006/relationships" xmlns:p="http://schemas.openxmlformats.org/presentationml/2006/main">
-  <p:cSld>
-    <p:spTree>
-      <p:nvGrpSpPr>
-        <p:cNvPr id="1" name="">
-          <a:extLst>
-            <a:ext uri="{FF2B5EF4-FFF2-40B4-BE49-F238E27FC236}">
-              <a16:creationId xmlns:a16="http://schemas.microsoft.com/office/drawing/2014/main" id="{98CB9552-DF22-1310-10FA-4D2D2AF77601}"/>
-            </a:ext>
-          </a:extLst>
-        </p:cNvPr>
-        <p:cNvGrpSpPr/>
-        <p:nvPr/>
-      </p:nvGrpSpPr>
-      <p:grpSpPr>
-        <a:xfrm>
-          <a:off x="0" y="0"/>
-          <a:ext cx="0" cy="0"/>
-          <a:chOff x="0" y="0"/>
-          <a:chExt cx="0" cy="0"/>
-        </a:xfrm>
-      </p:grpSpPr>
-      <p:sp>
-        <p:nvSpPr>
-          <p:cNvPr id="16" name="object 16">
-            <a:extLst>
-              <a:ext uri="{FF2B5EF4-FFF2-40B4-BE49-F238E27FC236}">
-                <a16:creationId xmlns:a16="http://schemas.microsoft.com/office/drawing/2014/main" id="{B0632A48-0384-0EF1-389E-FBF3F9C3E7CE}"/>
-              </a:ext>
-            </a:extLst>
-          </p:cNvPr>
-          <p:cNvSpPr txBox="1">
-            <a:spLocks noGrp="1"/>
-          </p:cNvSpPr>
-          <p:nvPr>
-            <p:ph type="title"/>
-          </p:nvPr>
-        </p:nvSpPr>
-        <p:spPr>
-          <a:xfrm>
-            <a:off x="685800" y="408883"/>
-            <a:ext cx="10994410" cy="782265"/>
-          </a:xfrm>
-          <a:prstGeom prst="rect">
-            <a:avLst/>
-          </a:prstGeom>
-        </p:spPr>
-        <p:txBody>
-          <a:bodyPr vert="horz" wrap="square" lIns="0" tIns="12700" rIns="0" bIns="0" rtlCol="0">
-            <a:spAutoFit/>
-          </a:bodyPr>
-          <a:lstStyle/>
-          <a:p>
-            <a:pPr marL="12700">
-              <a:lnSpc>
-                <a:spcPct val="100000"/>
-              </a:lnSpc>
-              <a:spcBef>
-                <a:spcPts val="100"/>
-              </a:spcBef>
-            </a:pPr>
-            <a:r>
-              <a:rPr lang="en-US" sz="2400" b="1" dirty="0"/>
-              <a:t>ASSESSMENT #3 </a:t>
-            </a:r>
-            <a:r>
-              <a:rPr lang="en-US" sz="2500" dirty="0"/>
-              <a:t>– SAX implementation </a:t>
-            </a:r>
-            <a:br>
-              <a:rPr lang="es-ES" sz="2500" spc="-5" dirty="0">
-                <a:latin typeface="+mj-lt"/>
-                <a:cs typeface="Lucida Sans"/>
-              </a:rPr>
-            </a:br>
-            <a:endParaRPr sz="2500" b="0" dirty="0">
-              <a:latin typeface="+mj-lt"/>
-              <a:cs typeface="Lucida Sans"/>
-            </a:endParaRPr>
-          </a:p>
-        </p:txBody>
-      </p:sp>
-      <p:pic>
-        <p:nvPicPr>
-          <p:cNvPr id="83" name="Gráfico 82">
-            <a:extLst>
-              <a:ext uri="{FF2B5EF4-FFF2-40B4-BE49-F238E27FC236}">
-                <a16:creationId xmlns:a16="http://schemas.microsoft.com/office/drawing/2014/main" id="{1F43E6A6-5CC3-9B99-14AC-997478150C3D}"/>
-              </a:ext>
-            </a:extLst>
-          </p:cNvPr>
-          <p:cNvPicPr>
-            <a:picLocks noChangeAspect="1"/>
-          </p:cNvPicPr>
-          <p:nvPr/>
-        </p:nvPicPr>
-        <p:blipFill>
-          <a:blip r:embed="rId3">
-            <a:extLst>
-              <a:ext uri="{96DAC541-7B7A-43D3-8B79-37D633B846F1}">
-                <asvg:svgBlip xmlns:asvg="http://schemas.microsoft.com/office/drawing/2016/SVG/main" r:embed="rId4"/>
-              </a:ext>
-            </a:extLst>
-          </a:blip>
-          <a:stretch>
-            <a:fillRect/>
-          </a:stretch>
-        </p:blipFill>
-        <p:spPr>
-          <a:xfrm>
-            <a:off x="5045006" y="6356057"/>
-            <a:ext cx="6409575" cy="363174"/>
-          </a:xfrm>
-          <a:prstGeom prst="rect">
-            <a:avLst/>
-          </a:prstGeom>
-        </p:spPr>
-      </p:pic>
-      <p:sp>
-        <p:nvSpPr>
-          <p:cNvPr id="84" name="Marcador de número de diapositiva 83">
-            <a:extLst>
-              <a:ext uri="{FF2B5EF4-FFF2-40B4-BE49-F238E27FC236}">
-                <a16:creationId xmlns:a16="http://schemas.microsoft.com/office/drawing/2014/main" id="{DFC09DB6-1DF7-C8F9-7414-27BC280DEA0F}"/>
-              </a:ext>
-            </a:extLst>
-          </p:cNvPr>
-          <p:cNvSpPr>
-            <a:spLocks noGrp="1"/>
-          </p:cNvSpPr>
-          <p:nvPr>
-            <p:ph type="sldNum" sz="quarter" idx="7"/>
-          </p:nvPr>
-        </p:nvSpPr>
-        <p:spPr/>
-        <p:txBody>
-          <a:bodyPr/>
-          <a:lstStyle/>
-          <a:p>
-            <a:fld id="{B6F15528-21DE-4FAA-801E-634DDDAF4B2B}" type="slidenum">
-              <a:rPr lang="es-ES" smtClean="0"/>
-              <a:t>8</a:t>
-            </a:fld>
-            <a:endParaRPr lang="es-ES"/>
-          </a:p>
-        </p:txBody>
-      </p:sp>
-      <p:sp>
-        <p:nvSpPr>
-          <p:cNvPr id="4" name="Marcador de texto 2">
-            <a:extLst>
-              <a:ext uri="{FF2B5EF4-FFF2-40B4-BE49-F238E27FC236}">
-                <a16:creationId xmlns:a16="http://schemas.microsoft.com/office/drawing/2014/main" id="{EBC8DCFA-5565-A757-1F8D-F4CCCF573A63}"/>
-              </a:ext>
-            </a:extLst>
-          </p:cNvPr>
-          <p:cNvSpPr txBox="1">
-            <a:spLocks/>
-          </p:cNvSpPr>
-          <p:nvPr/>
-        </p:nvSpPr>
-        <p:spPr>
-          <a:xfrm>
-            <a:off x="571500" y="1066800"/>
-            <a:ext cx="11048999" cy="4958137"/>
-          </a:xfrm>
-          <a:prstGeom prst="rect">
-            <a:avLst/>
-          </a:prstGeom>
-        </p:spPr>
-        <p:txBody>
-          <a:bodyPr>
-            <a:normAutofit/>
-          </a:bodyPr>
-          <a:lstStyle>
-            <a:lvl1pPr marL="0">
-              <a:defRPr>
-                <a:latin typeface="+mn-lt"/>
-                <a:ea typeface="+mn-ea"/>
-                <a:cs typeface="+mn-cs"/>
-              </a:defRPr>
-            </a:lvl1pPr>
-            <a:lvl2pPr marL="457200">
-              <a:defRPr>
-                <a:latin typeface="+mn-lt"/>
-                <a:ea typeface="+mn-ea"/>
-                <a:cs typeface="+mn-cs"/>
-              </a:defRPr>
-            </a:lvl2pPr>
-            <a:lvl3pPr marL="914400">
-              <a:defRPr>
-                <a:latin typeface="+mn-lt"/>
-                <a:ea typeface="+mn-ea"/>
-                <a:cs typeface="+mn-cs"/>
-              </a:defRPr>
-            </a:lvl3pPr>
-            <a:lvl4pPr marL="1371600">
-              <a:defRPr>
-                <a:latin typeface="+mn-lt"/>
-                <a:ea typeface="+mn-ea"/>
-                <a:cs typeface="+mn-cs"/>
-              </a:defRPr>
-            </a:lvl4pPr>
-            <a:lvl5pPr marL="1828800">
-              <a:defRPr>
-                <a:latin typeface="+mn-lt"/>
-                <a:ea typeface="+mn-ea"/>
-                <a:cs typeface="+mn-cs"/>
-              </a:defRPr>
-            </a:lvl5pPr>
-            <a:lvl6pPr marL="2286000">
-              <a:defRPr>
-                <a:latin typeface="+mn-lt"/>
-                <a:ea typeface="+mn-ea"/>
-                <a:cs typeface="+mn-cs"/>
-              </a:defRPr>
-            </a:lvl6pPr>
-            <a:lvl7pPr marL="2743200">
-              <a:defRPr>
-                <a:latin typeface="+mn-lt"/>
-                <a:ea typeface="+mn-ea"/>
-                <a:cs typeface="+mn-cs"/>
-              </a:defRPr>
-            </a:lvl7pPr>
-            <a:lvl8pPr marL="3200400">
-              <a:defRPr>
-                <a:latin typeface="+mn-lt"/>
-                <a:ea typeface="+mn-ea"/>
-                <a:cs typeface="+mn-cs"/>
-              </a:defRPr>
-            </a:lvl8pPr>
-            <a:lvl9pPr marL="3657600">
-              <a:defRPr>
-                <a:latin typeface="+mn-lt"/>
-                <a:ea typeface="+mn-ea"/>
-                <a:cs typeface="+mn-cs"/>
-              </a:defRPr>
-            </a:lvl9pPr>
-          </a:lstStyle>
-          <a:p>
-            <a:r>
-              <a:rPr lang="en-US" dirty="0"/>
-              <a:t>Now, we are going to implement the design parameters in the MZI model developed in SAX and compare the response obtained with the one simulated by mathematical formulation. This will help us to identify any error in the definition of the SAX model single components. </a:t>
-            </a:r>
-          </a:p>
-          <a:p>
-            <a:br>
-              <a:rPr lang="en-US" dirty="0"/>
-            </a:br>
-            <a:r>
-              <a:rPr lang="en-US" dirty="0"/>
-              <a:t>In order to implement the SAX model, take as example the following lines:</a:t>
-            </a:r>
-          </a:p>
-          <a:p>
-            <a:endParaRPr lang="en-US" dirty="0"/>
-          </a:p>
-          <a:p>
-            <a:pPr lvl="2">
-              <a:lnSpc>
-                <a:spcPts val="1425"/>
-              </a:lnSpc>
-            </a:pPr>
-            <a:r>
-              <a:rPr lang="es-ES" sz="1400" b="0" dirty="0">
-                <a:effectLst/>
-                <a:latin typeface="Courier New" panose="02070309020205020404" pitchFamily="49" charset="0"/>
-              </a:rPr>
-              <a:t> </a:t>
-            </a:r>
-            <a:r>
-              <a:rPr lang="es-ES" sz="1400" b="0" dirty="0" err="1">
-                <a:effectLst/>
-                <a:latin typeface="Courier New" panose="02070309020205020404" pitchFamily="49" charset="0"/>
-              </a:rPr>
-              <a:t>mzi_test</a:t>
-            </a:r>
-            <a:r>
-              <a:rPr lang="es-ES" sz="1400" b="0" dirty="0">
-                <a:effectLst/>
-                <a:latin typeface="Courier New" panose="02070309020205020404" pitchFamily="49" charset="0"/>
-              </a:rPr>
-              <a:t> = </a:t>
-            </a:r>
-            <a:r>
-              <a:rPr lang="es-ES" sz="1400" b="0" dirty="0" err="1">
-                <a:effectLst/>
-                <a:latin typeface="Courier New" panose="02070309020205020404" pitchFamily="49" charset="0"/>
-              </a:rPr>
-              <a:t>mzi</a:t>
-            </a:r>
-            <a:r>
-              <a:rPr lang="es-ES" sz="1400" b="0" dirty="0">
-                <a:effectLst/>
-                <a:latin typeface="Courier New" panose="02070309020205020404" pitchFamily="49" charset="0"/>
-              </a:rPr>
-              <a:t>(</a:t>
-            </a:r>
-            <a:r>
-              <a:rPr lang="es-ES" sz="1400" b="0" dirty="0" err="1">
-                <a:effectLst/>
-                <a:latin typeface="Courier New" panose="02070309020205020404" pitchFamily="49" charset="0"/>
-              </a:rPr>
-              <a:t>wl</a:t>
-            </a:r>
-            <a:r>
-              <a:rPr lang="es-ES" sz="1400" b="0" dirty="0">
-                <a:effectLst/>
-                <a:latin typeface="Courier New" panose="02070309020205020404" pitchFamily="49" charset="0"/>
-              </a:rPr>
-              <a:t>=</a:t>
-            </a:r>
-            <a:r>
-              <a:rPr lang="es-ES" sz="1400" b="0" dirty="0" err="1">
-                <a:effectLst/>
-                <a:latin typeface="Courier New" panose="02070309020205020404" pitchFamily="49" charset="0"/>
-              </a:rPr>
-              <a:t>wl</a:t>
-            </a:r>
-            <a:r>
-              <a:rPr lang="es-ES" sz="1400" b="0" dirty="0">
-                <a:effectLst/>
-                <a:latin typeface="Courier New" panose="02070309020205020404" pitchFamily="49" charset="0"/>
-              </a:rPr>
-              <a:t>, </a:t>
-            </a:r>
-          </a:p>
-          <a:p>
-            <a:pPr lvl="2">
-              <a:lnSpc>
-                <a:spcPts val="1425"/>
-              </a:lnSpc>
-            </a:pPr>
-            <a:r>
-              <a:rPr lang="es-ES" sz="1400" b="0" dirty="0">
-                <a:effectLst/>
-                <a:latin typeface="Courier New" panose="02070309020205020404" pitchFamily="49" charset="0"/>
-              </a:rPr>
-              <a:t>    </a:t>
-            </a:r>
-            <a:r>
-              <a:rPr lang="es-ES" sz="1400" b="0" dirty="0" err="1">
-                <a:effectLst/>
-                <a:latin typeface="Courier New" panose="02070309020205020404" pitchFamily="49" charset="0"/>
-              </a:rPr>
-              <a:t>coup_a</a:t>
-            </a:r>
-            <a:r>
-              <a:rPr lang="es-ES" sz="1400" b="0" dirty="0">
-                <a:effectLst/>
-                <a:latin typeface="Courier New" panose="02070309020205020404" pitchFamily="49" charset="0"/>
-              </a:rPr>
-              <a:t> = ...</a:t>
-            </a:r>
-          </a:p>
-          <a:p>
-            <a:pPr lvl="2">
-              <a:lnSpc>
-                <a:spcPts val="1425"/>
-              </a:lnSpc>
-            </a:pPr>
-            <a:r>
-              <a:rPr lang="es-ES" sz="1400" b="0" dirty="0">
-                <a:effectLst/>
-                <a:latin typeface="Courier New" panose="02070309020205020404" pitchFamily="49" charset="0"/>
-              </a:rPr>
-              <a:t>    </a:t>
-            </a:r>
-            <a:r>
-              <a:rPr lang="es-ES" sz="1400" b="0" dirty="0" err="1">
-                <a:effectLst/>
-                <a:latin typeface="Courier New" panose="02070309020205020404" pitchFamily="49" charset="0"/>
-              </a:rPr>
-              <a:t>wvg_d</a:t>
-            </a:r>
-            <a:r>
-              <a:rPr lang="es-ES" sz="1400" b="0" dirty="0">
-                <a:effectLst/>
-                <a:latin typeface="Courier New" panose="02070309020205020404" pitchFamily="49" charset="0"/>
-              </a:rPr>
-              <a:t>={"</a:t>
-            </a:r>
-            <a:r>
-              <a:rPr lang="es-ES" sz="1400" b="0" dirty="0" err="1">
-                <a:effectLst/>
-                <a:latin typeface="Courier New" panose="02070309020205020404" pitchFamily="49" charset="0"/>
-              </a:rPr>
-              <a:t>length</a:t>
-            </a:r>
-            <a:r>
-              <a:rPr lang="es-ES" sz="1400" b="0" dirty="0">
-                <a:effectLst/>
-                <a:latin typeface="Courier New" panose="02070309020205020404" pitchFamily="49" charset="0"/>
-              </a:rPr>
-              <a:t>": </a:t>
-            </a:r>
-            <a:r>
-              <a:rPr lang="es-ES" sz="1400" b="0" dirty="0" err="1">
-                <a:effectLst/>
-                <a:latin typeface="Courier New" panose="02070309020205020404" pitchFamily="49" charset="0"/>
-              </a:rPr>
-              <a:t>l_d</a:t>
-            </a:r>
-            <a:r>
-              <a:rPr lang="es-ES" sz="1400" b="0" dirty="0">
-                <a:effectLst/>
-                <a:latin typeface="Courier New" panose="02070309020205020404" pitchFamily="49" charset="0"/>
-              </a:rPr>
-              <a:t>, "</a:t>
-            </a:r>
-            <a:r>
-              <a:rPr lang="es-ES" sz="1400" b="0" dirty="0" err="1">
-                <a:effectLst/>
-                <a:latin typeface="Courier New" panose="02070309020205020404" pitchFamily="49" charset="0"/>
-              </a:rPr>
-              <a:t>neff</a:t>
-            </a:r>
-            <a:r>
-              <a:rPr lang="es-ES" sz="1400" b="0" dirty="0">
-                <a:effectLst/>
-                <a:latin typeface="Courier New" panose="02070309020205020404" pitchFamily="49" charset="0"/>
-              </a:rPr>
-              <a:t>": ...}, </a:t>
-            </a:r>
-          </a:p>
-          <a:p>
-            <a:pPr lvl="2">
-              <a:lnSpc>
-                <a:spcPts val="1425"/>
-              </a:lnSpc>
-            </a:pPr>
-            <a:r>
-              <a:rPr lang="es-ES" sz="1400" b="0" dirty="0">
-                <a:effectLst/>
-                <a:latin typeface="Courier New" panose="02070309020205020404" pitchFamily="49" charset="0"/>
-              </a:rPr>
-              <a:t>    </a:t>
-            </a:r>
-            <a:r>
-              <a:rPr lang="es-ES" sz="1400" b="0" dirty="0" err="1">
-                <a:effectLst/>
-                <a:latin typeface="Courier New" panose="02070309020205020404" pitchFamily="49" charset="0"/>
-              </a:rPr>
-              <a:t>wvg_u</a:t>
-            </a:r>
-            <a:r>
-              <a:rPr lang="es-ES" sz="1400" b="0" dirty="0">
-                <a:effectLst/>
-                <a:latin typeface="Courier New" panose="02070309020205020404" pitchFamily="49" charset="0"/>
-              </a:rPr>
-              <a:t>={"</a:t>
-            </a:r>
-            <a:r>
-              <a:rPr lang="es-ES" sz="1400" b="0" dirty="0" err="1">
-                <a:effectLst/>
-                <a:latin typeface="Courier New" panose="02070309020205020404" pitchFamily="49" charset="0"/>
-              </a:rPr>
-              <a:t>length</a:t>
-            </a:r>
-            <a:r>
-              <a:rPr lang="es-ES" sz="1400" b="0" dirty="0">
-                <a:effectLst/>
-                <a:latin typeface="Courier New" panose="02070309020205020404" pitchFamily="49" charset="0"/>
-              </a:rPr>
-              <a:t>": </a:t>
-            </a:r>
-            <a:r>
-              <a:rPr lang="es-ES" sz="1400" b="0" dirty="0" err="1">
-                <a:effectLst/>
-                <a:latin typeface="Courier New" panose="02070309020205020404" pitchFamily="49" charset="0"/>
-              </a:rPr>
-              <a:t>l_u</a:t>
-            </a:r>
-            <a:r>
-              <a:rPr lang="es-ES" sz="1400" b="0" dirty="0">
-                <a:effectLst/>
-                <a:latin typeface="Courier New" panose="02070309020205020404" pitchFamily="49" charset="0"/>
-              </a:rPr>
-              <a:t>, "</a:t>
-            </a:r>
-            <a:r>
-              <a:rPr lang="es-ES" sz="1400" b="0" dirty="0" err="1">
-                <a:effectLst/>
-                <a:latin typeface="Courier New" panose="02070309020205020404" pitchFamily="49" charset="0"/>
-              </a:rPr>
-              <a:t>neff</a:t>
-            </a:r>
-            <a:r>
-              <a:rPr lang="es-ES" sz="1400" b="0" dirty="0">
-                <a:effectLst/>
-                <a:latin typeface="Courier New" panose="02070309020205020404" pitchFamily="49" charset="0"/>
-              </a:rPr>
-              <a:t>": ...},</a:t>
-            </a:r>
-          </a:p>
-          <a:p>
-            <a:pPr lvl="2">
-              <a:lnSpc>
-                <a:spcPts val="1425"/>
-              </a:lnSpc>
-            </a:pPr>
-            <a:r>
-              <a:rPr lang="es-ES" sz="1400" b="0" dirty="0">
-                <a:effectLst/>
-                <a:latin typeface="Courier New" panose="02070309020205020404" pitchFamily="49" charset="0"/>
-              </a:rPr>
-              <a:t>    </a:t>
-            </a:r>
-            <a:r>
-              <a:rPr lang="es-ES" sz="1400" b="0" dirty="0" err="1">
-                <a:effectLst/>
-                <a:latin typeface="Courier New" panose="02070309020205020404" pitchFamily="49" charset="0"/>
-              </a:rPr>
-              <a:t>coup_b</a:t>
-            </a:r>
-            <a:r>
-              <a:rPr lang="es-ES" sz="1400" b="0" dirty="0">
-                <a:effectLst/>
-                <a:latin typeface="Courier New" panose="02070309020205020404" pitchFamily="49" charset="0"/>
-              </a:rPr>
-              <a:t> = ... )</a:t>
-            </a:r>
-          </a:p>
-          <a:p>
-            <a:pPr lvl="2">
-              <a:lnSpc>
-                <a:spcPts val="1425"/>
-              </a:lnSpc>
-            </a:pPr>
-            <a:br>
-              <a:rPr lang="es-ES" sz="1400" b="0" dirty="0">
-                <a:effectLst/>
-                <a:latin typeface="Courier New" panose="02070309020205020404" pitchFamily="49" charset="0"/>
-              </a:rPr>
-            </a:br>
-            <a:r>
-              <a:rPr lang="es-ES" sz="1400" b="0" dirty="0">
-                <a:effectLst/>
-                <a:latin typeface="Courier New" panose="02070309020205020404" pitchFamily="49" charset="0"/>
-              </a:rPr>
-              <a:t>    H00 = </a:t>
-            </a:r>
-            <a:r>
-              <a:rPr lang="es-ES" sz="1400" b="0" dirty="0" err="1">
-                <a:effectLst/>
-                <a:latin typeface="Courier New" panose="02070309020205020404" pitchFamily="49" charset="0"/>
-              </a:rPr>
-              <a:t>mzi_test</a:t>
-            </a:r>
-            <a:r>
-              <a:rPr lang="es-ES" sz="1400" b="0" dirty="0">
-                <a:effectLst/>
-                <a:latin typeface="Courier New" panose="02070309020205020404" pitchFamily="49" charset="0"/>
-              </a:rPr>
-              <a:t>["in0", "out0"]</a:t>
-            </a:r>
-          </a:p>
-          <a:p>
-            <a:endParaRPr lang="en-US" sz="2000" dirty="0"/>
-          </a:p>
-          <a:p>
-            <a:pPr algn="just"/>
-            <a:endParaRPr lang="en-US" sz="2000" dirty="0"/>
-          </a:p>
-          <a:p>
-            <a:pPr algn="just"/>
-            <a:endParaRPr lang="en-US" sz="2000" b="1" i="1" dirty="0"/>
-          </a:p>
-          <a:p>
-            <a:pPr algn="just"/>
-            <a:endParaRPr lang="en-US" sz="2000" kern="0" dirty="0">
-              <a:solidFill>
-                <a:sysClr val="windowText" lastClr="000000"/>
-              </a:solidFill>
-            </a:endParaRPr>
-          </a:p>
-          <a:p>
-            <a:endParaRPr lang="en-US" sz="2000" kern="0" dirty="0">
-              <a:solidFill>
-                <a:sysClr val="windowText" lastClr="000000"/>
-              </a:solidFill>
-            </a:endParaRPr>
-          </a:p>
-        </p:txBody>
-      </p:sp>
-      <p:sp>
-        <p:nvSpPr>
-          <p:cNvPr id="2" name="CuadroTexto 1">
-            <a:extLst>
-              <a:ext uri="{FF2B5EF4-FFF2-40B4-BE49-F238E27FC236}">
-                <a16:creationId xmlns:a16="http://schemas.microsoft.com/office/drawing/2014/main" id="{CA4A2D6E-5993-52B3-D251-1ADF2B0C8355}"/>
-              </a:ext>
-            </a:extLst>
-          </p:cNvPr>
-          <p:cNvSpPr txBox="1"/>
-          <p:nvPr/>
-        </p:nvSpPr>
-        <p:spPr>
-          <a:xfrm>
-            <a:off x="609441" y="4860334"/>
-            <a:ext cx="11199971" cy="1384995"/>
-          </a:xfrm>
-          <a:prstGeom prst="rect">
-            <a:avLst/>
-          </a:prstGeom>
-          <a:solidFill>
-            <a:schemeClr val="bg1">
-              <a:lumMod val="95000"/>
-            </a:schemeClr>
-          </a:solidFill>
-          <a:ln w="28575">
-            <a:solidFill>
-              <a:srgbClr val="E0700D"/>
-            </a:solidFill>
-          </a:ln>
-        </p:spPr>
-        <p:txBody>
-          <a:bodyPr wrap="square" rtlCol="0">
-            <a:spAutoFit/>
-          </a:bodyPr>
-          <a:lstStyle/>
-          <a:p>
-            <a:pPr algn="just"/>
-            <a:r>
-              <a:rPr lang="en-US" sz="1200" dirty="0">
-                <a:latin typeface="Arial" panose="020B0604020202020204" pitchFamily="34" charset="0"/>
-                <a:cs typeface="Arial" panose="020B0604020202020204" pitchFamily="34" charset="0"/>
-              </a:rPr>
-              <a:t>Document all your results (copy here the code employed to obtain the transfer function employing SAX modeling and include the comparative plot of the models)</a:t>
-            </a:r>
-          </a:p>
-          <a:p>
-            <a:pPr algn="just"/>
-            <a:endParaRPr lang="en-US" sz="1200" dirty="0">
-              <a:latin typeface="Arial" panose="020B0604020202020204" pitchFamily="34" charset="0"/>
-              <a:cs typeface="Arial" panose="020B0604020202020204" pitchFamily="34" charset="0"/>
-            </a:endParaRPr>
-          </a:p>
-          <a:p>
-            <a:pPr algn="just"/>
-            <a:endParaRPr lang="en-US" sz="1200" dirty="0">
-              <a:latin typeface="Arial" panose="020B0604020202020204" pitchFamily="34" charset="0"/>
-              <a:cs typeface="Arial" panose="020B0604020202020204" pitchFamily="34" charset="0"/>
-            </a:endParaRPr>
-          </a:p>
-          <a:p>
-            <a:pPr algn="just"/>
-            <a:endParaRPr lang="en-US" sz="1200" dirty="0">
-              <a:latin typeface="Arial" panose="020B0604020202020204" pitchFamily="34" charset="0"/>
-              <a:cs typeface="Arial" panose="020B0604020202020204" pitchFamily="34" charset="0"/>
-            </a:endParaRPr>
-          </a:p>
-          <a:p>
-            <a:pPr algn="just"/>
-            <a:endParaRPr lang="en-US" sz="1200" dirty="0">
-              <a:latin typeface="Arial" panose="020B0604020202020204" pitchFamily="34" charset="0"/>
-              <a:cs typeface="Arial" panose="020B0604020202020204" pitchFamily="34" charset="0"/>
-            </a:endParaRPr>
-          </a:p>
-          <a:p>
-            <a:pPr algn="just"/>
-            <a:endParaRPr lang="en-US" sz="1200" dirty="0">
-              <a:latin typeface="Arial" panose="020B0604020202020204" pitchFamily="34" charset="0"/>
-              <a:cs typeface="Arial" panose="020B0604020202020204" pitchFamily="34" charset="0"/>
-            </a:endParaRPr>
-          </a:p>
-          <a:p>
-            <a:pPr algn="just"/>
-            <a:endParaRPr lang="en-US" sz="1200" dirty="0">
-              <a:latin typeface="Arial" panose="020B0604020202020204" pitchFamily="34" charset="0"/>
-              <a:cs typeface="Arial" panose="020B0604020202020204" pitchFamily="34" charset="0"/>
-            </a:endParaRPr>
-          </a:p>
-        </p:txBody>
-      </p:sp>
-      <p:sp>
-        <p:nvSpPr>
-          <p:cNvPr id="5" name="Marcador de pie de página 2">
-            <a:extLst>
-              <a:ext uri="{FF2B5EF4-FFF2-40B4-BE49-F238E27FC236}">
-                <a16:creationId xmlns:a16="http://schemas.microsoft.com/office/drawing/2014/main" id="{ED97C9D0-256C-D4CA-42E7-79330F040B30}"/>
-              </a:ext>
-            </a:extLst>
-          </p:cNvPr>
-          <p:cNvSpPr>
-            <a:spLocks noGrp="1"/>
-          </p:cNvSpPr>
-          <p:nvPr>
-            <p:ph type="ftr" sz="quarter" idx="5"/>
-          </p:nvPr>
-        </p:nvSpPr>
-        <p:spPr>
-          <a:xfrm>
-            <a:off x="609600" y="6457057"/>
-            <a:ext cx="2743200" cy="184666"/>
-          </a:xfrm>
-        </p:spPr>
-        <p:txBody>
-          <a:bodyPr/>
-          <a:lstStyle/>
-          <a:p>
-            <a:pPr marL="12700">
-              <a:spcBef>
-                <a:spcPts val="15"/>
-              </a:spcBef>
-            </a:pPr>
-            <a:r>
-              <a:rPr lang="es-ES" spc="-5"/>
-              <a:t>LAB 3. INTERFEROMETERS I</a:t>
-            </a:r>
-            <a:endParaRPr lang="es-ES" spc="-5" dirty="0"/>
-          </a:p>
-        </p:txBody>
-      </p:sp>
-    </p:spTree>
-    <p:extLst>
-      <p:ext uri="{BB962C8B-B14F-4D97-AF65-F5344CB8AC3E}">
-        <p14:creationId xmlns:p14="http://schemas.microsoft.com/office/powerpoint/2010/main" val="3666436811"/>
-      </p:ext>
-    </p:extLst>
-  </p:cSld>
-  <p:clrMapOvr>
-    <a:masterClrMapping/>
-  </p:clrMapOvr>
-</p:sld>
-</file>
-
-<file path=ppt/slides/slide9.xml><?xml version="1.0" encoding="utf-8"?>
-<p:sld xmlns:a="http://schemas.openxmlformats.org/drawingml/2006/main" xmlns:r="http://schemas.openxmlformats.org/officeDocument/2006/relationships" xmlns:p="http://schemas.openxmlformats.org/presentationml/2006/main">
-  <p:cSld>
-    <p:spTree>
-      <p:nvGrpSpPr>
-        <p:cNvPr id="1" name=""/>
-        <p:cNvGrpSpPr/>
-        <p:nvPr/>
-      </p:nvGrpSpPr>
-      <p:grpSpPr>
-        <a:xfrm>
-          <a:off x="0" y="0"/>
-          <a:ext cx="0" cy="0"/>
-          <a:chOff x="0" y="0"/>
-          <a:chExt cx="0" cy="0"/>
-        </a:xfrm>
-      </p:grpSpPr>
-      <p:sp>
-        <p:nvSpPr>
-          <p:cNvPr id="2" name="Marcador de número de diapositiva 1">
-            <a:extLst>
-              <a:ext uri="{FF2B5EF4-FFF2-40B4-BE49-F238E27FC236}">
-                <a16:creationId xmlns:a16="http://schemas.microsoft.com/office/drawing/2014/main" id="{5A262B9B-63C7-D050-29CE-69C0673EA18E}"/>
-              </a:ext>
-            </a:extLst>
-          </p:cNvPr>
-          <p:cNvSpPr>
-            <a:spLocks noGrp="1"/>
-          </p:cNvSpPr>
-          <p:nvPr>
-            <p:ph type="sldNum" sz="quarter" idx="7"/>
-          </p:nvPr>
-        </p:nvSpPr>
-        <p:spPr/>
-        <p:txBody>
-          <a:bodyPr/>
-          <a:lstStyle/>
-          <a:p>
-            <a:fld id="{B6F15528-21DE-4FAA-801E-634DDDAF4B2B}" type="slidenum">
-              <a:rPr lang="es-ES" smtClean="0"/>
-              <a:t>9</a:t>
-            </a:fld>
-            <a:endParaRPr lang="es-ES"/>
-          </a:p>
-        </p:txBody>
-      </p:sp>
-      <p:pic>
-        <p:nvPicPr>
-          <p:cNvPr id="8" name="Imagen 7">
-            <a:extLst>
-              <a:ext uri="{FF2B5EF4-FFF2-40B4-BE49-F238E27FC236}">
-                <a16:creationId xmlns:a16="http://schemas.microsoft.com/office/drawing/2014/main" id="{6E6A95D7-6F7D-A4CD-0DB7-37860A54D1D6}"/>
-              </a:ext>
-            </a:extLst>
-          </p:cNvPr>
-          <p:cNvPicPr>
-            <a:picLocks noChangeAspect="1"/>
-          </p:cNvPicPr>
-          <p:nvPr/>
-        </p:nvPicPr>
-        <p:blipFill>
-          <a:blip r:embed="rId2"/>
-          <a:stretch>
-            <a:fillRect/>
-          </a:stretch>
-        </p:blipFill>
-        <p:spPr>
-          <a:xfrm>
-            <a:off x="4191000" y="303789"/>
-            <a:ext cx="3989450" cy="3201411"/>
-          </a:xfrm>
-          <a:prstGeom prst="rect">
-            <a:avLst/>
-          </a:prstGeom>
-        </p:spPr>
-      </p:pic>
-      <p:pic>
-        <p:nvPicPr>
-          <p:cNvPr id="10" name="Imagen 9">
-            <a:extLst>
-              <a:ext uri="{FF2B5EF4-FFF2-40B4-BE49-F238E27FC236}">
-                <a16:creationId xmlns:a16="http://schemas.microsoft.com/office/drawing/2014/main" id="{A8B83A4A-197F-1857-FB32-1782C497CC3B}"/>
-              </a:ext>
-            </a:extLst>
-          </p:cNvPr>
-          <p:cNvPicPr>
-            <a:picLocks noChangeAspect="1"/>
-          </p:cNvPicPr>
-          <p:nvPr/>
-        </p:nvPicPr>
-        <p:blipFill>
-          <a:blip r:embed="rId3"/>
-          <a:stretch>
-            <a:fillRect/>
-          </a:stretch>
-        </p:blipFill>
-        <p:spPr>
-          <a:xfrm>
-            <a:off x="152400" y="195262"/>
-            <a:ext cx="4124692" cy="3309938"/>
-          </a:xfrm>
-          <a:prstGeom prst="rect">
-            <a:avLst/>
-          </a:prstGeom>
-        </p:spPr>
-      </p:pic>
-      <p:sp>
-        <p:nvSpPr>
-          <p:cNvPr id="11" name="CuadroTexto 10">
-            <a:extLst>
-              <a:ext uri="{FF2B5EF4-FFF2-40B4-BE49-F238E27FC236}">
-                <a16:creationId xmlns:a16="http://schemas.microsoft.com/office/drawing/2014/main" id="{D4799E6C-0660-BA35-BAA0-7AB4AAC8C92C}"/>
-              </a:ext>
-            </a:extLst>
-          </p:cNvPr>
-          <p:cNvSpPr txBox="1"/>
-          <p:nvPr/>
-        </p:nvSpPr>
-        <p:spPr>
-          <a:xfrm>
-            <a:off x="8686800" y="914400"/>
-            <a:ext cx="2667000" cy="1477328"/>
-          </a:xfrm>
-          <a:prstGeom prst="rect">
-            <a:avLst/>
-          </a:prstGeom>
-          <a:noFill/>
-        </p:spPr>
-        <p:txBody>
-          <a:bodyPr wrap="square" rtlCol="0">
-            <a:spAutoFit/>
-          </a:bodyPr>
-          <a:lstStyle/>
-          <a:p>
-            <a:r>
-              <a:rPr lang="es-ES" dirty="0"/>
-              <a:t>HACER MÁS EJEMPLOS</a:t>
-            </a:r>
-          </a:p>
-          <a:p>
-            <a:r>
-              <a:rPr lang="es-ES" dirty="0"/>
-              <a:t>En </a:t>
-            </a:r>
-            <a:r>
-              <a:rPr lang="es-ES" dirty="0" err="1"/>
-              <a:t>sax</a:t>
-            </a:r>
-            <a:r>
-              <a:rPr lang="es-ES" dirty="0"/>
-              <a:t> los puertos son 0, 1</a:t>
-            </a:r>
-          </a:p>
-          <a:p>
-            <a:r>
-              <a:rPr lang="es-ES" dirty="0"/>
-              <a:t>Por lo que 1 en </a:t>
-            </a:r>
-            <a:r>
-              <a:rPr lang="es-ES" dirty="0" err="1"/>
-              <a:t>sax</a:t>
-            </a:r>
-            <a:r>
-              <a:rPr lang="es-ES" dirty="0"/>
-              <a:t> corresponde a 2 en el otro. </a:t>
-            </a:r>
-          </a:p>
-        </p:txBody>
-      </p:sp>
-    </p:spTree>
-    <p:extLst>
-      <p:ext uri="{BB962C8B-B14F-4D97-AF65-F5344CB8AC3E}">
-        <p14:creationId xmlns:p14="http://schemas.microsoft.com/office/powerpoint/2010/main" val="701476647"/>
       </p:ext>
     </p:extLst>
   </p:cSld>

--- a/LabBook_3.pptx
+++ b/LabBook_3.pptx
@@ -5,10 +5,10 @@
     <p:sldMasterId id="2147483648" r:id="rId1"/>
   </p:sldMasterIdLst>
   <p:notesMasterIdLst>
-    <p:notesMasterId r:id="rId17"/>
+    <p:notesMasterId r:id="rId15"/>
   </p:notesMasterIdLst>
   <p:handoutMasterIdLst>
-    <p:handoutMasterId r:id="rId18"/>
+    <p:handoutMasterId r:id="rId16"/>
   </p:handoutMasterIdLst>
   <p:sldIdLst>
     <p:sldId id="256" r:id="rId2"/>
@@ -18,14 +18,12 @@
     <p:sldId id="302" r:id="rId6"/>
     <p:sldId id="303" r:id="rId7"/>
     <p:sldId id="304" r:id="rId8"/>
-    <p:sldId id="297" r:id="rId9"/>
-    <p:sldId id="295" r:id="rId10"/>
-    <p:sldId id="296" r:id="rId11"/>
-    <p:sldId id="298" r:id="rId12"/>
-    <p:sldId id="293" r:id="rId13"/>
-    <p:sldId id="299" r:id="rId14"/>
-    <p:sldId id="300" r:id="rId15"/>
-    <p:sldId id="288" r:id="rId16"/>
+    <p:sldId id="295" r:id="rId9"/>
+    <p:sldId id="296" r:id="rId10"/>
+    <p:sldId id="293" r:id="rId11"/>
+    <p:sldId id="299" r:id="rId12"/>
+    <p:sldId id="300" r:id="rId13"/>
+    <p:sldId id="288" r:id="rId14"/>
   </p:sldIdLst>
   <p:sldSz cx="12192000" cy="6858000"/>
   <p:notesSz cx="12192000" cy="6858000"/>
@@ -240,7 +238,7 @@
           <a:p>
             <a:fld id="{8438F8DC-35B0-48E6-A86E-42F1F08DD00F}" type="datetimeFigureOut">
               <a:rPr lang="es-ES" smtClean="0"/>
-              <a:t>10/03/2026</a:t>
+              <a:t>22/03/2026</a:t>
             </a:fld>
             <a:endParaRPr lang="es-ES"/>
           </a:p>
@@ -417,7 +415,7 @@
           <a:p>
             <a:fld id="{FACBDC12-F39B-4B97-8F4D-6734F9D366FF}" type="datetimeFigureOut">
               <a:rPr lang="es-ES" smtClean="0"/>
-              <a:t>10/03/2026</a:t>
+              <a:t>22/03/2026</a:t>
             </a:fld>
             <a:endParaRPr lang="es-ES"/>
           </a:p>
@@ -1208,114 +1206,6 @@
         <p:cNvPr id="1" name="">
           <a:extLst>
             <a:ext uri="{FF2B5EF4-FFF2-40B4-BE49-F238E27FC236}">
-              <a16:creationId xmlns:a16="http://schemas.microsoft.com/office/drawing/2014/main" id="{845763E5-B315-6B89-9E6A-296CC0C32BEB}"/>
-            </a:ext>
-          </a:extLst>
-        </p:cNvPr>
-        <p:cNvGrpSpPr/>
-        <p:nvPr/>
-      </p:nvGrpSpPr>
-      <p:grpSpPr>
-        <a:xfrm>
-          <a:off x="0" y="0"/>
-          <a:ext cx="0" cy="0"/>
-          <a:chOff x="0" y="0"/>
-          <a:chExt cx="0" cy="0"/>
-        </a:xfrm>
-      </p:grpSpPr>
-      <p:sp>
-        <p:nvSpPr>
-          <p:cNvPr id="2" name="Marcador de imagen de diapositiva 1">
-            <a:extLst>
-              <a:ext uri="{FF2B5EF4-FFF2-40B4-BE49-F238E27FC236}">
-                <a16:creationId xmlns:a16="http://schemas.microsoft.com/office/drawing/2014/main" id="{E2D0EE57-D3E5-5882-3113-7E39695FDB29}"/>
-              </a:ext>
-            </a:extLst>
-          </p:cNvPr>
-          <p:cNvSpPr>
-            <a:spLocks noGrp="1" noRot="1" noChangeAspect="1"/>
-          </p:cNvSpPr>
-          <p:nvPr>
-            <p:ph type="sldImg"/>
-          </p:nvPr>
-        </p:nvSpPr>
-        <p:spPr/>
-      </p:sp>
-      <p:sp>
-        <p:nvSpPr>
-          <p:cNvPr id="3" name="Marcador de notas 2">
-            <a:extLst>
-              <a:ext uri="{FF2B5EF4-FFF2-40B4-BE49-F238E27FC236}">
-                <a16:creationId xmlns:a16="http://schemas.microsoft.com/office/drawing/2014/main" id="{33CE78E4-FE49-4B0C-A57E-5C5FDE25D97F}"/>
-              </a:ext>
-            </a:extLst>
-          </p:cNvPr>
-          <p:cNvSpPr>
-            <a:spLocks noGrp="1"/>
-          </p:cNvSpPr>
-          <p:nvPr>
-            <p:ph type="body" idx="1"/>
-          </p:nvPr>
-        </p:nvSpPr>
-        <p:spPr/>
-        <p:txBody>
-          <a:bodyPr/>
-          <a:lstStyle/>
-          <a:p>
-            <a:endParaRPr lang="es-ES" dirty="0"/>
-          </a:p>
-        </p:txBody>
-      </p:sp>
-      <p:sp>
-        <p:nvSpPr>
-          <p:cNvPr id="4" name="Marcador de número de diapositiva 3">
-            <a:extLst>
-              <a:ext uri="{FF2B5EF4-FFF2-40B4-BE49-F238E27FC236}">
-                <a16:creationId xmlns:a16="http://schemas.microsoft.com/office/drawing/2014/main" id="{D7C3657D-061F-C8AE-FFC6-D9A0C1657AD9}"/>
-              </a:ext>
-            </a:extLst>
-          </p:cNvPr>
-          <p:cNvSpPr>
-            <a:spLocks noGrp="1"/>
-          </p:cNvSpPr>
-          <p:nvPr>
-            <p:ph type="sldNum" sz="quarter" idx="5"/>
-          </p:nvPr>
-        </p:nvSpPr>
-        <p:spPr/>
-        <p:txBody>
-          <a:bodyPr/>
-          <a:lstStyle/>
-          <a:p>
-            <a:fld id="{676223B9-C868-4436-87D9-1A3152E1157A}" type="slidenum">
-              <a:rPr lang="es-ES" smtClean="0"/>
-              <a:t>8</a:t>
-            </a:fld>
-            <a:endParaRPr lang="es-ES"/>
-          </a:p>
-        </p:txBody>
-      </p:sp>
-    </p:spTree>
-    <p:extLst>
-      <p:ext uri="{BB962C8B-B14F-4D97-AF65-F5344CB8AC3E}">
-        <p14:creationId xmlns:p14="http://schemas.microsoft.com/office/powerpoint/2010/main" val="580024602"/>
-      </p:ext>
-    </p:extLst>
-  </p:cSld>
-  <p:clrMapOvr>
-    <a:masterClrMapping/>
-  </p:clrMapOvr>
-</p:notes>
-</file>
-
-<file path=ppt/notesSlides/notesSlide7.xml><?xml version="1.0" encoding="utf-8"?>
-<p:notes xmlns:a="http://schemas.openxmlformats.org/drawingml/2006/main" xmlns:r="http://schemas.openxmlformats.org/officeDocument/2006/relationships" xmlns:p="http://schemas.openxmlformats.org/presentationml/2006/main">
-  <p:cSld>
-    <p:spTree>
-      <p:nvGrpSpPr>
-        <p:cNvPr id="1" name="">
-          <a:extLst>
-            <a:ext uri="{FF2B5EF4-FFF2-40B4-BE49-F238E27FC236}">
               <a16:creationId xmlns:a16="http://schemas.microsoft.com/office/drawing/2014/main" id="{812B2A21-C6A2-C5B9-2DCA-3754617037C3}"/>
             </a:ext>
           </a:extLst>
@@ -1397,7 +1287,7 @@
           <a:p>
             <a:fld id="{676223B9-C868-4436-87D9-1A3152E1157A}" type="slidenum">
               <a:rPr lang="es-ES" smtClean="0"/>
-              <a:t>9</a:t>
+              <a:t>8</a:t>
             </a:fld>
             <a:endParaRPr lang="es-ES"/>
           </a:p>
@@ -1416,7 +1306,7 @@
 </p:notes>
 </file>
 
-<file path=ppt/notesSlides/notesSlide8.xml><?xml version="1.0" encoding="utf-8"?>
+<file path=ppt/notesSlides/notesSlide7.xml><?xml version="1.0" encoding="utf-8"?>
 <p:notes xmlns:a="http://schemas.openxmlformats.org/drawingml/2006/main" xmlns:r="http://schemas.openxmlformats.org/officeDocument/2006/relationships" xmlns:p="http://schemas.openxmlformats.org/presentationml/2006/main">
   <p:cSld>
     <p:spTree>
@@ -1505,7 +1395,7 @@
           <a:p>
             <a:fld id="{676223B9-C868-4436-87D9-1A3152E1157A}" type="slidenum">
               <a:rPr lang="es-ES" smtClean="0"/>
-              <a:t>10</a:t>
+              <a:t>9</a:t>
             </a:fld>
             <a:endParaRPr lang="es-ES"/>
           </a:p>
@@ -1524,7 +1414,7 @@
 </p:notes>
 </file>
 
-<file path=ppt/notesSlides/notesSlide9.xml><?xml version="1.0" encoding="utf-8"?>
+<file path=ppt/notesSlides/notesSlide8.xml><?xml version="1.0" encoding="utf-8"?>
 <p:notes xmlns:a="http://schemas.openxmlformats.org/drawingml/2006/main" xmlns:r="http://schemas.openxmlformats.org/officeDocument/2006/relationships" xmlns:p="http://schemas.openxmlformats.org/presentationml/2006/main">
   <p:cSld>
     <p:spTree>
@@ -1613,7 +1503,7 @@
           <a:p>
             <a:fld id="{676223B9-C868-4436-87D9-1A3152E1157A}" type="slidenum">
               <a:rPr lang="es-ES" smtClean="0"/>
-              <a:t>12</a:t>
+              <a:t>10</a:t>
             </a:fld>
             <a:endParaRPr lang="es-ES"/>
           </a:p>
@@ -3281,916 +3171,6 @@
         <p:cNvPr id="1" name="">
           <a:extLst>
             <a:ext uri="{FF2B5EF4-FFF2-40B4-BE49-F238E27FC236}">
-              <a16:creationId xmlns:a16="http://schemas.microsoft.com/office/drawing/2014/main" id="{98CB9552-DF22-1310-10FA-4D2D2AF77601}"/>
-            </a:ext>
-          </a:extLst>
-        </p:cNvPr>
-        <p:cNvGrpSpPr/>
-        <p:nvPr/>
-      </p:nvGrpSpPr>
-      <p:grpSpPr>
-        <a:xfrm>
-          <a:off x="0" y="0"/>
-          <a:ext cx="0" cy="0"/>
-          <a:chOff x="0" y="0"/>
-          <a:chExt cx="0" cy="0"/>
-        </a:xfrm>
-      </p:grpSpPr>
-      <p:sp>
-        <p:nvSpPr>
-          <p:cNvPr id="16" name="object 16">
-            <a:extLst>
-              <a:ext uri="{FF2B5EF4-FFF2-40B4-BE49-F238E27FC236}">
-                <a16:creationId xmlns:a16="http://schemas.microsoft.com/office/drawing/2014/main" id="{B0632A48-0384-0EF1-389E-FBF3F9C3E7CE}"/>
-              </a:ext>
-            </a:extLst>
-          </p:cNvPr>
-          <p:cNvSpPr txBox="1">
-            <a:spLocks noGrp="1"/>
-          </p:cNvSpPr>
-          <p:nvPr>
-            <p:ph type="title"/>
-          </p:nvPr>
-        </p:nvSpPr>
-        <p:spPr>
-          <a:xfrm>
-            <a:off x="685800" y="408883"/>
-            <a:ext cx="10994410" cy="782265"/>
-          </a:xfrm>
-          <a:prstGeom prst="rect">
-            <a:avLst/>
-          </a:prstGeom>
-        </p:spPr>
-        <p:txBody>
-          <a:bodyPr vert="horz" wrap="square" lIns="0" tIns="12700" rIns="0" bIns="0" rtlCol="0">
-            <a:spAutoFit/>
-          </a:bodyPr>
-          <a:lstStyle/>
-          <a:p>
-            <a:pPr marL="12700">
-              <a:lnSpc>
-                <a:spcPct val="100000"/>
-              </a:lnSpc>
-              <a:spcBef>
-                <a:spcPts val="100"/>
-              </a:spcBef>
-            </a:pPr>
-            <a:r>
-              <a:rPr lang="en-US" sz="2400" b="1" dirty="0"/>
-              <a:t>ASSESSMENT #3 </a:t>
-            </a:r>
-            <a:r>
-              <a:rPr lang="en-US" sz="2500" dirty="0"/>
-              <a:t>– SAX implementation </a:t>
-            </a:r>
-            <a:br>
-              <a:rPr lang="es-ES" sz="2500" spc="-5" dirty="0">
-                <a:latin typeface="+mj-lt"/>
-                <a:cs typeface="Lucida Sans"/>
-              </a:rPr>
-            </a:br>
-            <a:endParaRPr sz="2500" b="0" dirty="0">
-              <a:latin typeface="+mj-lt"/>
-              <a:cs typeface="Lucida Sans"/>
-            </a:endParaRPr>
-          </a:p>
-        </p:txBody>
-      </p:sp>
-      <p:pic>
-        <p:nvPicPr>
-          <p:cNvPr id="83" name="Gráfico 82">
-            <a:extLst>
-              <a:ext uri="{FF2B5EF4-FFF2-40B4-BE49-F238E27FC236}">
-                <a16:creationId xmlns:a16="http://schemas.microsoft.com/office/drawing/2014/main" id="{1F43E6A6-5CC3-9B99-14AC-997478150C3D}"/>
-              </a:ext>
-            </a:extLst>
-          </p:cNvPr>
-          <p:cNvPicPr>
-            <a:picLocks noChangeAspect="1"/>
-          </p:cNvPicPr>
-          <p:nvPr/>
-        </p:nvPicPr>
-        <p:blipFill>
-          <a:blip r:embed="rId3">
-            <a:extLst>
-              <a:ext uri="{96DAC541-7B7A-43D3-8B79-37D633B846F1}">
-                <asvg:svgBlip xmlns:asvg="http://schemas.microsoft.com/office/drawing/2016/SVG/main" r:embed="rId4"/>
-              </a:ext>
-            </a:extLst>
-          </a:blip>
-          <a:stretch>
-            <a:fillRect/>
-          </a:stretch>
-        </p:blipFill>
-        <p:spPr>
-          <a:xfrm>
-            <a:off x="5045006" y="6356057"/>
-            <a:ext cx="6409575" cy="363174"/>
-          </a:xfrm>
-          <a:prstGeom prst="rect">
-            <a:avLst/>
-          </a:prstGeom>
-        </p:spPr>
-      </p:pic>
-      <p:sp>
-        <p:nvSpPr>
-          <p:cNvPr id="84" name="Marcador de número de diapositiva 83">
-            <a:extLst>
-              <a:ext uri="{FF2B5EF4-FFF2-40B4-BE49-F238E27FC236}">
-                <a16:creationId xmlns:a16="http://schemas.microsoft.com/office/drawing/2014/main" id="{DFC09DB6-1DF7-C8F9-7414-27BC280DEA0F}"/>
-              </a:ext>
-            </a:extLst>
-          </p:cNvPr>
-          <p:cNvSpPr>
-            <a:spLocks noGrp="1"/>
-          </p:cNvSpPr>
-          <p:nvPr>
-            <p:ph type="sldNum" sz="quarter" idx="7"/>
-          </p:nvPr>
-        </p:nvSpPr>
-        <p:spPr/>
-        <p:txBody>
-          <a:bodyPr/>
-          <a:lstStyle/>
-          <a:p>
-            <a:fld id="{B6F15528-21DE-4FAA-801E-634DDDAF4B2B}" type="slidenum">
-              <a:rPr lang="es-ES" smtClean="0"/>
-              <a:t>10</a:t>
-            </a:fld>
-            <a:endParaRPr lang="es-ES"/>
-          </a:p>
-        </p:txBody>
-      </p:sp>
-      <p:sp>
-        <p:nvSpPr>
-          <p:cNvPr id="4" name="Marcador de texto 2">
-            <a:extLst>
-              <a:ext uri="{FF2B5EF4-FFF2-40B4-BE49-F238E27FC236}">
-                <a16:creationId xmlns:a16="http://schemas.microsoft.com/office/drawing/2014/main" id="{EBC8DCFA-5565-A757-1F8D-F4CCCF573A63}"/>
-              </a:ext>
-            </a:extLst>
-          </p:cNvPr>
-          <p:cNvSpPr txBox="1">
-            <a:spLocks/>
-          </p:cNvSpPr>
-          <p:nvPr/>
-        </p:nvSpPr>
-        <p:spPr>
-          <a:xfrm>
-            <a:off x="571500" y="1066800"/>
-            <a:ext cx="11048999" cy="4958137"/>
-          </a:xfrm>
-          <a:prstGeom prst="rect">
-            <a:avLst/>
-          </a:prstGeom>
-        </p:spPr>
-        <p:txBody>
-          <a:bodyPr>
-            <a:normAutofit/>
-          </a:bodyPr>
-          <a:lstStyle>
-            <a:lvl1pPr marL="0">
-              <a:defRPr>
-                <a:latin typeface="+mn-lt"/>
-                <a:ea typeface="+mn-ea"/>
-                <a:cs typeface="+mn-cs"/>
-              </a:defRPr>
-            </a:lvl1pPr>
-            <a:lvl2pPr marL="457200">
-              <a:defRPr>
-                <a:latin typeface="+mn-lt"/>
-                <a:ea typeface="+mn-ea"/>
-                <a:cs typeface="+mn-cs"/>
-              </a:defRPr>
-            </a:lvl2pPr>
-            <a:lvl3pPr marL="914400">
-              <a:defRPr>
-                <a:latin typeface="+mn-lt"/>
-                <a:ea typeface="+mn-ea"/>
-                <a:cs typeface="+mn-cs"/>
-              </a:defRPr>
-            </a:lvl3pPr>
-            <a:lvl4pPr marL="1371600">
-              <a:defRPr>
-                <a:latin typeface="+mn-lt"/>
-                <a:ea typeface="+mn-ea"/>
-                <a:cs typeface="+mn-cs"/>
-              </a:defRPr>
-            </a:lvl4pPr>
-            <a:lvl5pPr marL="1828800">
-              <a:defRPr>
-                <a:latin typeface="+mn-lt"/>
-                <a:ea typeface="+mn-ea"/>
-                <a:cs typeface="+mn-cs"/>
-              </a:defRPr>
-            </a:lvl5pPr>
-            <a:lvl6pPr marL="2286000">
-              <a:defRPr>
-                <a:latin typeface="+mn-lt"/>
-                <a:ea typeface="+mn-ea"/>
-                <a:cs typeface="+mn-cs"/>
-              </a:defRPr>
-            </a:lvl6pPr>
-            <a:lvl7pPr marL="2743200">
-              <a:defRPr>
-                <a:latin typeface="+mn-lt"/>
-                <a:ea typeface="+mn-ea"/>
-                <a:cs typeface="+mn-cs"/>
-              </a:defRPr>
-            </a:lvl7pPr>
-            <a:lvl8pPr marL="3200400">
-              <a:defRPr>
-                <a:latin typeface="+mn-lt"/>
-                <a:ea typeface="+mn-ea"/>
-                <a:cs typeface="+mn-cs"/>
-              </a:defRPr>
-            </a:lvl8pPr>
-            <a:lvl9pPr marL="3657600">
-              <a:defRPr>
-                <a:latin typeface="+mn-lt"/>
-                <a:ea typeface="+mn-ea"/>
-                <a:cs typeface="+mn-cs"/>
-              </a:defRPr>
-            </a:lvl9pPr>
-          </a:lstStyle>
-          <a:p>
-            <a:r>
-              <a:rPr lang="en-US" dirty="0"/>
-              <a:t>Now, we are going to implement the design parameters in the MZI model developed in SAX and compare the response obtained with the one simulated by mathematical formulation. This will help us to identify any error in the definition of the SAX model single components. </a:t>
-            </a:r>
-          </a:p>
-          <a:p>
-            <a:br>
-              <a:rPr lang="en-US" dirty="0"/>
-            </a:br>
-            <a:r>
-              <a:rPr lang="en-US" dirty="0"/>
-              <a:t>In order to implement the SAX model, take as example the following lines:</a:t>
-            </a:r>
-          </a:p>
-          <a:p>
-            <a:endParaRPr lang="en-US" dirty="0"/>
-          </a:p>
-          <a:p>
-            <a:pPr lvl="2">
-              <a:lnSpc>
-                <a:spcPts val="1425"/>
-              </a:lnSpc>
-            </a:pPr>
-            <a:r>
-              <a:rPr lang="es-ES" sz="1400" b="0" dirty="0">
-                <a:effectLst/>
-                <a:latin typeface="Courier New" panose="02070309020205020404" pitchFamily="49" charset="0"/>
-              </a:rPr>
-              <a:t> </a:t>
-            </a:r>
-            <a:r>
-              <a:rPr lang="es-ES" sz="1400" b="0" dirty="0" err="1">
-                <a:effectLst/>
-                <a:latin typeface="Courier New" panose="02070309020205020404" pitchFamily="49" charset="0"/>
-              </a:rPr>
-              <a:t>mzi_test</a:t>
-            </a:r>
-            <a:r>
-              <a:rPr lang="es-ES" sz="1400" b="0" dirty="0">
-                <a:effectLst/>
-                <a:latin typeface="Courier New" panose="02070309020205020404" pitchFamily="49" charset="0"/>
-              </a:rPr>
-              <a:t> = </a:t>
-            </a:r>
-            <a:r>
-              <a:rPr lang="es-ES" sz="1400" b="0" dirty="0" err="1">
-                <a:effectLst/>
-                <a:latin typeface="Courier New" panose="02070309020205020404" pitchFamily="49" charset="0"/>
-              </a:rPr>
-              <a:t>mzi</a:t>
-            </a:r>
-            <a:r>
-              <a:rPr lang="es-ES" sz="1400" b="0" dirty="0">
-                <a:effectLst/>
-                <a:latin typeface="Courier New" panose="02070309020205020404" pitchFamily="49" charset="0"/>
-              </a:rPr>
-              <a:t>(</a:t>
-            </a:r>
-            <a:r>
-              <a:rPr lang="es-ES" sz="1400" b="0" dirty="0" err="1">
-                <a:effectLst/>
-                <a:latin typeface="Courier New" panose="02070309020205020404" pitchFamily="49" charset="0"/>
-              </a:rPr>
-              <a:t>wl</a:t>
-            </a:r>
-            <a:r>
-              <a:rPr lang="es-ES" sz="1400" b="0" dirty="0">
-                <a:effectLst/>
-                <a:latin typeface="Courier New" panose="02070309020205020404" pitchFamily="49" charset="0"/>
-              </a:rPr>
-              <a:t>=</a:t>
-            </a:r>
-            <a:r>
-              <a:rPr lang="es-ES" sz="1400" b="0" dirty="0" err="1">
-                <a:effectLst/>
-                <a:latin typeface="Courier New" panose="02070309020205020404" pitchFamily="49" charset="0"/>
-              </a:rPr>
-              <a:t>wl</a:t>
-            </a:r>
-            <a:r>
-              <a:rPr lang="es-ES" sz="1400" b="0" dirty="0">
-                <a:effectLst/>
-                <a:latin typeface="Courier New" panose="02070309020205020404" pitchFamily="49" charset="0"/>
-              </a:rPr>
-              <a:t>, </a:t>
-            </a:r>
-          </a:p>
-          <a:p>
-            <a:pPr lvl="2">
-              <a:lnSpc>
-                <a:spcPts val="1425"/>
-              </a:lnSpc>
-            </a:pPr>
-            <a:r>
-              <a:rPr lang="es-ES" sz="1400" b="0" dirty="0">
-                <a:effectLst/>
-                <a:latin typeface="Courier New" panose="02070309020205020404" pitchFamily="49" charset="0"/>
-              </a:rPr>
-              <a:t>    </a:t>
-            </a:r>
-            <a:r>
-              <a:rPr lang="es-ES" sz="1400" b="0" dirty="0" err="1">
-                <a:effectLst/>
-                <a:latin typeface="Courier New" panose="02070309020205020404" pitchFamily="49" charset="0"/>
-              </a:rPr>
-              <a:t>coup_a</a:t>
-            </a:r>
-            <a:r>
-              <a:rPr lang="es-ES" sz="1400" b="0" dirty="0">
-                <a:effectLst/>
-                <a:latin typeface="Courier New" panose="02070309020205020404" pitchFamily="49" charset="0"/>
-              </a:rPr>
-              <a:t> = ...</a:t>
-            </a:r>
-          </a:p>
-          <a:p>
-            <a:pPr lvl="2">
-              <a:lnSpc>
-                <a:spcPts val="1425"/>
-              </a:lnSpc>
-            </a:pPr>
-            <a:r>
-              <a:rPr lang="es-ES" sz="1400" b="0" dirty="0">
-                <a:effectLst/>
-                <a:latin typeface="Courier New" panose="02070309020205020404" pitchFamily="49" charset="0"/>
-              </a:rPr>
-              <a:t>    </a:t>
-            </a:r>
-            <a:r>
-              <a:rPr lang="es-ES" sz="1400" b="0" dirty="0" err="1">
-                <a:effectLst/>
-                <a:latin typeface="Courier New" panose="02070309020205020404" pitchFamily="49" charset="0"/>
-              </a:rPr>
-              <a:t>wvg_d</a:t>
-            </a:r>
-            <a:r>
-              <a:rPr lang="es-ES" sz="1400" b="0" dirty="0">
-                <a:effectLst/>
-                <a:latin typeface="Courier New" panose="02070309020205020404" pitchFamily="49" charset="0"/>
-              </a:rPr>
-              <a:t>={"</a:t>
-            </a:r>
-            <a:r>
-              <a:rPr lang="es-ES" sz="1400" b="0" dirty="0" err="1">
-                <a:effectLst/>
-                <a:latin typeface="Courier New" panose="02070309020205020404" pitchFamily="49" charset="0"/>
-              </a:rPr>
-              <a:t>length</a:t>
-            </a:r>
-            <a:r>
-              <a:rPr lang="es-ES" sz="1400" b="0" dirty="0">
-                <a:effectLst/>
-                <a:latin typeface="Courier New" panose="02070309020205020404" pitchFamily="49" charset="0"/>
-              </a:rPr>
-              <a:t>": </a:t>
-            </a:r>
-            <a:r>
-              <a:rPr lang="es-ES" sz="1400" b="0" dirty="0" err="1">
-                <a:effectLst/>
-                <a:latin typeface="Courier New" panose="02070309020205020404" pitchFamily="49" charset="0"/>
-              </a:rPr>
-              <a:t>l_d</a:t>
-            </a:r>
-            <a:r>
-              <a:rPr lang="es-ES" sz="1400" b="0" dirty="0">
-                <a:effectLst/>
-                <a:latin typeface="Courier New" panose="02070309020205020404" pitchFamily="49" charset="0"/>
-              </a:rPr>
-              <a:t>, "</a:t>
-            </a:r>
-            <a:r>
-              <a:rPr lang="es-ES" sz="1400" b="0" dirty="0" err="1">
-                <a:effectLst/>
-                <a:latin typeface="Courier New" panose="02070309020205020404" pitchFamily="49" charset="0"/>
-              </a:rPr>
-              <a:t>neff</a:t>
-            </a:r>
-            <a:r>
-              <a:rPr lang="es-ES" sz="1400" b="0" dirty="0">
-                <a:effectLst/>
-                <a:latin typeface="Courier New" panose="02070309020205020404" pitchFamily="49" charset="0"/>
-              </a:rPr>
-              <a:t>": ...}, </a:t>
-            </a:r>
-          </a:p>
-          <a:p>
-            <a:pPr lvl="2">
-              <a:lnSpc>
-                <a:spcPts val="1425"/>
-              </a:lnSpc>
-            </a:pPr>
-            <a:r>
-              <a:rPr lang="es-ES" sz="1400" b="0" dirty="0">
-                <a:effectLst/>
-                <a:latin typeface="Courier New" panose="02070309020205020404" pitchFamily="49" charset="0"/>
-              </a:rPr>
-              <a:t>    </a:t>
-            </a:r>
-            <a:r>
-              <a:rPr lang="es-ES" sz="1400" b="0" dirty="0" err="1">
-                <a:effectLst/>
-                <a:latin typeface="Courier New" panose="02070309020205020404" pitchFamily="49" charset="0"/>
-              </a:rPr>
-              <a:t>wvg_u</a:t>
-            </a:r>
-            <a:r>
-              <a:rPr lang="es-ES" sz="1400" b="0" dirty="0">
-                <a:effectLst/>
-                <a:latin typeface="Courier New" panose="02070309020205020404" pitchFamily="49" charset="0"/>
-              </a:rPr>
-              <a:t>={"</a:t>
-            </a:r>
-            <a:r>
-              <a:rPr lang="es-ES" sz="1400" b="0" dirty="0" err="1">
-                <a:effectLst/>
-                <a:latin typeface="Courier New" panose="02070309020205020404" pitchFamily="49" charset="0"/>
-              </a:rPr>
-              <a:t>length</a:t>
-            </a:r>
-            <a:r>
-              <a:rPr lang="es-ES" sz="1400" b="0" dirty="0">
-                <a:effectLst/>
-                <a:latin typeface="Courier New" panose="02070309020205020404" pitchFamily="49" charset="0"/>
-              </a:rPr>
-              <a:t>": </a:t>
-            </a:r>
-            <a:r>
-              <a:rPr lang="es-ES" sz="1400" b="0" dirty="0" err="1">
-                <a:effectLst/>
-                <a:latin typeface="Courier New" panose="02070309020205020404" pitchFamily="49" charset="0"/>
-              </a:rPr>
-              <a:t>l_u</a:t>
-            </a:r>
-            <a:r>
-              <a:rPr lang="es-ES" sz="1400" b="0" dirty="0">
-                <a:effectLst/>
-                <a:latin typeface="Courier New" panose="02070309020205020404" pitchFamily="49" charset="0"/>
-              </a:rPr>
-              <a:t>, "</a:t>
-            </a:r>
-            <a:r>
-              <a:rPr lang="es-ES" sz="1400" b="0" dirty="0" err="1">
-                <a:effectLst/>
-                <a:latin typeface="Courier New" panose="02070309020205020404" pitchFamily="49" charset="0"/>
-              </a:rPr>
-              <a:t>neff</a:t>
-            </a:r>
-            <a:r>
-              <a:rPr lang="es-ES" sz="1400" b="0" dirty="0">
-                <a:effectLst/>
-                <a:latin typeface="Courier New" panose="02070309020205020404" pitchFamily="49" charset="0"/>
-              </a:rPr>
-              <a:t>": ...},</a:t>
-            </a:r>
-          </a:p>
-          <a:p>
-            <a:pPr lvl="2">
-              <a:lnSpc>
-                <a:spcPts val="1425"/>
-              </a:lnSpc>
-            </a:pPr>
-            <a:r>
-              <a:rPr lang="es-ES" sz="1400" b="0" dirty="0">
-                <a:effectLst/>
-                <a:latin typeface="Courier New" panose="02070309020205020404" pitchFamily="49" charset="0"/>
-              </a:rPr>
-              <a:t>    </a:t>
-            </a:r>
-            <a:r>
-              <a:rPr lang="es-ES" sz="1400" b="0" dirty="0" err="1">
-                <a:effectLst/>
-                <a:latin typeface="Courier New" panose="02070309020205020404" pitchFamily="49" charset="0"/>
-              </a:rPr>
-              <a:t>coup_b</a:t>
-            </a:r>
-            <a:r>
-              <a:rPr lang="es-ES" sz="1400" b="0" dirty="0">
-                <a:effectLst/>
-                <a:latin typeface="Courier New" panose="02070309020205020404" pitchFamily="49" charset="0"/>
-              </a:rPr>
-              <a:t> = ... )</a:t>
-            </a:r>
-          </a:p>
-          <a:p>
-            <a:pPr lvl="2">
-              <a:lnSpc>
-                <a:spcPts val="1425"/>
-              </a:lnSpc>
-            </a:pPr>
-            <a:br>
-              <a:rPr lang="es-ES" sz="1400" b="0" dirty="0">
-                <a:effectLst/>
-                <a:latin typeface="Courier New" panose="02070309020205020404" pitchFamily="49" charset="0"/>
-              </a:rPr>
-            </a:br>
-            <a:r>
-              <a:rPr lang="es-ES" sz="1400" b="0" dirty="0">
-                <a:effectLst/>
-                <a:latin typeface="Courier New" panose="02070309020205020404" pitchFamily="49" charset="0"/>
-              </a:rPr>
-              <a:t>    H00 = </a:t>
-            </a:r>
-            <a:r>
-              <a:rPr lang="es-ES" sz="1400" b="0" dirty="0" err="1">
-                <a:effectLst/>
-                <a:latin typeface="Courier New" panose="02070309020205020404" pitchFamily="49" charset="0"/>
-              </a:rPr>
-              <a:t>mzi_test</a:t>
-            </a:r>
-            <a:r>
-              <a:rPr lang="es-ES" sz="1400" b="0" dirty="0">
-                <a:effectLst/>
-                <a:latin typeface="Courier New" panose="02070309020205020404" pitchFamily="49" charset="0"/>
-              </a:rPr>
-              <a:t>["in0", "out0"]</a:t>
-            </a:r>
-          </a:p>
-          <a:p>
-            <a:endParaRPr lang="en-US" sz="2000" dirty="0"/>
-          </a:p>
-          <a:p>
-            <a:pPr algn="just"/>
-            <a:endParaRPr lang="en-US" sz="2000" dirty="0"/>
-          </a:p>
-          <a:p>
-            <a:pPr algn="just"/>
-            <a:endParaRPr lang="en-US" sz="2000" b="1" i="1" dirty="0"/>
-          </a:p>
-          <a:p>
-            <a:pPr algn="just"/>
-            <a:endParaRPr lang="en-US" sz="2000" kern="0" dirty="0">
-              <a:solidFill>
-                <a:sysClr val="windowText" lastClr="000000"/>
-              </a:solidFill>
-            </a:endParaRPr>
-          </a:p>
-          <a:p>
-            <a:endParaRPr lang="en-US" sz="2000" kern="0" dirty="0">
-              <a:solidFill>
-                <a:sysClr val="windowText" lastClr="000000"/>
-              </a:solidFill>
-            </a:endParaRPr>
-          </a:p>
-        </p:txBody>
-      </p:sp>
-      <p:sp>
-        <p:nvSpPr>
-          <p:cNvPr id="2" name="CuadroTexto 1">
-            <a:extLst>
-              <a:ext uri="{FF2B5EF4-FFF2-40B4-BE49-F238E27FC236}">
-                <a16:creationId xmlns:a16="http://schemas.microsoft.com/office/drawing/2014/main" id="{CA4A2D6E-5993-52B3-D251-1ADF2B0C8355}"/>
-              </a:ext>
-            </a:extLst>
-          </p:cNvPr>
-          <p:cNvSpPr txBox="1"/>
-          <p:nvPr/>
-        </p:nvSpPr>
-        <p:spPr>
-          <a:xfrm>
-            <a:off x="609441" y="4860334"/>
-            <a:ext cx="11199971" cy="1384995"/>
-          </a:xfrm>
-          <a:prstGeom prst="rect">
-            <a:avLst/>
-          </a:prstGeom>
-          <a:solidFill>
-            <a:schemeClr val="bg1">
-              <a:lumMod val="95000"/>
-            </a:schemeClr>
-          </a:solidFill>
-          <a:ln w="28575">
-            <a:solidFill>
-              <a:srgbClr val="E0700D"/>
-            </a:solidFill>
-          </a:ln>
-        </p:spPr>
-        <p:txBody>
-          <a:bodyPr wrap="square" rtlCol="0">
-            <a:spAutoFit/>
-          </a:bodyPr>
-          <a:lstStyle/>
-          <a:p>
-            <a:pPr algn="just"/>
-            <a:r>
-              <a:rPr lang="en-US" sz="1200" dirty="0">
-                <a:latin typeface="Arial" panose="020B0604020202020204" pitchFamily="34" charset="0"/>
-                <a:cs typeface="Arial" panose="020B0604020202020204" pitchFamily="34" charset="0"/>
-              </a:rPr>
-              <a:t>Document all your results (copy here the code employed to obtain the transfer function employing SAX modeling and include the comparative plot of the models)</a:t>
-            </a:r>
-          </a:p>
-          <a:p>
-            <a:pPr algn="just"/>
-            <a:endParaRPr lang="en-US" sz="1200" dirty="0">
-              <a:latin typeface="Arial" panose="020B0604020202020204" pitchFamily="34" charset="0"/>
-              <a:cs typeface="Arial" panose="020B0604020202020204" pitchFamily="34" charset="0"/>
-            </a:endParaRPr>
-          </a:p>
-          <a:p>
-            <a:pPr algn="just"/>
-            <a:endParaRPr lang="en-US" sz="1200" dirty="0">
-              <a:latin typeface="Arial" panose="020B0604020202020204" pitchFamily="34" charset="0"/>
-              <a:cs typeface="Arial" panose="020B0604020202020204" pitchFamily="34" charset="0"/>
-            </a:endParaRPr>
-          </a:p>
-          <a:p>
-            <a:pPr algn="just"/>
-            <a:endParaRPr lang="en-US" sz="1200" dirty="0">
-              <a:latin typeface="Arial" panose="020B0604020202020204" pitchFamily="34" charset="0"/>
-              <a:cs typeface="Arial" panose="020B0604020202020204" pitchFamily="34" charset="0"/>
-            </a:endParaRPr>
-          </a:p>
-          <a:p>
-            <a:pPr algn="just"/>
-            <a:endParaRPr lang="en-US" sz="1200" dirty="0">
-              <a:latin typeface="Arial" panose="020B0604020202020204" pitchFamily="34" charset="0"/>
-              <a:cs typeface="Arial" panose="020B0604020202020204" pitchFamily="34" charset="0"/>
-            </a:endParaRPr>
-          </a:p>
-          <a:p>
-            <a:pPr algn="just"/>
-            <a:endParaRPr lang="en-US" sz="1200" dirty="0">
-              <a:latin typeface="Arial" panose="020B0604020202020204" pitchFamily="34" charset="0"/>
-              <a:cs typeface="Arial" panose="020B0604020202020204" pitchFamily="34" charset="0"/>
-            </a:endParaRPr>
-          </a:p>
-          <a:p>
-            <a:pPr algn="just"/>
-            <a:endParaRPr lang="en-US" sz="1200" dirty="0">
-              <a:latin typeface="Arial" panose="020B0604020202020204" pitchFamily="34" charset="0"/>
-              <a:cs typeface="Arial" panose="020B0604020202020204" pitchFamily="34" charset="0"/>
-            </a:endParaRPr>
-          </a:p>
-        </p:txBody>
-      </p:sp>
-      <p:sp>
-        <p:nvSpPr>
-          <p:cNvPr id="5" name="Marcador de pie de página 2">
-            <a:extLst>
-              <a:ext uri="{FF2B5EF4-FFF2-40B4-BE49-F238E27FC236}">
-                <a16:creationId xmlns:a16="http://schemas.microsoft.com/office/drawing/2014/main" id="{ED97C9D0-256C-D4CA-42E7-79330F040B30}"/>
-              </a:ext>
-            </a:extLst>
-          </p:cNvPr>
-          <p:cNvSpPr>
-            <a:spLocks noGrp="1"/>
-          </p:cNvSpPr>
-          <p:nvPr>
-            <p:ph type="ftr" sz="quarter" idx="5"/>
-          </p:nvPr>
-        </p:nvSpPr>
-        <p:spPr>
-          <a:xfrm>
-            <a:off x="609600" y="6457057"/>
-            <a:ext cx="2743200" cy="184666"/>
-          </a:xfrm>
-        </p:spPr>
-        <p:txBody>
-          <a:bodyPr/>
-          <a:lstStyle/>
-          <a:p>
-            <a:pPr marL="12700">
-              <a:spcBef>
-                <a:spcPts val="15"/>
-              </a:spcBef>
-            </a:pPr>
-            <a:r>
-              <a:rPr lang="es-ES" spc="-5"/>
-              <a:t>LAB 3. INTERFEROMETERS I</a:t>
-            </a:r>
-            <a:endParaRPr lang="es-ES" spc="-5" dirty="0"/>
-          </a:p>
-        </p:txBody>
-      </p:sp>
-    </p:spTree>
-    <p:extLst>
-      <p:ext uri="{BB962C8B-B14F-4D97-AF65-F5344CB8AC3E}">
-        <p14:creationId xmlns:p14="http://schemas.microsoft.com/office/powerpoint/2010/main" val="3666436811"/>
-      </p:ext>
-    </p:extLst>
-  </p:cSld>
-  <p:clrMapOvr>
-    <a:masterClrMapping/>
-  </p:clrMapOvr>
-</p:sld>
-</file>
-
-<file path=ppt/slides/slide11.xml><?xml version="1.0" encoding="utf-8"?>
-<p:sld xmlns:a="http://schemas.openxmlformats.org/drawingml/2006/main" xmlns:r="http://schemas.openxmlformats.org/officeDocument/2006/relationships" xmlns:p="http://schemas.openxmlformats.org/presentationml/2006/main">
-  <p:cSld>
-    <p:spTree>
-      <p:nvGrpSpPr>
-        <p:cNvPr id="1" name=""/>
-        <p:cNvGrpSpPr/>
-        <p:nvPr/>
-      </p:nvGrpSpPr>
-      <p:grpSpPr>
-        <a:xfrm>
-          <a:off x="0" y="0"/>
-          <a:ext cx="0" cy="0"/>
-          <a:chOff x="0" y="0"/>
-          <a:chExt cx="0" cy="0"/>
-        </a:xfrm>
-      </p:grpSpPr>
-      <p:sp>
-        <p:nvSpPr>
-          <p:cNvPr id="2" name="Marcador de número de diapositiva 1">
-            <a:extLst>
-              <a:ext uri="{FF2B5EF4-FFF2-40B4-BE49-F238E27FC236}">
-                <a16:creationId xmlns:a16="http://schemas.microsoft.com/office/drawing/2014/main" id="{5A262B9B-63C7-D050-29CE-69C0673EA18E}"/>
-              </a:ext>
-            </a:extLst>
-          </p:cNvPr>
-          <p:cNvSpPr>
-            <a:spLocks noGrp="1"/>
-          </p:cNvSpPr>
-          <p:nvPr>
-            <p:ph type="sldNum" sz="quarter" idx="7"/>
-          </p:nvPr>
-        </p:nvSpPr>
-        <p:spPr/>
-        <p:txBody>
-          <a:bodyPr/>
-          <a:lstStyle/>
-          <a:p>
-            <a:fld id="{B6F15528-21DE-4FAA-801E-634DDDAF4B2B}" type="slidenum">
-              <a:rPr lang="es-ES" smtClean="0"/>
-              <a:t>11</a:t>
-            </a:fld>
-            <a:endParaRPr lang="es-ES"/>
-          </a:p>
-        </p:txBody>
-      </p:sp>
-      <p:pic>
-        <p:nvPicPr>
-          <p:cNvPr id="8" name="Imagen 7">
-            <a:extLst>
-              <a:ext uri="{FF2B5EF4-FFF2-40B4-BE49-F238E27FC236}">
-                <a16:creationId xmlns:a16="http://schemas.microsoft.com/office/drawing/2014/main" id="{6E6A95D7-6F7D-A4CD-0DB7-37860A54D1D6}"/>
-              </a:ext>
-            </a:extLst>
-          </p:cNvPr>
-          <p:cNvPicPr>
-            <a:picLocks noChangeAspect="1"/>
-          </p:cNvPicPr>
-          <p:nvPr/>
-        </p:nvPicPr>
-        <p:blipFill>
-          <a:blip r:embed="rId2"/>
-          <a:stretch>
-            <a:fillRect/>
-          </a:stretch>
-        </p:blipFill>
-        <p:spPr>
-          <a:xfrm>
-            <a:off x="4191000" y="303789"/>
-            <a:ext cx="3989450" cy="3201411"/>
-          </a:xfrm>
-          <a:prstGeom prst="rect">
-            <a:avLst/>
-          </a:prstGeom>
-        </p:spPr>
-      </p:pic>
-      <p:pic>
-        <p:nvPicPr>
-          <p:cNvPr id="10" name="Imagen 9">
-            <a:extLst>
-              <a:ext uri="{FF2B5EF4-FFF2-40B4-BE49-F238E27FC236}">
-                <a16:creationId xmlns:a16="http://schemas.microsoft.com/office/drawing/2014/main" id="{A8B83A4A-197F-1857-FB32-1782C497CC3B}"/>
-              </a:ext>
-            </a:extLst>
-          </p:cNvPr>
-          <p:cNvPicPr>
-            <a:picLocks noChangeAspect="1"/>
-          </p:cNvPicPr>
-          <p:nvPr/>
-        </p:nvPicPr>
-        <p:blipFill>
-          <a:blip r:embed="rId3"/>
-          <a:stretch>
-            <a:fillRect/>
-          </a:stretch>
-        </p:blipFill>
-        <p:spPr>
-          <a:xfrm>
-            <a:off x="152400" y="195262"/>
-            <a:ext cx="4124692" cy="3309938"/>
-          </a:xfrm>
-          <a:prstGeom prst="rect">
-            <a:avLst/>
-          </a:prstGeom>
-        </p:spPr>
-      </p:pic>
-      <p:sp>
-        <p:nvSpPr>
-          <p:cNvPr id="11" name="CuadroTexto 10">
-            <a:extLst>
-              <a:ext uri="{FF2B5EF4-FFF2-40B4-BE49-F238E27FC236}">
-                <a16:creationId xmlns:a16="http://schemas.microsoft.com/office/drawing/2014/main" id="{D4799E6C-0660-BA35-BAA0-7AB4AAC8C92C}"/>
-              </a:ext>
-            </a:extLst>
-          </p:cNvPr>
-          <p:cNvSpPr txBox="1"/>
-          <p:nvPr/>
-        </p:nvSpPr>
-        <p:spPr>
-          <a:xfrm>
-            <a:off x="8686800" y="914400"/>
-            <a:ext cx="2667000" cy="1477328"/>
-          </a:xfrm>
-          <a:prstGeom prst="rect">
-            <a:avLst/>
-          </a:prstGeom>
-          <a:noFill/>
-        </p:spPr>
-        <p:txBody>
-          <a:bodyPr wrap="square" rtlCol="0">
-            <a:spAutoFit/>
-          </a:bodyPr>
-          <a:lstStyle/>
-          <a:p>
-            <a:r>
-              <a:rPr lang="es-ES" dirty="0"/>
-              <a:t>HACER MÁS EJEMPLOS</a:t>
-            </a:r>
-          </a:p>
-          <a:p>
-            <a:r>
-              <a:rPr lang="es-ES" dirty="0"/>
-              <a:t>En </a:t>
-            </a:r>
-            <a:r>
-              <a:rPr lang="es-ES" dirty="0" err="1"/>
-              <a:t>sax</a:t>
-            </a:r>
-            <a:r>
-              <a:rPr lang="es-ES" dirty="0"/>
-              <a:t> los puertos son 0, 1</a:t>
-            </a:r>
-          </a:p>
-          <a:p>
-            <a:r>
-              <a:rPr lang="es-ES" dirty="0"/>
-              <a:t>Por lo que 1 en </a:t>
-            </a:r>
-            <a:r>
-              <a:rPr lang="es-ES" dirty="0" err="1"/>
-              <a:t>sax</a:t>
-            </a:r>
-            <a:r>
-              <a:rPr lang="es-ES" dirty="0"/>
-              <a:t> corresponde a 2 en el otro. </a:t>
-            </a:r>
-          </a:p>
-        </p:txBody>
-      </p:sp>
-    </p:spTree>
-    <p:extLst>
-      <p:ext uri="{BB962C8B-B14F-4D97-AF65-F5344CB8AC3E}">
-        <p14:creationId xmlns:p14="http://schemas.microsoft.com/office/powerpoint/2010/main" val="701476647"/>
-      </p:ext>
-    </p:extLst>
-  </p:cSld>
-  <p:clrMapOvr>
-    <a:masterClrMapping/>
-  </p:clrMapOvr>
-</p:sld>
-</file>
-
-<file path=ppt/slides/slide12.xml><?xml version="1.0" encoding="utf-8"?>
-<p:sld xmlns:a="http://schemas.openxmlformats.org/drawingml/2006/main" xmlns:r="http://schemas.openxmlformats.org/officeDocument/2006/relationships" xmlns:p="http://schemas.openxmlformats.org/presentationml/2006/main">
-  <p:cSld>
-    <p:spTree>
-      <p:nvGrpSpPr>
-        <p:cNvPr id="1" name="">
-          <a:extLst>
-            <a:ext uri="{FF2B5EF4-FFF2-40B4-BE49-F238E27FC236}">
               <a16:creationId xmlns:a16="http://schemas.microsoft.com/office/drawing/2014/main" id="{25434E70-43B1-3881-1771-20FB4358471D}"/>
             </a:ext>
           </a:extLst>
@@ -4315,7 +3295,7 @@
           <a:p>
             <a:fld id="{B6F15528-21DE-4FAA-801E-634DDDAF4B2B}" type="slidenum">
               <a:rPr lang="es-ES" smtClean="0"/>
-              <a:t>12</a:t>
+              <a:t>10</a:t>
             </a:fld>
             <a:endParaRPr lang="es-ES"/>
           </a:p>
@@ -4612,7 +3592,7 @@
 </p:sld>
 </file>
 
-<file path=ppt/slides/slide13.xml><?xml version="1.0" encoding="utf-8"?>
+<file path=ppt/slides/slide11.xml><?xml version="1.0" encoding="utf-8"?>
 <p:sld xmlns:a="http://schemas.openxmlformats.org/drawingml/2006/main" xmlns:r="http://schemas.openxmlformats.org/officeDocument/2006/relationships" xmlns:p="http://schemas.openxmlformats.org/presentationml/2006/main">
   <p:cSld>
     <p:spTree>
@@ -4652,7 +3632,7 @@
           <a:p>
             <a:fld id="{B6F15528-21DE-4FAA-801E-634DDDAF4B2B}" type="slidenum">
               <a:rPr lang="es-ES" smtClean="0"/>
-              <a:t>13</a:t>
+              <a:t>11</a:t>
             </a:fld>
             <a:endParaRPr lang="es-ES"/>
           </a:p>
@@ -4680,144 +3660,230 @@
         </p:blipFill>
         <p:spPr>
           <a:xfrm>
-            <a:off x="1447800" y="1752600"/>
-            <a:ext cx="3181350" cy="838200"/>
+            <a:off x="2899071" y="1042015"/>
+            <a:ext cx="3078006" cy="810972"/>
           </a:xfrm>
           <a:prstGeom prst="rect">
             <a:avLst/>
           </a:prstGeom>
         </p:spPr>
       </p:pic>
-      <p:sp>
-        <p:nvSpPr>
-          <p:cNvPr id="5" name="CuadroTexto 4">
-            <a:extLst>
-              <a:ext uri="{FF2B5EF4-FFF2-40B4-BE49-F238E27FC236}">
-                <a16:creationId xmlns:a16="http://schemas.microsoft.com/office/drawing/2014/main" id="{3383DB73-B498-36BE-3CA7-16C3FDD7E8EE}"/>
-              </a:ext>
-            </a:extLst>
-          </p:cNvPr>
-          <p:cNvSpPr txBox="1"/>
-          <p:nvPr/>
-        </p:nvSpPr>
-        <p:spPr>
-          <a:xfrm>
-            <a:off x="304800" y="609600"/>
-            <a:ext cx="6918960" cy="923330"/>
-          </a:xfrm>
-          <a:prstGeom prst="rect">
-            <a:avLst/>
-          </a:prstGeom>
-          <a:noFill/>
-        </p:spPr>
-        <p:txBody>
-          <a:bodyPr wrap="square" rtlCol="0">
-            <a:spAutoFit/>
-          </a:bodyPr>
-          <a:lstStyle/>
-          <a:p>
-            <a:r>
-              <a:rPr lang="es-ES" dirty="0"/>
-              <a:t>Para tener interferencia constructiva en lambda 0 se debe cumplir esa condición: (tenemos en cuenta que estamos en el caso en el que solo hay </a:t>
-            </a:r>
-            <a:r>
-              <a:rPr lang="es-ES" dirty="0" err="1"/>
-              <a:t>dif</a:t>
-            </a:r>
-            <a:r>
-              <a:rPr lang="es-ES" dirty="0"/>
-              <a:t> de longitud en los brazos): </a:t>
-            </a:r>
-          </a:p>
-        </p:txBody>
-      </p:sp>
+      <mc:AlternateContent xmlns:mc="http://schemas.openxmlformats.org/markup-compatibility/2006">
+        <mc:Choice xmlns:a14="http://schemas.microsoft.com/office/drawing/2010/main" Requires="a14">
+          <p:sp>
+            <p:nvSpPr>
+              <p:cNvPr id="5" name="CuadroTexto 4">
+                <a:extLst>
+                  <a:ext uri="{FF2B5EF4-FFF2-40B4-BE49-F238E27FC236}">
+                    <a16:creationId xmlns:a16="http://schemas.microsoft.com/office/drawing/2014/main" id="{3383DB73-B498-36BE-3CA7-16C3FDD7E8EE}"/>
+                  </a:ext>
+                </a:extLst>
+              </p:cNvPr>
+              <p:cNvSpPr txBox="1"/>
+              <p:nvPr/>
+            </p:nvSpPr>
+            <p:spPr>
+              <a:xfrm>
+                <a:off x="274320" y="595001"/>
+                <a:ext cx="11460479" cy="369332"/>
+              </a:xfrm>
+              <a:prstGeom prst="rect">
+                <a:avLst/>
+              </a:prstGeom>
+              <a:noFill/>
+            </p:spPr>
+            <p:txBody>
+              <a:bodyPr wrap="square" rtlCol="0">
+                <a:spAutoFit/>
+              </a:bodyPr>
+              <a:lstStyle/>
+              <a:p>
+                <a:r>
+                  <a:rPr lang="es-ES" dirty="0" err="1"/>
+                  <a:t>To</a:t>
+                </a:r>
+                <a:r>
+                  <a:rPr lang="es-ES" dirty="0"/>
+                  <a:t> </a:t>
+                </a:r>
+                <a:r>
+                  <a:rPr lang="es-ES" dirty="0" err="1"/>
+                  <a:t>achieve</a:t>
+                </a:r>
+                <a:r>
+                  <a:rPr lang="es-ES" dirty="0"/>
+                  <a:t> constructive </a:t>
+                </a:r>
+                <a:r>
+                  <a:rPr lang="es-ES" dirty="0" err="1"/>
+                  <a:t>interference</a:t>
+                </a:r>
+                <a:r>
+                  <a:rPr lang="es-ES" dirty="0"/>
+                  <a:t> at </a:t>
+                </a:r>
+                <a14:m>
+                  <m:oMath xmlns:m="http://schemas.openxmlformats.org/officeDocument/2006/math">
+                    <m:sSub>
+                      <m:sSubPr>
+                        <m:ctrlPr>
+                          <a:rPr lang="ar-AE"/>
+                        </m:ctrlPr>
+                      </m:sSubPr>
+                      <m:e>
+                        <m:r>
+                          <a:rPr lang="ar-AE" i="1"/>
+                          <m:t>𝜆</m:t>
+                        </m:r>
+                      </m:e>
+                      <m:sub>
+                        <m:r>
+                          <a:rPr lang="ar-AE"/>
+                          <m:t>0</m:t>
+                        </m:r>
+                      </m:sub>
+                    </m:sSub>
+                    <m:r>
+                      <a:rPr lang="ar-AE"/>
+                      <m:t>=</m:t>
+                    </m:r>
+                    <m:r>
+                      <a:rPr lang="ar-AE"/>
+                      <m:t>1550</m:t>
+                    </m:r>
+                  </m:oMath>
+                </a14:m>
+                <a:r>
+                  <a:rPr lang="es-ES" dirty="0"/>
+                  <a:t>nm, </a:t>
+                </a:r>
+                <a:r>
+                  <a:rPr lang="es-ES" dirty="0" err="1"/>
+                  <a:t>the</a:t>
+                </a:r>
+                <a:r>
+                  <a:rPr lang="es-ES" dirty="0"/>
+                  <a:t> </a:t>
+                </a:r>
+                <a:r>
+                  <a:rPr lang="es-ES" dirty="0" err="1"/>
+                  <a:t>arm</a:t>
+                </a:r>
+                <a:r>
+                  <a:rPr lang="es-ES" dirty="0"/>
+                  <a:t> </a:t>
+                </a:r>
+                <a:r>
+                  <a:rPr lang="es-ES" dirty="0" err="1"/>
+                  <a:t>length</a:t>
+                </a:r>
+                <a:r>
+                  <a:rPr lang="es-ES" dirty="0"/>
+                  <a:t> </a:t>
+                </a:r>
+                <a:r>
+                  <a:rPr lang="es-ES" dirty="0" err="1"/>
+                  <a:t>difference</a:t>
+                </a:r>
+                <a:r>
+                  <a:rPr lang="es-ES" dirty="0"/>
+                  <a:t> </a:t>
+                </a:r>
+                <a:r>
+                  <a:rPr lang="es-ES" dirty="0" err="1"/>
+                  <a:t>must</a:t>
+                </a:r>
+                <a:r>
+                  <a:rPr lang="es-ES" dirty="0"/>
+                  <a:t> </a:t>
+                </a:r>
+                <a:r>
+                  <a:rPr lang="es-ES" dirty="0" err="1"/>
+                  <a:t>satisfy</a:t>
+                </a:r>
+                <a:r>
+                  <a:rPr lang="es-ES" dirty="0"/>
+                  <a:t> </a:t>
+                </a:r>
+                <a:r>
+                  <a:rPr lang="es-ES" dirty="0" err="1"/>
+                  <a:t>the</a:t>
+                </a:r>
+                <a:r>
+                  <a:rPr lang="es-ES" dirty="0"/>
+                  <a:t> MZI </a:t>
+                </a:r>
+                <a:r>
+                  <a:rPr lang="es-ES" dirty="0" err="1"/>
+                  <a:t>phase</a:t>
+                </a:r>
+                <a:r>
+                  <a:rPr lang="es-ES" dirty="0"/>
+                  <a:t> </a:t>
+                </a:r>
+                <a:r>
+                  <a:rPr lang="es-ES" dirty="0" err="1"/>
+                  <a:t>condition</a:t>
+                </a:r>
+                <a:r>
+                  <a:rPr lang="es-ES" dirty="0"/>
+                  <a:t>:  </a:t>
+                </a:r>
+              </a:p>
+            </p:txBody>
+          </p:sp>
+        </mc:Choice>
+        <mc:Fallback>
+          <p:sp>
+            <p:nvSpPr>
+              <p:cNvPr id="5" name="CuadroTexto 4">
+                <a:extLst>
+                  <a:ext uri="{FF2B5EF4-FFF2-40B4-BE49-F238E27FC236}">
+                    <a16:creationId xmlns:a16="http://schemas.microsoft.com/office/drawing/2014/main" id="{3383DB73-B498-36BE-3CA7-16C3FDD7E8EE}"/>
+                  </a:ext>
+                </a:extLst>
+              </p:cNvPr>
+              <p:cNvSpPr txBox="1">
+                <a:spLocks noRot="1" noChangeAspect="1" noMove="1" noResize="1" noEditPoints="1" noAdjustHandles="1" noChangeArrowheads="1" noChangeShapeType="1" noTextEdit="1"/>
+              </p:cNvSpPr>
+              <p:nvPr/>
+            </p:nvSpPr>
+            <p:spPr>
+              <a:xfrm>
+                <a:off x="274320" y="595001"/>
+                <a:ext cx="11460479" cy="369332"/>
+              </a:xfrm>
+              <a:prstGeom prst="rect">
+                <a:avLst/>
+              </a:prstGeom>
+              <a:blipFill>
+                <a:blip r:embed="rId3"/>
+                <a:stretch>
+                  <a:fillRect l="-426" t="-10000" b="-26667"/>
+                </a:stretch>
+              </a:blipFill>
+            </p:spPr>
+            <p:txBody>
+              <a:bodyPr/>
+              <a:lstStyle/>
+              <a:p>
+                <a:r>
+                  <a:rPr lang="es-ES">
+                    <a:noFill/>
+                  </a:rPr>
+                  <a:t> </a:t>
+                </a:r>
+              </a:p>
+            </p:txBody>
+          </p:sp>
+        </mc:Fallback>
+      </mc:AlternateContent>
       <p:pic>
         <p:nvPicPr>
           <p:cNvPr id="7" name="Imagen 6">
             <a:extLst>
               <a:ext uri="{FF2B5EF4-FFF2-40B4-BE49-F238E27FC236}">
                 <a16:creationId xmlns:a16="http://schemas.microsoft.com/office/drawing/2014/main" id="{0D31D717-D0AE-75D4-2688-DBA6014492FC}"/>
-              </a:ext>
-            </a:extLst>
-          </p:cNvPr>
-          <p:cNvPicPr>
-            <a:picLocks noChangeAspect="1"/>
-          </p:cNvPicPr>
-          <p:nvPr/>
-        </p:nvPicPr>
-        <p:blipFill>
-          <a:blip r:embed="rId3"/>
-          <a:stretch>
-            <a:fillRect/>
-          </a:stretch>
-        </p:blipFill>
-        <p:spPr>
-          <a:xfrm>
-            <a:off x="5715000" y="1532930"/>
-            <a:ext cx="1752600" cy="923925"/>
-          </a:xfrm>
-          <a:prstGeom prst="rect">
-            <a:avLst/>
-          </a:prstGeom>
-        </p:spPr>
-      </p:pic>
-      <p:sp>
-        <p:nvSpPr>
-          <p:cNvPr id="8" name="CuadroTexto 7">
-            <a:extLst>
-              <a:ext uri="{FF2B5EF4-FFF2-40B4-BE49-F238E27FC236}">
-                <a16:creationId xmlns:a16="http://schemas.microsoft.com/office/drawing/2014/main" id="{4205ABBB-6150-0834-CDF4-24A98BA4EA1D}"/>
-              </a:ext>
-            </a:extLst>
-          </p:cNvPr>
-          <p:cNvSpPr txBox="1"/>
-          <p:nvPr/>
-        </p:nvSpPr>
-        <p:spPr>
-          <a:xfrm>
-            <a:off x="8458200" y="762000"/>
-            <a:ext cx="2438400" cy="2862322"/>
-          </a:xfrm>
-          <a:prstGeom prst="rect">
-            <a:avLst/>
-          </a:prstGeom>
-          <a:noFill/>
-        </p:spPr>
-        <p:txBody>
-          <a:bodyPr wrap="square" rtlCol="0">
-            <a:spAutoFit/>
-          </a:bodyPr>
-          <a:lstStyle/>
-          <a:p>
-            <a:r>
-              <a:rPr lang="es-ES" dirty="0"/>
-              <a:t>Observamos que para m=1 nos queda un </a:t>
-            </a:r>
-            <a:r>
-              <a:rPr lang="es-ES" dirty="0" err="1"/>
-              <a:t>fsr</a:t>
-            </a:r>
-            <a:r>
-              <a:rPr lang="es-ES" dirty="0"/>
-              <a:t> demasiado ancho para una aplicación de filtrado. Por eso hacemos un barrido de m para escoger la m necesaria para la </a:t>
-            </a:r>
-            <a:r>
-              <a:rPr lang="es-ES" dirty="0" err="1"/>
-              <a:t>plicación</a:t>
-            </a:r>
-            <a:r>
-              <a:rPr lang="es-ES" dirty="0"/>
-              <a:t> concreta de nuestro filtro. </a:t>
-            </a:r>
-          </a:p>
-        </p:txBody>
-      </p:sp>
-      <p:pic>
-        <p:nvPicPr>
-          <p:cNvPr id="10" name="Imagen 9">
-            <a:extLst>
-              <a:ext uri="{FF2B5EF4-FFF2-40B4-BE49-F238E27FC236}">
-                <a16:creationId xmlns:a16="http://schemas.microsoft.com/office/drawing/2014/main" id="{26CFADEB-D2F5-E274-9860-ACE0FEF5EBE3}"/>
               </a:ext>
             </a:extLst>
           </p:cNvPr>
@@ -4834,55 +3900,20 @@
         </p:blipFill>
         <p:spPr>
           <a:xfrm>
-            <a:off x="381000" y="2915602"/>
-            <a:ext cx="4314606" cy="3462338"/>
+            <a:off x="6096000" y="994072"/>
+            <a:ext cx="1572868" cy="829175"/>
           </a:xfrm>
           <a:prstGeom prst="rect">
             <a:avLst/>
           </a:prstGeom>
         </p:spPr>
       </p:pic>
-      <p:sp>
-        <p:nvSpPr>
-          <p:cNvPr id="11" name="CuadroTexto 10">
+      <p:pic>
+        <p:nvPicPr>
+          <p:cNvPr id="10" name="Imagen 9">
             <a:extLst>
               <a:ext uri="{FF2B5EF4-FFF2-40B4-BE49-F238E27FC236}">
-                <a16:creationId xmlns:a16="http://schemas.microsoft.com/office/drawing/2014/main" id="{BFAF3784-0FF0-9D2F-AF31-5D982A9CA718}"/>
-              </a:ext>
-            </a:extLst>
-          </p:cNvPr>
-          <p:cNvSpPr txBox="1"/>
-          <p:nvPr/>
-        </p:nvSpPr>
-        <p:spPr>
-          <a:xfrm>
-            <a:off x="5257800" y="3686383"/>
-            <a:ext cx="4724400" cy="1200329"/>
-          </a:xfrm>
-          <a:prstGeom prst="rect">
-            <a:avLst/>
-          </a:prstGeom>
-          <a:noFill/>
-        </p:spPr>
-        <p:txBody>
-          <a:bodyPr wrap="square" rtlCol="0">
-            <a:spAutoFit/>
-          </a:bodyPr>
-          <a:lstStyle/>
-          <a:p>
-            <a:r>
-              <a:rPr lang="es-ES" dirty="0"/>
-              <a:t>Podemos elegir la m según lo fino que nos interese que sea nuestro filtro y obtenemos las longitudes de los brazos. He dejado Lu fija solo cambiamos el incremento. </a:t>
-            </a:r>
-          </a:p>
-        </p:txBody>
-      </p:sp>
-      <p:pic>
-        <p:nvPicPr>
-          <p:cNvPr id="13" name="Imagen 12">
-            <a:extLst>
-              <a:ext uri="{FF2B5EF4-FFF2-40B4-BE49-F238E27FC236}">
-                <a16:creationId xmlns:a16="http://schemas.microsoft.com/office/drawing/2014/main" id="{362AAAEC-8C47-B016-8E59-7C040F37A647}"/>
+                <a16:creationId xmlns:a16="http://schemas.microsoft.com/office/drawing/2014/main" id="{26CFADEB-D2F5-E274-9860-ACE0FEF5EBE3}"/>
               </a:ext>
             </a:extLst>
           </p:cNvPr>
@@ -4899,14 +3930,116 @@
         </p:blipFill>
         <p:spPr>
           <a:xfrm>
-            <a:off x="8133263" y="4646771"/>
-            <a:ext cx="2411131" cy="1934858"/>
+            <a:off x="152400" y="2073312"/>
+            <a:ext cx="4696637" cy="3768906"/>
           </a:xfrm>
           <a:prstGeom prst="rect">
             <a:avLst/>
           </a:prstGeom>
         </p:spPr>
       </p:pic>
+      <p:pic>
+        <p:nvPicPr>
+          <p:cNvPr id="13" name="Imagen 12">
+            <a:extLst>
+              <a:ext uri="{FF2B5EF4-FFF2-40B4-BE49-F238E27FC236}">
+                <a16:creationId xmlns:a16="http://schemas.microsoft.com/office/drawing/2014/main" id="{362AAAEC-8C47-B016-8E59-7C040F37A647}"/>
+              </a:ext>
+            </a:extLst>
+          </p:cNvPr>
+          <p:cNvPicPr>
+            <a:picLocks noChangeAspect="1"/>
+          </p:cNvPicPr>
+          <p:nvPr/>
+        </p:nvPicPr>
+        <p:blipFill>
+          <a:blip r:embed="rId6"/>
+          <a:stretch>
+            <a:fillRect/>
+          </a:stretch>
+        </p:blipFill>
+        <p:spPr>
+          <a:xfrm>
+            <a:off x="6994596" y="3525071"/>
+            <a:ext cx="3762595" cy="3019366"/>
+          </a:xfrm>
+          <a:prstGeom prst="rect">
+            <a:avLst/>
+          </a:prstGeom>
+        </p:spPr>
+      </p:pic>
+      <p:sp>
+        <p:nvSpPr>
+          <p:cNvPr id="3" name="CuadroTexto 2">
+            <a:extLst>
+              <a:ext uri="{FF2B5EF4-FFF2-40B4-BE49-F238E27FC236}">
+                <a16:creationId xmlns:a16="http://schemas.microsoft.com/office/drawing/2014/main" id="{35D48CDE-4345-C2B0-886E-8D1E4FB7F4CA}"/>
+              </a:ext>
+            </a:extLst>
+          </p:cNvPr>
+          <p:cNvSpPr txBox="1"/>
+          <p:nvPr/>
+        </p:nvSpPr>
+        <p:spPr>
+          <a:xfrm>
+            <a:off x="4942226" y="1770745"/>
+            <a:ext cx="7202055" cy="1754326"/>
+          </a:xfrm>
+          <a:prstGeom prst="rect">
+            <a:avLst/>
+          </a:prstGeom>
+          <a:noFill/>
+        </p:spPr>
+        <p:txBody>
+          <a:bodyPr wrap="square" rtlCol="0">
+            <a:spAutoFit/>
+          </a:bodyPr>
+          <a:lstStyle/>
+          <a:p>
+            <a:pPr algn="just"/>
+            <a:r>
+              <a:rPr lang="en-US" dirty="0"/>
+              <a:t>A parametric sweep over m was performed to analyze its impact on the spectral response and to identify a suitable configuration for filtering. As observed in the plot, low values of m result in an excessively large FSR, which is not appropriate for practical filtering applications. Increasing m leads to finer spectral selectivity. For this reason, m=76 is selected to design a filter with the following response: </a:t>
+            </a:r>
+            <a:endParaRPr lang="es-ES" dirty="0"/>
+          </a:p>
+        </p:txBody>
+      </p:sp>
+      <p:sp>
+        <p:nvSpPr>
+          <p:cNvPr id="6" name="CuadroTexto 5">
+            <a:extLst>
+              <a:ext uri="{FF2B5EF4-FFF2-40B4-BE49-F238E27FC236}">
+                <a16:creationId xmlns:a16="http://schemas.microsoft.com/office/drawing/2014/main" id="{2F3B1639-CFAE-35E0-63D4-A3C9F9D1158E}"/>
+              </a:ext>
+            </a:extLst>
+          </p:cNvPr>
+          <p:cNvSpPr txBox="1"/>
+          <p:nvPr/>
+        </p:nvSpPr>
+        <p:spPr>
+          <a:xfrm>
+            <a:off x="274320" y="228600"/>
+            <a:ext cx="4667906" cy="400110"/>
+          </a:xfrm>
+          <a:prstGeom prst="rect">
+            <a:avLst/>
+          </a:prstGeom>
+          <a:noFill/>
+        </p:spPr>
+        <p:txBody>
+          <a:bodyPr wrap="square" rtlCol="0">
+            <a:spAutoFit/>
+          </a:bodyPr>
+          <a:lstStyle/>
+          <a:p>
+            <a:r>
+              <a:rPr lang="es-ES" sz="2000" b="1" dirty="0"/>
+              <a:t>EXTRA ASSESSMENTS: ASSESSMENT 4</a:t>
+            </a:r>
+          </a:p>
+        </p:txBody>
+      </p:sp>
     </p:spTree>
     <p:extLst>
       <p:ext uri="{BB962C8B-B14F-4D97-AF65-F5344CB8AC3E}">
@@ -4920,7 +4053,7 @@
 </p:sld>
 </file>
 
-<file path=ppt/slides/slide14.xml><?xml version="1.0" encoding="utf-8"?>
+<file path=ppt/slides/slide12.xml><?xml version="1.0" encoding="utf-8"?>
 <p:sld xmlns:a="http://schemas.openxmlformats.org/drawingml/2006/main" xmlns:r="http://schemas.openxmlformats.org/officeDocument/2006/relationships" xmlns:p="http://schemas.openxmlformats.org/presentationml/2006/main">
   <p:cSld>
     <p:spTree>
@@ -4960,7 +4093,7 @@
           <a:p>
             <a:fld id="{B6F15528-21DE-4FAA-801E-634DDDAF4B2B}" type="slidenum">
               <a:rPr lang="es-ES" smtClean="0"/>
-              <a:t>14</a:t>
+              <a:t>12</a:t>
             </a:fld>
             <a:endParaRPr lang="es-ES"/>
           </a:p>
@@ -4979,7 +4112,7 @@
 </p:sld>
 </file>
 
-<file path=ppt/slides/slide15.xml><?xml version="1.0" encoding="utf-8"?>
+<file path=ppt/slides/slide13.xml><?xml version="1.0" encoding="utf-8"?>
 <p:sld xmlns:a="http://schemas.openxmlformats.org/drawingml/2006/main" xmlns:r="http://schemas.openxmlformats.org/officeDocument/2006/relationships" xmlns:p="http://schemas.openxmlformats.org/presentationml/2006/main">
   <p:cSld>
     <p:spTree>
@@ -5118,7 +4251,7 @@
           <a:p>
             <a:fld id="{B6F15528-21DE-4FAA-801E-634DDDAF4B2B}" type="slidenum">
               <a:rPr lang="es-ES" smtClean="0"/>
-              <a:t>15</a:t>
+              <a:t>13</a:t>
             </a:fld>
             <a:endParaRPr lang="es-ES"/>
           </a:p>
@@ -11069,8 +10202,8 @@
         </p:nvSpPr>
         <p:spPr>
           <a:xfrm>
-            <a:off x="491990" y="3547720"/>
-            <a:ext cx="11208020" cy="2800767"/>
+            <a:off x="398395" y="3429000"/>
+            <a:ext cx="11395210" cy="3091404"/>
           </a:xfrm>
           <a:prstGeom prst="rect">
             <a:avLst/>
@@ -11629,7 +10762,7 @@
             </a:r>
             <a:r>
               <a:rPr lang="es-ES" sz="1600" dirty="0" err="1"/>
-              <a:t>equal</a:t>
+              <a:t>complementary</a:t>
             </a:r>
             <a:r>
               <a:rPr lang="es-ES" sz="1600" dirty="0"/>
@@ -11673,7 +10806,15 @@
             </a:r>
             <a:r>
               <a:rPr lang="es-ES" sz="1600" dirty="0"/>
-              <a:t>. </a:t>
+              <a:t>.  </a:t>
+            </a:r>
+            <a:r>
+              <a:rPr lang="es-ES" sz="1600" dirty="0" err="1"/>
+              <a:t>This</a:t>
+            </a:r>
+            <a:r>
+              <a:rPr lang="es-ES" sz="1600" dirty="0"/>
+              <a:t> is Ka = 1 – Kb. </a:t>
             </a:r>
           </a:p>
           <a:p>
@@ -11682,17 +10823,10 @@
           </a:p>
           <a:p>
             <a:pPr algn="just"/>
-            <a:endParaRPr lang="es-ES" sz="1600" dirty="0"/>
-          </a:p>
-          <a:p>
-            <a:pPr algn="just"/>
-            <a:r>
-              <a:rPr lang="es-ES" sz="1600" dirty="0"/>
-              <a:t>´</a:t>
-            </a:r>
-          </a:p>
-          <a:p>
-            <a:pPr algn="just"/>
+            <a:r>
+              <a:rPr lang="en-US" sz="1600" dirty="0"/>
+              <a:t>To compensate for propagation loss imbalance between the two arms, the input coupler must be made asymmetric so that more power is injected into the arm with higher loss and less into the arm with lower loss. In this way, after propagation, both fields reach the output with equal amplitudes, restoring optimal interference and maximizing the extinction ratio.</a:t>
+            </a:r>
             <a:endParaRPr lang="es-ES" sz="1600" dirty="0"/>
           </a:p>
         </p:txBody>
@@ -11719,7 +10853,7 @@
         </p:blipFill>
         <p:spPr>
           <a:xfrm>
-            <a:off x="382303" y="525752"/>
+            <a:off x="1795463" y="463560"/>
             <a:ext cx="3843338" cy="3084160"/>
           </a:xfrm>
           <a:prstGeom prst="rect">
@@ -11749,7 +10883,7 @@
         </p:blipFill>
         <p:spPr>
           <a:xfrm>
-            <a:off x="4225641" y="600301"/>
+            <a:off x="5943600" y="538354"/>
             <a:ext cx="3973622" cy="2935062"/>
           </a:xfrm>
           <a:prstGeom prst="rect">
@@ -11757,45 +10891,6 @@
           </a:prstGeom>
         </p:spPr>
       </p:pic>
-      <p:sp>
-        <p:nvSpPr>
-          <p:cNvPr id="10" name="CuadroTexto 9">
-            <a:extLst>
-              <a:ext uri="{FF2B5EF4-FFF2-40B4-BE49-F238E27FC236}">
-                <a16:creationId xmlns:a16="http://schemas.microsoft.com/office/drawing/2014/main" id="{3E53BAA1-58EE-485C-9535-965D889CB3B0}"/>
-              </a:ext>
-            </a:extLst>
-          </p:cNvPr>
-          <p:cNvSpPr txBox="1"/>
-          <p:nvPr/>
-        </p:nvSpPr>
-        <p:spPr>
-          <a:xfrm>
-            <a:off x="8199263" y="1600200"/>
-            <a:ext cx="3002137" cy="646331"/>
-          </a:xfrm>
-          <a:prstGeom prst="rect">
-            <a:avLst/>
-          </a:prstGeom>
-          <a:noFill/>
-        </p:spPr>
-        <p:txBody>
-          <a:bodyPr wrap="square" rtlCol="0">
-            <a:spAutoFit/>
-          </a:bodyPr>
-          <a:lstStyle/>
-          <a:p>
-            <a:r>
-              <a:rPr lang="es-ES" dirty="0">
-                <a:solidFill>
-                  <a:srgbClr val="FF0000"/>
-                </a:solidFill>
-              </a:rPr>
-              <a:t>FALTA LA ÚLTIMS PREGUNTA !!!!!</a:t>
-            </a:r>
-          </a:p>
-        </p:txBody>
-      </p:sp>
     </p:spTree>
     <p:extLst>
       <p:ext uri="{BB962C8B-B14F-4D97-AF65-F5344CB8AC3E}">
@@ -11810,304 +10905,6 @@
 </file>
 
 <file path=ppt/slides/slide8.xml><?xml version="1.0" encoding="utf-8"?>
-<p:sld xmlns:a="http://schemas.openxmlformats.org/drawingml/2006/main" xmlns:r="http://schemas.openxmlformats.org/officeDocument/2006/relationships" xmlns:p="http://schemas.openxmlformats.org/presentationml/2006/main">
-  <p:cSld>
-    <p:spTree>
-      <p:nvGrpSpPr>
-        <p:cNvPr id="1" name="">
-          <a:extLst>
-            <a:ext uri="{FF2B5EF4-FFF2-40B4-BE49-F238E27FC236}">
-              <a16:creationId xmlns:a16="http://schemas.microsoft.com/office/drawing/2014/main" id="{977991F9-0A8D-EA56-149F-ABF4C9FBD7C6}"/>
-            </a:ext>
-          </a:extLst>
-        </p:cNvPr>
-        <p:cNvGrpSpPr/>
-        <p:nvPr/>
-      </p:nvGrpSpPr>
-      <p:grpSpPr>
-        <a:xfrm>
-          <a:off x="0" y="0"/>
-          <a:ext cx="0" cy="0"/>
-          <a:chOff x="0" y="0"/>
-          <a:chExt cx="0" cy="0"/>
-        </a:xfrm>
-      </p:grpSpPr>
-      <p:pic>
-        <p:nvPicPr>
-          <p:cNvPr id="83" name="Gráfico 82">
-            <a:extLst>
-              <a:ext uri="{FF2B5EF4-FFF2-40B4-BE49-F238E27FC236}">
-                <a16:creationId xmlns:a16="http://schemas.microsoft.com/office/drawing/2014/main" id="{1B844145-16A0-AB26-42D0-ED845AA0F7A0}"/>
-              </a:ext>
-            </a:extLst>
-          </p:cNvPr>
-          <p:cNvPicPr>
-            <a:picLocks noChangeAspect="1"/>
-          </p:cNvPicPr>
-          <p:nvPr/>
-        </p:nvPicPr>
-        <p:blipFill>
-          <a:blip r:embed="rId3">
-            <a:extLst>
-              <a:ext uri="{96DAC541-7B7A-43D3-8B79-37D633B846F1}">
-                <asvg:svgBlip xmlns:asvg="http://schemas.microsoft.com/office/drawing/2016/SVG/main" r:embed="rId4"/>
-              </a:ext>
-            </a:extLst>
-          </a:blip>
-          <a:stretch>
-            <a:fillRect/>
-          </a:stretch>
-        </p:blipFill>
-        <p:spPr>
-          <a:xfrm>
-            <a:off x="5045006" y="6356057"/>
-            <a:ext cx="6409575" cy="363174"/>
-          </a:xfrm>
-          <a:prstGeom prst="rect">
-            <a:avLst/>
-          </a:prstGeom>
-        </p:spPr>
-      </p:pic>
-      <p:sp>
-        <p:nvSpPr>
-          <p:cNvPr id="84" name="Marcador de número de diapositiva 83">
-            <a:extLst>
-              <a:ext uri="{FF2B5EF4-FFF2-40B4-BE49-F238E27FC236}">
-                <a16:creationId xmlns:a16="http://schemas.microsoft.com/office/drawing/2014/main" id="{26A449DB-5ED0-510B-C0EA-6986DCBC89BE}"/>
-              </a:ext>
-            </a:extLst>
-          </p:cNvPr>
-          <p:cNvSpPr>
-            <a:spLocks noGrp="1"/>
-          </p:cNvSpPr>
-          <p:nvPr>
-            <p:ph type="sldNum" sz="quarter" idx="7"/>
-          </p:nvPr>
-        </p:nvSpPr>
-        <p:spPr>
-          <a:xfrm>
-            <a:off x="9311640" y="6377940"/>
-            <a:ext cx="2804160" cy="276999"/>
-          </a:xfrm>
-        </p:spPr>
-        <p:txBody>
-          <a:bodyPr/>
-          <a:lstStyle/>
-          <a:p>
-            <a:fld id="{B6F15528-21DE-4FAA-801E-634DDDAF4B2B}" type="slidenum">
-              <a:rPr lang="es-ES" u="sng" smtClean="0"/>
-              <a:t>8</a:t>
-            </a:fld>
-            <a:endParaRPr lang="es-ES" u="sng" dirty="0"/>
-          </a:p>
-        </p:txBody>
-      </p:sp>
-      <p:sp>
-        <p:nvSpPr>
-          <p:cNvPr id="4" name="Marcador de texto 2">
-            <a:extLst>
-              <a:ext uri="{FF2B5EF4-FFF2-40B4-BE49-F238E27FC236}">
-                <a16:creationId xmlns:a16="http://schemas.microsoft.com/office/drawing/2014/main" id="{4D519C49-6C56-2617-D5D9-34E3A440F2A8}"/>
-              </a:ext>
-            </a:extLst>
-          </p:cNvPr>
-          <p:cNvSpPr txBox="1">
-            <a:spLocks/>
-          </p:cNvSpPr>
-          <p:nvPr/>
-        </p:nvSpPr>
-        <p:spPr>
-          <a:xfrm>
-            <a:off x="608012" y="1295400"/>
-            <a:ext cx="11048999" cy="4958137"/>
-          </a:xfrm>
-          <a:prstGeom prst="rect">
-            <a:avLst/>
-          </a:prstGeom>
-        </p:spPr>
-        <p:txBody>
-          <a:bodyPr>
-            <a:normAutofit/>
-          </a:bodyPr>
-          <a:lstStyle>
-            <a:lvl1pPr marL="0">
-              <a:defRPr>
-                <a:latin typeface="+mn-lt"/>
-                <a:ea typeface="+mn-ea"/>
-                <a:cs typeface="+mn-cs"/>
-              </a:defRPr>
-            </a:lvl1pPr>
-            <a:lvl2pPr marL="457200">
-              <a:defRPr>
-                <a:latin typeface="+mn-lt"/>
-                <a:ea typeface="+mn-ea"/>
-                <a:cs typeface="+mn-cs"/>
-              </a:defRPr>
-            </a:lvl2pPr>
-            <a:lvl3pPr marL="914400">
-              <a:defRPr>
-                <a:latin typeface="+mn-lt"/>
-                <a:ea typeface="+mn-ea"/>
-                <a:cs typeface="+mn-cs"/>
-              </a:defRPr>
-            </a:lvl3pPr>
-            <a:lvl4pPr marL="1371600">
-              <a:defRPr>
-                <a:latin typeface="+mn-lt"/>
-                <a:ea typeface="+mn-ea"/>
-                <a:cs typeface="+mn-cs"/>
-              </a:defRPr>
-            </a:lvl4pPr>
-            <a:lvl5pPr marL="1828800">
-              <a:defRPr>
-                <a:latin typeface="+mn-lt"/>
-                <a:ea typeface="+mn-ea"/>
-                <a:cs typeface="+mn-cs"/>
-              </a:defRPr>
-            </a:lvl5pPr>
-            <a:lvl6pPr marL="2286000">
-              <a:defRPr>
-                <a:latin typeface="+mn-lt"/>
-                <a:ea typeface="+mn-ea"/>
-                <a:cs typeface="+mn-cs"/>
-              </a:defRPr>
-            </a:lvl6pPr>
-            <a:lvl7pPr marL="2743200">
-              <a:defRPr>
-                <a:latin typeface="+mn-lt"/>
-                <a:ea typeface="+mn-ea"/>
-                <a:cs typeface="+mn-cs"/>
-              </a:defRPr>
-            </a:lvl7pPr>
-            <a:lvl8pPr marL="3200400">
-              <a:defRPr>
-                <a:latin typeface="+mn-lt"/>
-                <a:ea typeface="+mn-ea"/>
-                <a:cs typeface="+mn-cs"/>
-              </a:defRPr>
-            </a:lvl8pPr>
-            <a:lvl9pPr marL="3657600">
-              <a:defRPr>
-                <a:latin typeface="+mn-lt"/>
-                <a:ea typeface="+mn-ea"/>
-                <a:cs typeface="+mn-cs"/>
-              </a:defRPr>
-            </a:lvl9pPr>
-          </a:lstStyle>
-          <a:p>
-            <a:r>
-              <a:rPr lang="en-US" sz="2000" dirty="0"/>
-              <a:t> </a:t>
-            </a:r>
-          </a:p>
-          <a:p>
-            <a:pPr algn="just"/>
-            <a:endParaRPr lang="en-US" sz="2000" dirty="0"/>
-          </a:p>
-          <a:p>
-            <a:pPr algn="just"/>
-            <a:endParaRPr lang="en-US" sz="2000" b="1" i="1" dirty="0"/>
-          </a:p>
-          <a:p>
-            <a:pPr algn="just"/>
-            <a:endParaRPr lang="en-US" sz="2000" kern="0" dirty="0">
-              <a:solidFill>
-                <a:sysClr val="windowText" lastClr="000000"/>
-              </a:solidFill>
-            </a:endParaRPr>
-          </a:p>
-          <a:p>
-            <a:endParaRPr lang="en-US" sz="2000" kern="0" dirty="0">
-              <a:solidFill>
-                <a:sysClr val="windowText" lastClr="000000"/>
-              </a:solidFill>
-            </a:endParaRPr>
-          </a:p>
-        </p:txBody>
-      </p:sp>
-      <p:sp>
-        <p:nvSpPr>
-          <p:cNvPr id="5" name="Marcador de pie de página 2">
-            <a:extLst>
-              <a:ext uri="{FF2B5EF4-FFF2-40B4-BE49-F238E27FC236}">
-                <a16:creationId xmlns:a16="http://schemas.microsoft.com/office/drawing/2014/main" id="{9D42CE27-BDDD-AAE2-C559-4ED67D8C843B}"/>
-              </a:ext>
-            </a:extLst>
-          </p:cNvPr>
-          <p:cNvSpPr>
-            <a:spLocks noGrp="1"/>
-          </p:cNvSpPr>
-          <p:nvPr>
-            <p:ph type="ftr" sz="quarter" idx="5"/>
-          </p:nvPr>
-        </p:nvSpPr>
-        <p:spPr>
-          <a:xfrm>
-            <a:off x="609600" y="6457057"/>
-            <a:ext cx="2743200" cy="184666"/>
-          </a:xfrm>
-        </p:spPr>
-        <p:txBody>
-          <a:bodyPr/>
-          <a:lstStyle/>
-          <a:p>
-            <a:pPr marL="12700">
-              <a:spcBef>
-                <a:spcPts val="15"/>
-              </a:spcBef>
-            </a:pPr>
-            <a:r>
-              <a:rPr lang="es-ES" spc="-5"/>
-              <a:t>LAB 3. INTERFEROMETERS I</a:t>
-            </a:r>
-            <a:endParaRPr lang="es-ES" spc="-5" dirty="0"/>
-          </a:p>
-        </p:txBody>
-      </p:sp>
-      <p:pic>
-        <p:nvPicPr>
-          <p:cNvPr id="13" name="Imagen 12" descr="Gráfico&#10;&#10;El contenido generado por IA puede ser incorrecto.">
-            <a:extLst>
-              <a:ext uri="{FF2B5EF4-FFF2-40B4-BE49-F238E27FC236}">
-                <a16:creationId xmlns:a16="http://schemas.microsoft.com/office/drawing/2014/main" id="{F9BEA475-2622-9D82-08DC-02B387AD3A43}"/>
-              </a:ext>
-            </a:extLst>
-          </p:cNvPr>
-          <p:cNvPicPr>
-            <a:picLocks noChangeAspect="1"/>
-          </p:cNvPicPr>
-          <p:nvPr/>
-        </p:nvPicPr>
-        <p:blipFill>
-          <a:blip r:embed="rId5"/>
-          <a:stretch>
-            <a:fillRect/>
-          </a:stretch>
-        </p:blipFill>
-        <p:spPr>
-          <a:xfrm>
-            <a:off x="228600" y="3471957"/>
-            <a:ext cx="3843338" cy="3084160"/>
-          </a:xfrm>
-          <a:prstGeom prst="rect">
-            <a:avLst/>
-          </a:prstGeom>
-        </p:spPr>
-      </p:pic>
-    </p:spTree>
-    <p:extLst>
-      <p:ext uri="{BB962C8B-B14F-4D97-AF65-F5344CB8AC3E}">
-        <p14:creationId xmlns:p14="http://schemas.microsoft.com/office/powerpoint/2010/main" val="3412787152"/>
-      </p:ext>
-    </p:extLst>
-  </p:cSld>
-  <p:clrMapOvr>
-    <a:masterClrMapping/>
-  </p:clrMapOvr>
-</p:sld>
-</file>
-
-<file path=ppt/slides/slide9.xml><?xml version="1.0" encoding="utf-8"?>
 <p:sld xmlns:a="http://schemas.openxmlformats.org/drawingml/2006/main" xmlns:r="http://schemas.openxmlformats.org/officeDocument/2006/relationships" xmlns:p="http://schemas.openxmlformats.org/presentationml/2006/main">
   <p:cSld>
     <p:spTree>
@@ -12130,8 +10927,8 @@
           <a:chExt cx="0" cy="0"/>
         </a:xfrm>
       </p:grpSpPr>
-      <mc:AlternateContent xmlns:mc="http://schemas.openxmlformats.org/markup-compatibility/2006" xmlns:a14="http://schemas.microsoft.com/office/drawing/2010/main">
-        <mc:Choice Requires="a14">
+      <mc:AlternateContent xmlns:mc="http://schemas.openxmlformats.org/markup-compatibility/2006">
+        <mc:Choice xmlns:a14="http://schemas.microsoft.com/office/drawing/2010/main" Requires="a14">
           <p:sp>
             <p:nvSpPr>
               <p:cNvPr id="16" name="object 16">
@@ -12150,7 +10947,7 @@
             </p:nvSpPr>
             <p:spPr>
               <a:xfrm>
-                <a:off x="685800" y="408883"/>
+                <a:off x="484496" y="207533"/>
                 <a:ext cx="10994410" cy="782265"/>
               </a:xfrm>
               <a:prstGeom prst="rect">
@@ -12216,7 +11013,7 @@
             </p:txBody>
           </p:sp>
         </mc:Choice>
-        <mc:Fallback xmlns="">
+        <mc:Fallback>
           <p:sp>
             <p:nvSpPr>
               <p:cNvPr id="16" name="object 16">
@@ -12235,7 +11032,7 @@
             </p:nvSpPr>
             <p:spPr>
               <a:xfrm>
-                <a:off x="685800" y="408883"/>
+                <a:off x="484496" y="207533"/>
                 <a:ext cx="10994410" cy="782265"/>
               </a:xfrm>
               <a:prstGeom prst="rect">
@@ -12244,7 +11041,7 @@
               <a:blipFill>
                 <a:blip r:embed="rId3"/>
                 <a:stretch>
-                  <a:fillRect l="-1608" t="-10156"/>
+                  <a:fillRect l="-1552" t="-10156"/>
                 </a:stretch>
               </a:blipFill>
             </p:spPr>
@@ -12322,14 +11119,14 @@
           <a:p>
             <a:fld id="{B6F15528-21DE-4FAA-801E-634DDDAF4B2B}" type="slidenum">
               <a:rPr lang="es-ES" smtClean="0"/>
-              <a:t>9</a:t>
+              <a:t>8</a:t>
             </a:fld>
             <a:endParaRPr lang="es-ES"/>
           </a:p>
         </p:txBody>
       </p:sp>
-      <mc:AlternateContent xmlns:mc="http://schemas.openxmlformats.org/markup-compatibility/2006" xmlns:a14="http://schemas.microsoft.com/office/drawing/2010/main">
-        <mc:Choice Requires="a14">
+      <mc:AlternateContent xmlns:mc="http://schemas.openxmlformats.org/markup-compatibility/2006">
+        <mc:Choice xmlns:a14="http://schemas.microsoft.com/office/drawing/2010/main" Requires="a14">
           <p:sp>
             <p:nvSpPr>
               <p:cNvPr id="4" name="Marcador de texto 2">
@@ -12346,7 +11143,7 @@
             </p:nvSpPr>
             <p:spPr>
               <a:xfrm>
-                <a:off x="608012" y="1295400"/>
+                <a:off x="457201" y="644083"/>
                 <a:ext cx="11048999" cy="4958137"/>
               </a:xfrm>
               <a:prstGeom prst="rect">
@@ -12424,7 +11221,13 @@
               </a:lstStyle>
               <a:p>
                 <a:r>
-                  <a:rPr lang="en-US" sz="2000" dirty="0"/>
+                  <a:rPr lang="en-US" sz="2000" dirty="0">
+                    <a:solidFill>
+                      <a:schemeClr val="accent1">
+                        <a:lumMod val="75000"/>
+                      </a:schemeClr>
+                    </a:solidFill>
+                  </a:rPr>
                   <a:t>Considering the n_{eff} values for the SOI cross-section, what would be the path difference (</a:t>
                 </a:r>
                 <a14:m>
@@ -12434,12 +11237,22 @@
                         <m:sty m:val="p"/>
                       </m:rPr>
                       <a:rPr lang="es-ES" sz="2000" b="0" i="0" smtClean="0">
+                        <a:solidFill>
+                          <a:schemeClr val="accent1">
+                            <a:lumMod val="75000"/>
+                          </a:schemeClr>
+                        </a:solidFill>
                         <a:latin typeface="Cambria Math" panose="02040503050406030204" pitchFamily="18" charset="0"/>
                       </a:rPr>
                       <m:t>ΔL</m:t>
                     </m:r>
                     <m:r>
                       <a:rPr lang="es-ES" sz="2000" b="0" i="1" smtClean="0">
+                        <a:solidFill>
+                          <a:schemeClr val="accent1">
+                            <a:lumMod val="75000"/>
+                          </a:schemeClr>
+                        </a:solidFill>
                         <a:latin typeface="Cambria Math" panose="02040503050406030204" pitchFamily="18" charset="0"/>
                       </a:rPr>
                       <m:t>= </m:t>
@@ -12448,6 +11261,11 @@
                       <m:sSubPr>
                         <m:ctrlPr>
                           <a:rPr lang="es-ES" sz="2000" i="1" smtClean="0">
+                            <a:solidFill>
+                              <a:schemeClr val="accent1">
+                                <a:lumMod val="75000"/>
+                              </a:schemeClr>
+                            </a:solidFill>
                             <a:latin typeface="Cambria Math" panose="02040503050406030204" pitchFamily="18" charset="0"/>
                           </a:rPr>
                         </m:ctrlPr>
@@ -12455,6 +11273,11 @@
                       <m:e>
                         <m:r>
                           <a:rPr lang="es-ES" sz="2000" b="0" i="1" smtClean="0">
+                            <a:solidFill>
+                              <a:schemeClr val="accent1">
+                                <a:lumMod val="75000"/>
+                              </a:schemeClr>
+                            </a:solidFill>
                             <a:latin typeface="Cambria Math" panose="02040503050406030204" pitchFamily="18" charset="0"/>
                           </a:rPr>
                           <m:t>𝐿</m:t>
@@ -12463,6 +11286,11 @@
                       <m:sub>
                         <m:r>
                           <a:rPr lang="es-ES" sz="2000" b="0" i="1" smtClean="0">
+                            <a:solidFill>
+                              <a:schemeClr val="accent1">
+                                <a:lumMod val="75000"/>
+                              </a:schemeClr>
+                            </a:solidFill>
                             <a:latin typeface="Cambria Math" panose="02040503050406030204" pitchFamily="18" charset="0"/>
                           </a:rPr>
                           <m:t>𝑢</m:t>
@@ -12471,6 +11299,11 @@
                     </m:sSub>
                     <m:r>
                       <a:rPr lang="es-ES" sz="2000" b="0" i="1" smtClean="0">
+                        <a:solidFill>
+                          <a:schemeClr val="accent1">
+                            <a:lumMod val="75000"/>
+                          </a:schemeClr>
+                        </a:solidFill>
                         <a:latin typeface="Cambria Math" panose="02040503050406030204" pitchFamily="18" charset="0"/>
                       </a:rPr>
                       <m:t> −</m:t>
@@ -12479,6 +11312,11 @@
                       <m:sSubPr>
                         <m:ctrlPr>
                           <a:rPr lang="es-ES" sz="2000" i="1">
+                            <a:solidFill>
+                              <a:schemeClr val="accent1">
+                                <a:lumMod val="75000"/>
+                              </a:schemeClr>
+                            </a:solidFill>
                             <a:latin typeface="Cambria Math" panose="02040503050406030204" pitchFamily="18" charset="0"/>
                           </a:rPr>
                         </m:ctrlPr>
@@ -12486,6 +11324,11 @@
                       <m:e>
                         <m:r>
                           <a:rPr lang="es-ES" sz="2000" b="0" i="1">
+                            <a:solidFill>
+                              <a:schemeClr val="accent1">
+                                <a:lumMod val="75000"/>
+                              </a:schemeClr>
+                            </a:solidFill>
                             <a:latin typeface="Cambria Math" panose="02040503050406030204" pitchFamily="18" charset="0"/>
                           </a:rPr>
                           <m:t>𝐿</m:t>
@@ -12494,6 +11337,11 @@
                       <m:sub>
                         <m:r>
                           <a:rPr lang="es-ES" sz="2000" b="0" i="1" smtClean="0">
+                            <a:solidFill>
+                              <a:schemeClr val="accent1">
+                                <a:lumMod val="75000"/>
+                              </a:schemeClr>
+                            </a:solidFill>
                             <a:latin typeface="Cambria Math" panose="02040503050406030204" pitchFamily="18" charset="0"/>
                           </a:rPr>
                           <m:t>𝑑</m:t>
@@ -12503,16 +11351,25 @@
                   </m:oMath>
                 </a14:m>
                 <a:r>
-                  <a:rPr lang="en-US" sz="2000" dirty="0"/>
+                  <a:rPr lang="en-US" sz="2000" dirty="0">
+                    <a:solidFill>
+                      <a:schemeClr val="accent1">
+                        <a:lumMod val="75000"/>
+                      </a:schemeClr>
+                    </a:solidFill>
+                  </a:rPr>
                   <a:t>) needed to obtain a Free Spectral Range of 40 nm? Introduce the obtained value in the model to check the MZI response. </a:t>
                 </a:r>
               </a:p>
               <a:p>
-                <a:endParaRPr lang="en-US" sz="2000" dirty="0"/>
-              </a:p>
-              <a:p>
                 <a:r>
-                  <a:rPr lang="en-US" sz="2000" dirty="0"/>
+                  <a:rPr lang="en-US" sz="2000" dirty="0">
+                    <a:solidFill>
+                      <a:schemeClr val="accent1">
+                        <a:lumMod val="75000"/>
+                      </a:schemeClr>
+                    </a:solidFill>
+                  </a:rPr>
                   <a:t>Hint: We assume 1550 nm as the central design wavelength (</a:t>
                 </a:r>
                 <a14:m>
@@ -12521,6 +11378,11 @@
                       <m:sSubPr>
                         <m:ctrlPr>
                           <a:rPr lang="es-ES" sz="2000" i="1" smtClean="0">
+                            <a:solidFill>
+                              <a:schemeClr val="accent1">
+                                <a:lumMod val="75000"/>
+                              </a:schemeClr>
+                            </a:solidFill>
                             <a:latin typeface="Cambria Math" panose="02040503050406030204" pitchFamily="18" charset="0"/>
                           </a:rPr>
                         </m:ctrlPr>
@@ -12528,6 +11390,11 @@
                       <m:e>
                         <m:r>
                           <a:rPr lang="es-ES" sz="2000" i="1">
+                            <a:solidFill>
+                              <a:schemeClr val="accent1">
+                                <a:lumMod val="75000"/>
+                              </a:schemeClr>
+                            </a:solidFill>
                             <a:latin typeface="Cambria Math" panose="02040503050406030204" pitchFamily="18" charset="0"/>
                           </a:rPr>
                           <m:t>𝜆</m:t>
@@ -12536,6 +11403,11 @@
                       <m:sub>
                         <m:r>
                           <a:rPr lang="es-ES" sz="2000" b="0" i="1" smtClean="0">
+                            <a:solidFill>
+                              <a:schemeClr val="accent1">
+                                <a:lumMod val="75000"/>
+                              </a:schemeClr>
+                            </a:solidFill>
                             <a:latin typeface="Cambria Math" panose="02040503050406030204" pitchFamily="18" charset="0"/>
                           </a:rPr>
                           <m:t>0</m:t>
@@ -12544,6 +11416,11 @@
                     </m:sSub>
                     <m:r>
                       <a:rPr lang="es-ES" sz="2000" b="0" i="1" smtClean="0">
+                        <a:solidFill>
+                          <a:schemeClr val="accent1">
+                            <a:lumMod val="75000"/>
+                          </a:schemeClr>
+                        </a:solidFill>
                         <a:latin typeface="Cambria Math" panose="02040503050406030204" pitchFamily="18" charset="0"/>
                       </a:rPr>
                       <m:t>= </m:t>
@@ -12551,7 +11428,13 @@
                   </m:oMath>
                 </a14:m>
                 <a:r>
-                  <a:rPr lang="en-US" sz="2000" dirty="0"/>
+                  <a:rPr lang="en-US" sz="2000" dirty="0">
+                    <a:solidFill>
+                      <a:schemeClr val="accent1">
+                        <a:lumMod val="75000"/>
+                      </a:schemeClr>
+                    </a:solidFill>
+                  </a:rPr>
                   <a:t>1550 nm).</a:t>
                 </a:r>
               </a:p>
@@ -12584,7 +11467,7 @@
             </p:txBody>
           </p:sp>
         </mc:Choice>
-        <mc:Fallback xmlns="">
+        <mc:Fallback>
           <p:sp>
             <p:nvSpPr>
               <p:cNvPr id="4" name="Marcador de texto 2">
@@ -12601,7 +11484,7 @@
             </p:nvSpPr>
             <p:spPr>
               <a:xfrm>
-                <a:off x="608012" y="1295400"/>
+                <a:off x="457201" y="644083"/>
                 <a:ext cx="11048999" cy="4958137"/>
               </a:xfrm>
               <a:prstGeom prst="rect">
@@ -12610,7 +11493,7 @@
               <a:blipFill>
                 <a:blip r:embed="rId6"/>
                 <a:stretch>
-                  <a:fillRect l="-607" t="-738"/>
+                  <a:fillRect l="-552" t="-738"/>
                 </a:stretch>
               </a:blipFill>
             </p:spPr>
@@ -12629,96 +11512,6 @@
           </p:sp>
         </mc:Fallback>
       </mc:AlternateContent>
-      <p:sp>
-        <p:nvSpPr>
-          <p:cNvPr id="2" name="CuadroTexto 1">
-            <a:extLst>
-              <a:ext uri="{FF2B5EF4-FFF2-40B4-BE49-F238E27FC236}">
-                <a16:creationId xmlns:a16="http://schemas.microsoft.com/office/drawing/2014/main" id="{CFDBBA6B-3646-055F-7A9C-EE01830137BE}"/>
-              </a:ext>
-            </a:extLst>
-          </p:cNvPr>
-          <p:cNvSpPr txBox="1"/>
-          <p:nvPr/>
-        </p:nvSpPr>
-        <p:spPr>
-          <a:xfrm>
-            <a:off x="609441" y="4860334"/>
-            <a:ext cx="11199971" cy="1384995"/>
-          </a:xfrm>
-          <a:prstGeom prst="rect">
-            <a:avLst/>
-          </a:prstGeom>
-          <a:solidFill>
-            <a:schemeClr val="bg1">
-              <a:lumMod val="95000"/>
-            </a:schemeClr>
-          </a:solidFill>
-          <a:ln w="28575">
-            <a:solidFill>
-              <a:srgbClr val="E0700D"/>
-            </a:solidFill>
-          </a:ln>
-        </p:spPr>
-        <p:txBody>
-          <a:bodyPr wrap="square" rtlCol="0">
-            <a:spAutoFit/>
-          </a:bodyPr>
-          <a:lstStyle/>
-          <a:p>
-            <a:pPr algn="just"/>
-            <a:r>
-              <a:rPr lang="en-US" sz="1200" dirty="0">
-                <a:latin typeface="Arial" panose="020B0604020202020204" pitchFamily="34" charset="0"/>
-                <a:cs typeface="Arial" panose="020B0604020202020204" pitchFamily="34" charset="0"/>
-              </a:rPr>
-              <a:t>Document all your results (copy here the code employed to obtain the corresponding value)</a:t>
-            </a:r>
-          </a:p>
-          <a:p>
-            <a:pPr algn="just"/>
-            <a:endParaRPr lang="en-US" sz="1200" dirty="0">
-              <a:latin typeface="Arial" panose="020B0604020202020204" pitchFamily="34" charset="0"/>
-              <a:cs typeface="Arial" panose="020B0604020202020204" pitchFamily="34" charset="0"/>
-            </a:endParaRPr>
-          </a:p>
-          <a:p>
-            <a:pPr algn="just"/>
-            <a:endParaRPr lang="en-US" sz="1200" dirty="0">
-              <a:latin typeface="Arial" panose="020B0604020202020204" pitchFamily="34" charset="0"/>
-              <a:cs typeface="Arial" panose="020B0604020202020204" pitchFamily="34" charset="0"/>
-            </a:endParaRPr>
-          </a:p>
-          <a:p>
-            <a:pPr algn="just"/>
-            <a:endParaRPr lang="en-US" sz="1200" dirty="0">
-              <a:latin typeface="Arial" panose="020B0604020202020204" pitchFamily="34" charset="0"/>
-              <a:cs typeface="Arial" panose="020B0604020202020204" pitchFamily="34" charset="0"/>
-            </a:endParaRPr>
-          </a:p>
-          <a:p>
-            <a:pPr algn="just"/>
-            <a:endParaRPr lang="en-US" sz="1200" dirty="0">
-              <a:latin typeface="Arial" panose="020B0604020202020204" pitchFamily="34" charset="0"/>
-              <a:cs typeface="Arial" panose="020B0604020202020204" pitchFamily="34" charset="0"/>
-            </a:endParaRPr>
-          </a:p>
-          <a:p>
-            <a:pPr algn="just"/>
-            <a:endParaRPr lang="en-US" sz="1200" dirty="0">
-              <a:latin typeface="Arial" panose="020B0604020202020204" pitchFamily="34" charset="0"/>
-              <a:cs typeface="Arial" panose="020B0604020202020204" pitchFamily="34" charset="0"/>
-            </a:endParaRPr>
-          </a:p>
-          <a:p>
-            <a:pPr algn="just"/>
-            <a:endParaRPr lang="en-US" sz="1200" dirty="0">
-              <a:latin typeface="Arial" panose="020B0604020202020204" pitchFamily="34" charset="0"/>
-              <a:cs typeface="Arial" panose="020B0604020202020204" pitchFamily="34" charset="0"/>
-            </a:endParaRPr>
-          </a:p>
-        </p:txBody>
-      </p:sp>
       <p:sp>
         <p:nvSpPr>
           <p:cNvPr id="5" name="Marcador de pie de página 2">
@@ -12758,10 +11551,961 @@
           </a:p>
         </p:txBody>
       </p:sp>
+      <p:pic>
+        <p:nvPicPr>
+          <p:cNvPr id="6" name="Imagen 5">
+            <a:extLst>
+              <a:ext uri="{FF2B5EF4-FFF2-40B4-BE49-F238E27FC236}">
+                <a16:creationId xmlns:a16="http://schemas.microsoft.com/office/drawing/2014/main" id="{CBD9C45D-24A5-E9C6-B8F9-4A0CF60E3749}"/>
+              </a:ext>
+            </a:extLst>
+          </p:cNvPr>
+          <p:cNvPicPr>
+            <a:picLocks noChangeAspect="1"/>
+          </p:cNvPicPr>
+          <p:nvPr/>
+        </p:nvPicPr>
+        <p:blipFill>
+          <a:blip r:embed="rId7"/>
+          <a:stretch>
+            <a:fillRect/>
+          </a:stretch>
+        </p:blipFill>
+        <p:spPr>
+          <a:xfrm>
+            <a:off x="457201" y="2126989"/>
+            <a:ext cx="5074261" cy="4071938"/>
+          </a:xfrm>
+          <a:prstGeom prst="rect">
+            <a:avLst/>
+          </a:prstGeom>
+        </p:spPr>
+      </p:pic>
+      <mc:AlternateContent xmlns:mc="http://schemas.openxmlformats.org/markup-compatibility/2006">
+        <mc:Choice xmlns:a14="http://schemas.microsoft.com/office/drawing/2010/main" Requires="a14">
+          <p:sp>
+            <p:nvSpPr>
+              <p:cNvPr id="7" name="CuadroTexto 6">
+                <a:extLst>
+                  <a:ext uri="{FF2B5EF4-FFF2-40B4-BE49-F238E27FC236}">
+                    <a16:creationId xmlns:a16="http://schemas.microsoft.com/office/drawing/2014/main" id="{D706742F-95A9-386F-79C4-3559B8E7D64C}"/>
+                  </a:ext>
+                </a:extLst>
+              </p:cNvPr>
+              <p:cNvSpPr txBox="1"/>
+              <p:nvPr/>
+            </p:nvSpPr>
+            <p:spPr>
+              <a:xfrm>
+                <a:off x="5776209" y="2274878"/>
+                <a:ext cx="5943600" cy="3416320"/>
+              </a:xfrm>
+              <a:prstGeom prst="rect">
+                <a:avLst/>
+              </a:prstGeom>
+              <a:noFill/>
+            </p:spPr>
+            <p:txBody>
+              <a:bodyPr wrap="square" rtlCol="0">
+                <a:spAutoFit/>
+              </a:bodyPr>
+              <a:lstStyle/>
+              <a:p>
+                <a:pPr algn="just"/>
+                <a:r>
+                  <a:rPr lang="es-ES" dirty="0"/>
+                  <a:t>The </a:t>
+                </a:r>
+                <a:r>
+                  <a:rPr lang="es-ES" dirty="0" err="1"/>
+                  <a:t>required</a:t>
+                </a:r>
+                <a:r>
+                  <a:rPr lang="es-ES" dirty="0"/>
+                  <a:t> </a:t>
+                </a:r>
+                <a:r>
+                  <a:rPr lang="es-ES" dirty="0" err="1"/>
+                  <a:t>path</a:t>
+                </a:r>
+                <a:r>
+                  <a:rPr lang="es-ES" dirty="0"/>
+                  <a:t> </a:t>
+                </a:r>
+                <a:r>
+                  <a:rPr lang="en-US" dirty="0"/>
+                  <a:t>difference to obtain a Free Spectral Range of 40 nm is obtained from the theoretical MZI expression using the group index (computed with </a:t>
+                </a:r>
+                <a:r>
+                  <a:rPr lang="en-US" dirty="0" err="1"/>
+                  <a:t>np.gradient</a:t>
+                </a:r>
+                <a:r>
+                  <a:rPr lang="en-US" dirty="0"/>
+                  <a:t>), resulting in </a:t>
+                </a:r>
+                <a14:m>
+                  <m:oMath xmlns:m="http://schemas.openxmlformats.org/officeDocument/2006/math">
+                    <m:r>
+                      <m:rPr>
+                        <m:sty m:val="p"/>
+                      </m:rPr>
+                      <a:rPr lang="es-ES" smtClean="0">
+                        <a:solidFill>
+                          <a:schemeClr val="tx1"/>
+                        </a:solidFill>
+                        <a:latin typeface="Cambria Math" panose="02040503050406030204" pitchFamily="18" charset="0"/>
+                      </a:rPr>
+                      <m:t>ΔL</m:t>
+                    </m:r>
+                    <m:r>
+                      <a:rPr lang="es-ES" b="0" i="0" smtClean="0">
+                        <a:solidFill>
+                          <a:schemeClr val="tx1"/>
+                        </a:solidFill>
+                        <a:latin typeface="Cambria Math" panose="02040503050406030204" pitchFamily="18" charset="0"/>
+                      </a:rPr>
+                      <m:t>=</m:t>
+                    </m:r>
+                    <m:r>
+                      <a:rPr lang="es-ES" b="0" i="0" smtClean="0">
+                        <a:solidFill>
+                          <a:schemeClr val="tx1"/>
+                        </a:solidFill>
+                        <a:latin typeface="Cambria Math" panose="02040503050406030204" pitchFamily="18" charset="0"/>
+                      </a:rPr>
+                      <m:t>13</m:t>
+                    </m:r>
+                    <m:r>
+                      <a:rPr lang="es-ES" b="0" i="0" smtClean="0">
+                        <a:solidFill>
+                          <a:schemeClr val="tx1"/>
+                        </a:solidFill>
+                        <a:latin typeface="Cambria Math" panose="02040503050406030204" pitchFamily="18" charset="0"/>
+                      </a:rPr>
+                      <m:t>.</m:t>
+                    </m:r>
+                    <m:r>
+                      <a:rPr lang="es-ES" b="0" i="0" smtClean="0">
+                        <a:solidFill>
+                          <a:schemeClr val="tx1"/>
+                        </a:solidFill>
+                        <a:latin typeface="Cambria Math" panose="02040503050406030204" pitchFamily="18" charset="0"/>
+                      </a:rPr>
+                      <m:t>99</m:t>
+                    </m:r>
+                    <m:r>
+                      <a:rPr lang="es-ES" b="0" i="0" smtClean="0">
+                        <a:solidFill>
+                          <a:schemeClr val="tx1"/>
+                        </a:solidFill>
+                        <a:latin typeface="Cambria Math" panose="02040503050406030204" pitchFamily="18" charset="0"/>
+                      </a:rPr>
+                      <m:t> </m:t>
+                    </m:r>
+                    <m:r>
+                      <m:rPr>
+                        <m:sty m:val="p"/>
+                      </m:rPr>
+                      <a:rPr lang="es-ES" b="0" i="0" smtClean="0">
+                        <a:solidFill>
+                          <a:schemeClr val="tx1"/>
+                        </a:solidFill>
+                        <a:latin typeface="Cambria Math" panose="02040503050406030204" pitchFamily="18" charset="0"/>
+                      </a:rPr>
+                      <m:t>um</m:t>
+                    </m:r>
+                  </m:oMath>
+                </a14:m>
+                <a:r>
+                  <a:rPr lang="es-ES" dirty="0">
+                    <a:solidFill>
+                      <a:schemeClr val="tx1"/>
+                    </a:solidFill>
+                  </a:rPr>
+                  <a:t>. </a:t>
+                </a:r>
+              </a:p>
+              <a:p>
+                <a:pPr algn="just"/>
+                <a:endParaRPr lang="es-ES" dirty="0"/>
+              </a:p>
+              <a:p>
+                <a:pPr algn="just"/>
+                <a:r>
+                  <a:rPr lang="en-US" dirty="0"/>
+                  <a:t>As we can observe in the plot, the simulated MZI response shows the expected periodic behavior. Although the plotted wavelength range does not include two consecutive maxima, the graph shows a separation of about 20 nm between one maximum and the adjacent minimum, which corresponds to half of the FSR. Therefore, the complete FSR is confirmed to be approximately 40 nm.</a:t>
+                </a:r>
+                <a:endParaRPr lang="es-ES" dirty="0"/>
+              </a:p>
+            </p:txBody>
+          </p:sp>
+        </mc:Choice>
+        <mc:Fallback>
+          <p:sp>
+            <p:nvSpPr>
+              <p:cNvPr id="7" name="CuadroTexto 6">
+                <a:extLst>
+                  <a:ext uri="{FF2B5EF4-FFF2-40B4-BE49-F238E27FC236}">
+                    <a16:creationId xmlns:a16="http://schemas.microsoft.com/office/drawing/2014/main" id="{D706742F-95A9-386F-79C4-3559B8E7D64C}"/>
+                  </a:ext>
+                </a:extLst>
+              </p:cNvPr>
+              <p:cNvSpPr txBox="1">
+                <a:spLocks noRot="1" noChangeAspect="1" noMove="1" noResize="1" noEditPoints="1" noAdjustHandles="1" noChangeArrowheads="1" noChangeShapeType="1" noTextEdit="1"/>
+              </p:cNvSpPr>
+              <p:nvPr/>
+            </p:nvSpPr>
+            <p:spPr>
+              <a:xfrm>
+                <a:off x="5776209" y="2274878"/>
+                <a:ext cx="5943600" cy="3416320"/>
+              </a:xfrm>
+              <a:prstGeom prst="rect">
+                <a:avLst/>
+              </a:prstGeom>
+              <a:blipFill>
+                <a:blip r:embed="rId8"/>
+                <a:stretch>
+                  <a:fillRect l="-923" t="-891" r="-821" b="-1783"/>
+                </a:stretch>
+              </a:blipFill>
+            </p:spPr>
+            <p:txBody>
+              <a:bodyPr/>
+              <a:lstStyle/>
+              <a:p>
+                <a:r>
+                  <a:rPr lang="es-ES">
+                    <a:noFill/>
+                  </a:rPr>
+                  <a:t> </a:t>
+                </a:r>
+              </a:p>
+            </p:txBody>
+          </p:sp>
+        </mc:Fallback>
+      </mc:AlternateContent>
     </p:spTree>
     <p:extLst>
       <p:ext uri="{BB962C8B-B14F-4D97-AF65-F5344CB8AC3E}">
         <p14:creationId xmlns:p14="http://schemas.microsoft.com/office/powerpoint/2010/main" val="2337098194"/>
+      </p:ext>
+    </p:extLst>
+  </p:cSld>
+  <p:clrMapOvr>
+    <a:masterClrMapping/>
+  </p:clrMapOvr>
+</p:sld>
+</file>
+
+<file path=ppt/slides/slide9.xml><?xml version="1.0" encoding="utf-8"?>
+<p:sld xmlns:a="http://schemas.openxmlformats.org/drawingml/2006/main" xmlns:r="http://schemas.openxmlformats.org/officeDocument/2006/relationships" xmlns:p="http://schemas.openxmlformats.org/presentationml/2006/main">
+  <p:cSld>
+    <p:spTree>
+      <p:nvGrpSpPr>
+        <p:cNvPr id="1" name="">
+          <a:extLst>
+            <a:ext uri="{FF2B5EF4-FFF2-40B4-BE49-F238E27FC236}">
+              <a16:creationId xmlns:a16="http://schemas.microsoft.com/office/drawing/2014/main" id="{98CB9552-DF22-1310-10FA-4D2D2AF77601}"/>
+            </a:ext>
+          </a:extLst>
+        </p:cNvPr>
+        <p:cNvGrpSpPr/>
+        <p:nvPr/>
+      </p:nvGrpSpPr>
+      <p:grpSpPr>
+        <a:xfrm>
+          <a:off x="0" y="0"/>
+          <a:ext cx="0" cy="0"/>
+          <a:chOff x="0" y="0"/>
+          <a:chExt cx="0" cy="0"/>
+        </a:xfrm>
+      </p:grpSpPr>
+      <p:sp>
+        <p:nvSpPr>
+          <p:cNvPr id="16" name="object 16">
+            <a:extLst>
+              <a:ext uri="{FF2B5EF4-FFF2-40B4-BE49-F238E27FC236}">
+                <a16:creationId xmlns:a16="http://schemas.microsoft.com/office/drawing/2014/main" id="{B0632A48-0384-0EF1-389E-FBF3F9C3E7CE}"/>
+              </a:ext>
+            </a:extLst>
+          </p:cNvPr>
+          <p:cNvSpPr txBox="1">
+            <a:spLocks noGrp="1"/>
+          </p:cNvSpPr>
+          <p:nvPr>
+            <p:ph type="title"/>
+          </p:nvPr>
+        </p:nvSpPr>
+        <p:spPr>
+          <a:xfrm>
+            <a:off x="304800" y="137160"/>
+            <a:ext cx="10994410" cy="782265"/>
+          </a:xfrm>
+          <a:prstGeom prst="rect">
+            <a:avLst/>
+          </a:prstGeom>
+        </p:spPr>
+        <p:txBody>
+          <a:bodyPr vert="horz" wrap="square" lIns="0" tIns="12700" rIns="0" bIns="0" rtlCol="0">
+            <a:spAutoFit/>
+          </a:bodyPr>
+          <a:lstStyle/>
+          <a:p>
+            <a:pPr marL="12700">
+              <a:lnSpc>
+                <a:spcPct val="100000"/>
+              </a:lnSpc>
+              <a:spcBef>
+                <a:spcPts val="100"/>
+              </a:spcBef>
+            </a:pPr>
+            <a:r>
+              <a:rPr lang="en-US" sz="2400" b="1" dirty="0"/>
+              <a:t>ASSESSMENT #3 </a:t>
+            </a:r>
+            <a:r>
+              <a:rPr lang="en-US" sz="2500" dirty="0"/>
+              <a:t>– SAX implementation </a:t>
+            </a:r>
+            <a:br>
+              <a:rPr lang="es-ES" sz="2500" spc="-5" dirty="0">
+                <a:latin typeface="+mj-lt"/>
+                <a:cs typeface="Lucida Sans"/>
+              </a:rPr>
+            </a:br>
+            <a:endParaRPr sz="2500" b="0" dirty="0">
+              <a:latin typeface="+mj-lt"/>
+              <a:cs typeface="Lucida Sans"/>
+            </a:endParaRPr>
+          </a:p>
+        </p:txBody>
+      </p:sp>
+      <p:pic>
+        <p:nvPicPr>
+          <p:cNvPr id="83" name="Gráfico 82">
+            <a:extLst>
+              <a:ext uri="{FF2B5EF4-FFF2-40B4-BE49-F238E27FC236}">
+                <a16:creationId xmlns:a16="http://schemas.microsoft.com/office/drawing/2014/main" id="{1F43E6A6-5CC3-9B99-14AC-997478150C3D}"/>
+              </a:ext>
+            </a:extLst>
+          </p:cNvPr>
+          <p:cNvPicPr>
+            <a:picLocks noChangeAspect="1"/>
+          </p:cNvPicPr>
+          <p:nvPr/>
+        </p:nvPicPr>
+        <p:blipFill>
+          <a:blip r:embed="rId3">
+            <a:extLst>
+              <a:ext uri="{96DAC541-7B7A-43D3-8B79-37D633B846F1}">
+                <asvg:svgBlip xmlns:asvg="http://schemas.microsoft.com/office/drawing/2016/SVG/main" r:embed="rId4"/>
+              </a:ext>
+            </a:extLst>
+          </a:blip>
+          <a:stretch>
+            <a:fillRect/>
+          </a:stretch>
+        </p:blipFill>
+        <p:spPr>
+          <a:xfrm>
+            <a:off x="5045006" y="6356057"/>
+            <a:ext cx="6409575" cy="363174"/>
+          </a:xfrm>
+          <a:prstGeom prst="rect">
+            <a:avLst/>
+          </a:prstGeom>
+        </p:spPr>
+      </p:pic>
+      <p:sp>
+        <p:nvSpPr>
+          <p:cNvPr id="84" name="Marcador de número de diapositiva 83">
+            <a:extLst>
+              <a:ext uri="{FF2B5EF4-FFF2-40B4-BE49-F238E27FC236}">
+                <a16:creationId xmlns:a16="http://schemas.microsoft.com/office/drawing/2014/main" id="{DFC09DB6-1DF7-C8F9-7414-27BC280DEA0F}"/>
+              </a:ext>
+            </a:extLst>
+          </p:cNvPr>
+          <p:cNvSpPr>
+            <a:spLocks noGrp="1"/>
+          </p:cNvSpPr>
+          <p:nvPr>
+            <p:ph type="sldNum" sz="quarter" idx="7"/>
+          </p:nvPr>
+        </p:nvSpPr>
+        <p:spPr/>
+        <p:txBody>
+          <a:bodyPr/>
+          <a:lstStyle/>
+          <a:p>
+            <a:fld id="{B6F15528-21DE-4FAA-801E-634DDDAF4B2B}" type="slidenum">
+              <a:rPr lang="es-ES" smtClean="0"/>
+              <a:t>9</a:t>
+            </a:fld>
+            <a:endParaRPr lang="es-ES"/>
+          </a:p>
+        </p:txBody>
+      </p:sp>
+      <p:sp>
+        <p:nvSpPr>
+          <p:cNvPr id="4" name="Marcador de texto 2">
+            <a:extLst>
+              <a:ext uri="{FF2B5EF4-FFF2-40B4-BE49-F238E27FC236}">
+                <a16:creationId xmlns:a16="http://schemas.microsoft.com/office/drawing/2014/main" id="{EBC8DCFA-5565-A757-1F8D-F4CCCF573A63}"/>
+              </a:ext>
+            </a:extLst>
+          </p:cNvPr>
+          <p:cNvSpPr txBox="1">
+            <a:spLocks/>
+          </p:cNvSpPr>
+          <p:nvPr/>
+        </p:nvSpPr>
+        <p:spPr>
+          <a:xfrm>
+            <a:off x="571500" y="528292"/>
+            <a:ext cx="11048999" cy="4958137"/>
+          </a:xfrm>
+          <a:prstGeom prst="rect">
+            <a:avLst/>
+          </a:prstGeom>
+        </p:spPr>
+        <p:txBody>
+          <a:bodyPr>
+            <a:normAutofit/>
+          </a:bodyPr>
+          <a:lstStyle>
+            <a:lvl1pPr marL="0">
+              <a:defRPr>
+                <a:latin typeface="+mn-lt"/>
+                <a:ea typeface="+mn-ea"/>
+                <a:cs typeface="+mn-cs"/>
+              </a:defRPr>
+            </a:lvl1pPr>
+            <a:lvl2pPr marL="457200">
+              <a:defRPr>
+                <a:latin typeface="+mn-lt"/>
+                <a:ea typeface="+mn-ea"/>
+                <a:cs typeface="+mn-cs"/>
+              </a:defRPr>
+            </a:lvl2pPr>
+            <a:lvl3pPr marL="914400">
+              <a:defRPr>
+                <a:latin typeface="+mn-lt"/>
+                <a:ea typeface="+mn-ea"/>
+                <a:cs typeface="+mn-cs"/>
+              </a:defRPr>
+            </a:lvl3pPr>
+            <a:lvl4pPr marL="1371600">
+              <a:defRPr>
+                <a:latin typeface="+mn-lt"/>
+                <a:ea typeface="+mn-ea"/>
+                <a:cs typeface="+mn-cs"/>
+              </a:defRPr>
+            </a:lvl4pPr>
+            <a:lvl5pPr marL="1828800">
+              <a:defRPr>
+                <a:latin typeface="+mn-lt"/>
+                <a:ea typeface="+mn-ea"/>
+                <a:cs typeface="+mn-cs"/>
+              </a:defRPr>
+            </a:lvl5pPr>
+            <a:lvl6pPr marL="2286000">
+              <a:defRPr>
+                <a:latin typeface="+mn-lt"/>
+                <a:ea typeface="+mn-ea"/>
+                <a:cs typeface="+mn-cs"/>
+              </a:defRPr>
+            </a:lvl6pPr>
+            <a:lvl7pPr marL="2743200">
+              <a:defRPr>
+                <a:latin typeface="+mn-lt"/>
+                <a:ea typeface="+mn-ea"/>
+                <a:cs typeface="+mn-cs"/>
+              </a:defRPr>
+            </a:lvl7pPr>
+            <a:lvl8pPr marL="3200400">
+              <a:defRPr>
+                <a:latin typeface="+mn-lt"/>
+                <a:ea typeface="+mn-ea"/>
+                <a:cs typeface="+mn-cs"/>
+              </a:defRPr>
+            </a:lvl8pPr>
+            <a:lvl9pPr marL="3657600">
+              <a:defRPr>
+                <a:latin typeface="+mn-lt"/>
+                <a:ea typeface="+mn-ea"/>
+                <a:cs typeface="+mn-cs"/>
+              </a:defRPr>
+            </a:lvl9pPr>
+          </a:lstStyle>
+          <a:p>
+            <a:r>
+              <a:rPr lang="en-US" dirty="0">
+                <a:solidFill>
+                  <a:schemeClr val="accent1">
+                    <a:lumMod val="75000"/>
+                  </a:schemeClr>
+                </a:solidFill>
+              </a:rPr>
+              <a:t>Now, we are going to implement the design parameters in the MZI model developed in SAX and compare the response obtained with the one simulated by mathematical formulation. </a:t>
+            </a:r>
+            <a:br>
+              <a:rPr lang="en-US" dirty="0"/>
+            </a:br>
+            <a:endParaRPr lang="en-US" sz="2000" dirty="0"/>
+          </a:p>
+          <a:p>
+            <a:pPr algn="just"/>
+            <a:endParaRPr lang="en-US" sz="2000" b="1" i="1" dirty="0"/>
+          </a:p>
+          <a:p>
+            <a:pPr algn="just"/>
+            <a:endParaRPr lang="en-US" sz="2000" kern="0" dirty="0">
+              <a:solidFill>
+                <a:sysClr val="windowText" lastClr="000000"/>
+              </a:solidFill>
+            </a:endParaRPr>
+          </a:p>
+          <a:p>
+            <a:endParaRPr lang="en-US" sz="2000" kern="0" dirty="0">
+              <a:solidFill>
+                <a:sysClr val="windowText" lastClr="000000"/>
+              </a:solidFill>
+            </a:endParaRPr>
+          </a:p>
+        </p:txBody>
+      </p:sp>
+      <p:sp>
+        <p:nvSpPr>
+          <p:cNvPr id="5" name="Marcador de pie de página 2">
+            <a:extLst>
+              <a:ext uri="{FF2B5EF4-FFF2-40B4-BE49-F238E27FC236}">
+                <a16:creationId xmlns:a16="http://schemas.microsoft.com/office/drawing/2014/main" id="{ED97C9D0-256C-D4CA-42E7-79330F040B30}"/>
+              </a:ext>
+            </a:extLst>
+          </p:cNvPr>
+          <p:cNvSpPr>
+            <a:spLocks noGrp="1"/>
+          </p:cNvSpPr>
+          <p:nvPr>
+            <p:ph type="ftr" sz="quarter" idx="5"/>
+          </p:nvPr>
+        </p:nvSpPr>
+        <p:spPr>
+          <a:xfrm>
+            <a:off x="609600" y="6457057"/>
+            <a:ext cx="2743200" cy="184666"/>
+          </a:xfrm>
+        </p:spPr>
+        <p:txBody>
+          <a:bodyPr/>
+          <a:lstStyle/>
+          <a:p>
+            <a:pPr marL="12700">
+              <a:spcBef>
+                <a:spcPts val="15"/>
+              </a:spcBef>
+            </a:pPr>
+            <a:r>
+              <a:rPr lang="es-ES" spc="-5"/>
+              <a:t>LAB 3. INTERFEROMETERS I</a:t>
+            </a:r>
+            <a:endParaRPr lang="es-ES" spc="-5" dirty="0"/>
+          </a:p>
+        </p:txBody>
+      </p:sp>
+      <p:pic>
+        <p:nvPicPr>
+          <p:cNvPr id="3" name="Imagen 2">
+            <a:extLst>
+              <a:ext uri="{FF2B5EF4-FFF2-40B4-BE49-F238E27FC236}">
+                <a16:creationId xmlns:a16="http://schemas.microsoft.com/office/drawing/2014/main" id="{D9FE7195-59E4-F10B-2E47-7D609BC49727}"/>
+              </a:ext>
+            </a:extLst>
+          </p:cNvPr>
+          <p:cNvPicPr>
+            <a:picLocks noChangeAspect="1"/>
+          </p:cNvPicPr>
+          <p:nvPr/>
+        </p:nvPicPr>
+        <p:blipFill>
+          <a:blip r:embed="rId5"/>
+          <a:stretch>
+            <a:fillRect/>
+          </a:stretch>
+        </p:blipFill>
+        <p:spPr>
+          <a:xfrm>
+            <a:off x="1531686" y="1222150"/>
+            <a:ext cx="3543300" cy="2843389"/>
+          </a:xfrm>
+          <a:prstGeom prst="rect">
+            <a:avLst/>
+          </a:prstGeom>
+        </p:spPr>
+      </p:pic>
+      <p:pic>
+        <p:nvPicPr>
+          <p:cNvPr id="6" name="Imagen 5">
+            <a:extLst>
+              <a:ext uri="{FF2B5EF4-FFF2-40B4-BE49-F238E27FC236}">
+                <a16:creationId xmlns:a16="http://schemas.microsoft.com/office/drawing/2014/main" id="{2108B1E8-5141-1067-2149-FB15939AACE0}"/>
+              </a:ext>
+            </a:extLst>
+          </p:cNvPr>
+          <p:cNvPicPr>
+            <a:picLocks noChangeAspect="1"/>
+          </p:cNvPicPr>
+          <p:nvPr/>
+        </p:nvPicPr>
+        <p:blipFill>
+          <a:blip r:embed="rId6"/>
+          <a:stretch>
+            <a:fillRect/>
+          </a:stretch>
+        </p:blipFill>
+        <p:spPr>
+          <a:xfrm>
+            <a:off x="6478143" y="1160489"/>
+            <a:ext cx="3543300" cy="2843389"/>
+          </a:xfrm>
+          <a:prstGeom prst="rect">
+            <a:avLst/>
+          </a:prstGeom>
+        </p:spPr>
+      </p:pic>
+      <p:sp>
+        <p:nvSpPr>
+          <p:cNvPr id="7" name="CuadroTexto 6">
+            <a:extLst>
+              <a:ext uri="{FF2B5EF4-FFF2-40B4-BE49-F238E27FC236}">
+                <a16:creationId xmlns:a16="http://schemas.microsoft.com/office/drawing/2014/main" id="{FCFDA2D9-04B5-11CB-7E9C-D59E88338AAF}"/>
+              </a:ext>
+            </a:extLst>
+          </p:cNvPr>
+          <p:cNvSpPr txBox="1"/>
+          <p:nvPr/>
+        </p:nvSpPr>
+        <p:spPr>
+          <a:xfrm>
+            <a:off x="304800" y="4065539"/>
+            <a:ext cx="11430000" cy="2031325"/>
+          </a:xfrm>
+          <a:prstGeom prst="rect">
+            <a:avLst/>
+          </a:prstGeom>
+          <a:noFill/>
+        </p:spPr>
+        <p:txBody>
+          <a:bodyPr wrap="square" rtlCol="0">
+            <a:spAutoFit/>
+          </a:bodyPr>
+          <a:lstStyle/>
+          <a:p>
+            <a:pPr algn="just"/>
+            <a:r>
+              <a:rPr lang="es-ES" dirty="0"/>
+              <a:t>After </a:t>
+            </a:r>
+            <a:r>
+              <a:rPr lang="es-ES" dirty="0" err="1"/>
+              <a:t>implementing</a:t>
+            </a:r>
+            <a:r>
+              <a:rPr lang="es-ES" dirty="0"/>
+              <a:t> </a:t>
+            </a:r>
+            <a:r>
+              <a:rPr lang="es-ES" dirty="0" err="1"/>
+              <a:t>the</a:t>
+            </a:r>
+            <a:r>
+              <a:rPr lang="es-ES" dirty="0"/>
+              <a:t> </a:t>
+            </a:r>
+            <a:r>
+              <a:rPr lang="es-ES" dirty="0" err="1"/>
+              <a:t>design</a:t>
+            </a:r>
+            <a:r>
+              <a:rPr lang="es-ES" dirty="0"/>
+              <a:t> in SAX, </a:t>
+            </a:r>
+            <a:r>
+              <a:rPr lang="es-ES" dirty="0" err="1"/>
+              <a:t>both</a:t>
+            </a:r>
+            <a:r>
+              <a:rPr lang="es-ES" dirty="0"/>
+              <a:t> </a:t>
+            </a:r>
+            <a:r>
+              <a:rPr lang="es-ES" dirty="0" err="1"/>
+              <a:t>plots</a:t>
+            </a:r>
+            <a:r>
+              <a:rPr lang="es-ES" dirty="0"/>
+              <a:t> show </a:t>
+            </a:r>
+            <a:r>
+              <a:rPr lang="es-ES" dirty="0" err="1"/>
+              <a:t>identical</a:t>
+            </a:r>
+            <a:r>
+              <a:rPr lang="es-ES" dirty="0"/>
+              <a:t> </a:t>
+            </a:r>
+            <a:r>
+              <a:rPr lang="es-ES" dirty="0" err="1"/>
+              <a:t>behavior</a:t>
+            </a:r>
+            <a:r>
+              <a:rPr lang="es-ES" dirty="0"/>
+              <a:t>. In</a:t>
+            </a:r>
+            <a:r>
+              <a:rPr lang="en-US" dirty="0"/>
+              <a:t> both cases, one output remains close to 1 while the complementary output stays close to 0 over the whole wavelength range, which confirms the expected behavior for the balanced configuration.</a:t>
+            </a:r>
+          </a:p>
+          <a:p>
+            <a:pPr algn="just"/>
+            <a:endParaRPr lang="es-ES" dirty="0"/>
+          </a:p>
+          <a:p>
+            <a:pPr algn="just"/>
+            <a:r>
+              <a:rPr lang="es-ES" dirty="0" err="1"/>
+              <a:t>The</a:t>
+            </a:r>
+            <a:r>
+              <a:rPr lang="es-ES" dirty="0"/>
+              <a:t> </a:t>
+            </a:r>
+            <a:r>
+              <a:rPr lang="es-ES" dirty="0" err="1"/>
+              <a:t>comparison</a:t>
+            </a:r>
+            <a:r>
+              <a:rPr lang="es-ES" dirty="0"/>
+              <a:t> </a:t>
+            </a:r>
+            <a:r>
+              <a:rPr lang="es-ES" dirty="0" err="1"/>
+              <a:t>validates</a:t>
+            </a:r>
+            <a:r>
+              <a:rPr lang="es-ES" dirty="0"/>
+              <a:t> </a:t>
+            </a:r>
+            <a:r>
+              <a:rPr lang="es-ES" dirty="0" err="1"/>
+              <a:t>that</a:t>
+            </a:r>
+            <a:r>
+              <a:rPr lang="es-ES" dirty="0"/>
+              <a:t> </a:t>
+            </a:r>
+            <a:r>
+              <a:rPr lang="es-ES" dirty="0" err="1"/>
+              <a:t>the</a:t>
+            </a:r>
+            <a:r>
+              <a:rPr lang="es-ES" dirty="0"/>
+              <a:t> SAX </a:t>
+            </a:r>
+            <a:r>
+              <a:rPr lang="es-ES" dirty="0" err="1"/>
+              <a:t>model</a:t>
+            </a:r>
+            <a:r>
+              <a:rPr lang="es-ES" dirty="0"/>
+              <a:t> has </a:t>
+            </a:r>
+            <a:r>
+              <a:rPr lang="es-ES" dirty="0" err="1"/>
+              <a:t>been</a:t>
+            </a:r>
+            <a:r>
+              <a:rPr lang="es-ES" dirty="0"/>
+              <a:t> </a:t>
+            </a:r>
+            <a:r>
+              <a:rPr lang="es-ES" dirty="0" err="1"/>
+              <a:t>correctly</a:t>
+            </a:r>
+            <a:r>
+              <a:rPr lang="es-ES" dirty="0"/>
+              <a:t> </a:t>
+            </a:r>
+            <a:r>
+              <a:rPr lang="es-ES" dirty="0" err="1"/>
+              <a:t>defined</a:t>
+            </a:r>
+            <a:r>
+              <a:rPr lang="es-ES" dirty="0"/>
+              <a:t> and </a:t>
+            </a:r>
+            <a:r>
+              <a:rPr lang="es-ES" dirty="0" err="1"/>
+              <a:t>that</a:t>
+            </a:r>
+            <a:r>
+              <a:rPr lang="es-ES" dirty="0"/>
+              <a:t> </a:t>
+            </a:r>
+            <a:r>
+              <a:rPr lang="es-ES" dirty="0" err="1"/>
+              <a:t>the</a:t>
+            </a:r>
+            <a:r>
+              <a:rPr lang="es-ES" dirty="0"/>
+              <a:t> individual </a:t>
+            </a:r>
+            <a:r>
+              <a:rPr lang="es-ES" dirty="0" err="1"/>
+              <a:t>components</a:t>
+            </a:r>
+            <a:r>
+              <a:rPr lang="es-ES" dirty="0"/>
+              <a:t> are </a:t>
+            </a:r>
+            <a:r>
+              <a:rPr lang="es-ES" dirty="0" err="1"/>
+              <a:t>properly</a:t>
+            </a:r>
+            <a:r>
+              <a:rPr lang="es-ES" dirty="0"/>
+              <a:t> </a:t>
+            </a:r>
+            <a:r>
+              <a:rPr lang="es-ES" dirty="0" err="1"/>
+              <a:t>connected</a:t>
+            </a:r>
+            <a:r>
+              <a:rPr lang="es-ES" dirty="0"/>
+              <a:t>. </a:t>
+            </a:r>
+            <a:r>
+              <a:rPr lang="es-ES" dirty="0" err="1"/>
+              <a:t>It</a:t>
+            </a:r>
+            <a:r>
+              <a:rPr lang="es-ES" dirty="0"/>
+              <a:t> </a:t>
+            </a:r>
+            <a:r>
+              <a:rPr lang="es-ES" dirty="0" err="1"/>
+              <a:t>must</a:t>
+            </a:r>
+            <a:r>
+              <a:rPr lang="es-ES" dirty="0"/>
+              <a:t> be </a:t>
+            </a:r>
+            <a:r>
+              <a:rPr lang="es-ES" dirty="0" err="1"/>
+              <a:t>noted</a:t>
+            </a:r>
+            <a:r>
+              <a:rPr lang="es-ES" dirty="0"/>
+              <a:t> </a:t>
+            </a:r>
+            <a:r>
+              <a:rPr lang="es-ES" dirty="0" err="1"/>
+              <a:t>that</a:t>
+            </a:r>
+            <a:r>
+              <a:rPr lang="es-ES" dirty="0"/>
+              <a:t> SAX uses </a:t>
+            </a:r>
+            <a:r>
+              <a:rPr lang="es-ES" dirty="0" err="1"/>
+              <a:t>port</a:t>
+            </a:r>
+            <a:r>
+              <a:rPr lang="es-ES" dirty="0"/>
+              <a:t> </a:t>
+            </a:r>
+            <a:r>
+              <a:rPr lang="es-ES" dirty="0" err="1"/>
+              <a:t>numbering</a:t>
+            </a:r>
+            <a:r>
+              <a:rPr lang="es-ES" dirty="0"/>
+              <a:t> (0,1) so </a:t>
+            </a:r>
+            <a:r>
+              <a:rPr lang="es-ES" dirty="0" err="1"/>
+              <a:t>its</a:t>
+            </a:r>
+            <a:r>
+              <a:rPr lang="es-ES" dirty="0"/>
+              <a:t> </a:t>
+            </a:r>
+            <a:r>
+              <a:rPr lang="es-ES" dirty="0" err="1"/>
+              <a:t>port</a:t>
+            </a:r>
+            <a:r>
+              <a:rPr lang="es-ES" dirty="0"/>
+              <a:t> 1 </a:t>
+            </a:r>
+            <a:r>
+              <a:rPr lang="es-ES" dirty="0" err="1"/>
+              <a:t>corresponds</a:t>
+            </a:r>
+            <a:r>
+              <a:rPr lang="es-ES" dirty="0"/>
+              <a:t> </a:t>
+            </a:r>
+            <a:r>
+              <a:rPr lang="es-ES" dirty="0" err="1"/>
+              <a:t>to</a:t>
+            </a:r>
+            <a:r>
+              <a:rPr lang="es-ES" dirty="0"/>
+              <a:t> </a:t>
+            </a:r>
+            <a:r>
+              <a:rPr lang="es-ES" dirty="0" err="1"/>
+              <a:t>port</a:t>
+            </a:r>
+            <a:r>
+              <a:rPr lang="es-ES" dirty="0"/>
+              <a:t> 2 in </a:t>
+            </a:r>
+            <a:r>
+              <a:rPr lang="es-ES" dirty="0" err="1"/>
+              <a:t>the</a:t>
+            </a:r>
+            <a:r>
+              <a:rPr lang="es-ES" dirty="0"/>
+              <a:t> </a:t>
+            </a:r>
+            <a:r>
+              <a:rPr lang="es-ES" dirty="0" err="1"/>
+              <a:t>analytical</a:t>
+            </a:r>
+            <a:r>
+              <a:rPr lang="es-ES" dirty="0"/>
+              <a:t> </a:t>
+            </a:r>
+            <a:r>
+              <a:rPr lang="es-ES" dirty="0" err="1"/>
+              <a:t>model</a:t>
+            </a:r>
+            <a:r>
+              <a:rPr lang="es-ES" dirty="0"/>
+              <a:t>.</a:t>
+            </a:r>
+          </a:p>
+        </p:txBody>
+      </p:sp>
+    </p:spTree>
+    <p:extLst>
+      <p:ext uri="{BB962C8B-B14F-4D97-AF65-F5344CB8AC3E}">
+        <p14:creationId xmlns:p14="http://schemas.microsoft.com/office/powerpoint/2010/main" val="3666436811"/>
       </p:ext>
     </p:extLst>
   </p:cSld>

--- a/LabBook_3.pptx
+++ b/LabBook_3.pptx
@@ -3088,7 +3088,7 @@
                 <a:latin typeface="Arial"/>
                 <a:cs typeface="Arial"/>
               </a:rPr>
-              <a:t>: </a:t>
+              <a:t>: María Romero García </a:t>
             </a:r>
             <a:endParaRPr sz="1800" dirty="0">
               <a:latin typeface="Arial"/>
@@ -4096,6 +4096,159 @@
               <a:t>12</a:t>
             </a:fld>
             <a:endParaRPr lang="es-ES"/>
+          </a:p>
+        </p:txBody>
+      </p:sp>
+      <p:pic>
+        <p:nvPicPr>
+          <p:cNvPr id="4" name="Imagen 3">
+            <a:extLst>
+              <a:ext uri="{FF2B5EF4-FFF2-40B4-BE49-F238E27FC236}">
+                <a16:creationId xmlns:a16="http://schemas.microsoft.com/office/drawing/2014/main" id="{5A294286-9646-F910-4BCC-6337148D05A1}"/>
+              </a:ext>
+            </a:extLst>
+          </p:cNvPr>
+          <p:cNvPicPr>
+            <a:picLocks noChangeAspect="1"/>
+          </p:cNvPicPr>
+          <p:nvPr/>
+        </p:nvPicPr>
+        <p:blipFill>
+          <a:blip r:embed="rId2"/>
+          <a:stretch>
+            <a:fillRect/>
+          </a:stretch>
+        </p:blipFill>
+        <p:spPr>
+          <a:xfrm>
+            <a:off x="304800" y="521761"/>
+            <a:ext cx="4724400" cy="3731948"/>
+          </a:xfrm>
+          <a:prstGeom prst="rect">
+            <a:avLst/>
+          </a:prstGeom>
+        </p:spPr>
+      </p:pic>
+      <p:sp>
+        <p:nvSpPr>
+          <p:cNvPr id="6" name="CuadroTexto 5">
+            <a:extLst>
+              <a:ext uri="{FF2B5EF4-FFF2-40B4-BE49-F238E27FC236}">
+                <a16:creationId xmlns:a16="http://schemas.microsoft.com/office/drawing/2014/main" id="{B483D384-2B33-D938-FFFF-376064192023}"/>
+              </a:ext>
+            </a:extLst>
+          </p:cNvPr>
+          <p:cNvSpPr txBox="1"/>
+          <p:nvPr/>
+        </p:nvSpPr>
+        <p:spPr>
+          <a:xfrm>
+            <a:off x="533400" y="212786"/>
+            <a:ext cx="6160956" cy="369332"/>
+          </a:xfrm>
+          <a:prstGeom prst="rect">
+            <a:avLst/>
+          </a:prstGeom>
+          <a:noFill/>
+        </p:spPr>
+        <p:txBody>
+          <a:bodyPr wrap="square">
+            <a:spAutoFit/>
+          </a:bodyPr>
+          <a:lstStyle/>
+          <a:p>
+            <a:r>
+              <a:rPr lang="es-ES" sz="1800" b="1" dirty="0"/>
+              <a:t>EXTRA ASSESSMENTS: ASSESSMENT 5</a:t>
+            </a:r>
+          </a:p>
+        </p:txBody>
+      </p:sp>
+      <p:pic>
+        <p:nvPicPr>
+          <p:cNvPr id="7" name="Imagen 6" descr="Gráfico, Gráfico de líneas&#10;&#10;El contenido generado por IA puede ser incorrecto.">
+            <a:extLst>
+              <a:ext uri="{FF2B5EF4-FFF2-40B4-BE49-F238E27FC236}">
+                <a16:creationId xmlns:a16="http://schemas.microsoft.com/office/drawing/2014/main" id="{2AE89165-E553-D1D5-FFE7-F64B8101A463}"/>
+              </a:ext>
+            </a:extLst>
+          </p:cNvPr>
+          <p:cNvPicPr>
+            <a:picLocks noChangeAspect="1"/>
+          </p:cNvPicPr>
+          <p:nvPr/>
+        </p:nvPicPr>
+        <p:blipFill>
+          <a:blip r:embed="rId3"/>
+          <a:stretch>
+            <a:fillRect/>
+          </a:stretch>
+        </p:blipFill>
+        <p:spPr>
+          <a:xfrm>
+            <a:off x="1295400" y="4325681"/>
+            <a:ext cx="3297753" cy="2451761"/>
+          </a:xfrm>
+          <a:prstGeom prst="rect">
+            <a:avLst/>
+          </a:prstGeom>
+        </p:spPr>
+      </p:pic>
+      <p:sp>
+        <p:nvSpPr>
+          <p:cNvPr id="8" name="CuadroTexto 7">
+            <a:extLst>
+              <a:ext uri="{FF2B5EF4-FFF2-40B4-BE49-F238E27FC236}">
+                <a16:creationId xmlns:a16="http://schemas.microsoft.com/office/drawing/2014/main" id="{263BBBB3-19A2-EA72-2C2D-F0584DCD7EC4}"/>
+              </a:ext>
+            </a:extLst>
+          </p:cNvPr>
+          <p:cNvSpPr txBox="1"/>
+          <p:nvPr/>
+        </p:nvSpPr>
+        <p:spPr>
+          <a:xfrm>
+            <a:off x="5334000" y="1524000"/>
+            <a:ext cx="6400800" cy="3416320"/>
+          </a:xfrm>
+          <a:prstGeom prst="rect">
+            <a:avLst/>
+          </a:prstGeom>
+          <a:noFill/>
+        </p:spPr>
+        <p:txBody>
+          <a:bodyPr wrap="square" rtlCol="0">
+            <a:spAutoFit/>
+          </a:bodyPr>
+          <a:lstStyle/>
+          <a:p>
+            <a:pPr algn="just"/>
+            <a:r>
+              <a:rPr lang="es-ES" dirty="0" err="1"/>
+              <a:t>Varying</a:t>
+            </a:r>
+            <a:r>
+              <a:rPr lang="es-ES" dirty="0"/>
+              <a:t> </a:t>
+            </a:r>
+            <a:r>
+              <a:rPr lang="en-US" dirty="0"/>
+              <a:t>the effective index in one arm modifies its propagation constant, introducing a phase mismatch that shifts the interference condition of the MZI. As observed in the SAX result, this leads to a gradual redistribution of power between the outputs. This behavior is consistent with the analytical results. (second plot)</a:t>
+            </a:r>
+          </a:p>
+          <a:p>
+            <a:pPr algn="just"/>
+            <a:endParaRPr lang="en-US" dirty="0"/>
+          </a:p>
+          <a:p>
+            <a:pPr algn="just"/>
+            <a:r>
+              <a:rPr lang="en-US" dirty="0"/>
+              <a:t>An example of application is tunable MZI-based filters or optical modulators, where the effective index of one arm is controlled to shift the transmission spectrum and select or modulate specific wavelengths.</a:t>
+            </a:r>
+          </a:p>
+          <a:p>
+            <a:endParaRPr lang="es-ES" dirty="0"/>
           </a:p>
         </p:txBody>
       </p:sp>
